--- a/slides/datasets-in-10-minutes-crosswoz.pptx
+++ b/slides/datasets-in-10-minutes-crosswoz.pptx
@@ -36,7 +36,6 @@
     <p:sldId id="284" r:id="rId34"/>
     <p:sldId id="285" r:id="rId35"/>
     <p:sldId id="286" r:id="rId36"/>
-    <p:sldId id="287" r:id="rId37"/>
     <p:sldId id="288" r:id="rId38"/>
     <p:sldId id="289" r:id="rId39"/>
     <p:sldId id="290" r:id="rId40"/>
@@ -58,8 +57,6 @@
     <p:sldId id="306" r:id="rId56"/>
     <p:sldId id="307" r:id="rId57"/>
     <p:sldId id="308" r:id="rId58"/>
-    <p:sldId id="309" r:id="rId59"/>
-    <p:sldId id="310" r:id="rId60"/>
     <p:sldId id="311" r:id="rId61"/>
     <p:sldId id="312" r:id="rId62"/>
     <p:sldId id="313" r:id="rId63"/>
@@ -7682,7 +7679,7 @@
                 <a:ea typeface="Noto Sans CJK JP"/>
                 <a:cs typeface="Noto Sans"/>
               </a:rPr>
-              <a:t>1. 対話の履歴から、次の応答を読む</a:t>
+              <a:t>1. 旅行相談の対話と応答</a:t>
             </a:r>
           </a:p>
         </p:txBody>
@@ -7736,7 +7733,7 @@
                 <a:ea typeface="Noto Sans CJK JP"/>
                 <a:cs typeface="Noto Sans"/>
               </a:rPr>
-              <a:t>train / 対話7568 / 全履歴 5発話 → 収録応答1発話 ／ 訳は左→右</a:t>
+              <a:t>会話の履歴（5発話）と、次の応答</a:t>
             </a:r>
           </a:p>
         </p:txBody>
@@ -8044,8 +8041,8 @@
         </p:nvSpPr>
         <p:spPr>
           <a:xfrm>
-            <a:off x="502920" y="4700016"/>
-            <a:ext cx="8183879" cy="621792"/>
+            <a:off x="502920" y="4699000"/>
+            <a:ext cx="8183879" cy="431800"/>
           </a:xfrm>
           <a:prstGeom prst="rect">
             <a:avLst/>
@@ -8077,41 +8074,27 @@
               </a:defRPr>
             </a:pPr>
             <a:r>
-              <a:rPr sz="810" b="0" lang="ja-JP" altLang="en-US">
-                <a:solidFill>
-                  <a:srgbClr val="626669"/>
-                </a:solidFill>
-                <a:latin typeface="Noto Sans"/>
-                <a:ea typeface="Noto Sans CJK JP"/>
-                <a:cs typeface="Noto Sans"/>
-              </a:rPr>
-              <a:t>[1] Qi Zhu et al. (2020). CrossWOZ公式配布データ。固定commit df82c9fd。 train.json / dialogue 7568 / messages[0:5] → [5]。</a:t>
+              <a:rPr sz="830">
+                <a:latin typeface="Noto Sans CJK JP"/>
+              </a:rPr>
+              <a:t>[1] Zhu et al. (2020). CrossWOZ: dialogue data.</a:t>
             </a:r>
           </a:p>
           <a:p>
             <a:pPr>
-              <a:lnSpc>
-                <a:spcPts val="1200"/>
-              </a:lnSpc>
-              <a:buNone/>
-              <a:defRPr sz="810" b="0">
-                <a:solidFill>
-                  <a:srgbClr val="303437"/>
-                </a:solidFill>
-                <a:latin typeface="Noto Sans"/>
-              </a:defRPr>
-            </a:pPr>
-            <a:r>
-              <a:rPr sz="810" b="0" lang="ja-JP" altLang="en-US">
-                <a:solidFill>
-                  <a:srgbClr val="626669"/>
-                </a:solidFill>
-                <a:latin typeface="Noto Sans"/>
-                <a:ea typeface="Noto Sans CJK JP"/>
-                <a:cs typeface="Noto Sans"/>
-                <a:hlinkClick r:id="rId2"/>
-              </a:rPr>
-              <a:t>https://github.com/thu-coai/CrossWOZ/tree/df82c9fdff91b9b130f2d6b89110d3870ba6260e/data/crosswoz</a:t>
+              <a:spcBef>
+                <a:spcPts val="0"/>
+              </a:spcBef>
+              <a:spcAft>
+                <a:spcPts val="0"/>
+              </a:spcAft>
+            </a:pPr>
+            <a:r>
+              <a:rPr sz="830">
+                <a:latin typeface="Noto Sans CJK JP"/>
+                <a:hlinkClick r:id="rId3"/>
+              </a:rPr>
+              <a:t>https://github.com/thu-coai/CrossWOZ/tree/master/data/crosswoz</a:t>
             </a:r>
           </a:p>
         </p:txBody>
@@ -8177,7 +8160,7 @@
                 <a:ea typeface="Noto Sans CJK JP"/>
                 <a:cs typeface="Noto Sans"/>
               </a:rPr>
-              <a:t>応答の前後で、検索条件が変わる</a:t>
+              <a:t>候補がないときは、検索条件を緩める</a:t>
             </a:r>
           </a:p>
         </p:txBody>
@@ -8225,7 +8208,7 @@
                 <a:ea typeface="Noto Sans CJK JP"/>
                 <a:cs typeface="Noto Sans"/>
               </a:rPr>
-              <a:t>1. 対話の履歴から、次の応答を読む</a:t>
+              <a:t>1. 旅行相談の対話と応答</a:t>
             </a:r>
           </a:p>
         </p:txBody>
@@ -8737,7 +8720,7 @@
                 <a:ea typeface="Noto Sans CJK JP"/>
                 <a:cs typeface="Noto Sans"/>
               </a:rPr>
-              <a:t>sys_state_initとsys_stateの実値。候補なしを表すNoOfferと、代替ホテル名のInformが同じ応答に付く。</a:t>
+              <a:t>この応答では、周辺という条件を外して代わりのホテルを提案する。</a:t>
             </a:r>
           </a:p>
         </p:txBody>
@@ -8750,8 +8733,8 @@
         </p:nvSpPr>
         <p:spPr>
           <a:xfrm>
-            <a:off x="502920" y="4700016"/>
-            <a:ext cx="8183879" cy="621792"/>
+            <a:off x="502920" y="4699000"/>
+            <a:ext cx="8183879" cy="431800"/>
           </a:xfrm>
           <a:prstGeom prst="rect">
             <a:avLst/>
@@ -8783,41 +8766,27 @@
               </a:defRPr>
             </a:pPr>
             <a:r>
-              <a:rPr sz="810" b="0" lang="ja-JP" altLang="en-US">
-                <a:solidFill>
-                  <a:srgbClr val="626669"/>
-                </a:solidFill>
-                <a:latin typeface="Noto Sans"/>
-                <a:ea typeface="Noto Sans CJK JP"/>
-                <a:cs typeface="Noto Sans"/>
-              </a:rPr>
-              <a:t>[1] Qi Zhu et al. (2020). CrossWOZ公式配布データ。固定commit df82c9fd。</a:t>
+              <a:rPr sz="830">
+                <a:latin typeface="Noto Sans CJK JP"/>
+              </a:rPr>
+              <a:t>[1] Zhu et al. (2020). CrossWOZ: dialogue data.</a:t>
             </a:r>
           </a:p>
           <a:p>
             <a:pPr>
-              <a:lnSpc>
-                <a:spcPts val="1200"/>
-              </a:lnSpc>
-              <a:buNone/>
-              <a:defRPr sz="810" b="0">
-                <a:solidFill>
-                  <a:srgbClr val="303437"/>
-                </a:solidFill>
-                <a:latin typeface="Noto Sans"/>
-              </a:defRPr>
-            </a:pPr>
-            <a:r>
-              <a:rPr sz="810" b="0" lang="ja-JP" altLang="en-US">
-                <a:solidFill>
-                  <a:srgbClr val="626669"/>
-                </a:solidFill>
-                <a:latin typeface="Noto Sans"/>
-                <a:ea typeface="Noto Sans CJK JP"/>
-                <a:cs typeface="Noto Sans"/>
-                <a:hlinkClick r:id="rId2"/>
-              </a:rPr>
-              <a:t>https://github.com/thu-coai/CrossWOZ/tree/df82c9fdff91b9b130f2d6b89110d3870ba6260e/data/crosswoz</a:t>
+              <a:spcBef>
+                <a:spcPts val="0"/>
+              </a:spcBef>
+              <a:spcAft>
+                <a:spcPts val="0"/>
+              </a:spcAft>
+            </a:pPr>
+            <a:r>
+              <a:rPr sz="830">
+                <a:latin typeface="Noto Sans CJK JP"/>
+                <a:hlinkClick r:id="rId3"/>
+              </a:rPr>
+              <a:t>https://github.com/thu-coai/CrossWOZ/tree/master/data/crosswoz</a:t>
             </a:r>
           </a:p>
         </p:txBody>
@@ -8931,7 +8900,7 @@
                 <a:ea typeface="Noto Sans CJK JP"/>
                 <a:cs typeface="Noto Sans"/>
               </a:rPr>
-              <a:t>1. 対話の履歴から、次の応答を読む</a:t>
+              <a:t>1. 旅行相談の対話と応答</a:t>
             </a:r>
           </a:p>
         </p:txBody>
@@ -8985,7 +8954,7 @@
                 <a:ea typeface="Noto Sans CJK JP"/>
                 <a:cs typeface="Noto Sans"/>
               </a:rPr>
-              <a:t>test / 対話10113 / 全履歴 5発話 → 収録応答1発話 ／ 原文は左→右</a:t>
+              <a:t>会話の履歴（5発話）と、次の応答</a:t>
             </a:r>
           </a:p>
         </p:txBody>
@@ -9324,8 +9293,8 @@
         </p:nvSpPr>
         <p:spPr>
           <a:xfrm>
-            <a:off x="502920" y="4700016"/>
-            <a:ext cx="8183879" cy="621792"/>
+            <a:off x="502920" y="4699000"/>
+            <a:ext cx="8183879" cy="431800"/>
           </a:xfrm>
           <a:prstGeom prst="rect">
             <a:avLst/>
@@ -9357,41 +9326,27 @@
               </a:defRPr>
             </a:pPr>
             <a:r>
-              <a:rPr sz="810" b="0" lang="ja-JP" altLang="en-US">
-                <a:solidFill>
-                  <a:srgbClr val="626669"/>
-                </a:solidFill>
-                <a:latin typeface="Noto Sans"/>
-                <a:ea typeface="Noto Sans CJK JP"/>
-                <a:cs typeface="Noto Sans"/>
-              </a:rPr>
-              <a:t>[1] Qi Zhu et al. (2020). CrossWOZ公式配布データ。固定commit df82c9fd。 test.json / dialogue 10113 / messages[0:5] → [5]。</a:t>
+              <a:rPr sz="830">
+                <a:latin typeface="Noto Sans CJK JP"/>
+              </a:rPr>
+              <a:t>[1] Zhu et al. (2020). CrossWOZ: dialogue data.</a:t>
             </a:r>
           </a:p>
           <a:p>
             <a:pPr>
-              <a:lnSpc>
-                <a:spcPts val="1200"/>
-              </a:lnSpc>
-              <a:buNone/>
-              <a:defRPr sz="810" b="0">
-                <a:solidFill>
-                  <a:srgbClr val="303437"/>
-                </a:solidFill>
-                <a:latin typeface="Noto Sans"/>
-              </a:defRPr>
-            </a:pPr>
-            <a:r>
-              <a:rPr sz="810" b="0" lang="ja-JP" altLang="en-US">
-                <a:solidFill>
-                  <a:srgbClr val="626669"/>
-                </a:solidFill>
-                <a:latin typeface="Noto Sans"/>
-                <a:ea typeface="Noto Sans CJK JP"/>
-                <a:cs typeface="Noto Sans"/>
-                <a:hlinkClick r:id="rId2"/>
-              </a:rPr>
-              <a:t>https://github.com/thu-coai/CrossWOZ/tree/df82c9fdff91b9b130f2d6b89110d3870ba6260e/data/crosswoz</a:t>
+              <a:spcBef>
+                <a:spcPts val="0"/>
+              </a:spcBef>
+              <a:spcAft>
+                <a:spcPts val="0"/>
+              </a:spcAft>
+            </a:pPr>
+            <a:r>
+              <a:rPr sz="830">
+                <a:latin typeface="Noto Sans CJK JP"/>
+                <a:hlinkClick r:id="rId3"/>
+              </a:rPr>
+              <a:t>https://github.com/thu-coai/CrossWOZ/tree/master/data/crosswoz</a:t>
             </a:r>
           </a:p>
         </p:txBody>
@@ -9505,7 +9460,7 @@
                 <a:ea typeface="Noto Sans CJK JP"/>
                 <a:cs typeface="Noto Sans"/>
               </a:rPr>
-              <a:t>1. 対話の履歴から、次の応答を読む</a:t>
+              <a:t>1. 旅行相談の対話と応答</a:t>
             </a:r>
           </a:p>
         </p:txBody>
@@ -9559,7 +9514,7 @@
                 <a:ea typeface="Noto Sans CJK JP"/>
                 <a:cs typeface="Noto Sans"/>
               </a:rPr>
-              <a:t>test / 対話10113 / 全履歴 5発話 → 収録応答1発話 ／ 訳は左→右</a:t>
+              <a:t>会話の履歴（5発話）と、次の応答</a:t>
             </a:r>
           </a:p>
         </p:txBody>
@@ -9898,8 +9853,8 @@
         </p:nvSpPr>
         <p:spPr>
           <a:xfrm>
-            <a:off x="502920" y="4700016"/>
-            <a:ext cx="8183879" cy="621792"/>
+            <a:off x="502920" y="4699000"/>
+            <a:ext cx="8183879" cy="431800"/>
           </a:xfrm>
           <a:prstGeom prst="rect">
             <a:avLst/>
@@ -9931,41 +9886,27 @@
               </a:defRPr>
             </a:pPr>
             <a:r>
-              <a:rPr sz="810" b="0" lang="ja-JP" altLang="en-US">
-                <a:solidFill>
-                  <a:srgbClr val="626669"/>
-                </a:solidFill>
-                <a:latin typeface="Noto Sans"/>
-                <a:ea typeface="Noto Sans CJK JP"/>
-                <a:cs typeface="Noto Sans"/>
-              </a:rPr>
-              <a:t>[1] Qi Zhu et al. (2020). CrossWOZ公式配布データ。固定commit df82c9fd。 test.json / dialogue 10113 / messages[0:5] → [5]。</a:t>
+              <a:rPr sz="830">
+                <a:latin typeface="Noto Sans CJK JP"/>
+              </a:rPr>
+              <a:t>[1] Zhu et al. (2020). CrossWOZ: dialogue data.</a:t>
             </a:r>
           </a:p>
           <a:p>
             <a:pPr>
-              <a:lnSpc>
-                <a:spcPts val="1200"/>
-              </a:lnSpc>
-              <a:buNone/>
-              <a:defRPr sz="810" b="0">
-                <a:solidFill>
-                  <a:srgbClr val="303437"/>
-                </a:solidFill>
-                <a:latin typeface="Noto Sans"/>
-              </a:defRPr>
-            </a:pPr>
-            <a:r>
-              <a:rPr sz="810" b="0" lang="ja-JP" altLang="en-US">
-                <a:solidFill>
-                  <a:srgbClr val="626669"/>
-                </a:solidFill>
-                <a:latin typeface="Noto Sans"/>
-                <a:ea typeface="Noto Sans CJK JP"/>
-                <a:cs typeface="Noto Sans"/>
-                <a:hlinkClick r:id="rId2"/>
-              </a:rPr>
-              <a:t>https://github.com/thu-coai/CrossWOZ/tree/df82c9fdff91b9b130f2d6b89110d3870ba6260e/data/crosswoz</a:t>
+              <a:spcBef>
+                <a:spcPts val="0"/>
+              </a:spcBef>
+              <a:spcAft>
+                <a:spcPts val="0"/>
+              </a:spcAft>
+            </a:pPr>
+            <a:r>
+              <a:rPr sz="830">
+                <a:latin typeface="Noto Sans CJK JP"/>
+                <a:hlinkClick r:id="rId3"/>
+              </a:rPr>
+              <a:t>https://github.com/thu-coai/CrossWOZ/tree/master/data/crosswoz</a:t>
             </a:r>
           </a:p>
         </p:txBody>
@@ -10117,36 +10058,6 @@
               <a:t>収録応答の#CXと#CPは、車種と車両番号のプレースホルダー。タクシーDBは固定テンプレートで、実車の配車情報ではない。</a:t>
             </a:r>
           </a:p>
-          <a:p>
-            <a:pPr marL="457200" indent="-355600">
-              <a:lnSpc>
-                <a:spcPts val="2499"/>
-              </a:lnSpc>
-              <a:spcAft>
-                <a:spcPts val="0"/>
-              </a:spcAft>
-              <a:buSzPct val="63333"/>
-              <a:buFont typeface="Noto Sans CJK JP"/>
-              <a:buChar char="●"/>
-              <a:defRPr sz="2100" b="0">
-                <a:solidFill>
-                  <a:srgbClr val="303437"/>
-                </a:solidFill>
-                <a:latin typeface="Noto Sans"/>
-              </a:defRPr>
-            </a:pPr>
-            <a:r>
-              <a:rPr sz="2100" b="0" lang="ja-JP" altLang="en-US">
-                <a:solidFill>
-                  <a:srgbClr val="303437"/>
-                </a:solidFill>
-                <a:latin typeface="Noto Sans"/>
-                <a:ea typeface="Noto Sans CJK JP"/>
-                <a:cs typeface="Noto Sans"/>
-              </a:rPr>
-              <a:t>同じ旅行相談でも、単独の施設検索と、施設間の関係を使う相談では必要な文脈が異なる。</a:t>
-            </a:r>
-          </a:p>
         </p:txBody>
       </p:sp>
       <p:sp>
@@ -10192,7 +10103,7 @@
                 <a:ea typeface="Noto Sans CJK JP"/>
                 <a:cs typeface="Noto Sans"/>
               </a:rPr>
-              <a:t>1. 対話の履歴から、次の応答を読む</a:t>
+              <a:t>1. 旅行相談の対話と応答</a:t>
             </a:r>
           </a:p>
         </p:txBody>
@@ -10205,8 +10116,8 @@
         </p:nvSpPr>
         <p:spPr>
           <a:xfrm>
-            <a:off x="502920" y="4700016"/>
-            <a:ext cx="8183879" cy="621792"/>
+            <a:off x="502920" y="4699000"/>
+            <a:ext cx="8183879" cy="431800"/>
           </a:xfrm>
           <a:prstGeom prst="rect">
             <a:avLst/>
@@ -10238,41 +10149,27 @@
               </a:defRPr>
             </a:pPr>
             <a:r>
-              <a:rPr sz="810" b="0" lang="ja-JP" altLang="en-US">
-                <a:solidFill>
-                  <a:srgbClr val="626669"/>
-                </a:solidFill>
-                <a:latin typeface="Noto Sans"/>
-                <a:ea typeface="Noto Sans CJK JP"/>
-                <a:cs typeface="Noto Sans"/>
-              </a:rPr>
-              <a:t>[1] Qi Zhu et al. CrossWOZ database / database.md. 固定commit df82c9fd。</a:t>
+              <a:rPr sz="830">
+                <a:latin typeface="Noto Sans CJK JP"/>
+              </a:rPr>
+              <a:t>[1] Zhu et al. (2020). CrossWOZ: database.</a:t>
             </a:r>
           </a:p>
           <a:p>
             <a:pPr>
-              <a:lnSpc>
-                <a:spcPts val="1200"/>
-              </a:lnSpc>
-              <a:buNone/>
-              <a:defRPr sz="810" b="0">
-                <a:solidFill>
-                  <a:srgbClr val="303437"/>
-                </a:solidFill>
-                <a:latin typeface="Noto Sans"/>
-              </a:defRPr>
-            </a:pPr>
-            <a:r>
-              <a:rPr sz="810" b="0" lang="ja-JP" altLang="en-US">
-                <a:solidFill>
-                  <a:srgbClr val="626669"/>
-                </a:solidFill>
-                <a:latin typeface="Noto Sans"/>
-                <a:ea typeface="Noto Sans CJK JP"/>
-                <a:cs typeface="Noto Sans"/>
-                <a:hlinkClick r:id="rId2"/>
-              </a:rPr>
-              <a:t>https://github.com/thu-coai/CrossWOZ/tree/df82c9fdff91b9b130f2d6b89110d3870ba6260e/data/crosswoz/database</a:t>
+              <a:spcBef>
+                <a:spcPts val="0"/>
+              </a:spcBef>
+              <a:spcAft>
+                <a:spcPts val="0"/>
+              </a:spcAft>
+            </a:pPr>
+            <a:r>
+              <a:rPr sz="830">
+                <a:latin typeface="Noto Sans CJK JP"/>
+                <a:hlinkClick r:id="rId3"/>
+              </a:rPr>
+              <a:t>https://github.com/thu-coai/CrossWOZ/tree/master/data/crosswoz/database</a:t>
             </a:r>
           </a:p>
         </p:txBody>
@@ -10338,7 +10235,7 @@
                 <a:ea typeface="Noto Sans CJK JP"/>
                 <a:cs typeface="Noto Sans"/>
               </a:rPr>
-              <a:t>2. 目標・状態・DBのある対話</a:t>
+              <a:t>2. 目標・注釈・施設情報</a:t>
             </a:r>
           </a:p>
         </p:txBody>
@@ -10386,7 +10283,7 @@
                 <a:ea typeface="Noto Sans CJK JP"/>
                 <a:cs typeface="Noto Sans"/>
               </a:rPr>
-              <a:t>2. 目標・状態・DBのある対話</a:t>
+              <a:t>2. 目標・注釈・施設情報</a:t>
             </a:r>
           </a:p>
         </p:txBody>
@@ -10500,7 +10397,7 @@
                 <a:ea typeface="Noto Sans CJK JP"/>
                 <a:cs typeface="Noto Sans"/>
               </a:rPr>
-              <a:t>2. 目標・状態・DBのある対話</a:t>
+              <a:t>2. 目標・注釈・施設情報</a:t>
             </a:r>
           </a:p>
         </p:txBody>
@@ -10716,15 +10613,15 @@
                         </a:defRPr>
                       </a:pPr>
                       <a:r>
-                        <a:rPr sz="2100" b="0" lang="ja-JP" altLang="en-US">
+                        <a:rPr sz="2100" b="1" lang="ja-JP" altLang="en-US">
                           <a:solidFill>
                             <a:srgbClr val="303437"/>
                           </a:solidFill>
-                          <a:latin typeface="Noto Sans"/>
+                          <a:latin typeface="Noto Sans CJK JP"/>
                           <a:ea typeface="Noto Sans CJK JP"/>
                           <a:cs typeface="Noto Sans"/>
                         </a:rPr>
-                        <a:t>sys応答</a:t>
+                        <a:t>案内役の応答</a:t>
                       </a:r>
                     </a:p>
                   </a:txBody>
@@ -11436,7 +11333,7 @@
                 <a:ea typeface="Noto Sans CJK JP"/>
                 <a:cs typeface="Noto Sans"/>
               </a:rPr>
-              <a:t>公式ZIPの全件再集計。発話は片側1回で数え、利用者とシステムの一往復は2発話。</a:t>
+              <a:t>発話数は、利用者と案内役の1回ずつの発言を数える。一往復は2発話。</a:t>
             </a:r>
           </a:p>
         </p:txBody>
@@ -11449,8 +11346,8 @@
         </p:nvSpPr>
         <p:spPr>
           <a:xfrm>
-            <a:off x="502920" y="4700016"/>
-            <a:ext cx="8183879" cy="621792"/>
+            <a:off x="502920" y="4699000"/>
+            <a:ext cx="8183879" cy="431800"/>
           </a:xfrm>
           <a:prstGeom prst="rect">
             <a:avLst/>
@@ -11482,41 +11379,27 @@
               </a:defRPr>
             </a:pPr>
             <a:r>
-              <a:rPr sz="810" b="0" lang="ja-JP" altLang="en-US">
-                <a:solidFill>
-                  <a:srgbClr val="626669"/>
-                </a:solidFill>
-                <a:latin typeface="Noto Sans"/>
-                <a:ea typeface="Noto Sans CJK JP"/>
-                <a:cs typeface="Noto Sans"/>
-              </a:rPr>
-              <a:t>[1] Qi Zhu et al. (2020). CrossWOZ公式配布データ。固定commit df82c9fd。</a:t>
+              <a:rPr sz="830">
+                <a:latin typeface="Noto Sans CJK JP"/>
+              </a:rPr>
+              <a:t>[1] Zhu et al. (2020). CrossWOZ: dialogue data.</a:t>
             </a:r>
           </a:p>
           <a:p>
             <a:pPr>
-              <a:lnSpc>
-                <a:spcPts val="1200"/>
-              </a:lnSpc>
-              <a:buNone/>
-              <a:defRPr sz="810" b="0">
-                <a:solidFill>
-                  <a:srgbClr val="303437"/>
-                </a:solidFill>
-                <a:latin typeface="Noto Sans"/>
-              </a:defRPr>
-            </a:pPr>
-            <a:r>
-              <a:rPr sz="810" b="0" lang="ja-JP" altLang="en-US">
-                <a:solidFill>
-                  <a:srgbClr val="626669"/>
-                </a:solidFill>
-                <a:latin typeface="Noto Sans"/>
-                <a:ea typeface="Noto Sans CJK JP"/>
-                <a:cs typeface="Noto Sans"/>
-                <a:hlinkClick r:id="rId2"/>
-              </a:rPr>
-              <a:t>https://github.com/thu-coai/CrossWOZ/tree/df82c9fdff91b9b130f2d6b89110d3870ba6260e/data/crosswoz</a:t>
+              <a:spcBef>
+                <a:spcPts val="0"/>
+              </a:spcBef>
+              <a:spcAft>
+                <a:spcPts val="0"/>
+              </a:spcAft>
+            </a:pPr>
+            <a:r>
+              <a:rPr sz="830">
+                <a:latin typeface="Noto Sans CJK JP"/>
+                <a:hlinkClick r:id="rId3"/>
+              </a:rPr>
+              <a:t>https://github.com/thu-coai/CrossWOZ/tree/master/data/crosswoz</a:t>
             </a:r>
           </a:p>
         </p:txBody>
@@ -11582,7 +11465,7 @@
                 <a:ea typeface="Noto Sans CJK JP"/>
                 <a:cs typeface="Noto Sans"/>
               </a:rPr>
-              <a:t>対話は、二人の作業者が同期して作る</a:t>
+              <a:t>二人の作業者が、旅行者役と案内役を演じる</a:t>
             </a:r>
           </a:p>
         </p:txBody>
@@ -11695,7 +11578,7 @@
                 <a:ea typeface="Noto Sans CJK JP"/>
                 <a:cs typeface="Noto Sans"/>
               </a:rPr>
-              <a:t>未完了の対話を除き、対話単位で学習・検証・テストへ無作為に分割した。発話ごとに分割する設計ではない。</a:t>
+              <a:t>未完了の対話を除き、対話単位で学習・検証・テストへ無作為に分割した。</a:t>
             </a:r>
           </a:p>
         </p:txBody>
@@ -11743,7 +11626,7 @@
                 <a:ea typeface="Noto Sans CJK JP"/>
                 <a:cs typeface="Noto Sans"/>
               </a:rPr>
-              <a:t>2. 目標・状態・DBのある対話</a:t>
+              <a:t>2. 目標・注釈・施設情報</a:t>
             </a:r>
           </a:p>
         </p:txBody>
@@ -11756,8 +11639,8 @@
         </p:nvSpPr>
         <p:spPr>
           <a:xfrm>
-            <a:off x="502920" y="4700016"/>
-            <a:ext cx="8183879" cy="621792"/>
+            <a:off x="502920" y="4699000"/>
+            <a:ext cx="8183879" cy="431800"/>
           </a:xfrm>
           <a:prstGeom prst="rect">
             <a:avLst/>
@@ -11789,35 +11672,24 @@
               </a:defRPr>
             </a:pPr>
             <a:r>
-              <a:rPr sz="810" b="0" lang="ja-JP" altLang="en-US">
-                <a:solidFill>
-                  <a:srgbClr val="626669"/>
-                </a:solidFill>
-                <a:latin typeface="Noto Sans"/>
-                <a:ea typeface="Noto Sans CJK JP"/>
-                <a:cs typeface="Noto Sans"/>
-              </a:rPr>
-              <a:t>[1] Zhu et al. (2020). CrossWOZ: A Large-Scale Chinese Cross-Domain Task-Oriented Dialogue Dataset. TACL 8:281–295.</a:t>
-            </a:r>
-            <a:r>
-              <a:rPr sz="810" b="0" lang="ja-JP" altLang="en-US">
-                <a:solidFill>
-                  <a:srgbClr val="626669"/>
-                </a:solidFill>
-                <a:latin typeface="Noto Sans"/>
-                <a:ea typeface="Noto Sans CJK JP"/>
-                <a:cs typeface="Noto Sans"/>
-              </a:rPr>
-              <a:t>  </a:t>
-            </a:r>
-            <a:r>
-              <a:rPr sz="810" b="0" lang="ja-JP" altLang="en-US">
-                <a:solidFill>
-                  <a:srgbClr val="626669"/>
-                </a:solidFill>
-                <a:latin typeface="Noto Sans"/>
-                <a:ea typeface="Noto Sans CJK JP"/>
-                <a:cs typeface="Noto Sans"/>
+              <a:rPr sz="830">
+                <a:latin typeface="Noto Sans CJK JP"/>
+              </a:rPr>
+              <a:t>[1] Zhu et al. (2020). CrossWOZ: A Large-Scale Chinese Cross-Domain Task-Oriented Dialogue Dataset.</a:t>
+            </a:r>
+          </a:p>
+          <a:p>
+            <a:pPr>
+              <a:spcBef>
+                <a:spcPts val="0"/>
+              </a:spcBef>
+              <a:spcAft>
+                <a:spcPts val="0"/>
+              </a:spcAft>
+            </a:pPr>
+            <a:r>
+              <a:rPr sz="830">
+                <a:latin typeface="Noto Sans CJK JP"/>
                 <a:hlinkClick r:id="rId2"/>
               </a:rPr>
               <a:t>https://aclanthology.org/2020.tacl-1.19/</a:t>
@@ -11886,7 +11758,7 @@
                 <a:ea typeface="Noto Sans CJK JP"/>
                 <a:cs typeface="Noto Sans"/>
               </a:rPr>
-              <a:t>施設情報と交通のDBを用意する</a:t>
+              <a:t>施設の条件と交通を検索するデータベース</a:t>
             </a:r>
           </a:p>
         </p:txBody>
@@ -11934,7 +11806,7 @@
                 <a:ea typeface="Noto Sans CJK JP"/>
                 <a:cs typeface="Noto Sans"/>
               </a:rPr>
-              <a:t>2. 目標・状態・DBのある対話</a:t>
+              <a:t>2. 目標・注釈・施設情報</a:t>
             </a:r>
           </a:p>
         </p:txBody>
@@ -12961,7 +12833,7 @@
                 <a:ea typeface="Noto Sans CJK JP"/>
                 <a:cs typeface="Noto Sans"/>
               </a:rPr>
-              <a:t>固定配布を再集計。地下鉄の2,549は駅数ではなく、3種類の施設に対応する項目数。</a:t>
+              <a:t>地下鉄の情報は、各施設の最寄り駅を記した2,549件。</a:t>
             </a:r>
           </a:p>
         </p:txBody>
@@ -12974,8 +12846,8 @@
         </p:nvSpPr>
         <p:spPr>
           <a:xfrm>
-            <a:off x="502920" y="4700016"/>
-            <a:ext cx="8183879" cy="621792"/>
+            <a:off x="502920" y="4699000"/>
+            <a:ext cx="8183879" cy="431800"/>
           </a:xfrm>
           <a:prstGeom prst="rect">
             <a:avLst/>
@@ -13007,41 +12879,27 @@
               </a:defRPr>
             </a:pPr>
             <a:r>
-              <a:rPr sz="810" b="0" lang="ja-JP" altLang="en-US">
-                <a:solidFill>
-                  <a:srgbClr val="626669"/>
-                </a:solidFill>
-                <a:latin typeface="Noto Sans"/>
-                <a:ea typeface="Noto Sans CJK JP"/>
-                <a:cs typeface="Noto Sans"/>
-              </a:rPr>
-              <a:t>[1] Qi Zhu et al. CrossWOZ database / database.md. 固定commit df82c9fd。</a:t>
+              <a:rPr sz="830">
+                <a:latin typeface="Noto Sans CJK JP"/>
+              </a:rPr>
+              <a:t>[1] Zhu et al. (2020). CrossWOZ: database.</a:t>
             </a:r>
           </a:p>
           <a:p>
             <a:pPr>
-              <a:lnSpc>
-                <a:spcPts val="1200"/>
-              </a:lnSpc>
-              <a:buNone/>
-              <a:defRPr sz="810" b="0">
-                <a:solidFill>
-                  <a:srgbClr val="303437"/>
-                </a:solidFill>
-                <a:latin typeface="Noto Sans"/>
-              </a:defRPr>
-            </a:pPr>
-            <a:r>
-              <a:rPr sz="810" b="0" lang="ja-JP" altLang="en-US">
-                <a:solidFill>
-                  <a:srgbClr val="626669"/>
-                </a:solidFill>
-                <a:latin typeface="Noto Sans"/>
-                <a:ea typeface="Noto Sans CJK JP"/>
-                <a:cs typeface="Noto Sans"/>
-                <a:hlinkClick r:id="rId2"/>
-              </a:rPr>
-              <a:t>https://github.com/thu-coai/CrossWOZ/tree/df82c9fdff91b9b130f2d6b89110d3870ba6260e/data/crosswoz/database</a:t>
+              <a:spcBef>
+                <a:spcPts val="0"/>
+              </a:spcBef>
+              <a:spcAft>
+                <a:spcPts val="0"/>
+              </a:spcAft>
+            </a:pPr>
+            <a:r>
+              <a:rPr sz="830">
+                <a:latin typeface="Noto Sans CJK JP"/>
+                <a:hlinkClick r:id="rId3"/>
+              </a:rPr>
+              <a:t>https://github.com/thu-coai/CrossWOZ/tree/master/data/crosswoz/database</a:t>
             </a:r>
           </a:p>
         </p:txBody>
@@ -13107,7 +12965,7 @@
                 <a:ea typeface="Noto Sans CJK JP"/>
                 <a:cs typeface="Noto Sans"/>
               </a:rPr>
-              <a:t>目標の依存関係で、5種類に分ける</a:t>
+              <a:t>旅行目標には、5種類の組み合わせがある</a:t>
             </a:r>
           </a:p>
         </p:txBody>
@@ -13155,7 +13013,7 @@
                 <a:ea typeface="Noto Sans CJK JP"/>
                 <a:cs typeface="Noto Sans"/>
               </a:rPr>
-              <a:t>2. 目標・状態・DBのある対話</a:t>
+              <a:t>2. 目標・注釈・施設情報</a:t>
             </a:r>
           </a:p>
         </p:txBody>
@@ -14182,7 +14040,7 @@
                 <a:ea typeface="Noto Sans CJK JP"/>
                 <a:cs typeface="Noto Sans"/>
               </a:rPr>
-              <a:t>HARはhotel・attraction・restaurantの3領域。分割ファイルのtype値でも全5件数を照合した。</a:t>
+              <a:t>Tは地下鉄・タクシーの移動。CMは、他施設の周辺などの依存関係を含む。</a:t>
             </a:r>
           </a:p>
         </p:txBody>
@@ -14195,8 +14053,8 @@
         </p:nvSpPr>
         <p:spPr>
           <a:xfrm>
-            <a:off x="502920" y="4700016"/>
-            <a:ext cx="8183879" cy="621792"/>
+            <a:off x="502920" y="4699000"/>
+            <a:ext cx="8183879" cy="431800"/>
           </a:xfrm>
           <a:prstGeom prst="rect">
             <a:avLst/>
@@ -14228,35 +14086,24 @@
               </a:defRPr>
             </a:pPr>
             <a:r>
-              <a:rPr sz="810" b="0" lang="ja-JP" altLang="en-US">
-                <a:solidFill>
-                  <a:srgbClr val="626669"/>
-                </a:solidFill>
-                <a:latin typeface="Noto Sans"/>
-                <a:ea typeface="Noto Sans CJK JP"/>
-                <a:cs typeface="Noto Sans"/>
-              </a:rPr>
-              <a:t>[1] Zhu et al. (2020). CrossWOZ: A Large-Scale Chinese Cross-Domain Task-Oriented Dialogue Dataset. TACL 8:281–295.</a:t>
-            </a:r>
-            <a:r>
-              <a:rPr sz="810" b="0" lang="ja-JP" altLang="en-US">
-                <a:solidFill>
-                  <a:srgbClr val="626669"/>
-                </a:solidFill>
-                <a:latin typeface="Noto Sans"/>
-                <a:ea typeface="Noto Sans CJK JP"/>
-                <a:cs typeface="Noto Sans"/>
-              </a:rPr>
-              <a:t>  </a:t>
-            </a:r>
-            <a:r>
-              <a:rPr sz="810" b="0" lang="ja-JP" altLang="en-US">
-                <a:solidFill>
-                  <a:srgbClr val="626669"/>
-                </a:solidFill>
-                <a:latin typeface="Noto Sans"/>
-                <a:ea typeface="Noto Sans CJK JP"/>
-                <a:cs typeface="Noto Sans"/>
+              <a:rPr sz="830">
+                <a:latin typeface="Noto Sans CJK JP"/>
+              </a:rPr>
+              <a:t>[1] Zhu et al. (2020). CrossWOZ: A Large-Scale Chinese Cross-Domain Task-Oriented Dialogue Dataset.</a:t>
+            </a:r>
+          </a:p>
+          <a:p>
+            <a:pPr>
+              <a:spcBef>
+                <a:spcPts val="0"/>
+              </a:spcBef>
+              <a:spcAft>
+                <a:spcPts val="0"/>
+              </a:spcAft>
+            </a:pPr>
+            <a:r>
+              <a:rPr sz="830">
+                <a:latin typeface="Noto Sans CJK JP"/>
                 <a:hlinkClick r:id="rId2"/>
               </a:rPr>
               <a:t>https://aclanthology.org/2020.tacl-1.19/</a:t>
@@ -14386,8 +14233,8 @@
         </p:nvSpPr>
         <p:spPr>
           <a:xfrm>
-            <a:off x="502920" y="4700016"/>
-            <a:ext cx="8183879" cy="621792"/>
+            <a:off x="502920" y="4699000"/>
+            <a:ext cx="8183879" cy="431800"/>
           </a:xfrm>
           <a:prstGeom prst="rect">
             <a:avLst/>
@@ -14419,35 +14266,24 @@
               </a:defRPr>
             </a:pPr>
             <a:r>
-              <a:rPr sz="810" b="0" lang="ja-JP" altLang="en-US">
-                <a:solidFill>
-                  <a:srgbClr val="626669"/>
-                </a:solidFill>
-                <a:latin typeface="Noto Sans"/>
-                <a:ea typeface="Noto Sans CJK JP"/>
-                <a:cs typeface="Noto Sans"/>
-              </a:rPr>
-              <a:t>[1] Qi Zhu et al. CrossWOZ. 公式リポジトリ・README（2026-10-18取得）。</a:t>
-            </a:r>
-            <a:r>
-              <a:rPr sz="810" b="0" lang="ja-JP" altLang="en-US">
-                <a:solidFill>
-                  <a:srgbClr val="626669"/>
-                </a:solidFill>
-                <a:latin typeface="Noto Sans"/>
-                <a:ea typeface="Noto Sans CJK JP"/>
-                <a:cs typeface="Noto Sans"/>
-              </a:rPr>
-              <a:t>  </a:t>
-            </a:r>
-            <a:r>
-              <a:rPr sz="810" b="0" lang="ja-JP" altLang="en-US">
-                <a:solidFill>
-                  <a:srgbClr val="626669"/>
-                </a:solidFill>
-                <a:latin typeface="Noto Sans"/>
-                <a:ea typeface="Noto Sans CJK JP"/>
-                <a:cs typeface="Noto Sans"/>
+              <a:rPr sz="830">
+                <a:latin typeface="Noto Sans CJK JP"/>
+              </a:rPr>
+              <a:t>[1] Zhu et al. (2020). CrossWOZ: official repository.</a:t>
+            </a:r>
+          </a:p>
+          <a:p>
+            <a:pPr>
+              <a:spcBef>
+                <a:spcPts val="0"/>
+              </a:spcBef>
+              <a:spcAft>
+                <a:spcPts val="0"/>
+              </a:spcAft>
+            </a:pPr>
+            <a:r>
+              <a:rPr sz="830">
+                <a:latin typeface="Noto Sans CJK JP"/>
                 <a:hlinkClick r:id="rId3"/>
               </a:rPr>
               <a:t>https://github.com/thu-coai/CrossWOZ</a:t>
@@ -14540,7 +14376,7 @@
                 <a:ea typeface="Noto Sans CJK JP"/>
                 <a:cs typeface="Noto Sans"/>
               </a:rPr>
-              <a:t>目標には、条件と知りたい項目を持つ</a:t>
+              <a:t>旅行の目標は、条件と質問したい項目で表す</a:t>
             </a:r>
           </a:p>
         </p:txBody>
@@ -14593,7 +14429,7 @@
                 <a:ea typeface="Noto Sans CJK JP"/>
                 <a:cs typeface="Noto Sans"/>
               </a:rPr>
-              <a:t>goalは、下位目標ID、領域、スロット、値、すでに言及したかの印を並べた構造。価格や評価の条件と、名称・電話などの未回答項目を表す。</a:t>
+              <a:t>goalは、旅行者が達成したい目標を表す。価格や評価などの検索条件と、施設名や電話番号などの知りたい項目を持つ。</a:t>
             </a:r>
           </a:p>
           <a:p>
@@ -14623,7 +14459,7 @@
                 <a:ea typeface="Noto Sans CJK JP"/>
                 <a:cs typeface="Noto Sans"/>
               </a:rPr>
-              <a:t>領域をまたぐ目標では、前に選んだ施設の近くを探す指定や、id=1からid=2へ移動する指定を持つ。実際の施設名は会話の進行で決まる。</a:t>
+              <a:t>複数の領域にまたがる目標には、選んだ施設の近くを探す指定や、施設間を移動する指定がある。実際の施設名は会話の進行で決まる。</a:t>
             </a:r>
           </a:p>
           <a:p>
@@ -14653,7 +14489,7 @@
                 <a:ea typeface="Noto Sans CJK JP"/>
                 <a:cs typeface="Noto Sans"/>
               </a:rPr>
-              <a:t>user_stateは会話中の目標の状態。回答された値を埋め、候補がなければ条件を変えることもできる。</a:t>
+              <a:t>user_stateは、会話中の目標の状態を表す。回答された値を埋め、候補がなければ条件を変えることもできる。</a:t>
             </a:r>
           </a:p>
         </p:txBody>
@@ -14701,7 +14537,7 @@
                 <a:ea typeface="Noto Sans CJK JP"/>
                 <a:cs typeface="Noto Sans"/>
               </a:rPr>
-              <a:t>2. 目標・状態・DBのある対話</a:t>
+              <a:t>2. 目標・注釈・施設情報</a:t>
             </a:r>
           </a:p>
         </p:txBody>
@@ -14714,8 +14550,8 @@
         </p:nvSpPr>
         <p:spPr>
           <a:xfrm>
-            <a:off x="502920" y="4700016"/>
-            <a:ext cx="8183879" cy="621792"/>
+            <a:off x="502920" y="4699000"/>
+            <a:ext cx="8183879" cy="431800"/>
           </a:xfrm>
           <a:prstGeom prst="rect">
             <a:avLst/>
@@ -14747,35 +14583,24 @@
               </a:defRPr>
             </a:pPr>
             <a:r>
-              <a:rPr sz="810" b="0" lang="ja-JP" altLang="en-US">
-                <a:solidFill>
-                  <a:srgbClr val="626669"/>
-                </a:solidFill>
-                <a:latin typeface="Noto Sans"/>
-                <a:ea typeface="Noto Sans CJK JP"/>
-                <a:cs typeface="Noto Sans"/>
-              </a:rPr>
-              <a:t>[1] Qi Zhu et al. CrossWOZ. 公式リポジトリ・README（2026-10-18取得）。</a:t>
-            </a:r>
-            <a:r>
-              <a:rPr sz="810" b="0" lang="ja-JP" altLang="en-US">
-                <a:solidFill>
-                  <a:srgbClr val="626669"/>
-                </a:solidFill>
-                <a:latin typeface="Noto Sans"/>
-                <a:ea typeface="Noto Sans CJK JP"/>
-                <a:cs typeface="Noto Sans"/>
-              </a:rPr>
-              <a:t>  </a:t>
-            </a:r>
-            <a:r>
-              <a:rPr sz="810" b="0" lang="ja-JP" altLang="en-US">
-                <a:solidFill>
-                  <a:srgbClr val="626669"/>
-                </a:solidFill>
-                <a:latin typeface="Noto Sans"/>
-                <a:ea typeface="Noto Sans CJK JP"/>
-                <a:cs typeface="Noto Sans"/>
+              <a:rPr sz="830">
+                <a:latin typeface="Noto Sans CJK JP"/>
+              </a:rPr>
+              <a:t>[1] Zhu et al. (2020). CrossWOZ: official repository.</a:t>
+            </a:r>
+          </a:p>
+          <a:p>
+            <a:pPr>
+              <a:spcBef>
+                <a:spcPts val="0"/>
+              </a:spcBef>
+              <a:spcAft>
+                <a:spcPts val="0"/>
+              </a:spcAft>
+            </a:pPr>
+            <a:r>
+              <a:rPr sz="830">
+                <a:latin typeface="Noto Sans CJK JP"/>
                 <a:hlinkClick r:id="rId2"/>
               </a:rPr>
               <a:t>https://github.com/thu-coai/CrossWOZ</a:t>
@@ -14844,7 +14669,7 @@
                 <a:ea typeface="Noto Sans CJK JP"/>
                 <a:cs typeface="Noto Sans"/>
               </a:rPr>
-              <a:t>状態と、発話の役割を別々に記録する</a:t>
+              <a:t>検索条件と、発話の働きを注釈する</a:t>
             </a:r>
           </a:p>
         </p:txBody>
@@ -15005,7 +14830,7 @@
                 <a:ea typeface="Noto Sans CJK JP"/>
                 <a:cs typeface="Noto Sans"/>
               </a:rPr>
-              <a:t>2. 目標・状態・DBのある対話</a:t>
+              <a:t>2. 目標・注釈・施設情報</a:t>
             </a:r>
           </a:p>
         </p:txBody>
@@ -15018,8 +14843,8 @@
         </p:nvSpPr>
         <p:spPr>
           <a:xfrm>
-            <a:off x="502920" y="4700016"/>
-            <a:ext cx="8183879" cy="621792"/>
+            <a:off x="502920" y="4699000"/>
+            <a:ext cx="8183879" cy="431800"/>
           </a:xfrm>
           <a:prstGeom prst="rect">
             <a:avLst/>
@@ -15051,35 +14876,24 @@
               </a:defRPr>
             </a:pPr>
             <a:r>
-              <a:rPr sz="810" b="0" lang="ja-JP" altLang="en-US">
-                <a:solidFill>
-                  <a:srgbClr val="626669"/>
-                </a:solidFill>
-                <a:latin typeface="Noto Sans"/>
-                <a:ea typeface="Noto Sans CJK JP"/>
-                <a:cs typeface="Noto Sans"/>
-              </a:rPr>
-              <a:t>[1] Zhu et al. (2020). CrossWOZ: A Large-Scale Chinese Cross-Domain Task-Oriented Dialogue Dataset. TACL 8:281–295.</a:t>
-            </a:r>
-            <a:r>
-              <a:rPr sz="810" b="0" lang="ja-JP" altLang="en-US">
-                <a:solidFill>
-                  <a:srgbClr val="626669"/>
-                </a:solidFill>
-                <a:latin typeface="Noto Sans"/>
-                <a:ea typeface="Noto Sans CJK JP"/>
-                <a:cs typeface="Noto Sans"/>
-              </a:rPr>
-              <a:t>  </a:t>
-            </a:r>
-            <a:r>
-              <a:rPr sz="810" b="0" lang="ja-JP" altLang="en-US">
-                <a:solidFill>
-                  <a:srgbClr val="626669"/>
-                </a:solidFill>
-                <a:latin typeface="Noto Sans"/>
-                <a:ea typeface="Noto Sans CJK JP"/>
-                <a:cs typeface="Noto Sans"/>
+              <a:rPr sz="830">
+                <a:latin typeface="Noto Sans CJK JP"/>
+              </a:rPr>
+              <a:t>[1] Zhu et al. (2020). CrossWOZ: A Large-Scale Chinese Cross-Domain Task-Oriented Dialogue Dataset.</a:t>
+            </a:r>
+          </a:p>
+          <a:p>
+            <a:pPr>
+              <a:spcBef>
+                <a:spcPts val="0"/>
+              </a:spcBef>
+              <a:spcAft>
+                <a:spcPts val="0"/>
+              </a:spcAft>
+            </a:pPr>
+            <a:r>
+              <a:rPr sz="830">
+                <a:latin typeface="Noto Sans CJK JP"/>
                 <a:hlinkClick r:id="rId2"/>
               </a:rPr>
               <a:t>https://aclanthology.org/2020.tacl-1.19/</a:t>
@@ -15196,7 +15010,7 @@
                 <a:ea typeface="Noto Sans CJK JP"/>
                 <a:cs typeface="Noto Sans"/>
               </a:rPr>
-              <a:t>2. 目標・状態・DBのある対話</a:t>
+              <a:t>2. 目標・注釈・施設情報</a:t>
             </a:r>
           </a:p>
         </p:txBody>
@@ -15767,7 +15581,7 @@
                 <a:ea typeface="Noto Sans CJK JP"/>
                 <a:cs typeface="Noto Sans"/>
               </a:rPr>
-              <a:t>各目標種10対話、合計50対話・806発話での品質確認。モデルの予測成績ではない。</a:t>
+              <a:t>各目標種10対話、合計50対話・806発話で注釈の品質を確認した。</a:t>
             </a:r>
           </a:p>
         </p:txBody>
@@ -15780,8 +15594,8 @@
         </p:nvSpPr>
         <p:spPr>
           <a:xfrm>
-            <a:off x="502920" y="4700016"/>
-            <a:ext cx="8183879" cy="621792"/>
+            <a:off x="502920" y="4699000"/>
+            <a:ext cx="8183879" cy="431800"/>
           </a:xfrm>
           <a:prstGeom prst="rect">
             <a:avLst/>
@@ -15813,35 +15627,24 @@
               </a:defRPr>
             </a:pPr>
             <a:r>
-              <a:rPr sz="810" b="0" lang="ja-JP" altLang="en-US">
-                <a:solidFill>
-                  <a:srgbClr val="626669"/>
-                </a:solidFill>
-                <a:latin typeface="Noto Sans"/>
-                <a:ea typeface="Noto Sans CJK JP"/>
-                <a:cs typeface="Noto Sans"/>
-              </a:rPr>
-              <a:t>[1] Zhu et al. (2020). CrossWOZ: A Large-Scale Chinese Cross-Domain Task-Oriented Dialogue Dataset. TACL 8:281–295.</a:t>
-            </a:r>
-            <a:r>
-              <a:rPr sz="810" b="0" lang="ja-JP" altLang="en-US">
-                <a:solidFill>
-                  <a:srgbClr val="626669"/>
-                </a:solidFill>
-                <a:latin typeface="Noto Sans"/>
-                <a:ea typeface="Noto Sans CJK JP"/>
-                <a:cs typeface="Noto Sans"/>
-              </a:rPr>
-              <a:t>  </a:t>
-            </a:r>
-            <a:r>
-              <a:rPr sz="810" b="0" lang="ja-JP" altLang="en-US">
-                <a:solidFill>
-                  <a:srgbClr val="626669"/>
-                </a:solidFill>
-                <a:latin typeface="Noto Sans"/>
-                <a:ea typeface="Noto Sans CJK JP"/>
-                <a:cs typeface="Noto Sans"/>
+              <a:rPr sz="830">
+                <a:latin typeface="Noto Sans CJK JP"/>
+              </a:rPr>
+              <a:t>[1] Zhu et al. (2020). CrossWOZ: A Large-Scale Chinese Cross-Domain Task-Oriented Dialogue Dataset.</a:t>
+            </a:r>
+          </a:p>
+          <a:p>
+            <a:pPr>
+              <a:spcBef>
+                <a:spcPts val="0"/>
+              </a:spcBef>
+              <a:spcAft>
+                <a:spcPts val="0"/>
+              </a:spcAft>
+            </a:pPr>
+            <a:r>
+              <a:rPr sz="830">
+                <a:latin typeface="Noto Sans CJK JP"/>
                 <a:hlinkClick r:id="rId2"/>
               </a:rPr>
               <a:t>https://aclanthology.org/2020.tacl-1.19/</a:t>
@@ -15910,7 +15713,7 @@
                 <a:ea typeface="Noto Sans CJK JP"/>
                 <a:cs typeface="Noto Sans"/>
               </a:rPr>
-              <a:t>3. 構築時の評価と難しさ</a:t>
+              <a:t>3. 対話システムの評価</a:t>
             </a:r>
           </a:p>
         </p:txBody>
@@ -15958,7 +15761,7 @@
                 <a:ea typeface="Noto Sans CJK JP"/>
                 <a:cs typeface="Noto Sans"/>
               </a:rPr>
-              <a:t>3. 構築時の評価と難しさ</a:t>
+              <a:t>3. 対話システムの評価</a:t>
             </a:r>
           </a:p>
         </p:txBody>
@@ -16185,7 +15988,7 @@
                 <a:ea typeface="Noto Sans CJK JP"/>
                 <a:cs typeface="Noto Sans"/>
               </a:rPr>
-              <a:t>3. 構築時の評価と難しさ</a:t>
+              <a:t>3. 対話システムの評価</a:t>
             </a:r>
           </a:p>
         </p:txBody>
@@ -16198,8 +16001,8 @@
         </p:nvSpPr>
         <p:spPr>
           <a:xfrm>
-            <a:off x="502920" y="4700016"/>
-            <a:ext cx="8183879" cy="621792"/>
+            <a:off x="502920" y="4699000"/>
+            <a:ext cx="8183879" cy="431800"/>
           </a:xfrm>
           <a:prstGeom prst="rect">
             <a:avLst/>
@@ -16231,35 +16034,24 @@
               </a:defRPr>
             </a:pPr>
             <a:r>
-              <a:rPr sz="810" b="0" lang="ja-JP" altLang="en-US">
-                <a:solidFill>
-                  <a:srgbClr val="626669"/>
-                </a:solidFill>
-                <a:latin typeface="Noto Sans"/>
-                <a:ea typeface="Noto Sans CJK JP"/>
-                <a:cs typeface="Noto Sans"/>
-              </a:rPr>
-              <a:t>[1] Zhu et al. (2020). CrossWOZ: A Large-Scale Chinese Cross-Domain Task-Oriented Dialogue Dataset. TACL 8:281–295.</a:t>
-            </a:r>
-            <a:r>
-              <a:rPr sz="810" b="0" lang="ja-JP" altLang="en-US">
-                <a:solidFill>
-                  <a:srgbClr val="626669"/>
-                </a:solidFill>
-                <a:latin typeface="Noto Sans"/>
-                <a:ea typeface="Noto Sans CJK JP"/>
-                <a:cs typeface="Noto Sans"/>
-              </a:rPr>
-              <a:t>  </a:t>
-            </a:r>
-            <a:r>
-              <a:rPr sz="810" b="0" lang="ja-JP" altLang="en-US">
-                <a:solidFill>
-                  <a:srgbClr val="626669"/>
-                </a:solidFill>
-                <a:latin typeface="Noto Sans"/>
-                <a:ea typeface="Noto Sans CJK JP"/>
-                <a:cs typeface="Noto Sans"/>
+              <a:rPr sz="830">
+                <a:latin typeface="Noto Sans CJK JP"/>
+              </a:rPr>
+              <a:t>[1] Zhu et al. (2020). CrossWOZ: A Large-Scale Chinese Cross-Domain Task-Oriented Dialogue Dataset.</a:t>
+            </a:r>
+          </a:p>
+          <a:p>
+            <a:pPr>
+              <a:spcBef>
+                <a:spcPts val="0"/>
+              </a:spcBef>
+              <a:spcAft>
+                <a:spcPts val="0"/>
+              </a:spcAft>
+            </a:pPr>
+            <a:r>
+              <a:rPr sz="830">
+                <a:latin typeface="Noto Sans CJK JP"/>
                 <a:hlinkClick r:id="rId2"/>
               </a:rPr>
               <a:t>https://aclanthology.org/2020.tacl-1.19/</a:t>
@@ -16376,7 +16168,7 @@
                 <a:ea typeface="Noto Sans CJK JP"/>
                 <a:cs typeface="Noto Sans"/>
               </a:rPr>
-              <a:t>3. 構築時の評価と難しさ</a:t>
+              <a:t>3. 対話システムの評価</a:t>
             </a:r>
           </a:p>
         </p:txBody>
@@ -16448,7 +16240,7 @@
                 <a:ea typeface="Noto Sans CJK JP"/>
                 <a:cs typeface="Noto Sans"/>
               </a:rPr>
-              <a:t>状態完全一致率（%）。test500対話・4,238応答。直前の正解状態と利用者の正解行為を与える。全値を固定実装で再現。</a:t>
+              <a:t>状態完全一致率（%）。testの500対話・4,238応答。直前の正解状態と利用者の正解対話行為を入力する。</a:t>
             </a:r>
           </a:p>
         </p:txBody>
@@ -16461,8 +16253,8 @@
         </p:nvSpPr>
         <p:spPr>
           <a:xfrm>
-            <a:off x="502920" y="4700016"/>
-            <a:ext cx="8183879" cy="621792"/>
+            <a:off x="502920" y="4699000"/>
+            <a:ext cx="8183879" cy="431800"/>
           </a:xfrm>
           <a:prstGeom prst="rect">
             <a:avLst/>
@@ -16494,41 +16286,27 @@
               </a:defRPr>
             </a:pPr>
             <a:r>
-              <a:rPr sz="810" b="0" lang="ja-JP" altLang="en-US">
-                <a:solidFill>
-                  <a:srgbClr val="626669"/>
-                </a:solidFill>
-                <a:latin typeface="Noto Sans"/>
-                <a:ea typeface="Noto Sans CJK JP"/>
-                <a:cs typeface="Noto Sans"/>
-              </a:rPr>
-              <a:t>[1] Qi Zhu et al. CrossWOZ RuleDST / evaluate.py. 固定commit df82c9fd。</a:t>
+              <a:rPr sz="830">
+                <a:latin typeface="Noto Sans CJK JP"/>
+              </a:rPr>
+              <a:t>[1] Zhu et al. (2020). CrossWOZ: RuleDST evaluation.</a:t>
             </a:r>
           </a:p>
           <a:p>
             <a:pPr>
-              <a:lnSpc>
-                <a:spcPts val="1200"/>
-              </a:lnSpc>
-              <a:buNone/>
-              <a:defRPr sz="810" b="0">
-                <a:solidFill>
-                  <a:srgbClr val="303437"/>
-                </a:solidFill>
-                <a:latin typeface="Noto Sans"/>
-              </a:defRPr>
-            </a:pPr>
-            <a:r>
-              <a:rPr sz="810" b="0" lang="ja-JP" altLang="en-US">
-                <a:solidFill>
-                  <a:srgbClr val="626669"/>
-                </a:solidFill>
-                <a:latin typeface="Noto Sans"/>
-                <a:ea typeface="Noto Sans CJK JP"/>
-                <a:cs typeface="Noto Sans"/>
-                <a:hlinkClick r:id="rId3"/>
-              </a:rPr>
-              <a:t>https://github.com/thu-coai/CrossWOZ/blob/df82c9fdff91b9b130f2d6b89110d3870ba6260e/convlab2/dst/rule/crosswoz/evaluate.py</a:t>
+              <a:spcBef>
+                <a:spcPts val="0"/>
+              </a:spcBef>
+              <a:spcAft>
+                <a:spcPts val="0"/>
+              </a:spcAft>
+            </a:pPr>
+            <a:r>
+              <a:rPr sz="830">
+                <a:latin typeface="Noto Sans CJK JP"/>
+                <a:hlinkClick r:id="rId4"/>
+              </a:rPr>
+              <a:t>https://github.com/thu-coai/CrossWOZ/blob/master/convlab2/dst/rule/crosswoz/evaluate.py</a:t>
             </a:r>
           </a:p>
         </p:txBody>
@@ -16594,7 +16372,7 @@
                 <a:ea typeface="Noto Sans CJK JP"/>
                 <a:cs typeface="Noto Sans"/>
               </a:rPr>
-              <a:t>入力条件と、採点単位を対応させる</a:t>
+              <a:t>理解・状態追跡・行動選択のベースライン</a:t>
             </a:r>
           </a:p>
         </p:txBody>
@@ -16642,7 +16420,7 @@
                 <a:ea typeface="Noto Sans CJK JP"/>
                 <a:cs typeface="Noto Sans"/>
               </a:rPr>
-              <a:t>3. 構築時の評価と難しさ</a:t>
+              <a:t>3. 対話システムの評価</a:t>
             </a:r>
           </a:p>
         </p:txBody>
@@ -17531,8 +17309,8 @@
         </p:nvSpPr>
         <p:spPr>
           <a:xfrm>
-            <a:off x="502920" y="4700016"/>
-            <a:ext cx="8183879" cy="621792"/>
+            <a:off x="502920" y="4699000"/>
+            <a:ext cx="8183879" cy="431800"/>
           </a:xfrm>
           <a:prstGeom prst="rect">
             <a:avLst/>
@@ -17564,35 +17342,24 @@
               </a:defRPr>
             </a:pPr>
             <a:r>
-              <a:rPr sz="810" b="0" lang="ja-JP" altLang="en-US">
-                <a:solidFill>
-                  <a:srgbClr val="626669"/>
-                </a:solidFill>
-                <a:latin typeface="Noto Sans"/>
-                <a:ea typeface="Noto Sans CJK JP"/>
-                <a:cs typeface="Noto Sans"/>
-              </a:rPr>
-              <a:t>[1] Zhu et al. (2020). CrossWOZ: A Large-Scale Chinese Cross-Domain Task-Oriented Dialogue Dataset. TACL 8:281–295.</a:t>
-            </a:r>
-            <a:r>
-              <a:rPr sz="810" b="0" lang="ja-JP" altLang="en-US">
-                <a:solidFill>
-                  <a:srgbClr val="626669"/>
-                </a:solidFill>
-                <a:latin typeface="Noto Sans"/>
-                <a:ea typeface="Noto Sans CJK JP"/>
-                <a:cs typeface="Noto Sans"/>
-              </a:rPr>
-              <a:t>  </a:t>
-            </a:r>
-            <a:r>
-              <a:rPr sz="810" b="0" lang="ja-JP" altLang="en-US">
-                <a:solidFill>
-                  <a:srgbClr val="626669"/>
-                </a:solidFill>
-                <a:latin typeface="Noto Sans"/>
-                <a:ea typeface="Noto Sans CJK JP"/>
-                <a:cs typeface="Noto Sans"/>
+              <a:rPr sz="830">
+                <a:latin typeface="Noto Sans CJK JP"/>
+              </a:rPr>
+              <a:t>[1] Zhu et al. (2020). CrossWOZ: A Large-Scale Chinese Cross-Domain Task-Oriented Dialogue Dataset.</a:t>
+            </a:r>
+          </a:p>
+          <a:p>
+            <a:pPr>
+              <a:spcBef>
+                <a:spcPts val="0"/>
+              </a:spcBef>
+              <a:spcAft>
+                <a:spcPts val="0"/>
+              </a:spcAft>
+            </a:pPr>
+            <a:r>
+              <a:rPr sz="830">
+                <a:latin typeface="Noto Sans CJK JP"/>
                 <a:hlinkClick r:id="rId2"/>
               </a:rPr>
               <a:t>https://aclanthology.org/2020.tacl-1.19/</a:t>
@@ -17661,7 +17428,7 @@
                 <a:ea typeface="Noto Sans CJK JP"/>
                 <a:cs typeface="Noto Sans"/>
               </a:rPr>
-              <a:t>RuleDSTは、最初の検索状態を再現する</a:t>
+              <a:t>RuleDSTは、検索条件全体の一致を測る</a:t>
             </a:r>
           </a:p>
         </p:txBody>
@@ -17714,7 +17481,7 @@
                 <a:ea typeface="Noto Sans CJK JP"/>
                 <a:cs typeface="Noto Sans"/>
               </a:rPr>
-              <a:t>正解はsys_state_initで、selectedResultsを除いた全領域のスロット値が、すべて一致した発話を正解とする。候補を選んだ後のsys_stateは採点先ではない。</a:t>
+              <a:t>正解は、案内役が最初に検索したときの状態（sys_state_init）。選択済み候補のselectedResultsを除き、全領域のスロット値が一致した応答を正解とする。</a:t>
             </a:r>
           </a:p>
           <a:p>
@@ -17744,37 +17511,7 @@
                 <a:ea typeface="Noto Sans CJK JP"/>
                 <a:cs typeface="Noto Sans"/>
               </a:rPr>
-              <a:t>固定実装を配布testへ適用すると、4,238応答中3,023応答が完全一致し、71.33%。5種類別の値も構築時の報告に一致した。</a:t>
-            </a:r>
-          </a:p>
-          <a:p>
-            <a:pPr marL="457200" indent="-355600">
-              <a:lnSpc>
-                <a:spcPts val="2379"/>
-              </a:lnSpc>
-              <a:spcAft>
-                <a:spcPts val="0"/>
-              </a:spcAft>
-              <a:buSzPct val="66500"/>
-              <a:buFont typeface="Noto Sans CJK JP"/>
-              <a:buChar char="●"/>
-              <a:defRPr sz="2000" b="0">
-                <a:solidFill>
-                  <a:srgbClr val="303437"/>
-                </a:solidFill>
-                <a:latin typeface="Noto Sans"/>
-              </a:defRPr>
-            </a:pPr>
-            <a:r>
-              <a:rPr sz="2000" b="0" lang="ja-JP" altLang="en-US">
-                <a:solidFill>
-                  <a:srgbClr val="303437"/>
-                </a:solidFill>
-                <a:latin typeface="Noto Sans"/>
-                <a:ea typeface="Noto Sans CJK JP"/>
-                <a:cs typeface="Noto Sans"/>
-              </a:rPr>
-              <a:t>ここでは学習済みの生成モデルを新たに実行していない。再計算したのは、規則で状態を更新するRuleDSTである。</a:t>
+              <a:t>RuleDSTには、直前の正解状態と利用者の正解対話行為を入力する。testの4,238応答中3,023応答が完全一致し、正解率は71.33%だった。</a:t>
             </a:r>
           </a:p>
         </p:txBody>
@@ -17822,7 +17559,7 @@
                 <a:ea typeface="Noto Sans CJK JP"/>
                 <a:cs typeface="Noto Sans"/>
               </a:rPr>
-              <a:t>3. 構築時の評価と難しさ</a:t>
+              <a:t>3. 対話システムの評価</a:t>
             </a:r>
           </a:p>
         </p:txBody>
@@ -17835,8 +17572,8 @@
         </p:nvSpPr>
         <p:spPr>
           <a:xfrm>
-            <a:off x="502920" y="4700016"/>
-            <a:ext cx="8183879" cy="621792"/>
+            <a:off x="502920" y="4699000"/>
+            <a:ext cx="8183879" cy="431800"/>
           </a:xfrm>
           <a:prstGeom prst="rect">
             <a:avLst/>
@@ -17868,41 +17605,27 @@
               </a:defRPr>
             </a:pPr>
             <a:r>
-              <a:rPr sz="810" b="0" lang="ja-JP" altLang="en-US">
-                <a:solidFill>
-                  <a:srgbClr val="626669"/>
-                </a:solidFill>
-                <a:latin typeface="Noto Sans"/>
-                <a:ea typeface="Noto Sans CJK JP"/>
-                <a:cs typeface="Noto Sans"/>
-              </a:rPr>
-              <a:t>[1] Qi Zhu et al. CrossWOZ RuleDST / evaluate.py. 固定commit df82c9fd。</a:t>
+              <a:rPr sz="830">
+                <a:latin typeface="Noto Sans CJK JP"/>
+              </a:rPr>
+              <a:t>[1] Zhu et al. (2020). CrossWOZ: RuleDST evaluation.</a:t>
             </a:r>
           </a:p>
           <a:p>
             <a:pPr>
-              <a:lnSpc>
-                <a:spcPts val="1200"/>
-              </a:lnSpc>
-              <a:buNone/>
-              <a:defRPr sz="810" b="0">
-                <a:solidFill>
-                  <a:srgbClr val="303437"/>
-                </a:solidFill>
-                <a:latin typeface="Noto Sans"/>
-              </a:defRPr>
-            </a:pPr>
-            <a:r>
-              <a:rPr sz="810" b="0" lang="ja-JP" altLang="en-US">
-                <a:solidFill>
-                  <a:srgbClr val="626669"/>
-                </a:solidFill>
-                <a:latin typeface="Noto Sans"/>
-                <a:ea typeface="Noto Sans CJK JP"/>
-                <a:cs typeface="Noto Sans"/>
-                <a:hlinkClick r:id="rId2"/>
-              </a:rPr>
-              <a:t>https://github.com/thu-coai/CrossWOZ/blob/df82c9fdff91b9b130f2d6b89110d3870ba6260e/convlab2/dst/rule/crosswoz/evaluate.py</a:t>
+              <a:spcBef>
+                <a:spcPts val="0"/>
+              </a:spcBef>
+              <a:spcAft>
+                <a:spcPts val="0"/>
+              </a:spcAft>
+            </a:pPr>
+            <a:r>
+              <a:rPr sz="830">
+                <a:latin typeface="Noto Sans CJK JP"/>
+                <a:hlinkClick r:id="rId3"/>
+              </a:rPr>
+              <a:t>https://github.com/thu-coai/CrossWOZ/blob/master/convlab2/dst/rule/crosswoz/evaluate.py</a:t>
             </a:r>
           </a:p>
         </p:txBody>
@@ -18016,7 +17739,7 @@
                 <a:ea typeface="Noto Sans CJK JP"/>
                 <a:cs typeface="Noto Sans"/>
               </a:rPr>
-              <a:t>3. 構築時の評価と難しさ</a:t>
+              <a:t>3. 対話システムの評価</a:t>
             </a:r>
           </a:p>
         </p:txBody>
@@ -18739,7 +18462,7 @@
                 <a:ea typeface="Noto Sans CJK JP"/>
                 <a:cs typeface="Noto Sans"/>
               </a:rPr>
-              <a:t>各目標種1,000回のシミュレーション。全要求項目が値で埋まるとtask finishとする。返答内容の正しさを別に保証する成功率ではない。</a:t>
+              <a:t>各目標種1,000回のシミュレーション。旅行者の全要求項目が値で埋まった対話の割合を、目標の完了率とする。</a:t>
             </a:r>
           </a:p>
         </p:txBody>
@@ -18752,8 +18475,8 @@
         </p:nvSpPr>
         <p:spPr>
           <a:xfrm>
-            <a:off x="502920" y="4700016"/>
-            <a:ext cx="8183879" cy="621792"/>
+            <a:off x="502920" y="4699000"/>
+            <a:ext cx="8183879" cy="431800"/>
           </a:xfrm>
           <a:prstGeom prst="rect">
             <a:avLst/>
@@ -18785,35 +18508,24 @@
               </a:defRPr>
             </a:pPr>
             <a:r>
-              <a:rPr sz="810" b="0" lang="ja-JP" altLang="en-US">
-                <a:solidFill>
-                  <a:srgbClr val="626669"/>
-                </a:solidFill>
-                <a:latin typeface="Noto Sans"/>
-                <a:ea typeface="Noto Sans CJK JP"/>
-                <a:cs typeface="Noto Sans"/>
-              </a:rPr>
-              <a:t>[1] Zhu et al. (2020). CrossWOZ: A Large-Scale Chinese Cross-Domain Task-Oriented Dialogue Dataset. TACL 8:281–295.</a:t>
-            </a:r>
-            <a:r>
-              <a:rPr sz="810" b="0" lang="ja-JP" altLang="en-US">
-                <a:solidFill>
-                  <a:srgbClr val="626669"/>
-                </a:solidFill>
-                <a:latin typeface="Noto Sans"/>
-                <a:ea typeface="Noto Sans CJK JP"/>
-                <a:cs typeface="Noto Sans"/>
-              </a:rPr>
-              <a:t>  </a:t>
-            </a:r>
-            <a:r>
-              <a:rPr sz="810" b="0" lang="ja-JP" altLang="en-US">
-                <a:solidFill>
-                  <a:srgbClr val="626669"/>
-                </a:solidFill>
-                <a:latin typeface="Noto Sans"/>
-                <a:ea typeface="Noto Sans CJK JP"/>
-                <a:cs typeface="Noto Sans"/>
+              <a:rPr sz="830">
+                <a:latin typeface="Noto Sans CJK JP"/>
+              </a:rPr>
+              <a:t>[1] Zhu et al. (2020). CrossWOZ: A Large-Scale Chinese Cross-Domain Task-Oriented Dialogue Dataset.</a:t>
+            </a:r>
+          </a:p>
+          <a:p>
+            <a:pPr>
+              <a:spcBef>
+                <a:spcPts val="0"/>
+              </a:spcBef>
+              <a:spcAft>
+                <a:spcPts val="0"/>
+              </a:spcAft>
+            </a:pPr>
+            <a:r>
+              <a:rPr sz="830">
+                <a:latin typeface="Noto Sans CJK JP"/>
                 <a:hlinkClick r:id="rId2"/>
               </a:rPr>
               <a:t>https://aclanthology.org/2020.tacl-1.19/</a:t>
@@ -18882,7 +18594,7 @@
                 <a:ea typeface="Noto Sans CJK JP"/>
                 <a:cs typeface="Noto Sans"/>
               </a:rPr>
-              <a:t>表現の一致と、目標の完了は別に測る</a:t>
+              <a:t>応答の語句の一致と、旅行目標の達成を測る</a:t>
             </a:r>
           </a:p>
         </p:txBody>
@@ -18935,7 +18647,7 @@
                 <a:ea typeface="Noto Sans CJK JP"/>
                 <a:cs typeface="Noto Sans"/>
               </a:rPr>
-              <a:t>生成した文章の評価にはBLEUを使い、対話全体ではシミュレータの目標が埋まるかを測った。</a:t>
+              <a:t>生成文と参照応答の語句の一致をBLEUで測り、対話全体ではシミュレータの目標が埋まるかを測った。</a:t>
             </a:r>
           </a:p>
           <a:p>
@@ -18966,36 +18678,6 @@
                 <a:cs typeface="Noto Sans"/>
               </a:rPr>
               <a:t>TemplateNLGはSC-LSTMより低いBLEUでも、自然言語による対話の完了率は高かった。理解器が学習データ由来の定型表現を扱いやすいことを、著者は一因として挙げている。</a:t>
-            </a:r>
-          </a:p>
-          <a:p>
-            <a:pPr marL="457200" indent="-355600">
-              <a:lnSpc>
-                <a:spcPts val="2499"/>
-              </a:lnSpc>
-              <a:spcAft>
-                <a:spcPts val="0"/>
-              </a:spcAft>
-              <a:buSzPct val="63333"/>
-              <a:buFont typeface="Noto Sans CJK JP"/>
-              <a:buChar char="●"/>
-              <a:defRPr sz="2100" b="0">
-                <a:solidFill>
-                  <a:srgbClr val="303437"/>
-                </a:solidFill>
-                <a:latin typeface="Noto Sans"/>
-              </a:defRPr>
-            </a:pPr>
-            <a:r>
-              <a:rPr sz="2100" b="0" lang="ja-JP" altLang="en-US">
-                <a:solidFill>
-                  <a:srgbClr val="303437"/>
-                </a:solidFill>
-                <a:latin typeface="Noto Sans"/>
-                <a:ea typeface="Noto Sans CJK JP"/>
-                <a:cs typeface="Noto Sans"/>
-              </a:rPr>
-              <a:t>収録応答、状態の正解、対話行為、目標の完了は、それぞれ異なる評価対象になる。</a:t>
             </a:r>
           </a:p>
         </p:txBody>
@@ -19043,7 +18725,7 @@
                 <a:ea typeface="Noto Sans CJK JP"/>
                 <a:cs typeface="Noto Sans"/>
               </a:rPr>
-              <a:t>3. 構築時の評価と難しさ</a:t>
+              <a:t>3. 対話システムの評価</a:t>
             </a:r>
           </a:p>
         </p:txBody>
@@ -19056,8 +18738,8 @@
         </p:nvSpPr>
         <p:spPr>
           <a:xfrm>
-            <a:off x="502920" y="4700016"/>
-            <a:ext cx="8183879" cy="621792"/>
+            <a:off x="502920" y="4699000"/>
+            <a:ext cx="8183879" cy="431800"/>
           </a:xfrm>
           <a:prstGeom prst="rect">
             <a:avLst/>
@@ -19089,35 +18771,24 @@
               </a:defRPr>
             </a:pPr>
             <a:r>
-              <a:rPr sz="810" b="0" lang="ja-JP" altLang="en-US">
-                <a:solidFill>
-                  <a:srgbClr val="626669"/>
-                </a:solidFill>
-                <a:latin typeface="Noto Sans"/>
-                <a:ea typeface="Noto Sans CJK JP"/>
-                <a:cs typeface="Noto Sans"/>
-              </a:rPr>
-              <a:t>[1] Zhu et al. (2020). CrossWOZ: A Large-Scale Chinese Cross-Domain Task-Oriented Dialogue Dataset. TACL 8:281–295.</a:t>
-            </a:r>
-            <a:r>
-              <a:rPr sz="810" b="0" lang="ja-JP" altLang="en-US">
-                <a:solidFill>
-                  <a:srgbClr val="626669"/>
-                </a:solidFill>
-                <a:latin typeface="Noto Sans"/>
-                <a:ea typeface="Noto Sans CJK JP"/>
-                <a:cs typeface="Noto Sans"/>
-              </a:rPr>
-              <a:t>  </a:t>
-            </a:r>
-            <a:r>
-              <a:rPr sz="810" b="0" lang="ja-JP" altLang="en-US">
-                <a:solidFill>
-                  <a:srgbClr val="626669"/>
-                </a:solidFill>
-                <a:latin typeface="Noto Sans"/>
-                <a:ea typeface="Noto Sans CJK JP"/>
-                <a:cs typeface="Noto Sans"/>
+              <a:rPr sz="830">
+                <a:latin typeface="Noto Sans CJK JP"/>
+              </a:rPr>
+              <a:t>[1] Zhu et al. (2020). CrossWOZ: A Large-Scale Chinese Cross-Domain Task-Oriented Dialogue Dataset.</a:t>
+            </a:r>
+          </a:p>
+          <a:p>
+            <a:pPr>
+              <a:spcBef>
+                <a:spcPts val="0"/>
+              </a:spcBef>
+              <a:spcAft>
+                <a:spcPts val="0"/>
+              </a:spcAft>
+            </a:pPr>
+            <a:r>
+              <a:rPr sz="830">
+                <a:latin typeface="Noto Sans CJK JP"/>
                 <a:hlinkClick r:id="rId2"/>
               </a:rPr>
               <a:t>https://aclanthology.org/2020.tacl-1.19/</a:t>
@@ -19239,7 +18910,7 @@
                 <a:ea typeface="Noto Sans CJK JP"/>
                 <a:cs typeface="Noto Sans"/>
               </a:rPr>
-              <a:t>対話の履歴から、次の応答を読む</a:t>
+              <a:t>旅行相談の対話と応答</a:t>
             </a:r>
           </a:p>
           <a:p>
@@ -19269,7 +18940,7 @@
                 <a:ea typeface="Noto Sans CJK JP"/>
                 <a:cs typeface="Noto Sans"/>
               </a:rPr>
-              <a:t>目標・状態・DBのある対話</a:t>
+              <a:t>目標・注釈・施設情報</a:t>
             </a:r>
           </a:p>
           <a:p>
@@ -19299,7 +18970,7 @@
                 <a:ea typeface="Noto Sans CJK JP"/>
                 <a:cs typeface="Noto Sans"/>
               </a:rPr>
-              <a:t>構築時の評価と難しさ</a:t>
+              <a:t>対話システムの評価</a:t>
             </a:r>
           </a:p>
           <a:p>
@@ -19329,7 +19000,7 @@
                 <a:ea typeface="Noto Sans CJK JP"/>
                 <a:cs typeface="Noto Sans"/>
               </a:rPr>
-              <a:t>CLEVAでの利用と入手</a:t>
+              <a:t>入手と応答生成への利用</a:t>
             </a:r>
           </a:p>
         </p:txBody>
@@ -19443,7 +19114,7 @@
                 <a:ea typeface="Noto Sans CJK JP"/>
                 <a:cs typeface="Noto Sans"/>
               </a:rPr>
-              <a:t>4. CLEVAでの利用と入手</a:t>
+              <a:t>4. 入手と応答生成への利用</a:t>
             </a:r>
           </a:p>
         </p:txBody>
@@ -19491,7 +19162,7 @@
                 <a:ea typeface="Noto Sans CJK JP"/>
                 <a:cs typeface="Noto Sans"/>
               </a:rPr>
-              <a:t>4. CLEVAでの利用と入手</a:t>
+              <a:t>4. 入手と応答生成への利用</a:t>
             </a:r>
           </a:p>
         </p:txBody>
@@ -19610,7 +19281,7 @@
                 <a:ea typeface="Noto Sans CJK JP"/>
                 <a:cs typeface="Noto Sans"/>
               </a:rPr>
-              <a:t>CLEVAは、CrossWOZをタスク指向対話の生成課題へ採用したと説明する。HELMのCLEVA実装は、各sys発話について、それ以前の全履歴と参照応答を一つのInstanceにする。</a:t>
+              <a:t>CLEVAは、中国語モデルの評価にCrossWOZを採用した。会話の履歴を入力し、次に案内役が返す応答を生成する課題である。</a:t>
             </a:r>
           </a:p>
           <a:p>
@@ -19640,7 +19311,7 @@
                 <a:ea typeface="Noto Sans CJK JP"/>
                 <a:cs typeface="Noto Sans"/>
               </a:rPr>
-              <a:t>固定設定はdialogue_generation、task_oriented、prompt_id 0～2、version v1。ここで取得したCrossWOZ原版と、CLEVAが選定・整形したv1集合は区別する。</a:t>
+              <a:t>公開実装は、各システム発話の直前までの会話と、収録された応答を組にする。</a:t>
             </a:r>
           </a:p>
           <a:p>
@@ -19670,7 +19341,7 @@
                 <a:ea typeface="Noto Sans CJK JP"/>
                 <a:cs typeface="Noto Sans"/>
               </a:rPr>
-              <a:t>CLEVA v1の配布集合は取得できず、Classic v0.4.0の公開runも0件。原版全件の応答数を、CLEVAの評価件数として扱わない。</a:t>
+              <a:t>CLEVAで使われた対話の全体や、抽出範囲は公開説明から確認できない。元のCrossWOZは、公式リポジトリから取得できる。</a:t>
             </a:r>
           </a:p>
         </p:txBody>
@@ -19718,7 +19389,7 @@
                 <a:ea typeface="Noto Sans CJK JP"/>
                 <a:cs typeface="Noto Sans"/>
               </a:rPr>
-              <a:t>4. CLEVAでの利用と入手</a:t>
+              <a:t>4. 入手と応答生成への利用</a:t>
             </a:r>
           </a:p>
         </p:txBody>
@@ -19731,8 +19402,8 @@
         </p:nvSpPr>
         <p:spPr>
           <a:xfrm>
-            <a:off x="502920" y="4700016"/>
-            <a:ext cx="8183879" cy="621792"/>
+            <a:off x="502920" y="4699000"/>
+            <a:ext cx="8183879" cy="431800"/>
           </a:xfrm>
           <a:prstGeom prst="rect">
             <a:avLst/>
@@ -19764,745 +19435,25 @@
               </a:defRPr>
             </a:pPr>
             <a:r>
-              <a:rPr sz="810" b="0" lang="ja-JP" altLang="en-US">
-                <a:solidFill>
-                  <a:srgbClr val="626669"/>
-                </a:solidFill>
-                <a:latin typeface="Noto Sans"/>
-                <a:ea typeface="Noto Sans CJK JP"/>
-                <a:cs typeface="Noto Sans"/>
-              </a:rPr>
-              <a:t>[1] Stanford CRFM (2023). CLEVA dialogue generation scenario. HELM v0.4.0.</a:t>
+              <a:rPr sz="830">
+                <a:latin typeface="Noto Sans CJK JP"/>
+              </a:rPr>
+              <a:t>[1] Stanford CRFM (2023). HELM: CLEVA dialogue generation scenario.</a:t>
             </a:r>
           </a:p>
           <a:p>
             <a:pPr>
-              <a:lnSpc>
-                <a:spcPts val="1200"/>
-              </a:lnSpc>
-              <a:buNone/>
-              <a:defRPr sz="810" b="0">
-                <a:solidFill>
-                  <a:srgbClr val="303437"/>
-                </a:solidFill>
-                <a:latin typeface="Noto Sans"/>
-              </a:defRPr>
-            </a:pPr>
-            <a:r>
-              <a:rPr sz="810" b="0" lang="ja-JP" altLang="en-US">
-                <a:solidFill>
-                  <a:srgbClr val="626669"/>
-                </a:solidFill>
-                <a:latin typeface="Noto Sans"/>
-                <a:ea typeface="Noto Sans CJK JP"/>
-                <a:cs typeface="Noto Sans"/>
+              <a:spcBef>
+                <a:spcPts val="0"/>
+              </a:spcBef>
+              <a:spcAft>
+                <a:spcPts val="0"/>
+              </a:spcAft>
+            </a:pPr>
+            <a:r>
+              <a:rPr sz="830">
+                <a:latin typeface="Noto Sans CJK JP"/>
                 <a:hlinkClick r:id="rId2"/>
-              </a:rPr>
-              <a:t>https://github.com/stanford-crfm/helm/blob/v0.4.0/src/helm/benchmark/scenarios/cleva_scenario.py</a:t>
-            </a:r>
-          </a:p>
-        </p:txBody>
-      </p:sp>
-    </p:spTree>
-  </p:cSld>
-  <p:clrMapOvr>
-    <a:masterClrMapping/>
-  </p:clrMapOvr>
-</p:sld>
-</file>
-
-<file path=ppt/slides/slide32.xml><?xml version="1.0" encoding="utf-8"?>
-<p:sld xmlns:a="http://schemas.openxmlformats.org/drawingml/2006/main" xmlns:p="http://schemas.openxmlformats.org/presentationml/2006/main" xmlns:r="http://schemas.openxmlformats.org/officeDocument/2006/relationships">
-  <p:cSld>
-    <p:spTree>
-      <p:nvGrpSpPr>
-        <p:cNvPr id="1" name=""/>
-        <p:cNvGrpSpPr/>
-        <p:nvPr/>
-      </p:nvGrpSpPr>
-      <p:grpSpPr/>
-      <p:sp>
-        <p:nvSpPr>
-          <p:cNvPr id="2" name="Title 1"/>
-          <p:cNvSpPr>
-            <a:spLocks noGrp="1"/>
-          </p:cNvSpPr>
-          <p:nvPr>
-            <p:ph type="title"/>
-          </p:nvPr>
-        </p:nvSpPr>
-        <p:spPr>
-          <a:xfrm>
-            <a:off x="468172" y="650138"/>
-            <a:ext cx="8206740" cy="616305"/>
-          </a:xfrm>
-        </p:spPr>
-        <p:txBody>
-          <a:bodyPr wrap="square" lIns="0" rIns="0" tIns="0" bIns="0">
-            <a:noAutofit/>
-          </a:bodyPr>
-          <a:lstStyle/>
-          <a:p>
-            <a:pPr algn="l">
-              <a:lnSpc>
-                <a:spcPct val="110000"/>
-              </a:lnSpc>
-              <a:buNone/>
-              <a:defRPr sz="2800" b="0">
-                <a:solidFill>
-                  <a:srgbClr val="303437"/>
-                </a:solidFill>
-                <a:latin typeface="Noto Sans"/>
-              </a:defRPr>
-            </a:pPr>
-            <a:r>
-              <a:rPr sz="2800" b="1" lang="ja-JP" altLang="en-US">
-                <a:solidFill>
-                  <a:srgbClr val="303437"/>
-                </a:solidFill>
-                <a:latin typeface="Noto Sans"/>
-                <a:ea typeface="Noto Sans CJK JP"/>
-                <a:cs typeface="Noto Sans"/>
-              </a:rPr>
-              <a:t>HELMの説明例を、公式valへ照合した</a:t>
-            </a:r>
-          </a:p>
-        </p:txBody>
-      </p:sp>
-      <p:sp>
-        <p:nvSpPr>
-          <p:cNvPr id="3" name="Title 2"/>
-          <p:cNvSpPr>
-            <a:spLocks noGrp="1"/>
-          </p:cNvSpPr>
-          <p:nvPr>
-            <p:ph type="title" idx="2"/>
-          </p:nvPr>
-        </p:nvSpPr>
-        <p:spPr>
-          <a:xfrm>
-            <a:off x="75895" y="0"/>
-            <a:ext cx="8115300" cy="480060"/>
-          </a:xfrm>
-        </p:spPr>
-        <p:txBody>
-          <a:bodyPr wrap="square" lIns="0" rIns="0" tIns="0" bIns="0" anchor="ctr">
-            <a:noAutofit/>
-          </a:bodyPr>
-          <a:lstStyle/>
-          <a:p>
-            <a:pPr algn="l">
-              <a:lnSpc>
-                <a:spcPct val="110000"/>
-              </a:lnSpc>
-              <a:buNone/>
-              <a:defRPr sz="1400" b="0">
-                <a:solidFill>
-                  <a:srgbClr val="303437"/>
-                </a:solidFill>
-                <a:latin typeface="Noto Sans"/>
-              </a:defRPr>
-            </a:pPr>
-            <a:r>
-              <a:rPr sz="1400" b="1" lang="ja-JP" altLang="en-US">
-                <a:solidFill>
-                  <a:srgbClr val="FFFEF8"/>
-                </a:solidFill>
-                <a:latin typeface="Noto Sans"/>
-                <a:ea typeface="Noto Sans CJK JP"/>
-                <a:cs typeface="Noto Sans"/>
-              </a:rPr>
-              <a:t>4. CLEVAでの利用と入手</a:t>
-            </a:r>
-          </a:p>
-        </p:txBody>
-      </p:sp>
-      <p:graphicFrame>
-        <p:nvGraphicFramePr>
-          <p:cNvPr id="4" name="Table 3"/>
-          <p:cNvGraphicFramePr>
-            <a:graphicFrameLocks noGrp="1"/>
-          </p:cNvGraphicFramePr>
-          <p:nvPr/>
-        </p:nvGraphicFramePr>
-        <p:xfrm>
-          <a:off x="548640" y="1508760"/>
-          <a:ext cx="8046720" cy="2179828"/>
-        </p:xfrm>
-        <a:graphic>
-          <a:graphicData uri="http://schemas.openxmlformats.org/drawingml/2006/table">
-            <a:tbl>
-              <a:tblPr firstRow="0" bandRow="0"/>
-              <a:tblGrid>
-                <a:gridCol w="2834640"/>
-                <a:gridCol w="5212080"/>
-              </a:tblGrid>
-              <a:tr h="420624">
-                <a:tc>
-                  <a:txBody>
-                    <a:bodyPr wrap="square">
-                      <a:noAutofit/>
-                    </a:bodyPr>
-                    <a:lstStyle/>
-                    <a:p>
-                      <a:pPr algn="l">
-                        <a:lnSpc>
-                          <a:spcPts val="2185"/>
-                        </a:lnSpc>
-                        <a:buNone/>
-                        <a:defRPr sz="1900" b="0">
-                          <a:solidFill>
-                            <a:srgbClr val="303437"/>
-                          </a:solidFill>
-                          <a:latin typeface="Noto Sans"/>
-                        </a:defRPr>
-                      </a:pPr>
-                      <a:r>
-                        <a:rPr sz="1900" b="0" lang="ja-JP" altLang="en-US">
-                          <a:solidFill>
-                            <a:srgbClr val="303437"/>
-                          </a:solidFill>
-                          <a:latin typeface="Noto Sans"/>
-                          <a:ea typeface="Noto Sans CJK JP"/>
-                          <a:cs typeface="Noto Sans"/>
-                        </a:rPr>
-                        <a:t>対象</a:t>
-                      </a:r>
-                    </a:p>
-                  </a:txBody>
-                  <a:tcPr marL="63500" marR="63500" marT="38100" marB="38100" anchor="ctr">
-                    <a:lnL w="7620">
-                      <a:noFill/>
-                    </a:lnL>
-                    <a:lnR w="7620">
-                      <a:noFill/>
-                    </a:lnR>
-                    <a:lnT w="15240">
-                      <a:solidFill>
-                        <a:srgbClr val="626669"/>
-                      </a:solidFill>
-                      <a:prstDash val="solid"/>
-                    </a:lnT>
-                    <a:lnB w="7620">
-                      <a:solidFill>
-                        <a:srgbClr val="626669"/>
-                      </a:solidFill>
-                      <a:prstDash val="solid"/>
-                    </a:lnB>
-                    <a:solidFill>
-                      <a:srgbClr val="FFFEF8"/>
-                    </a:solidFill>
-                  </a:tcPr>
-                </a:tc>
-                <a:tc>
-                  <a:txBody>
-                    <a:bodyPr wrap="square">
-                      <a:noAutofit/>
-                    </a:bodyPr>
-                    <a:lstStyle/>
-                    <a:p>
-                      <a:pPr algn="l">
-                        <a:lnSpc>
-                          <a:spcPts val="2185"/>
-                        </a:lnSpc>
-                        <a:buNone/>
-                        <a:defRPr sz="1900" b="0">
-                          <a:solidFill>
-                            <a:srgbClr val="303437"/>
-                          </a:solidFill>
-                          <a:latin typeface="Noto Sans"/>
-                        </a:defRPr>
-                      </a:pPr>
-                      <a:r>
-                        <a:rPr sz="1900" b="0" lang="ja-JP" altLang="en-US">
-                          <a:solidFill>
-                            <a:srgbClr val="303437"/>
-                          </a:solidFill>
-                          <a:latin typeface="Noto Sans"/>
-                          <a:ea typeface="Noto Sans CJK JP"/>
-                          <a:cs typeface="Noto Sans"/>
-                        </a:rPr>
-                        <a:t>確認した対応</a:t>
-                      </a:r>
-                    </a:p>
-                  </a:txBody>
-                  <a:tcPr marL="63500" marR="63500" marT="38100" marB="38100" anchor="ctr">
-                    <a:lnL w="7620">
-                      <a:noFill/>
-                    </a:lnL>
-                    <a:lnR w="7620">
-                      <a:noFill/>
-                    </a:lnR>
-                    <a:lnT w="15240">
-                      <a:solidFill>
-                        <a:srgbClr val="626669"/>
-                      </a:solidFill>
-                      <a:prstDash val="solid"/>
-                    </a:lnT>
-                    <a:lnB w="7620">
-                      <a:solidFill>
-                        <a:srgbClr val="626669"/>
-                      </a:solidFill>
-                      <a:prstDash val="solid"/>
-                    </a:lnB>
-                    <a:solidFill>
-                      <a:srgbClr val="FFFEF8"/>
-                    </a:solidFill>
-                  </a:tcPr>
-                </a:tc>
-              </a:tr>
-              <a:tr h="669290">
-                <a:tc>
-                  <a:txBody>
-                    <a:bodyPr wrap="square">
-                      <a:noAutofit/>
-                    </a:bodyPr>
-                    <a:lstStyle/>
-                    <a:p>
-                      <a:pPr algn="l">
-                        <a:lnSpc>
-                          <a:spcPts val="2185"/>
-                        </a:lnSpc>
-                        <a:buNone/>
-                        <a:defRPr sz="1900" b="0">
-                          <a:solidFill>
-                            <a:srgbClr val="303437"/>
-                          </a:solidFill>
-                          <a:latin typeface="Noto Sans"/>
-                        </a:defRPr>
-                      </a:pPr>
-                      <a:r>
-                        <a:rPr sz="1900" b="0" lang="ja-JP" altLang="en-US">
-                          <a:solidFill>
-                            <a:srgbClr val="303437"/>
-                          </a:solidFill>
-                          <a:latin typeface="Noto Sans"/>
-                          <a:ea typeface="Noto Sans CJK JP"/>
-                          <a:cs typeface="Noto Sans"/>
-                        </a:rPr>
-                        <a:t>HELMのホテル対話</a:t>
-                      </a:r>
-                    </a:p>
-                  </a:txBody>
-                  <a:tcPr marL="63500" marR="63500" marT="38100" marB="38100" anchor="ctr">
-                    <a:lnL w="7620">
-                      <a:noFill/>
-                    </a:lnL>
-                    <a:lnR w="7620">
-                      <a:noFill/>
-                    </a:lnR>
-                    <a:lnT w="7620">
-                      <a:solidFill>
-                        <a:srgbClr val="626669"/>
-                      </a:solidFill>
-                      <a:prstDash val="solid"/>
-                    </a:lnT>
-                    <a:lnB w="7620">
-                      <a:noFill/>
-                    </a:lnB>
-                    <a:solidFill>
-                      <a:srgbClr val="FFFEF8"/>
-                    </a:solidFill>
-                  </a:tcPr>
-                </a:tc>
-                <a:tc>
-                  <a:txBody>
-                    <a:bodyPr wrap="square">
-                      <a:noAutofit/>
-                    </a:bodyPr>
-                    <a:lstStyle/>
-                    <a:p>
-                      <a:pPr algn="l">
-                        <a:lnSpc>
-                          <a:spcPts val="2185"/>
-                        </a:lnSpc>
-                        <a:buNone/>
-                        <a:defRPr sz="1900" b="0">
-                          <a:solidFill>
-                            <a:srgbClr val="303437"/>
-                          </a:solidFill>
-                          <a:latin typeface="Noto Sans"/>
-                        </a:defRPr>
-                      </a:pPr>
-                      <a:r>
-                        <a:rPr sz="1900" b="0" lang="ja-JP" altLang="en-US">
-                          <a:solidFill>
-                            <a:srgbClr val="303437"/>
-                          </a:solidFill>
-                          <a:latin typeface="Noto Sans"/>
-                          <a:ea typeface="Noto Sans CJK JP"/>
-                          <a:cs typeface="Noto Sans"/>
-                        </a:rPr>
-                        <a:t>公式val.json / dialogue12121
-messages[0:9] → messages[9]</a:t>
-                      </a:r>
-                    </a:p>
-                  </a:txBody>
-                  <a:tcPr marL="63500" marR="63500" marT="38100" marB="38100" anchor="ctr">
-                    <a:lnL w="7620">
-                      <a:noFill/>
-                    </a:lnL>
-                    <a:lnR w="7620">
-                      <a:noFill/>
-                    </a:lnR>
-                    <a:lnT w="7620">
-                      <a:solidFill>
-                        <a:srgbClr val="626669"/>
-                      </a:solidFill>
-                      <a:prstDash val="solid"/>
-                    </a:lnT>
-                    <a:lnB w="7620">
-                      <a:noFill/>
-                    </a:lnB>
-                    <a:solidFill>
-                      <a:srgbClr val="FFFEF8"/>
-                    </a:solidFill>
-                  </a:tcPr>
-                </a:tc>
-              </a:tr>
-              <a:tr h="420624">
-                <a:tc>
-                  <a:txBody>
-                    <a:bodyPr wrap="square">
-                      <a:noAutofit/>
-                    </a:bodyPr>
-                    <a:lstStyle/>
-                    <a:p>
-                      <a:pPr algn="l">
-                        <a:lnSpc>
-                          <a:spcPts val="2185"/>
-                        </a:lnSpc>
-                        <a:buNone/>
-                        <a:defRPr sz="1900" b="0">
-                          <a:solidFill>
-                            <a:srgbClr val="303437"/>
-                          </a:solidFill>
-                          <a:latin typeface="Noto Sans"/>
-                        </a:defRPr>
-                      </a:pPr>
-                      <a:r>
-                        <a:rPr sz="1900" b="0" lang="ja-JP" altLang="en-US">
-                          <a:solidFill>
-                            <a:srgbClr val="303437"/>
-                          </a:solidFill>
-                          <a:latin typeface="Noto Sans"/>
-                          <a:ea typeface="Noto Sans CJK JP"/>
-                          <a:cs typeface="Noto Sans"/>
-                        </a:rPr>
-                        <a:t>この資料の実例13</a:t>
-                      </a:r>
-                    </a:p>
-                  </a:txBody>
-                  <a:tcPr marL="63500" marR="63500" marT="38100" marB="38100" anchor="ctr">
-                    <a:lnL w="7620">
-                      <a:noFill/>
-                    </a:lnL>
-                    <a:lnR w="7620">
-                      <a:noFill/>
-                    </a:lnR>
-                    <a:lnT w="7620">
-                      <a:noFill/>
-                    </a:lnT>
-                    <a:lnB w="7620">
-                      <a:noFill/>
-                    </a:lnB>
-                    <a:solidFill>
-                      <a:srgbClr val="FFFEF8"/>
-                    </a:solidFill>
-                  </a:tcPr>
-                </a:tc>
-                <a:tc>
-                  <a:txBody>
-                    <a:bodyPr wrap="square">
-                      <a:noAutofit/>
-                    </a:bodyPr>
-                    <a:lstStyle/>
-                    <a:p>
-                      <a:pPr algn="l">
-                        <a:lnSpc>
-                          <a:spcPts val="2185"/>
-                        </a:lnSpc>
-                        <a:buNone/>
-                        <a:defRPr sz="1900" b="0">
-                          <a:solidFill>
-                            <a:srgbClr val="303437"/>
-                          </a:solidFill>
-                          <a:latin typeface="Noto Sans"/>
-                        </a:defRPr>
-                      </a:pPr>
-                      <a:r>
-                        <a:rPr sz="1900" b="0" lang="ja-JP" altLang="en-US">
-                          <a:solidFill>
-                            <a:srgbClr val="303437"/>
-                          </a:solidFill>
-                          <a:latin typeface="Noto Sans"/>
-                          <a:ea typeface="Noto Sans CJK JP"/>
-                          <a:cs typeface="Noto Sans"/>
-                        </a:rPr>
-                        <a:t>同じ履歴9発話と収録応答1発話</a:t>
-                      </a:r>
-                    </a:p>
-                  </a:txBody>
-                  <a:tcPr marL="63500" marR="63500" marT="38100" marB="38100" anchor="ctr">
-                    <a:lnL w="7620">
-                      <a:noFill/>
-                    </a:lnL>
-                    <a:lnR w="7620">
-                      <a:noFill/>
-                    </a:lnR>
-                    <a:lnT w="7620">
-                      <a:noFill/>
-                    </a:lnT>
-                    <a:lnB w="7620">
-                      <a:noFill/>
-                    </a:lnB>
-                    <a:solidFill>
-                      <a:srgbClr val="FFFEF8"/>
-                    </a:solidFill>
-                  </a:tcPr>
-                </a:tc>
-              </a:tr>
-              <a:tr h="669290">
-                <a:tc>
-                  <a:txBody>
-                    <a:bodyPr wrap="square">
-                      <a:noAutofit/>
-                    </a:bodyPr>
-                    <a:lstStyle/>
-                    <a:p>
-                      <a:pPr algn="l">
-                        <a:lnSpc>
-                          <a:spcPts val="2185"/>
-                        </a:lnSpc>
-                        <a:buNone/>
-                        <a:defRPr sz="1900" b="0">
-                          <a:solidFill>
-                            <a:srgbClr val="303437"/>
-                          </a:solidFill>
-                          <a:latin typeface="Noto Sans"/>
-                        </a:defRPr>
-                      </a:pPr>
-                      <a:r>
-                        <a:rPr sz="1900" b="0" lang="ja-JP" altLang="en-US">
-                          <a:solidFill>
-                            <a:srgbClr val="303437"/>
-                          </a:solidFill>
-                          <a:latin typeface="Noto Sans"/>
-                          <a:ea typeface="Noto Sans CJK JP"/>
-                          <a:cs typeface="Noto Sans"/>
-                        </a:rPr>
-                        <a:t>CLEVA論文のテレビ対話</a:t>
-                      </a:r>
-                    </a:p>
-                  </a:txBody>
-                  <a:tcPr marL="63500" marR="63500" marT="38100" marB="38100" anchor="ctr">
-                    <a:lnL w="7620">
-                      <a:noFill/>
-                    </a:lnL>
-                    <a:lnR w="7620">
-                      <a:noFill/>
-                    </a:lnR>
-                    <a:lnT w="7620">
-                      <a:noFill/>
-                    </a:lnT>
-                    <a:lnB w="15240">
-                      <a:solidFill>
-                        <a:srgbClr val="626669"/>
-                      </a:solidFill>
-                      <a:prstDash val="solid"/>
-                    </a:lnB>
-                    <a:solidFill>
-                      <a:srgbClr val="FFFEF8"/>
-                    </a:solidFill>
-                  </a:tcPr>
-                </a:tc>
-                <a:tc>
-                  <a:txBody>
-                    <a:bodyPr wrap="square">
-                      <a:noAutofit/>
-                    </a:bodyPr>
-                    <a:lstStyle/>
-                    <a:p>
-                      <a:pPr algn="l">
-                        <a:lnSpc>
-                          <a:spcPts val="2185"/>
-                        </a:lnSpc>
-                        <a:buNone/>
-                        <a:defRPr sz="1900" b="0">
-                          <a:solidFill>
-                            <a:srgbClr val="303437"/>
-                          </a:solidFill>
-                          <a:latin typeface="Noto Sans"/>
-                        </a:defRPr>
-                      </a:pPr>
-                      <a:r>
-                        <a:rPr sz="1900" b="0" lang="ja-JP" altLang="en-US">
-                          <a:solidFill>
-                            <a:srgbClr val="303437"/>
-                          </a:solidFill>
-                          <a:latin typeface="Noto Sans"/>
-                          <a:ea typeface="Noto Sans CJK JP"/>
-                          <a:cs typeface="Noto Sans"/>
-                        </a:rPr>
-                        <a:t>CrossWOZ原版との一致は未確認
-本資料の実例には使用しない</a:t>
-                      </a:r>
-                    </a:p>
-                  </a:txBody>
-                  <a:tcPr marL="63500" marR="63500" marT="38100" marB="38100" anchor="ctr">
-                    <a:lnL w="7620">
-                      <a:noFill/>
-                    </a:lnL>
-                    <a:lnR w="7620">
-                      <a:noFill/>
-                    </a:lnR>
-                    <a:lnT w="7620">
-                      <a:noFill/>
-                    </a:lnT>
-                    <a:lnB w="15240">
-                      <a:solidFill>
-                        <a:srgbClr val="626669"/>
-                      </a:solidFill>
-                      <a:prstDash val="solid"/>
-                    </a:lnB>
-                    <a:solidFill>
-                      <a:srgbClr val="FFFEF8"/>
-                    </a:solidFill>
-                  </a:tcPr>
-                </a:tc>
-              </a:tr>
-            </a:tbl>
-          </a:graphicData>
-        </a:graphic>
-      </p:graphicFrame>
-      <p:sp>
-        <p:nvSpPr>
-          <p:cNvPr id="5" name="sources"/>
-          <p:cNvSpPr txBox="1"/>
-          <p:nvPr/>
-        </p:nvSpPr>
-        <p:spPr>
-          <a:xfrm>
-            <a:off x="502920" y="4517136"/>
-            <a:ext cx="8183879" cy="621792"/>
-          </a:xfrm>
-          <a:prstGeom prst="rect">
-            <a:avLst/>
-          </a:prstGeom>
-          <a:noFill/>
-        </p:spPr>
-        <p:txBody>
-          <a:bodyPr wrap="square" lIns="0" rIns="0" tIns="0" bIns="0">
-            <a:noAutofit/>
-          </a:bodyPr>
-          <a:lstStyle/>
-          <a:p>
-            <a:pPr algn="l">
-              <a:lnSpc>
-                <a:spcPts val="1200"/>
-              </a:lnSpc>
-              <a:spcBef>
-                <a:spcPts val="0"/>
-              </a:spcBef>
-              <a:spcAft>
-                <a:spcPts val="0"/>
-              </a:spcAft>
-              <a:buNone/>
-              <a:defRPr sz="810" b="0">
-                <a:solidFill>
-                  <a:srgbClr val="303437"/>
-                </a:solidFill>
-                <a:latin typeface="Noto Sans"/>
-              </a:defRPr>
-            </a:pPr>
-            <a:r>
-              <a:rPr sz="810" b="0" lang="ja-JP" altLang="en-US">
-                <a:solidFill>
-                  <a:srgbClr val="626669"/>
-                </a:solidFill>
-                <a:latin typeface="Noto Sans"/>
-                <a:ea typeface="Noto Sans CJK JP"/>
-                <a:cs typeface="Noto Sans"/>
-              </a:rPr>
-              <a:t>[1] Qi Zhu et al. (2020). CrossWOZ公式配布データ。固定commit df82c9fd。</a:t>
-            </a:r>
-          </a:p>
-          <a:p>
-            <a:pPr>
-              <a:lnSpc>
-                <a:spcPts val="1200"/>
-              </a:lnSpc>
-              <a:buNone/>
-              <a:defRPr sz="810" b="0">
-                <a:solidFill>
-                  <a:srgbClr val="303437"/>
-                </a:solidFill>
-                <a:latin typeface="Noto Sans"/>
-              </a:defRPr>
-            </a:pPr>
-            <a:r>
-              <a:rPr sz="810" b="0" lang="ja-JP" altLang="en-US">
-                <a:solidFill>
-                  <a:srgbClr val="626669"/>
-                </a:solidFill>
-                <a:latin typeface="Noto Sans"/>
-                <a:ea typeface="Noto Sans CJK JP"/>
-                <a:cs typeface="Noto Sans"/>
-                <a:hlinkClick r:id="rId2"/>
-              </a:rPr>
-              <a:t>https://github.com/thu-coai/CrossWOZ/tree/df82c9fdff91b9b130f2d6b89110d3870ba6260e/data/crosswoz</a:t>
-            </a:r>
-          </a:p>
-          <a:p>
-            <a:pPr>
-              <a:lnSpc>
-                <a:spcPts val="1200"/>
-              </a:lnSpc>
-              <a:spcAft>
-                <a:spcPts val="0"/>
-              </a:spcAft>
-              <a:buNone/>
-              <a:defRPr sz="810" b="0">
-                <a:solidFill>
-                  <a:srgbClr val="303437"/>
-                </a:solidFill>
-                <a:latin typeface="Noto Sans"/>
-              </a:defRPr>
-            </a:pPr>
-            <a:r>
-              <a:rPr sz="810" b="0" lang="ja-JP" altLang="en-US">
-                <a:solidFill>
-                  <a:srgbClr val="626669"/>
-                </a:solidFill>
-                <a:latin typeface="Noto Sans"/>
-                <a:ea typeface="Noto Sans CJK JP"/>
-                <a:cs typeface="Noto Sans"/>
-              </a:rPr>
-              <a:t>[2] Stanford CRFM (2023). CLEVA dialogue generation scenario. HELM v0.4.0.</a:t>
-            </a:r>
-          </a:p>
-          <a:p>
-            <a:pPr>
-              <a:lnSpc>
-                <a:spcPts val="1200"/>
-              </a:lnSpc>
-              <a:buNone/>
-              <a:defRPr sz="810" b="0">
-                <a:solidFill>
-                  <a:srgbClr val="303437"/>
-                </a:solidFill>
-                <a:latin typeface="Noto Sans"/>
-              </a:defRPr>
-            </a:pPr>
-            <a:r>
-              <a:rPr sz="810" b="0" lang="ja-JP" altLang="en-US">
-                <a:solidFill>
-                  <a:srgbClr val="626669"/>
-                </a:solidFill>
-                <a:latin typeface="Noto Sans"/>
-                <a:ea typeface="Noto Sans CJK JP"/>
-                <a:cs typeface="Noto Sans"/>
-                <a:hlinkClick r:id="rId3"/>
               </a:rPr>
               <a:t>https://github.com/stanford-crfm/helm/blob/v0.4.0/src/helm/benchmark/scenarios/cleva_scenario.py</a:t>
             </a:r>
@@ -20570,7 +19521,7 @@
                 <a:ea typeface="Noto Sans CJK JP"/>
                 <a:cs typeface="Noto Sans"/>
               </a:rPr>
-              <a:t>公式配布と、固定した実装を組み合わせる</a:t>
+              <a:t>公式データと対話システムの実装を入手する</a:t>
             </a:r>
           </a:p>
         </p:txBody>
@@ -20623,7 +19574,7 @@
                 <a:ea typeface="Noto Sans CJK JP"/>
                 <a:cs typeface="Noto Sans"/>
               </a:rPr>
-              <a:t>公式リポジトリのdata/crosswozからtrain、val、testのZIPとDBを取得できる。各ZIP内は、対話IDをキーにしたJSON辞書である。</a:t>
+              <a:t>公式リポジトリのdata/crosswozから、train・val・testのZIPと施設DBを取得できる。各ZIPには、対話IDをキーとしたJSON辞書が入っている。</a:t>
             </a:r>
           </a:p>
           <a:p>
@@ -20653,7 +19604,7 @@
                 <a:ea typeface="Noto Sans CJK JP"/>
                 <a:cs typeface="Noto Sans"/>
               </a:rPr>
-              <a:t>この資料では固定commitと各ファイルのSHAを保存し、対話・発話・下位目標・行為の件数を再集計した。</a:t>
+              <a:t>自然言語理解、状態追跡、対話方策、応答生成を組み合わせる実装も公開されている。</a:t>
             </a:r>
           </a:p>
           <a:p>
@@ -20683,7 +19634,7 @@
                 <a:ea typeface="Noto Sans CJK JP"/>
                 <a:cs typeface="Noto Sans"/>
               </a:rPr>
-              <a:t>リポジトリのライセンス表示はApache License 2.0。構築論文はCC BY 4.0で公開され、著者はデータやコードを使う場合の論文引用を求めている。</a:t>
+              <a:t>リポジトリのライセンスはApache License 2.0。構築論文はCC BY 4.0で公開され、著者はデータやコードを使う場合の論文引用を求めている。</a:t>
             </a:r>
           </a:p>
         </p:txBody>
@@ -20731,7 +19682,7 @@
                 <a:ea typeface="Noto Sans CJK JP"/>
                 <a:cs typeface="Noto Sans"/>
               </a:rPr>
-              <a:t>4. CLEVAでの利用と入手</a:t>
+              <a:t>4. 入手と応答生成への利用</a:t>
             </a:r>
           </a:p>
         </p:txBody>
@@ -20744,7 +19695,7 @@
         </p:nvSpPr>
         <p:spPr>
           <a:xfrm>
-            <a:off x="502920" y="4517136"/>
+            <a:off x="502920" y="4508500"/>
             <a:ext cx="8183879" cy="558800"/>
           </a:xfrm>
           <a:prstGeom prst="rect">
@@ -20777,35 +19728,24 @@
               </a:defRPr>
             </a:pPr>
             <a:r>
-              <a:rPr sz="810" b="0" lang="ja-JP" altLang="en-US">
-                <a:solidFill>
-                  <a:srgbClr val="626669"/>
-                </a:solidFill>
-                <a:latin typeface="Noto Sans"/>
-                <a:ea typeface="Noto Sans CJK JP"/>
-                <a:cs typeface="Noto Sans"/>
-              </a:rPr>
-              <a:t>[1] Qi Zhu et al. CrossWOZ. 公式リポジトリ・README（2026-10-18取得）。</a:t>
-            </a:r>
-            <a:r>
-              <a:rPr sz="810" b="0" lang="ja-JP" altLang="en-US">
-                <a:solidFill>
-                  <a:srgbClr val="626669"/>
-                </a:solidFill>
-                <a:latin typeface="Noto Sans"/>
-                <a:ea typeface="Noto Sans CJK JP"/>
-                <a:cs typeface="Noto Sans"/>
-              </a:rPr>
-              <a:t>  </a:t>
-            </a:r>
-            <a:r>
-              <a:rPr sz="810" b="0" lang="ja-JP" altLang="en-US">
-                <a:solidFill>
-                  <a:srgbClr val="626669"/>
-                </a:solidFill>
-                <a:latin typeface="Noto Sans"/>
-                <a:ea typeface="Noto Sans CJK JP"/>
-                <a:cs typeface="Noto Sans"/>
+              <a:rPr sz="830">
+                <a:latin typeface="Noto Sans CJK JP"/>
+              </a:rPr>
+              <a:t>[1] Zhu et al. (2020). CrossWOZ: official repository.</a:t>
+            </a:r>
+          </a:p>
+          <a:p>
+            <a:pPr>
+              <a:spcBef>
+                <a:spcPts val="0"/>
+              </a:spcBef>
+              <a:spcAft>
+                <a:spcPts val="0"/>
+              </a:spcAft>
+            </a:pPr>
+            <a:r>
+              <a:rPr sz="830">
+                <a:latin typeface="Noto Sans CJK JP"/>
                 <a:hlinkClick r:id="rId2"/>
               </a:rPr>
               <a:t>https://github.com/thu-coai/CrossWOZ</a:t>
@@ -20813,56 +19753,32 @@
           </a:p>
           <a:p>
             <a:pPr>
-              <a:lnSpc>
-                <a:spcPts val="1200"/>
-              </a:lnSpc>
-              <a:spcAft>
-                <a:spcPts val="0"/>
-              </a:spcAft>
-              <a:buNone/>
-              <a:defRPr sz="810" b="0">
-                <a:solidFill>
-                  <a:srgbClr val="303437"/>
-                </a:solidFill>
-                <a:latin typeface="Noto Sans"/>
-              </a:defRPr>
-            </a:pPr>
-            <a:r>
-              <a:rPr sz="810" b="0" lang="ja-JP" altLang="en-US">
-                <a:solidFill>
-                  <a:srgbClr val="626669"/>
-                </a:solidFill>
-                <a:latin typeface="Noto Sans"/>
-                <a:ea typeface="Noto Sans CJK JP"/>
-                <a:cs typeface="Noto Sans"/>
-              </a:rPr>
-              <a:t>[2] 同梱：Apache2.0本文・帰属・13例の位置と改変表示。</a:t>
+              <a:spcBef>
+                <a:spcPts val="0"/>
+              </a:spcBef>
+              <a:spcAft>
+                <a:spcPts val="0"/>
+              </a:spcAft>
+            </a:pPr>
+            <a:r>
+              <a:rPr sz="830">
+                <a:latin typeface="Noto Sans CJK JP"/>
+              </a:rPr>
+              <a:t>[2] 本資料の利用許諾・帰属表示（Apache 2.0）。</a:t>
             </a:r>
           </a:p>
           <a:p>
             <a:pPr>
-              <a:lnSpc>
-                <a:spcPts val="1200"/>
-              </a:lnSpc>
-              <a:spcAft>
-                <a:spcPts val="0"/>
-              </a:spcAft>
-              <a:buNone/>
-              <a:defRPr sz="810" b="0">
-                <a:solidFill>
-                  <a:srgbClr val="303437"/>
-                </a:solidFill>
-                <a:latin typeface="Noto Sans"/>
-              </a:defRPr>
-            </a:pPr>
-            <a:r>
-              <a:rPr sz="810" b="0" lang="ja-JP" altLang="en-US">
-                <a:solidFill>
-                  <a:srgbClr val="626669"/>
-                </a:solidFill>
-                <a:latin typeface="Noto Sans"/>
-                <a:ea typeface="Noto Sans CJK JP"/>
-                <a:cs typeface="Noto Sans"/>
+              <a:spcBef>
+                <a:spcPts val="0"/>
+              </a:spcBef>
+              <a:spcAft>
+                <a:spcPts val="0"/>
+              </a:spcAft>
+            </a:pPr>
+            <a:r>
+              <a:rPr sz="830">
+                <a:latin typeface="Noto Sans CJK JP"/>
                 <a:hlinkClick r:id="rId3"/>
               </a:rPr>
               <a:t>https://datasets-in-10-minutes.sasakiy84.net/assets/crosswoz-notices.zip</a:t>
@@ -21014,7 +19930,7 @@
                 <a:ea typeface="Noto Sans CJK JP"/>
                 <a:cs typeface="Noto Sans"/>
               </a:rPr>
-              <a:t>一つの施設の回答から、周辺の施設や施設間の移動へと条件がつながる。状態追跡の再計算でも、目標間に依存がある対話で完全一致率が低かった。</a:t>
+              <a:t>一つの施設の回答から、周辺の施設や施設間の移動へと条件がつながる。施設間に依存関係のある旅行目標では、状態追跡の正解率が低かった。</a:t>
             </a:r>
           </a:p>
           <a:p>
@@ -21044,7 +19960,7 @@
                 <a:ea typeface="Noto Sans CJK JP"/>
                 <a:cs typeface="Noto Sans"/>
               </a:rPr>
-              <a:t>原版では状態や行為の予測を評価し、CLEVA版では履歴から参照応答を生成する。それぞれで渡す情報と測る対象を明示して使う。</a:t>
+              <a:t>目標や状態の注釈は対話システムの各段階の評価に使える。収録された会話と応答は、履歴から次の発話を生成する課題にも使える。</a:t>
             </a:r>
           </a:p>
         </p:txBody>
@@ -21092,7 +20008,7 @@
                 <a:ea typeface="Noto Sans CJK JP"/>
                 <a:cs typeface="Noto Sans"/>
               </a:rPr>
-              <a:t>4. CLEVAでの利用と入手</a:t>
+              <a:t>4. 入手と応答生成への利用</a:t>
             </a:r>
           </a:p>
         </p:txBody>
@@ -21105,8 +20021,8 @@
         </p:nvSpPr>
         <p:spPr>
           <a:xfrm>
-            <a:off x="502920" y="4700016"/>
-            <a:ext cx="8183879" cy="621792"/>
+            <a:off x="502920" y="4699000"/>
+            <a:ext cx="8183879" cy="431800"/>
           </a:xfrm>
           <a:prstGeom prst="rect">
             <a:avLst/>
@@ -21138,35 +20054,24 @@
               </a:defRPr>
             </a:pPr>
             <a:r>
-              <a:rPr sz="810" b="0" lang="ja-JP" altLang="en-US">
-                <a:solidFill>
-                  <a:srgbClr val="626669"/>
-                </a:solidFill>
-                <a:latin typeface="Noto Sans"/>
-                <a:ea typeface="Noto Sans CJK JP"/>
-                <a:cs typeface="Noto Sans"/>
-              </a:rPr>
-              <a:t>[1] Zhu et al. (2020). CrossWOZ: A Large-Scale Chinese Cross-Domain Task-Oriented Dialogue Dataset. TACL 8:281–295.</a:t>
-            </a:r>
-            <a:r>
-              <a:rPr sz="810" b="0" lang="ja-JP" altLang="en-US">
-                <a:solidFill>
-                  <a:srgbClr val="626669"/>
-                </a:solidFill>
-                <a:latin typeface="Noto Sans"/>
-                <a:ea typeface="Noto Sans CJK JP"/>
-                <a:cs typeface="Noto Sans"/>
-              </a:rPr>
-              <a:t>  </a:t>
-            </a:r>
-            <a:r>
-              <a:rPr sz="810" b="0" lang="ja-JP" altLang="en-US">
-                <a:solidFill>
-                  <a:srgbClr val="626669"/>
-                </a:solidFill>
-                <a:latin typeface="Noto Sans"/>
-                <a:ea typeface="Noto Sans CJK JP"/>
-                <a:cs typeface="Noto Sans"/>
+              <a:rPr sz="830">
+                <a:latin typeface="Noto Sans CJK JP"/>
+              </a:rPr>
+              <a:t>[1] Zhu et al. (2020). CrossWOZ: A Large-Scale Chinese Cross-Domain Task-Oriented Dialogue Dataset.</a:t>
+            </a:r>
+          </a:p>
+          <a:p>
+            <a:pPr>
+              <a:spcBef>
+                <a:spcPts val="0"/>
+              </a:spcBef>
+              <a:spcAft>
+                <a:spcPts val="0"/>
+              </a:spcAft>
+            </a:pPr>
+            <a:r>
+              <a:rPr sz="830">
+                <a:latin typeface="Noto Sans CJK JP"/>
                 <a:hlinkClick r:id="rId2"/>
               </a:rPr>
               <a:t>https://aclanthology.org/2020.tacl-1.19/</a:t>
@@ -21402,7 +20307,7 @@
                 <a:ea typeface="Noto Sans CJK JP"/>
                 <a:cs typeface="Noto Sans"/>
               </a:rPr>
-              <a:t>追加の実例</a:t>
+              <a:t>追加の対話</a:t>
             </a:r>
           </a:p>
           <a:p>
@@ -21432,7 +20337,7 @@
                 <a:ea typeface="Noto Sans CJK JP"/>
                 <a:cs typeface="Noto Sans"/>
               </a:rPr>
-              <a:t>形式・集計・再計算</a:t>
+              <a:t>データの読み方</a:t>
             </a:r>
           </a:p>
           <a:p>
@@ -21576,7 +20481,7 @@
                 <a:ea typeface="Noto Sans CJK JP"/>
                 <a:cs typeface="Noto Sans"/>
               </a:rPr>
-              <a:t>追加の実例</a:t>
+              <a:t>追加の対話</a:t>
             </a:r>
           </a:p>
         </p:txBody>
@@ -21624,7 +20529,7 @@
                 <a:ea typeface="Noto Sans CJK JP"/>
                 <a:cs typeface="Noto Sans"/>
               </a:rPr>
-              <a:t>Appendix: 1. 追加の実例</a:t>
+              <a:t>Appendix: 1. 追加の対話</a:t>
             </a:r>
           </a:p>
         </p:txBody>
@@ -21738,7 +20643,7 @@
                 <a:ea typeface="Noto Sans CJK JP"/>
                 <a:cs typeface="Noto Sans"/>
               </a:rPr>
-              <a:t>Appendix: 1. 追加の実例</a:t>
+              <a:t>Appendix: 1. 追加の対話</a:t>
             </a:r>
           </a:p>
         </p:txBody>
@@ -21792,7 +20697,7 @@
                 <a:ea typeface="Noto Sans CJK JP"/>
                 <a:cs typeface="Noto Sans"/>
               </a:rPr>
-              <a:t>test / 対話118 / 全履歴 3発話 → 収録応答1発話</a:t>
+              <a:t>会話の履歴（3発話）と、次の応答</a:t>
             </a:r>
           </a:p>
         </p:txBody>
@@ -22293,8 +21198,8 @@
         </p:nvSpPr>
         <p:spPr>
           <a:xfrm>
-            <a:off x="502920" y="4700016"/>
-            <a:ext cx="8183879" cy="621792"/>
+            <a:off x="502920" y="4699000"/>
+            <a:ext cx="8183879" cy="431800"/>
           </a:xfrm>
           <a:prstGeom prst="rect">
             <a:avLst/>
@@ -22326,41 +21231,27 @@
               </a:defRPr>
             </a:pPr>
             <a:r>
-              <a:rPr sz="810" b="0" lang="ja-JP" altLang="en-US">
-                <a:solidFill>
-                  <a:srgbClr val="626669"/>
-                </a:solidFill>
-                <a:latin typeface="Noto Sans"/>
-                <a:ea typeface="Noto Sans CJK JP"/>
-                <a:cs typeface="Noto Sans"/>
-              </a:rPr>
-              <a:t>[1] Qi Zhu et al. (2020). CrossWOZ公式配布データ。固定commit df82c9fd。 test.json / dialogue 118 / messages[0:3] → [3]。</a:t>
+              <a:rPr sz="830">
+                <a:latin typeface="Noto Sans CJK JP"/>
+              </a:rPr>
+              <a:t>[1] Zhu et al. (2020). CrossWOZ: dialogue data.</a:t>
             </a:r>
           </a:p>
           <a:p>
             <a:pPr>
-              <a:lnSpc>
-                <a:spcPts val="1200"/>
-              </a:lnSpc>
-              <a:buNone/>
-              <a:defRPr sz="810" b="0">
-                <a:solidFill>
-                  <a:srgbClr val="303437"/>
-                </a:solidFill>
-                <a:latin typeface="Noto Sans"/>
-              </a:defRPr>
-            </a:pPr>
-            <a:r>
-              <a:rPr sz="810" b="0" lang="ja-JP" altLang="en-US">
-                <a:solidFill>
-                  <a:srgbClr val="626669"/>
-                </a:solidFill>
-                <a:latin typeface="Noto Sans"/>
-                <a:ea typeface="Noto Sans CJK JP"/>
-                <a:cs typeface="Noto Sans"/>
-                <a:hlinkClick r:id="rId2"/>
-              </a:rPr>
-              <a:t>https://github.com/thu-coai/CrossWOZ/tree/df82c9fdff91b9b130f2d6b89110d3870ba6260e/data/crosswoz</a:t>
+              <a:spcBef>
+                <a:spcPts val="0"/>
+              </a:spcBef>
+              <a:spcAft>
+                <a:spcPts val="0"/>
+              </a:spcAft>
+            </a:pPr>
+            <a:r>
+              <a:rPr sz="830">
+                <a:latin typeface="Noto Sans CJK JP"/>
+                <a:hlinkClick r:id="rId3"/>
+              </a:rPr>
+              <a:t>https://github.com/thu-coai/CrossWOZ/tree/master/data/crosswoz</a:t>
             </a:r>
           </a:p>
         </p:txBody>
@@ -22474,7 +21365,7 @@
                 <a:ea typeface="Noto Sans CJK JP"/>
                 <a:cs typeface="Noto Sans"/>
               </a:rPr>
-              <a:t>Appendix: 1. 追加の実例</a:t>
+              <a:t>Appendix: 1. 追加の対話</a:t>
             </a:r>
           </a:p>
         </p:txBody>
@@ -22528,7 +21419,7 @@
                 <a:ea typeface="Noto Sans CJK JP"/>
                 <a:cs typeface="Noto Sans"/>
               </a:rPr>
-              <a:t>test / 対話9693 / 全履歴 3発話 → 収録応答1発話</a:t>
+              <a:t>会話の履歴（3発話）と、次の応答</a:t>
             </a:r>
           </a:p>
         </p:txBody>
@@ -22900,7 +21791,7 @@
                 <a:ea typeface="Noto Sans CJK JP"/>
                 <a:cs typeface="Noto Sans"/>
               </a:rPr>
-              <a:t>利用者：こんにちは。恋人と、評価5点で入場無料の観光地へ行きたいので、一つ勧めてください。</a:t>
+              <a:t>利用者：こんにちは。彼女と、評価5点で入場無料の観光地へ行きたいので、一つ勧めてください。</a:t>
             </a:r>
           </a:p>
           <a:p>
@@ -23029,8 +21920,8 @@
         </p:nvSpPr>
         <p:spPr>
           <a:xfrm>
-            <a:off x="502920" y="4700016"/>
-            <a:ext cx="8183879" cy="621792"/>
+            <a:off x="502920" y="4699000"/>
+            <a:ext cx="8183879" cy="431800"/>
           </a:xfrm>
           <a:prstGeom prst="rect">
             <a:avLst/>
@@ -23062,41 +21953,27 @@
               </a:defRPr>
             </a:pPr>
             <a:r>
-              <a:rPr sz="810" b="0" lang="ja-JP" altLang="en-US">
-                <a:solidFill>
-                  <a:srgbClr val="626669"/>
-                </a:solidFill>
-                <a:latin typeface="Noto Sans"/>
-                <a:ea typeface="Noto Sans CJK JP"/>
-                <a:cs typeface="Noto Sans"/>
-              </a:rPr>
-              <a:t>[1] Qi Zhu et al. (2020). CrossWOZ公式配布データ。固定commit df82c9fd。 test.json / dialogue 9693 / messages[0:3] → [3]。</a:t>
+              <a:rPr sz="830">
+                <a:latin typeface="Noto Sans CJK JP"/>
+              </a:rPr>
+              <a:t>[1] Zhu et al. (2020). CrossWOZ: dialogue data.</a:t>
             </a:r>
           </a:p>
           <a:p>
             <a:pPr>
-              <a:lnSpc>
-                <a:spcPts val="1200"/>
-              </a:lnSpc>
-              <a:buNone/>
-              <a:defRPr sz="810" b="0">
-                <a:solidFill>
-                  <a:srgbClr val="303437"/>
-                </a:solidFill>
-                <a:latin typeface="Noto Sans"/>
-              </a:defRPr>
-            </a:pPr>
-            <a:r>
-              <a:rPr sz="810" b="0" lang="ja-JP" altLang="en-US">
-                <a:solidFill>
-                  <a:srgbClr val="626669"/>
-                </a:solidFill>
-                <a:latin typeface="Noto Sans"/>
-                <a:ea typeface="Noto Sans CJK JP"/>
-                <a:cs typeface="Noto Sans"/>
-                <a:hlinkClick r:id="rId2"/>
-              </a:rPr>
-              <a:t>https://github.com/thu-coai/CrossWOZ/tree/df82c9fdff91b9b130f2d6b89110d3870ba6260e/data/crosswoz</a:t>
+              <a:spcBef>
+                <a:spcPts val="0"/>
+              </a:spcBef>
+              <a:spcAft>
+                <a:spcPts val="0"/>
+              </a:spcAft>
+            </a:pPr>
+            <a:r>
+              <a:rPr sz="830">
+                <a:latin typeface="Noto Sans CJK JP"/>
+                <a:hlinkClick r:id="rId3"/>
+              </a:rPr>
+              <a:t>https://github.com/thu-coai/CrossWOZ/tree/master/data/crosswoz</a:t>
             </a:r>
           </a:p>
         </p:txBody>
@@ -23162,7 +22039,7 @@
                 <a:ea typeface="Noto Sans CJK JP"/>
                 <a:cs typeface="Noto Sans"/>
               </a:rPr>
-              <a:t>1. 対話の履歴から、次の応答を読む</a:t>
+              <a:t>1. 旅行相談の対話と応答</a:t>
             </a:r>
           </a:p>
         </p:txBody>
@@ -23210,7 +22087,7 @@
                 <a:ea typeface="Noto Sans CJK JP"/>
                 <a:cs typeface="Noto Sans"/>
               </a:rPr>
-              <a:t>1. 対話の履歴から、次の応答を読む</a:t>
+              <a:t>1. 旅行相談の対話と応答</a:t>
             </a:r>
           </a:p>
         </p:txBody>
@@ -23324,7 +22201,7 @@
                 <a:ea typeface="Noto Sans CJK JP"/>
                 <a:cs typeface="Noto Sans"/>
               </a:rPr>
-              <a:t>Appendix: 1. 追加の実例</a:t>
+              <a:t>Appendix: 1. 追加の対話</a:t>
             </a:r>
           </a:p>
         </p:txBody>
@@ -23378,7 +22255,7 @@
                 <a:ea typeface="Noto Sans CJK JP"/>
                 <a:cs typeface="Noto Sans"/>
               </a:rPr>
-              <a:t>test / 対話10662 / 全履歴 3発話 → 収録応答1発話</a:t>
+              <a:t>会話の履歴（3発話）と、次の応答</a:t>
             </a:r>
           </a:p>
         </p:txBody>
@@ -23879,8 +22756,8 @@
         </p:nvSpPr>
         <p:spPr>
           <a:xfrm>
-            <a:off x="502920" y="4700016"/>
-            <a:ext cx="8183879" cy="621792"/>
+            <a:off x="502920" y="4699000"/>
+            <a:ext cx="8183879" cy="431800"/>
           </a:xfrm>
           <a:prstGeom prst="rect">
             <a:avLst/>
@@ -23912,41 +22789,27 @@
               </a:defRPr>
             </a:pPr>
             <a:r>
-              <a:rPr sz="810" b="0" lang="ja-JP" altLang="en-US">
-                <a:solidFill>
-                  <a:srgbClr val="626669"/>
-                </a:solidFill>
-                <a:latin typeface="Noto Sans"/>
-                <a:ea typeface="Noto Sans CJK JP"/>
-                <a:cs typeface="Noto Sans"/>
-              </a:rPr>
-              <a:t>[1] Qi Zhu et al. (2020). CrossWOZ公式配布データ。固定commit df82c9fd。 test.json / dialogue 10662 / messages[0:3] → [3]。</a:t>
+              <a:rPr sz="830">
+                <a:latin typeface="Noto Sans CJK JP"/>
+              </a:rPr>
+              <a:t>[1] Zhu et al. (2020). CrossWOZ: dialogue data.</a:t>
             </a:r>
           </a:p>
           <a:p>
             <a:pPr>
-              <a:lnSpc>
-                <a:spcPts val="1200"/>
-              </a:lnSpc>
-              <a:buNone/>
-              <a:defRPr sz="810" b="0">
-                <a:solidFill>
-                  <a:srgbClr val="303437"/>
-                </a:solidFill>
-                <a:latin typeface="Noto Sans"/>
-              </a:defRPr>
-            </a:pPr>
-            <a:r>
-              <a:rPr sz="810" b="0" lang="ja-JP" altLang="en-US">
-                <a:solidFill>
-                  <a:srgbClr val="626669"/>
-                </a:solidFill>
-                <a:latin typeface="Noto Sans"/>
-                <a:ea typeface="Noto Sans CJK JP"/>
-                <a:cs typeface="Noto Sans"/>
-                <a:hlinkClick r:id="rId2"/>
-              </a:rPr>
-              <a:t>https://github.com/thu-coai/CrossWOZ/tree/df82c9fdff91b9b130f2d6b89110d3870ba6260e/data/crosswoz</a:t>
+              <a:spcBef>
+                <a:spcPts val="0"/>
+              </a:spcBef>
+              <a:spcAft>
+                <a:spcPts val="0"/>
+              </a:spcAft>
+            </a:pPr>
+            <a:r>
+              <a:rPr sz="830">
+                <a:latin typeface="Noto Sans CJK JP"/>
+                <a:hlinkClick r:id="rId3"/>
+              </a:rPr>
+              <a:t>https://github.com/thu-coai/CrossWOZ/tree/master/data/crosswoz</a:t>
             </a:r>
           </a:p>
         </p:txBody>
@@ -24060,7 +22923,7 @@
                 <a:ea typeface="Noto Sans CJK JP"/>
                 <a:cs typeface="Noto Sans"/>
               </a:rPr>
-              <a:t>Appendix: 1. 追加の実例</a:t>
+              <a:t>Appendix: 1. 追加の対話</a:t>
             </a:r>
           </a:p>
         </p:txBody>
@@ -24114,7 +22977,7 @@
                 <a:ea typeface="Noto Sans CJK JP"/>
                 <a:cs typeface="Noto Sans"/>
               </a:rPr>
-              <a:t>test / 対話10490 / 全履歴 3発話 → 収録応答1発話</a:t>
+              <a:t>会話の履歴（3発話）と、次の応答</a:t>
             </a:r>
           </a:p>
         </p:txBody>
@@ -24371,8 +23234,8 @@
         </p:nvSpPr>
         <p:spPr>
           <a:xfrm>
-            <a:off x="502920" y="4700016"/>
-            <a:ext cx="8183879" cy="621792"/>
+            <a:off x="502920" y="4699000"/>
+            <a:ext cx="8183879" cy="431800"/>
           </a:xfrm>
           <a:prstGeom prst="rect">
             <a:avLst/>
@@ -24404,41 +23267,27 @@
               </a:defRPr>
             </a:pPr>
             <a:r>
-              <a:rPr sz="810" b="0" lang="ja-JP" altLang="en-US">
-                <a:solidFill>
-                  <a:srgbClr val="626669"/>
-                </a:solidFill>
-                <a:latin typeface="Noto Sans"/>
-                <a:ea typeface="Noto Sans CJK JP"/>
-                <a:cs typeface="Noto Sans"/>
-              </a:rPr>
-              <a:t>[1] Qi Zhu et al. (2020). CrossWOZ公式配布データ。固定commit df82c9fd。 test.json / dialogue 10490 / messages[0:3] → [3]。</a:t>
+              <a:rPr sz="830">
+                <a:latin typeface="Noto Sans CJK JP"/>
+              </a:rPr>
+              <a:t>[1] Zhu et al. (2020). CrossWOZ: dialogue data.</a:t>
             </a:r>
           </a:p>
           <a:p>
             <a:pPr>
-              <a:lnSpc>
-                <a:spcPts val="1200"/>
-              </a:lnSpc>
-              <a:buNone/>
-              <a:defRPr sz="810" b="0">
-                <a:solidFill>
-                  <a:srgbClr val="303437"/>
-                </a:solidFill>
-                <a:latin typeface="Noto Sans"/>
-              </a:defRPr>
-            </a:pPr>
-            <a:r>
-              <a:rPr sz="810" b="0" lang="ja-JP" altLang="en-US">
-                <a:solidFill>
-                  <a:srgbClr val="626669"/>
-                </a:solidFill>
-                <a:latin typeface="Noto Sans"/>
-                <a:ea typeface="Noto Sans CJK JP"/>
-                <a:cs typeface="Noto Sans"/>
-                <a:hlinkClick r:id="rId2"/>
-              </a:rPr>
-              <a:t>https://github.com/thu-coai/CrossWOZ/tree/df82c9fdff91b9b130f2d6b89110d3870ba6260e/data/crosswoz</a:t>
+              <a:spcBef>
+                <a:spcPts val="0"/>
+              </a:spcBef>
+              <a:spcAft>
+                <a:spcPts val="0"/>
+              </a:spcAft>
+            </a:pPr>
+            <a:r>
+              <a:rPr sz="830">
+                <a:latin typeface="Noto Sans CJK JP"/>
+                <a:hlinkClick r:id="rId3"/>
+              </a:rPr>
+              <a:t>https://github.com/thu-coai/CrossWOZ/tree/master/data/crosswoz</a:t>
             </a:r>
           </a:p>
         </p:txBody>
@@ -24552,7 +23401,7 @@
                 <a:ea typeface="Noto Sans CJK JP"/>
                 <a:cs typeface="Noto Sans"/>
               </a:rPr>
-              <a:t>Appendix: 1. 追加の実例</a:t>
+              <a:t>Appendix: 1. 追加の対話</a:t>
             </a:r>
           </a:p>
         </p:txBody>
@@ -24606,7 +23455,7 @@
                 <a:ea typeface="Noto Sans CJK JP"/>
                 <a:cs typeface="Noto Sans"/>
               </a:rPr>
-              <a:t>test / 対話10490 / 全履歴 3発話 → 収録応答1発話</a:t>
+              <a:t>会話の履歴（3発話）と、次の応答</a:t>
             </a:r>
           </a:p>
         </p:txBody>
@@ -24863,8 +23712,8 @@
         </p:nvSpPr>
         <p:spPr>
           <a:xfrm>
-            <a:off x="502920" y="4700016"/>
-            <a:ext cx="8183879" cy="621792"/>
+            <a:off x="502920" y="4699000"/>
+            <a:ext cx="8183879" cy="431800"/>
           </a:xfrm>
           <a:prstGeom prst="rect">
             <a:avLst/>
@@ -24896,41 +23745,27 @@
               </a:defRPr>
             </a:pPr>
             <a:r>
-              <a:rPr sz="810" b="0" lang="ja-JP" altLang="en-US">
-                <a:solidFill>
-                  <a:srgbClr val="626669"/>
-                </a:solidFill>
-                <a:latin typeface="Noto Sans"/>
-                <a:ea typeface="Noto Sans CJK JP"/>
-                <a:cs typeface="Noto Sans"/>
-              </a:rPr>
-              <a:t>[1] Qi Zhu et al. (2020). CrossWOZ公式配布データ。固定commit df82c9fd。 test.json / dialogue 10490 / messages[0:3] → [3]。</a:t>
+              <a:rPr sz="830">
+                <a:latin typeface="Noto Sans CJK JP"/>
+              </a:rPr>
+              <a:t>[1] Zhu et al. (2020). CrossWOZ: dialogue data.</a:t>
             </a:r>
           </a:p>
           <a:p>
             <a:pPr>
-              <a:lnSpc>
-                <a:spcPts val="1200"/>
-              </a:lnSpc>
-              <a:buNone/>
-              <a:defRPr sz="810" b="0">
-                <a:solidFill>
-                  <a:srgbClr val="303437"/>
-                </a:solidFill>
-                <a:latin typeface="Noto Sans"/>
-              </a:defRPr>
-            </a:pPr>
-            <a:r>
-              <a:rPr sz="810" b="0" lang="ja-JP" altLang="en-US">
-                <a:solidFill>
-                  <a:srgbClr val="626669"/>
-                </a:solidFill>
-                <a:latin typeface="Noto Sans"/>
-                <a:ea typeface="Noto Sans CJK JP"/>
-                <a:cs typeface="Noto Sans"/>
-                <a:hlinkClick r:id="rId2"/>
-              </a:rPr>
-              <a:t>https://github.com/thu-coai/CrossWOZ/tree/df82c9fdff91b9b130f2d6b89110d3870ba6260e/data/crosswoz</a:t>
+              <a:spcBef>
+                <a:spcPts val="0"/>
+              </a:spcBef>
+              <a:spcAft>
+                <a:spcPts val="0"/>
+              </a:spcAft>
+            </a:pPr>
+            <a:r>
+              <a:rPr sz="830">
+                <a:latin typeface="Noto Sans CJK JP"/>
+                <a:hlinkClick r:id="rId3"/>
+              </a:rPr>
+              <a:t>https://github.com/thu-coai/CrossWOZ/tree/master/data/crosswoz</a:t>
             </a:r>
           </a:p>
         </p:txBody>
@@ -25044,7 +23879,7 @@
                 <a:ea typeface="Noto Sans CJK JP"/>
                 <a:cs typeface="Noto Sans"/>
               </a:rPr>
-              <a:t>Appendix: 1. 追加の実例</a:t>
+              <a:t>Appendix: 1. 追加の対話</a:t>
             </a:r>
           </a:p>
         </p:txBody>
@@ -25098,7 +23933,7 @@
                 <a:ea typeface="Noto Sans CJK JP"/>
                 <a:cs typeface="Noto Sans"/>
               </a:rPr>
-              <a:t>train / 対話8781 / 全履歴 1発話 → 収録応答1発話</a:t>
+              <a:t>会話の履歴（1発話）と、次の応答</a:t>
             </a:r>
           </a:p>
         </p:txBody>
@@ -25475,8 +24310,8 @@
         </p:nvSpPr>
         <p:spPr>
           <a:xfrm>
-            <a:off x="502920" y="4700016"/>
-            <a:ext cx="8183879" cy="621792"/>
+            <a:off x="502920" y="4699000"/>
+            <a:ext cx="8183879" cy="431800"/>
           </a:xfrm>
           <a:prstGeom prst="rect">
             <a:avLst/>
@@ -25508,41 +24343,27 @@
               </a:defRPr>
             </a:pPr>
             <a:r>
-              <a:rPr sz="810" b="0" lang="ja-JP" altLang="en-US">
-                <a:solidFill>
-                  <a:srgbClr val="626669"/>
-                </a:solidFill>
-                <a:latin typeface="Noto Sans"/>
-                <a:ea typeface="Noto Sans CJK JP"/>
-                <a:cs typeface="Noto Sans"/>
-              </a:rPr>
-              <a:t>[1] Qi Zhu et al. (2020). CrossWOZ公式配布データ。固定commit df82c9fd。 train.json / dialogue 8781 / messages[0:1] → [1]。</a:t>
+              <a:rPr sz="830">
+                <a:latin typeface="Noto Sans CJK JP"/>
+              </a:rPr>
+              <a:t>[1] Zhu et al. (2020). CrossWOZ: dialogue data.</a:t>
             </a:r>
           </a:p>
           <a:p>
             <a:pPr>
-              <a:lnSpc>
-                <a:spcPts val="1200"/>
-              </a:lnSpc>
-              <a:buNone/>
-              <a:defRPr sz="810" b="0">
-                <a:solidFill>
-                  <a:srgbClr val="303437"/>
-                </a:solidFill>
-                <a:latin typeface="Noto Sans"/>
-              </a:defRPr>
-            </a:pPr>
-            <a:r>
-              <a:rPr sz="810" b="0" lang="ja-JP" altLang="en-US">
-                <a:solidFill>
-                  <a:srgbClr val="626669"/>
-                </a:solidFill>
-                <a:latin typeface="Noto Sans"/>
-                <a:ea typeface="Noto Sans CJK JP"/>
-                <a:cs typeface="Noto Sans"/>
-                <a:hlinkClick r:id="rId2"/>
-              </a:rPr>
-              <a:t>https://github.com/thu-coai/CrossWOZ/tree/df82c9fdff91b9b130f2d6b89110d3870ba6260e/data/crosswoz</a:t>
+              <a:spcBef>
+                <a:spcPts val="0"/>
+              </a:spcBef>
+              <a:spcAft>
+                <a:spcPts val="0"/>
+              </a:spcAft>
+            </a:pPr>
+            <a:r>
+              <a:rPr sz="830">
+                <a:latin typeface="Noto Sans CJK JP"/>
+                <a:hlinkClick r:id="rId3"/>
+              </a:rPr>
+              <a:t>https://github.com/thu-coai/CrossWOZ/tree/master/data/crosswoz</a:t>
             </a:r>
           </a:p>
         </p:txBody>
@@ -25656,7 +24477,7 @@
                 <a:ea typeface="Noto Sans CJK JP"/>
                 <a:cs typeface="Noto Sans"/>
               </a:rPr>
-              <a:t>Appendix: 1. 追加の実例</a:t>
+              <a:t>Appendix: 1. 追加の対話</a:t>
             </a:r>
           </a:p>
         </p:txBody>
@@ -25710,7 +24531,7 @@
                 <a:ea typeface="Noto Sans CJK JP"/>
                 <a:cs typeface="Noto Sans"/>
               </a:rPr>
-              <a:t>train / 対話9779 / 全履歴 1発話 → 収録応答1発話</a:t>
+              <a:t>会話の履歴（1発話）と、次の応答</a:t>
             </a:r>
           </a:p>
         </p:txBody>
@@ -26087,8 +24908,8 @@
         </p:nvSpPr>
         <p:spPr>
           <a:xfrm>
-            <a:off x="502920" y="4700016"/>
-            <a:ext cx="8183879" cy="621792"/>
+            <a:off x="502920" y="4699000"/>
+            <a:ext cx="8183879" cy="431800"/>
           </a:xfrm>
           <a:prstGeom prst="rect">
             <a:avLst/>
@@ -26120,41 +24941,27 @@
               </a:defRPr>
             </a:pPr>
             <a:r>
-              <a:rPr sz="810" b="0" lang="ja-JP" altLang="en-US">
-                <a:solidFill>
-                  <a:srgbClr val="626669"/>
-                </a:solidFill>
-                <a:latin typeface="Noto Sans"/>
-                <a:ea typeface="Noto Sans CJK JP"/>
-                <a:cs typeface="Noto Sans"/>
-              </a:rPr>
-              <a:t>[1] Qi Zhu et al. (2020). CrossWOZ公式配布データ。固定commit df82c9fd。 train.json / dialogue 9779 / messages[0:1] → [1]。</a:t>
+              <a:rPr sz="830">
+                <a:latin typeface="Noto Sans CJK JP"/>
+              </a:rPr>
+              <a:t>[1] Zhu et al. (2020). CrossWOZ: dialogue data.</a:t>
             </a:r>
           </a:p>
           <a:p>
             <a:pPr>
-              <a:lnSpc>
-                <a:spcPts val="1200"/>
-              </a:lnSpc>
-              <a:buNone/>
-              <a:defRPr sz="810" b="0">
-                <a:solidFill>
-                  <a:srgbClr val="303437"/>
-                </a:solidFill>
-                <a:latin typeface="Noto Sans"/>
-              </a:defRPr>
-            </a:pPr>
-            <a:r>
-              <a:rPr sz="810" b="0" lang="ja-JP" altLang="en-US">
-                <a:solidFill>
-                  <a:srgbClr val="626669"/>
-                </a:solidFill>
-                <a:latin typeface="Noto Sans"/>
-                <a:ea typeface="Noto Sans CJK JP"/>
-                <a:cs typeface="Noto Sans"/>
-                <a:hlinkClick r:id="rId2"/>
-              </a:rPr>
-              <a:t>https://github.com/thu-coai/CrossWOZ/tree/df82c9fdff91b9b130f2d6b89110d3870ba6260e/data/crosswoz</a:t>
+              <a:spcBef>
+                <a:spcPts val="0"/>
+              </a:spcBef>
+              <a:spcAft>
+                <a:spcPts val="0"/>
+              </a:spcAft>
+            </a:pPr>
+            <a:r>
+              <a:rPr sz="830">
+                <a:latin typeface="Noto Sans CJK JP"/>
+                <a:hlinkClick r:id="rId3"/>
+              </a:rPr>
+              <a:t>https://github.com/thu-coai/CrossWOZ/tree/master/data/crosswoz</a:t>
             </a:r>
           </a:p>
         </p:txBody>
@@ -26268,7 +25075,7 @@
                 <a:ea typeface="Noto Sans CJK JP"/>
                 <a:cs typeface="Noto Sans"/>
               </a:rPr>
-              <a:t>Appendix: 1. 追加の実例</a:t>
+              <a:t>Appendix: 1. 追加の対話</a:t>
             </a:r>
           </a:p>
         </p:txBody>
@@ -26322,7 +25129,7 @@
                 <a:ea typeface="Noto Sans CJK JP"/>
                 <a:cs typeface="Noto Sans"/>
               </a:rPr>
-              <a:t>test / 対話10838 / 全履歴 5発話 → 収録応答1発話 ／ 原文は左→右</a:t>
+              <a:t>会話の履歴（5発話）と、次の応答</a:t>
             </a:r>
           </a:p>
         </p:txBody>
@@ -26661,8 +25468,8 @@
         </p:nvSpPr>
         <p:spPr>
           <a:xfrm>
-            <a:off x="502920" y="4700016"/>
-            <a:ext cx="8183879" cy="621792"/>
+            <a:off x="502920" y="4699000"/>
+            <a:ext cx="8183879" cy="431800"/>
           </a:xfrm>
           <a:prstGeom prst="rect">
             <a:avLst/>
@@ -26694,41 +25501,27 @@
               </a:defRPr>
             </a:pPr>
             <a:r>
-              <a:rPr sz="810" b="0" lang="ja-JP" altLang="en-US">
-                <a:solidFill>
-                  <a:srgbClr val="626669"/>
-                </a:solidFill>
-                <a:latin typeface="Noto Sans"/>
-                <a:ea typeface="Noto Sans CJK JP"/>
-                <a:cs typeface="Noto Sans"/>
-              </a:rPr>
-              <a:t>[1] Qi Zhu et al. (2020). CrossWOZ公式配布データ。固定commit df82c9fd。 test.json / dialogue 10838 / messages[0:5] → [5]。</a:t>
+              <a:rPr sz="830">
+                <a:latin typeface="Noto Sans CJK JP"/>
+              </a:rPr>
+              <a:t>[1] Zhu et al. (2020). CrossWOZ: dialogue data.</a:t>
             </a:r>
           </a:p>
           <a:p>
             <a:pPr>
-              <a:lnSpc>
-                <a:spcPts val="1200"/>
-              </a:lnSpc>
-              <a:buNone/>
-              <a:defRPr sz="810" b="0">
-                <a:solidFill>
-                  <a:srgbClr val="303437"/>
-                </a:solidFill>
-                <a:latin typeface="Noto Sans"/>
-              </a:defRPr>
-            </a:pPr>
-            <a:r>
-              <a:rPr sz="810" b="0" lang="ja-JP" altLang="en-US">
-                <a:solidFill>
-                  <a:srgbClr val="626669"/>
-                </a:solidFill>
-                <a:latin typeface="Noto Sans"/>
-                <a:ea typeface="Noto Sans CJK JP"/>
-                <a:cs typeface="Noto Sans"/>
-                <a:hlinkClick r:id="rId2"/>
-              </a:rPr>
-              <a:t>https://github.com/thu-coai/CrossWOZ/tree/df82c9fdff91b9b130f2d6b89110d3870ba6260e/data/crosswoz</a:t>
+              <a:spcBef>
+                <a:spcPts val="0"/>
+              </a:spcBef>
+              <a:spcAft>
+                <a:spcPts val="0"/>
+              </a:spcAft>
+            </a:pPr>
+            <a:r>
+              <a:rPr sz="830">
+                <a:latin typeface="Noto Sans CJK JP"/>
+                <a:hlinkClick r:id="rId3"/>
+              </a:rPr>
+              <a:t>https://github.com/thu-coai/CrossWOZ/tree/master/data/crosswoz</a:t>
             </a:r>
           </a:p>
         </p:txBody>
@@ -26842,7 +25635,7 @@
                 <a:ea typeface="Noto Sans CJK JP"/>
                 <a:cs typeface="Noto Sans"/>
               </a:rPr>
-              <a:t>Appendix: 1. 追加の実例</a:t>
+              <a:t>Appendix: 1. 追加の対話</a:t>
             </a:r>
           </a:p>
         </p:txBody>
@@ -26896,7 +25689,7 @@
                 <a:ea typeface="Noto Sans CJK JP"/>
                 <a:cs typeface="Noto Sans"/>
               </a:rPr>
-              <a:t>test / 対話10838 / 全履歴 5発話 → 収録応答1発話 ／ 訳は左→右</a:t>
+              <a:t>会話の履歴（5発話）と、次の応答</a:t>
             </a:r>
           </a:p>
         </p:txBody>
@@ -27235,8 +26028,8 @@
         </p:nvSpPr>
         <p:spPr>
           <a:xfrm>
-            <a:off x="502920" y="4700016"/>
-            <a:ext cx="8183879" cy="621792"/>
+            <a:off x="502920" y="4699000"/>
+            <a:ext cx="8183879" cy="431800"/>
           </a:xfrm>
           <a:prstGeom prst="rect">
             <a:avLst/>
@@ -27268,41 +26061,27 @@
               </a:defRPr>
             </a:pPr>
             <a:r>
-              <a:rPr sz="810" b="0" lang="ja-JP" altLang="en-US">
-                <a:solidFill>
-                  <a:srgbClr val="626669"/>
-                </a:solidFill>
-                <a:latin typeface="Noto Sans"/>
-                <a:ea typeface="Noto Sans CJK JP"/>
-                <a:cs typeface="Noto Sans"/>
-              </a:rPr>
-              <a:t>[1] Qi Zhu et al. (2020). CrossWOZ公式配布データ。固定commit df82c9fd。 test.json / dialogue 10838 / messages[0:5] → [5]。</a:t>
+              <a:rPr sz="830">
+                <a:latin typeface="Noto Sans CJK JP"/>
+              </a:rPr>
+              <a:t>[1] Zhu et al. (2020). CrossWOZ: dialogue data.</a:t>
             </a:r>
           </a:p>
           <a:p>
             <a:pPr>
-              <a:lnSpc>
-                <a:spcPts val="1200"/>
-              </a:lnSpc>
-              <a:buNone/>
-              <a:defRPr sz="810" b="0">
-                <a:solidFill>
-                  <a:srgbClr val="303437"/>
-                </a:solidFill>
-                <a:latin typeface="Noto Sans"/>
-              </a:defRPr>
-            </a:pPr>
-            <a:r>
-              <a:rPr sz="810" b="0" lang="ja-JP" altLang="en-US">
-                <a:solidFill>
-                  <a:srgbClr val="626669"/>
-                </a:solidFill>
-                <a:latin typeface="Noto Sans"/>
-                <a:ea typeface="Noto Sans CJK JP"/>
-                <a:cs typeface="Noto Sans"/>
-                <a:hlinkClick r:id="rId2"/>
-              </a:rPr>
-              <a:t>https://github.com/thu-coai/CrossWOZ/tree/df82c9fdff91b9b130f2d6b89110d3870ba6260e/data/crosswoz</a:t>
+              <a:spcBef>
+                <a:spcPts val="0"/>
+              </a:spcBef>
+              <a:spcAft>
+                <a:spcPts val="0"/>
+              </a:spcAft>
+            </a:pPr>
+            <a:r>
+              <a:rPr sz="830">
+                <a:latin typeface="Noto Sans CJK JP"/>
+                <a:hlinkClick r:id="rId3"/>
+              </a:rPr>
+              <a:t>https://github.com/thu-coai/CrossWOZ/tree/master/data/crosswoz</a:t>
             </a:r>
           </a:p>
         </p:txBody>
@@ -27416,7 +26195,7 @@
                 <a:ea typeface="Noto Sans CJK JP"/>
                 <a:cs typeface="Noto Sans"/>
               </a:rPr>
-              <a:t>Appendix: 1. 追加の実例</a:t>
+              <a:t>Appendix: 1. 追加の対話</a:t>
             </a:r>
           </a:p>
         </p:txBody>
@@ -27470,7 +26249,7 @@
                 <a:ea typeface="Noto Sans CJK JP"/>
                 <a:cs typeface="Noto Sans"/>
               </a:rPr>
-              <a:t>train / 対話8711 / 全履歴 9発話 → 収録応答1発話 ／ 原文は左→右</a:t>
+              <a:t>会話の履歴（9発話）と、次の応答</a:t>
             </a:r>
           </a:p>
         </p:txBody>
@@ -27902,8 +26681,8 @@
         </p:nvSpPr>
         <p:spPr>
           <a:xfrm>
-            <a:off x="502920" y="4700016"/>
-            <a:ext cx="8183879" cy="621792"/>
+            <a:off x="502920" y="4699000"/>
+            <a:ext cx="8183879" cy="431800"/>
           </a:xfrm>
           <a:prstGeom prst="rect">
             <a:avLst/>
@@ -27935,41 +26714,27 @@
               </a:defRPr>
             </a:pPr>
             <a:r>
-              <a:rPr sz="810" b="0" lang="ja-JP" altLang="en-US">
-                <a:solidFill>
-                  <a:srgbClr val="626669"/>
-                </a:solidFill>
-                <a:latin typeface="Noto Sans"/>
-                <a:ea typeface="Noto Sans CJK JP"/>
-                <a:cs typeface="Noto Sans"/>
-              </a:rPr>
-              <a:t>[1] Qi Zhu et al. (2020). CrossWOZ公式配布データ。固定commit df82c9fd。 train.json / dialogue 8711 / messages[0:9] → [9]。</a:t>
+              <a:rPr sz="830">
+                <a:latin typeface="Noto Sans CJK JP"/>
+              </a:rPr>
+              <a:t>[1] Zhu et al. (2020). CrossWOZ: dialogue data.</a:t>
             </a:r>
           </a:p>
           <a:p>
             <a:pPr>
-              <a:lnSpc>
-                <a:spcPts val="1200"/>
-              </a:lnSpc>
-              <a:buNone/>
-              <a:defRPr sz="810" b="0">
-                <a:solidFill>
-                  <a:srgbClr val="303437"/>
-                </a:solidFill>
-                <a:latin typeface="Noto Sans"/>
-              </a:defRPr>
-            </a:pPr>
-            <a:r>
-              <a:rPr sz="810" b="0" lang="ja-JP" altLang="en-US">
-                <a:solidFill>
-                  <a:srgbClr val="626669"/>
-                </a:solidFill>
-                <a:latin typeface="Noto Sans"/>
-                <a:ea typeface="Noto Sans CJK JP"/>
-                <a:cs typeface="Noto Sans"/>
-                <a:hlinkClick r:id="rId2"/>
-              </a:rPr>
-              <a:t>https://github.com/thu-coai/CrossWOZ/tree/df82c9fdff91b9b130f2d6b89110d3870ba6260e/data/crosswoz</a:t>
+              <a:spcBef>
+                <a:spcPts val="0"/>
+              </a:spcBef>
+              <a:spcAft>
+                <a:spcPts val="0"/>
+              </a:spcAft>
+            </a:pPr>
+            <a:r>
+              <a:rPr sz="830">
+                <a:latin typeface="Noto Sans CJK JP"/>
+                <a:hlinkClick r:id="rId3"/>
+              </a:rPr>
+              <a:t>https://github.com/thu-coai/CrossWOZ/tree/master/data/crosswoz</a:t>
             </a:r>
           </a:p>
         </p:txBody>
@@ -28083,7 +26848,7 @@
                 <a:ea typeface="Noto Sans CJK JP"/>
                 <a:cs typeface="Noto Sans"/>
               </a:rPr>
-              <a:t>Appendix: 1. 追加の実例</a:t>
+              <a:t>Appendix: 1. 追加の対話</a:t>
             </a:r>
           </a:p>
         </p:txBody>
@@ -28137,7 +26902,7 @@
                 <a:ea typeface="Noto Sans CJK JP"/>
                 <a:cs typeface="Noto Sans"/>
               </a:rPr>
-              <a:t>train / 対話8711 / 全履歴 9発話 → 収録応答1発話 ／ 訳は左→右</a:t>
+              <a:t>会話の履歴（9発話）と、次の応答</a:t>
             </a:r>
           </a:p>
         </p:txBody>
@@ -28600,8 +27365,8 @@
         </p:nvSpPr>
         <p:spPr>
           <a:xfrm>
-            <a:off x="502920" y="4700016"/>
-            <a:ext cx="8183879" cy="621792"/>
+            <a:off x="502920" y="4699000"/>
+            <a:ext cx="8183879" cy="431800"/>
           </a:xfrm>
           <a:prstGeom prst="rect">
             <a:avLst/>
@@ -28633,41 +27398,27 @@
               </a:defRPr>
             </a:pPr>
             <a:r>
-              <a:rPr sz="810" b="0" lang="ja-JP" altLang="en-US">
-                <a:solidFill>
-                  <a:srgbClr val="626669"/>
-                </a:solidFill>
-                <a:latin typeface="Noto Sans"/>
-                <a:ea typeface="Noto Sans CJK JP"/>
-                <a:cs typeface="Noto Sans"/>
-              </a:rPr>
-              <a:t>[1] Qi Zhu et al. (2020). CrossWOZ公式配布データ。固定commit df82c9fd。 train.json / dialogue 8711 / messages[0:9] → [9]。</a:t>
+              <a:rPr sz="830">
+                <a:latin typeface="Noto Sans CJK JP"/>
+              </a:rPr>
+              <a:t>[1] Zhu et al. (2020). CrossWOZ: dialogue data.</a:t>
             </a:r>
           </a:p>
           <a:p>
             <a:pPr>
-              <a:lnSpc>
-                <a:spcPts val="1200"/>
-              </a:lnSpc>
-              <a:buNone/>
-              <a:defRPr sz="810" b="0">
-                <a:solidFill>
-                  <a:srgbClr val="303437"/>
-                </a:solidFill>
-                <a:latin typeface="Noto Sans"/>
-              </a:defRPr>
-            </a:pPr>
-            <a:r>
-              <a:rPr sz="810" b="0" lang="ja-JP" altLang="en-US">
-                <a:solidFill>
-                  <a:srgbClr val="626669"/>
-                </a:solidFill>
-                <a:latin typeface="Noto Sans"/>
-                <a:ea typeface="Noto Sans CJK JP"/>
-                <a:cs typeface="Noto Sans"/>
-                <a:hlinkClick r:id="rId2"/>
-              </a:rPr>
-              <a:t>https://github.com/thu-coai/CrossWOZ/tree/df82c9fdff91b9b130f2d6b89110d3870ba6260e/data/crosswoz</a:t>
+              <a:spcBef>
+                <a:spcPts val="0"/>
+              </a:spcBef>
+              <a:spcAft>
+                <a:spcPts val="0"/>
+              </a:spcAft>
+            </a:pPr>
+            <a:r>
+              <a:rPr sz="830">
+                <a:latin typeface="Noto Sans CJK JP"/>
+                <a:hlinkClick r:id="rId3"/>
+              </a:rPr>
+              <a:t>https://github.com/thu-coai/CrossWOZ/tree/master/data/crosswoz</a:t>
             </a:r>
           </a:p>
         </p:txBody>
@@ -28781,7 +27532,7 @@
                 <a:ea typeface="Noto Sans CJK JP"/>
                 <a:cs typeface="Noto Sans"/>
               </a:rPr>
-              <a:t>Appendix: 1. 追加の実例</a:t>
+              <a:t>Appendix: 1. 追加の対話</a:t>
             </a:r>
           </a:p>
         </p:txBody>
@@ -28835,7 +27586,7 @@
                 <a:ea typeface="Noto Sans CJK JP"/>
                 <a:cs typeface="Noto Sans"/>
               </a:rPr>
-              <a:t>train / 対話7845 / 全履歴 9発話 → 収録応答1発話 ／ 原文は左→右</a:t>
+              <a:t>会話の履歴（9発話）と、次の応答</a:t>
             </a:r>
           </a:p>
         </p:txBody>
@@ -29298,8 +28049,8 @@
         </p:nvSpPr>
         <p:spPr>
           <a:xfrm>
-            <a:off x="502920" y="4700016"/>
-            <a:ext cx="8183879" cy="621792"/>
+            <a:off x="502920" y="4699000"/>
+            <a:ext cx="8183879" cy="431800"/>
           </a:xfrm>
           <a:prstGeom prst="rect">
             <a:avLst/>
@@ -29331,41 +28082,27 @@
               </a:defRPr>
             </a:pPr>
             <a:r>
-              <a:rPr sz="810" b="0" lang="ja-JP" altLang="en-US">
-                <a:solidFill>
-                  <a:srgbClr val="626669"/>
-                </a:solidFill>
-                <a:latin typeface="Noto Sans"/>
-                <a:ea typeface="Noto Sans CJK JP"/>
-                <a:cs typeface="Noto Sans"/>
-              </a:rPr>
-              <a:t>[1] Qi Zhu et al. (2020). CrossWOZ公式配布データ。固定commit df82c9fd。 train.json / dialogue 7845 / messages[0:9] → [9]。</a:t>
+              <a:rPr sz="830">
+                <a:latin typeface="Noto Sans CJK JP"/>
+              </a:rPr>
+              <a:t>[1] Zhu et al. (2020). CrossWOZ: dialogue data.</a:t>
             </a:r>
           </a:p>
           <a:p>
             <a:pPr>
-              <a:lnSpc>
-                <a:spcPts val="1200"/>
-              </a:lnSpc>
-              <a:buNone/>
-              <a:defRPr sz="810" b="0">
-                <a:solidFill>
-                  <a:srgbClr val="303437"/>
-                </a:solidFill>
-                <a:latin typeface="Noto Sans"/>
-              </a:defRPr>
-            </a:pPr>
-            <a:r>
-              <a:rPr sz="810" b="0" lang="ja-JP" altLang="en-US">
-                <a:solidFill>
-                  <a:srgbClr val="626669"/>
-                </a:solidFill>
-                <a:latin typeface="Noto Sans"/>
-                <a:ea typeface="Noto Sans CJK JP"/>
-                <a:cs typeface="Noto Sans"/>
-                <a:hlinkClick r:id="rId2"/>
-              </a:rPr>
-              <a:t>https://github.com/thu-coai/CrossWOZ/tree/df82c9fdff91b9b130f2d6b89110d3870ba6260e/data/crosswoz</a:t>
+              <a:spcBef>
+                <a:spcPts val="0"/>
+              </a:spcBef>
+              <a:spcAft>
+                <a:spcPts val="0"/>
+              </a:spcAft>
+            </a:pPr>
+            <a:r>
+              <a:rPr sz="830">
+                <a:latin typeface="Noto Sans CJK JP"/>
+                <a:hlinkClick r:id="rId3"/>
+              </a:rPr>
+              <a:t>https://github.com/thu-coai/CrossWOZ/tree/master/data/crosswoz</a:t>
             </a:r>
           </a:p>
         </p:txBody>
@@ -29592,7 +28329,7 @@
                 <a:ea typeface="Noto Sans CJK JP"/>
                 <a:cs typeface="Noto Sans"/>
               </a:rPr>
-              <a:t>1. 対話の履歴から、次の応答を読む</a:t>
+              <a:t>1. 旅行相談の対話と応答</a:t>
             </a:r>
           </a:p>
         </p:txBody>
@@ -29605,8 +28342,8 @@
         </p:nvSpPr>
         <p:spPr>
           <a:xfrm>
-            <a:off x="502920" y="4700016"/>
-            <a:ext cx="8183879" cy="621792"/>
+            <a:off x="502920" y="4699000"/>
+            <a:ext cx="8183879" cy="431800"/>
           </a:xfrm>
           <a:prstGeom prst="rect">
             <a:avLst/>
@@ -29638,35 +28375,24 @@
               </a:defRPr>
             </a:pPr>
             <a:r>
-              <a:rPr sz="810" b="0" lang="ja-JP" altLang="en-US">
-                <a:solidFill>
-                  <a:srgbClr val="626669"/>
-                </a:solidFill>
-                <a:latin typeface="Noto Sans"/>
-                <a:ea typeface="Noto Sans CJK JP"/>
-                <a:cs typeface="Noto Sans"/>
-              </a:rPr>
-              <a:t>[1] Zhu et al. (2020). CrossWOZ: A Large-Scale Chinese Cross-Domain Task-Oriented Dialogue Dataset. TACL 8:281–295.</a:t>
-            </a:r>
-            <a:r>
-              <a:rPr sz="810" b="0" lang="ja-JP" altLang="en-US">
-                <a:solidFill>
-                  <a:srgbClr val="626669"/>
-                </a:solidFill>
-                <a:latin typeface="Noto Sans"/>
-                <a:ea typeface="Noto Sans CJK JP"/>
-                <a:cs typeface="Noto Sans"/>
-              </a:rPr>
-              <a:t>  </a:t>
-            </a:r>
-            <a:r>
-              <a:rPr sz="810" b="0" lang="ja-JP" altLang="en-US">
-                <a:solidFill>
-                  <a:srgbClr val="626669"/>
-                </a:solidFill>
-                <a:latin typeface="Noto Sans"/>
-                <a:ea typeface="Noto Sans CJK JP"/>
-                <a:cs typeface="Noto Sans"/>
+              <a:rPr sz="830">
+                <a:latin typeface="Noto Sans CJK JP"/>
+              </a:rPr>
+              <a:t>[1] Zhu et al. (2020). CrossWOZ: A Large-Scale Chinese Cross-Domain Task-Oriented Dialogue Dataset.</a:t>
+            </a:r>
+          </a:p>
+          <a:p>
+            <a:pPr>
+              <a:spcBef>
+                <a:spcPts val="0"/>
+              </a:spcBef>
+              <a:spcAft>
+                <a:spcPts val="0"/>
+              </a:spcAft>
+            </a:pPr>
+            <a:r>
+              <a:rPr sz="830">
+                <a:latin typeface="Noto Sans CJK JP"/>
                 <a:hlinkClick r:id="rId2"/>
               </a:rPr>
               <a:t>https://aclanthology.org/2020.tacl-1.19/</a:t>
@@ -29783,7 +28509,7 @@
                 <a:ea typeface="Noto Sans CJK JP"/>
                 <a:cs typeface="Noto Sans"/>
               </a:rPr>
-              <a:t>Appendix: 1. 追加の実例</a:t>
+              <a:t>Appendix: 1. 追加の対話</a:t>
             </a:r>
           </a:p>
         </p:txBody>
@@ -29837,7 +28563,7 @@
                 <a:ea typeface="Noto Sans CJK JP"/>
                 <a:cs typeface="Noto Sans"/>
               </a:rPr>
-              <a:t>train / 対話7845 / 全履歴 9発話 → 収録応答1発話 ／ 訳は左→右</a:t>
+              <a:t>会話の履歴（9発話）と、次の応答</a:t>
             </a:r>
           </a:p>
         </p:txBody>
@@ -30269,8 +28995,8 @@
         </p:nvSpPr>
         <p:spPr>
           <a:xfrm>
-            <a:off x="502920" y="4700016"/>
-            <a:ext cx="8183879" cy="621792"/>
+            <a:off x="502920" y="4699000"/>
+            <a:ext cx="8183879" cy="431800"/>
           </a:xfrm>
           <a:prstGeom prst="rect">
             <a:avLst/>
@@ -30302,41 +29028,27 @@
               </a:defRPr>
             </a:pPr>
             <a:r>
-              <a:rPr sz="810" b="0" lang="ja-JP" altLang="en-US">
-                <a:solidFill>
-                  <a:srgbClr val="626669"/>
-                </a:solidFill>
-                <a:latin typeface="Noto Sans"/>
-                <a:ea typeface="Noto Sans CJK JP"/>
-                <a:cs typeface="Noto Sans"/>
-              </a:rPr>
-              <a:t>[1] Qi Zhu et al. (2020). CrossWOZ公式配布データ。固定commit df82c9fd。 train.json / dialogue 7845 / messages[0:9] → [9]。</a:t>
+              <a:rPr sz="830">
+                <a:latin typeface="Noto Sans CJK JP"/>
+              </a:rPr>
+              <a:t>[1] Zhu et al. (2020). CrossWOZ: dialogue data.</a:t>
             </a:r>
           </a:p>
           <a:p>
             <a:pPr>
-              <a:lnSpc>
-                <a:spcPts val="1200"/>
-              </a:lnSpc>
-              <a:buNone/>
-              <a:defRPr sz="810" b="0">
-                <a:solidFill>
-                  <a:srgbClr val="303437"/>
-                </a:solidFill>
-                <a:latin typeface="Noto Sans"/>
-              </a:defRPr>
-            </a:pPr>
-            <a:r>
-              <a:rPr sz="810" b="0" lang="ja-JP" altLang="en-US">
-                <a:solidFill>
-                  <a:srgbClr val="626669"/>
-                </a:solidFill>
-                <a:latin typeface="Noto Sans"/>
-                <a:ea typeface="Noto Sans CJK JP"/>
-                <a:cs typeface="Noto Sans"/>
-                <a:hlinkClick r:id="rId2"/>
-              </a:rPr>
-              <a:t>https://github.com/thu-coai/CrossWOZ/tree/df82c9fdff91b9b130f2d6b89110d3870ba6260e/data/crosswoz</a:t>
+              <a:spcBef>
+                <a:spcPts val="0"/>
+              </a:spcBef>
+              <a:spcAft>
+                <a:spcPts val="0"/>
+              </a:spcAft>
+            </a:pPr>
+            <a:r>
+              <a:rPr sz="830">
+                <a:latin typeface="Noto Sans CJK JP"/>
+                <a:hlinkClick r:id="rId3"/>
+              </a:rPr>
+              <a:t>https://github.com/thu-coai/CrossWOZ/tree/master/data/crosswoz</a:t>
             </a:r>
           </a:p>
         </p:txBody>
@@ -30402,7 +29114,7 @@
                 <a:ea typeface="Noto Sans CJK JP"/>
                 <a:cs typeface="Noto Sans"/>
               </a:rPr>
-              <a:t>実例13：HELMのホテル対話の原レコード</a:t>
+              <a:t>実例13：ホテルと観光地を順に選ぶ</a:t>
             </a:r>
           </a:p>
         </p:txBody>
@@ -30450,7 +29162,7 @@
                 <a:ea typeface="Noto Sans CJK JP"/>
                 <a:cs typeface="Noto Sans"/>
               </a:rPr>
-              <a:t>Appendix: 1. 追加の実例</a:t>
+              <a:t>Appendix: 1. 追加の対話</a:t>
             </a:r>
           </a:p>
         </p:txBody>
@@ -30504,7 +29216,7 @@
                 <a:ea typeface="Noto Sans CJK JP"/>
                 <a:cs typeface="Noto Sans"/>
               </a:rPr>
-              <a:t>val / 対話12121 / 全履歴 9発話 → 収録応答1発話 ／ 原文は左→右</a:t>
+              <a:t>会話の履歴（9発話）と、次の応答</a:t>
             </a:r>
           </a:p>
         </p:txBody>
@@ -30936,8 +29648,8 @@
         </p:nvSpPr>
         <p:spPr>
           <a:xfrm>
-            <a:off x="502920" y="4700016"/>
-            <a:ext cx="8183879" cy="621792"/>
+            <a:off x="502920" y="4699000"/>
+            <a:ext cx="8183879" cy="431800"/>
           </a:xfrm>
           <a:prstGeom prst="rect">
             <a:avLst/>
@@ -30969,41 +29681,27 @@
               </a:defRPr>
             </a:pPr>
             <a:r>
-              <a:rPr sz="810" b="0" lang="ja-JP" altLang="en-US">
-                <a:solidFill>
-                  <a:srgbClr val="626669"/>
-                </a:solidFill>
-                <a:latin typeface="Noto Sans"/>
-                <a:ea typeface="Noto Sans CJK JP"/>
-                <a:cs typeface="Noto Sans"/>
-              </a:rPr>
-              <a:t>[1] Qi Zhu et al. (2020). CrossWOZ公式配布データ。固定commit df82c9fd。 val.json / dialogue 12121 / messages[0:9] → [9]。</a:t>
+              <a:rPr sz="830">
+                <a:latin typeface="Noto Sans CJK JP"/>
+              </a:rPr>
+              <a:t>[1] Zhu et al. (2020). CrossWOZ: dialogue data.</a:t>
             </a:r>
           </a:p>
           <a:p>
             <a:pPr>
-              <a:lnSpc>
-                <a:spcPts val="1200"/>
-              </a:lnSpc>
-              <a:buNone/>
-              <a:defRPr sz="810" b="0">
-                <a:solidFill>
-                  <a:srgbClr val="303437"/>
-                </a:solidFill>
-                <a:latin typeface="Noto Sans"/>
-              </a:defRPr>
-            </a:pPr>
-            <a:r>
-              <a:rPr sz="810" b="0" lang="ja-JP" altLang="en-US">
-                <a:solidFill>
-                  <a:srgbClr val="626669"/>
-                </a:solidFill>
-                <a:latin typeface="Noto Sans"/>
-                <a:ea typeface="Noto Sans CJK JP"/>
-                <a:cs typeface="Noto Sans"/>
-                <a:hlinkClick r:id="rId2"/>
-              </a:rPr>
-              <a:t>https://github.com/thu-coai/CrossWOZ/tree/df82c9fdff91b9b130f2d6b89110d3870ba6260e/data/crosswoz</a:t>
+              <a:spcBef>
+                <a:spcPts val="0"/>
+              </a:spcBef>
+              <a:spcAft>
+                <a:spcPts val="0"/>
+              </a:spcAft>
+            </a:pPr>
+            <a:r>
+              <a:rPr sz="830">
+                <a:latin typeface="Noto Sans CJK JP"/>
+                <a:hlinkClick r:id="rId3"/>
+              </a:rPr>
+              <a:t>https://github.com/thu-coai/CrossWOZ/tree/master/data/crosswoz</a:t>
             </a:r>
           </a:p>
         </p:txBody>
@@ -31069,7 +29767,7 @@
                 <a:ea typeface="Noto Sans CJK JP"/>
                 <a:cs typeface="Noto Sans"/>
               </a:rPr>
-              <a:t>実例13：HELMのホテル対話の原レコード（訳）</a:t>
+              <a:t>実例13：ホテルと観光地を順に選ぶ（訳）</a:t>
             </a:r>
           </a:p>
         </p:txBody>
@@ -31117,7 +29815,7 @@
                 <a:ea typeface="Noto Sans CJK JP"/>
                 <a:cs typeface="Noto Sans"/>
               </a:rPr>
-              <a:t>Appendix: 1. 追加の実例</a:t>
+              <a:t>Appendix: 1. 追加の対話</a:t>
             </a:r>
           </a:p>
         </p:txBody>
@@ -31171,7 +29869,7 @@
                 <a:ea typeface="Noto Sans CJK JP"/>
                 <a:cs typeface="Noto Sans"/>
               </a:rPr>
-              <a:t>val / 対話12121 / 全履歴 9発話 → 収録応答1発話 ／ 訳は左→右</a:t>
+              <a:t>会話の履歴（9発話）と、次の応答</a:t>
             </a:r>
           </a:p>
         </p:txBody>
@@ -31474,7 +30172,7 @@
                 <a:ea typeface="Noto Sans CJK JP"/>
                 <a:cs typeface="Noto Sans"/>
               </a:rPr>
-              <a:t>利用者：よかったです。ホテルを決めた後、評価4.5点以上、見学時間1～2時間、入場料200元以上の観光地へ行きたいです。何か提案はありますか。</a:t>
+              <a:t>利用者：よかったです。ホテルを予約したら、評価4.5点以上、見学時間1～2時間、入場料200元以上の観光地へ行きたいです。何か提案はありますか。</a:t>
             </a:r>
           </a:p>
           <a:p>
@@ -31603,8 +30301,8 @@
         </p:nvSpPr>
         <p:spPr>
           <a:xfrm>
-            <a:off x="502920" y="4700016"/>
-            <a:ext cx="8183879" cy="621792"/>
+            <a:off x="502920" y="4699000"/>
+            <a:ext cx="8183879" cy="431800"/>
           </a:xfrm>
           <a:prstGeom prst="rect">
             <a:avLst/>
@@ -31636,41 +30334,27 @@
               </a:defRPr>
             </a:pPr>
             <a:r>
-              <a:rPr sz="810" b="0" lang="ja-JP" altLang="en-US">
-                <a:solidFill>
-                  <a:srgbClr val="626669"/>
-                </a:solidFill>
-                <a:latin typeface="Noto Sans"/>
-                <a:ea typeface="Noto Sans CJK JP"/>
-                <a:cs typeface="Noto Sans"/>
-              </a:rPr>
-              <a:t>[1] Qi Zhu et al. (2020). CrossWOZ公式配布データ。固定commit df82c9fd。 val.json / dialogue 12121 / messages[0:9] → [9]。</a:t>
+              <a:rPr sz="830">
+                <a:latin typeface="Noto Sans CJK JP"/>
+              </a:rPr>
+              <a:t>[1] Zhu et al. (2020). CrossWOZ: dialogue data.</a:t>
             </a:r>
           </a:p>
           <a:p>
             <a:pPr>
-              <a:lnSpc>
-                <a:spcPts val="1200"/>
-              </a:lnSpc>
-              <a:buNone/>
-              <a:defRPr sz="810" b="0">
-                <a:solidFill>
-                  <a:srgbClr val="303437"/>
-                </a:solidFill>
-                <a:latin typeface="Noto Sans"/>
-              </a:defRPr>
-            </a:pPr>
-            <a:r>
-              <a:rPr sz="810" b="0" lang="ja-JP" altLang="en-US">
-                <a:solidFill>
-                  <a:srgbClr val="626669"/>
-                </a:solidFill>
-                <a:latin typeface="Noto Sans"/>
-                <a:ea typeface="Noto Sans CJK JP"/>
-                <a:cs typeface="Noto Sans"/>
-                <a:hlinkClick r:id="rId2"/>
-              </a:rPr>
-              <a:t>https://github.com/thu-coai/CrossWOZ/tree/df82c9fdff91b9b130f2d6b89110d3870ba6260e/data/crosswoz</a:t>
+              <a:spcBef>
+                <a:spcPts val="0"/>
+              </a:spcBef>
+              <a:spcAft>
+                <a:spcPts val="0"/>
+              </a:spcAft>
+            </a:pPr>
+            <a:r>
+              <a:rPr sz="830">
+                <a:latin typeface="Noto Sans CJK JP"/>
+                <a:hlinkClick r:id="rId3"/>
+              </a:rPr>
+              <a:t>https://github.com/thu-coai/CrossWOZ/tree/master/data/crosswoz</a:t>
             </a:r>
           </a:p>
         </p:txBody>
@@ -31736,7 +30420,7 @@
                 <a:ea typeface="Noto Sans CJK JP"/>
                 <a:cs typeface="Noto Sans"/>
               </a:rPr>
-              <a:t>形式・集計・再計算</a:t>
+              <a:t>データの読み方</a:t>
             </a:r>
           </a:p>
         </p:txBody>
@@ -31784,2243 +30468,7 @@
                 <a:ea typeface="Noto Sans CJK JP"/>
                 <a:cs typeface="Noto Sans"/>
               </a:rPr>
-              <a:t>Appendix: 2. 形式・集計・再計算</a:t>
-            </a:r>
-          </a:p>
-        </p:txBody>
-      </p:sp>
-    </p:spTree>
-  </p:cSld>
-  <p:clrMapOvr>
-    <a:masterClrMapping/>
-  </p:clrMapOvr>
-</p:sld>
-</file>
-
-<file path=ppt/slides/slide54.xml><?xml version="1.0" encoding="utf-8"?>
-<p:sld xmlns:a="http://schemas.openxmlformats.org/drawingml/2006/main" xmlns:p="http://schemas.openxmlformats.org/presentationml/2006/main" xmlns:r="http://schemas.openxmlformats.org/officeDocument/2006/relationships">
-  <p:cSld>
-    <p:spTree>
-      <p:nvGrpSpPr>
-        <p:cNvPr id="1" name=""/>
-        <p:cNvGrpSpPr/>
-        <p:nvPr/>
-      </p:nvGrpSpPr>
-      <p:grpSpPr/>
-      <p:sp>
-        <p:nvSpPr>
-          <p:cNvPr id="2" name="Title 1"/>
-          <p:cNvSpPr>
-            <a:spLocks noGrp="1"/>
-          </p:cNvSpPr>
-          <p:nvPr>
-            <p:ph type="title"/>
-          </p:nvPr>
-        </p:nvSpPr>
-        <p:spPr>
-          <a:xfrm>
-            <a:off x="468172" y="650138"/>
-            <a:ext cx="8206740" cy="616305"/>
-          </a:xfrm>
-        </p:spPr>
-        <p:txBody>
-          <a:bodyPr wrap="square" lIns="0" rIns="0" tIns="0" bIns="0">
-            <a:noAutofit/>
-          </a:bodyPr>
-          <a:lstStyle/>
-          <a:p>
-            <a:pPr algn="l">
-              <a:lnSpc>
-                <a:spcPct val="110000"/>
-              </a:lnSpc>
-              <a:buNone/>
-              <a:defRPr sz="2800" b="0">
-                <a:solidFill>
-                  <a:srgbClr val="303437"/>
-                </a:solidFill>
-                <a:latin typeface="Noto Sans"/>
-              </a:defRPr>
-            </a:pPr>
-            <a:r>
-              <a:rPr sz="2800" b="1" lang="ja-JP" altLang="en-US">
-                <a:solidFill>
-                  <a:srgbClr val="303437"/>
-                </a:solidFill>
-                <a:latin typeface="Noto Sans"/>
-                <a:ea typeface="Noto Sans CJK JP"/>
-                <a:cs typeface="Noto Sans"/>
-              </a:rPr>
-              <a:t>原版の応答単位は、合計50,813件</a:t>
-            </a:r>
-          </a:p>
-        </p:txBody>
-      </p:sp>
-      <p:sp>
-        <p:nvSpPr>
-          <p:cNvPr id="3" name="Title 2"/>
-          <p:cNvSpPr>
-            <a:spLocks noGrp="1"/>
-          </p:cNvSpPr>
-          <p:nvPr>
-            <p:ph type="title" idx="2"/>
-          </p:nvPr>
-        </p:nvSpPr>
-        <p:spPr>
-          <a:xfrm>
-            <a:off x="75895" y="0"/>
-            <a:ext cx="8115300" cy="480060"/>
-          </a:xfrm>
-        </p:spPr>
-        <p:txBody>
-          <a:bodyPr wrap="square" lIns="0" rIns="0" tIns="0" bIns="0" anchor="ctr">
-            <a:noAutofit/>
-          </a:bodyPr>
-          <a:lstStyle/>
-          <a:p>
-            <a:pPr algn="l">
-              <a:lnSpc>
-                <a:spcPct val="110000"/>
-              </a:lnSpc>
-              <a:buNone/>
-              <a:defRPr sz="1400" b="0">
-                <a:solidFill>
-                  <a:srgbClr val="303437"/>
-                </a:solidFill>
-                <a:latin typeface="Noto Sans"/>
-              </a:defRPr>
-            </a:pPr>
-            <a:r>
-              <a:rPr sz="1400" b="1" lang="ja-JP" altLang="en-US">
-                <a:solidFill>
-                  <a:srgbClr val="FFFEF8"/>
-                </a:solidFill>
-                <a:latin typeface="Noto Sans"/>
-                <a:ea typeface="Noto Sans CJK JP"/>
-                <a:cs typeface="Noto Sans"/>
-              </a:rPr>
-              <a:t>Appendix: 2. 形式・集計・再計算</a:t>
-            </a:r>
-          </a:p>
-        </p:txBody>
-      </p:sp>
-      <p:graphicFrame>
-        <p:nvGraphicFramePr>
-          <p:cNvPr id="4" name="Table 3"/>
-          <p:cNvGraphicFramePr>
-            <a:graphicFrameLocks noGrp="1"/>
-          </p:cNvGraphicFramePr>
-          <p:nvPr/>
-        </p:nvGraphicFramePr>
-        <p:xfrm>
-          <a:off x="548640" y="1508760"/>
-          <a:ext cx="8046720" cy="1828800"/>
-        </p:xfrm>
-        <a:graphic>
-          <a:graphicData uri="http://schemas.openxmlformats.org/drawingml/2006/table">
-            <a:tbl>
-              <a:tblPr firstRow="0" bandRow="0"/>
-              <a:tblGrid>
-                <a:gridCol w="1828800"/>
-                <a:gridCol w="3108960"/>
-                <a:gridCol w="3108960"/>
-              </a:tblGrid>
-              <a:tr h="457200">
-                <a:tc>
-                  <a:txBody>
-                    <a:bodyPr wrap="square">
-                      <a:noAutofit/>
-                    </a:bodyPr>
-                    <a:lstStyle/>
-                    <a:p>
-                      <a:pPr algn="l">
-                        <a:lnSpc>
-                          <a:spcPts val="2415"/>
-                        </a:lnSpc>
-                        <a:buNone/>
-                        <a:defRPr sz="2100" b="0">
-                          <a:solidFill>
-                            <a:srgbClr val="303437"/>
-                          </a:solidFill>
-                          <a:latin typeface="Noto Sans"/>
-                        </a:defRPr>
-                      </a:pPr>
-                      <a:r>
-                        <a:rPr sz="2100" b="0" lang="ja-JP" altLang="en-US">
-                          <a:solidFill>
-                            <a:srgbClr val="303437"/>
-                          </a:solidFill>
-                          <a:latin typeface="Noto Sans"/>
-                          <a:ea typeface="Noto Sans CJK JP"/>
-                          <a:cs typeface="Noto Sans"/>
-                        </a:rPr>
-                        <a:t>分割</a:t>
-                      </a:r>
-                    </a:p>
-                  </a:txBody>
-                  <a:tcPr marL="63500" marR="63500" marT="38100" marB="38100" anchor="ctr">
-                    <a:lnL w="7620">
-                      <a:noFill/>
-                    </a:lnL>
-                    <a:lnR w="7620">
-                      <a:noFill/>
-                    </a:lnR>
-                    <a:lnT w="15240">
-                      <a:solidFill>
-                        <a:srgbClr val="626669"/>
-                      </a:solidFill>
-                      <a:prstDash val="solid"/>
-                    </a:lnT>
-                    <a:lnB w="7620">
-                      <a:solidFill>
-                        <a:srgbClr val="626669"/>
-                      </a:solidFill>
-                      <a:prstDash val="solid"/>
-                    </a:lnB>
-                    <a:solidFill>
-                      <a:srgbClr val="FFFEF8"/>
-                    </a:solidFill>
-                  </a:tcPr>
-                </a:tc>
-                <a:tc>
-                  <a:txBody>
-                    <a:bodyPr wrap="square">
-                      <a:noAutofit/>
-                    </a:bodyPr>
-                    <a:lstStyle/>
-                    <a:p>
-                      <a:pPr algn="r">
-                        <a:lnSpc>
-                          <a:spcPts val="2415"/>
-                        </a:lnSpc>
-                        <a:buNone/>
-                        <a:defRPr sz="2100" b="0">
-                          <a:solidFill>
-                            <a:srgbClr val="303437"/>
-                          </a:solidFill>
-                          <a:latin typeface="Noto Sans"/>
-                        </a:defRPr>
-                      </a:pPr>
-                      <a:r>
-                        <a:rPr sz="2100" b="0" lang="ja-JP" altLang="en-US">
-                          <a:solidFill>
-                            <a:srgbClr val="303437"/>
-                          </a:solidFill>
-                          <a:latin typeface="Noto Sans"/>
-                          <a:ea typeface="Noto Sans CJK JP"/>
-                          <a:cs typeface="Noto Sans"/>
-                        </a:rPr>
-                        <a:t>利用者発話</a:t>
-                      </a:r>
-                    </a:p>
-                  </a:txBody>
-                  <a:tcPr marL="63500" marR="63500" marT="38100" marB="38100" anchor="ctr">
-                    <a:lnL w="7620">
-                      <a:noFill/>
-                    </a:lnL>
-                    <a:lnR w="7620">
-                      <a:noFill/>
-                    </a:lnR>
-                    <a:lnT w="15240">
-                      <a:solidFill>
-                        <a:srgbClr val="626669"/>
-                      </a:solidFill>
-                      <a:prstDash val="solid"/>
-                    </a:lnT>
-                    <a:lnB w="7620">
-                      <a:solidFill>
-                        <a:srgbClr val="626669"/>
-                      </a:solidFill>
-                      <a:prstDash val="solid"/>
-                    </a:lnB>
-                    <a:solidFill>
-                      <a:srgbClr val="FFFEF8"/>
-                    </a:solidFill>
-                  </a:tcPr>
-                </a:tc>
-                <a:tc>
-                  <a:txBody>
-                    <a:bodyPr wrap="square">
-                      <a:noAutofit/>
-                    </a:bodyPr>
-                    <a:lstStyle/>
-                    <a:p>
-                      <a:pPr algn="r">
-                        <a:lnSpc>
-                          <a:spcPts val="2415"/>
-                        </a:lnSpc>
-                        <a:buNone/>
-                        <a:defRPr sz="2100" b="0">
-                          <a:solidFill>
-                            <a:srgbClr val="303437"/>
-                          </a:solidFill>
-                          <a:latin typeface="Noto Sans"/>
-                        </a:defRPr>
-                      </a:pPr>
-                      <a:r>
-                        <a:rPr sz="2100" b="0" lang="ja-JP" altLang="en-US">
-                          <a:solidFill>
-                            <a:srgbClr val="303437"/>
-                          </a:solidFill>
-                          <a:latin typeface="Noto Sans"/>
-                          <a:ea typeface="Noto Sans CJK JP"/>
-                          <a:cs typeface="Noto Sans"/>
-                        </a:rPr>
-                        <a:t>sys応答</a:t>
-                      </a:r>
-                    </a:p>
-                  </a:txBody>
-                  <a:tcPr marL="63500" marR="63500" marT="38100" marB="38100" anchor="ctr">
-                    <a:lnL w="7620">
-                      <a:noFill/>
-                    </a:lnL>
-                    <a:lnR w="7620">
-                      <a:noFill/>
-                    </a:lnR>
-                    <a:lnT w="15240">
-                      <a:solidFill>
-                        <a:srgbClr val="626669"/>
-                      </a:solidFill>
-                      <a:prstDash val="solid"/>
-                    </a:lnT>
-                    <a:lnB w="7620">
-                      <a:solidFill>
-                        <a:srgbClr val="626669"/>
-                      </a:solidFill>
-                      <a:prstDash val="solid"/>
-                    </a:lnB>
-                    <a:solidFill>
-                      <a:srgbClr val="FFFEF8"/>
-                    </a:solidFill>
-                  </a:tcPr>
-                </a:tc>
-              </a:tr>
-              <a:tr h="457200">
-                <a:tc>
-                  <a:txBody>
-                    <a:bodyPr wrap="square">
-                      <a:noAutofit/>
-                    </a:bodyPr>
-                    <a:lstStyle/>
-                    <a:p>
-                      <a:pPr algn="l">
-                        <a:lnSpc>
-                          <a:spcPts val="2415"/>
-                        </a:lnSpc>
-                        <a:buNone/>
-                        <a:defRPr sz="2100" b="0">
-                          <a:solidFill>
-                            <a:srgbClr val="303437"/>
-                          </a:solidFill>
-                          <a:latin typeface="Noto Sans"/>
-                        </a:defRPr>
-                      </a:pPr>
-                      <a:r>
-                        <a:rPr sz="2100" b="0" lang="ja-JP" altLang="en-US">
-                          <a:solidFill>
-                            <a:srgbClr val="303437"/>
-                          </a:solidFill>
-                          <a:latin typeface="Noto Sans"/>
-                          <a:ea typeface="Noto Sans CJK JP"/>
-                          <a:cs typeface="Noto Sans"/>
-                        </a:rPr>
-                        <a:t>train</a:t>
-                      </a:r>
-                    </a:p>
-                  </a:txBody>
-                  <a:tcPr marL="63500" marR="63500" marT="38100" marB="38100" anchor="ctr">
-                    <a:lnL w="7620">
-                      <a:noFill/>
-                    </a:lnL>
-                    <a:lnR w="7620">
-                      <a:noFill/>
-                    </a:lnR>
-                    <a:lnT w="7620">
-                      <a:solidFill>
-                        <a:srgbClr val="626669"/>
-                      </a:solidFill>
-                      <a:prstDash val="solid"/>
-                    </a:lnT>
-                    <a:lnB w="7620">
-                      <a:noFill/>
-                    </a:lnB>
-                    <a:solidFill>
-                      <a:srgbClr val="FFFEF8"/>
-                    </a:solidFill>
-                  </a:tcPr>
-                </a:tc>
-                <a:tc>
-                  <a:txBody>
-                    <a:bodyPr wrap="square">
-                      <a:noAutofit/>
-                    </a:bodyPr>
-                    <a:lstStyle/>
-                    <a:p>
-                      <a:pPr algn="r">
-                        <a:lnSpc>
-                          <a:spcPts val="2415"/>
-                        </a:lnSpc>
-                        <a:buNone/>
-                        <a:defRPr sz="2100" b="0">
-                          <a:solidFill>
-                            <a:srgbClr val="303437"/>
-                          </a:solidFill>
-                          <a:latin typeface="Noto Sans"/>
-                        </a:defRPr>
-                      </a:pPr>
-                      <a:r>
-                        <a:rPr sz="2100" b="0" lang="ja-JP" altLang="en-US">
-                          <a:solidFill>
-                            <a:srgbClr val="303437"/>
-                          </a:solidFill>
-                          <a:latin typeface="Noto Sans"/>
-                          <a:ea typeface="Noto Sans CJK JP"/>
-                          <a:cs typeface="Noto Sans"/>
-                        </a:rPr>
-                        <a:t>42,346</a:t>
-                      </a:r>
-                    </a:p>
-                  </a:txBody>
-                  <a:tcPr marL="63500" marR="63500" marT="38100" marB="38100" anchor="ctr">
-                    <a:lnL w="7620">
-                      <a:noFill/>
-                    </a:lnL>
-                    <a:lnR w="7620">
-                      <a:noFill/>
-                    </a:lnR>
-                    <a:lnT w="7620">
-                      <a:solidFill>
-                        <a:srgbClr val="626669"/>
-                      </a:solidFill>
-                      <a:prstDash val="solid"/>
-                    </a:lnT>
-                    <a:lnB w="7620">
-                      <a:noFill/>
-                    </a:lnB>
-                    <a:solidFill>
-                      <a:srgbClr val="FFFEF8"/>
-                    </a:solidFill>
-                  </a:tcPr>
-                </a:tc>
-                <a:tc>
-                  <a:txBody>
-                    <a:bodyPr wrap="square">
-                      <a:noAutofit/>
-                    </a:bodyPr>
-                    <a:lstStyle/>
-                    <a:p>
-                      <a:pPr algn="r">
-                        <a:lnSpc>
-                          <a:spcPts val="2415"/>
-                        </a:lnSpc>
-                        <a:buNone/>
-                        <a:defRPr sz="2100" b="0">
-                          <a:solidFill>
-                            <a:srgbClr val="303437"/>
-                          </a:solidFill>
-                          <a:latin typeface="Noto Sans"/>
-                        </a:defRPr>
-                      </a:pPr>
-                      <a:r>
-                        <a:rPr sz="2100" b="0" lang="ja-JP" altLang="en-US">
-                          <a:solidFill>
-                            <a:srgbClr val="303437"/>
-                          </a:solidFill>
-                          <a:latin typeface="Noto Sans"/>
-                          <a:ea typeface="Noto Sans CJK JP"/>
-                          <a:cs typeface="Noto Sans"/>
-                        </a:rPr>
-                        <a:t>42,346</a:t>
-                      </a:r>
-                    </a:p>
-                  </a:txBody>
-                  <a:tcPr marL="63500" marR="63500" marT="38100" marB="38100" anchor="ctr">
-                    <a:lnL w="7620">
-                      <a:noFill/>
-                    </a:lnL>
-                    <a:lnR w="7620">
-                      <a:noFill/>
-                    </a:lnR>
-                    <a:lnT w="7620">
-                      <a:solidFill>
-                        <a:srgbClr val="626669"/>
-                      </a:solidFill>
-                      <a:prstDash val="solid"/>
-                    </a:lnT>
-                    <a:lnB w="7620">
-                      <a:noFill/>
-                    </a:lnB>
-                    <a:solidFill>
-                      <a:srgbClr val="FFFEF8"/>
-                    </a:solidFill>
-                  </a:tcPr>
-                </a:tc>
-              </a:tr>
-              <a:tr h="457200">
-                <a:tc>
-                  <a:txBody>
-                    <a:bodyPr wrap="square">
-                      <a:noAutofit/>
-                    </a:bodyPr>
-                    <a:lstStyle/>
-                    <a:p>
-                      <a:pPr algn="l">
-                        <a:lnSpc>
-                          <a:spcPts val="2415"/>
-                        </a:lnSpc>
-                        <a:buNone/>
-                        <a:defRPr sz="2100" b="0">
-                          <a:solidFill>
-                            <a:srgbClr val="303437"/>
-                          </a:solidFill>
-                          <a:latin typeface="Noto Sans"/>
-                        </a:defRPr>
-                      </a:pPr>
-                      <a:r>
-                        <a:rPr sz="2100" b="0" lang="ja-JP" altLang="en-US">
-                          <a:solidFill>
-                            <a:srgbClr val="303437"/>
-                          </a:solidFill>
-                          <a:latin typeface="Noto Sans"/>
-                          <a:ea typeface="Noto Sans CJK JP"/>
-                          <a:cs typeface="Noto Sans"/>
-                        </a:rPr>
-                        <a:t>val</a:t>
-                      </a:r>
-                    </a:p>
-                  </a:txBody>
-                  <a:tcPr marL="63500" marR="63500" marT="38100" marB="38100" anchor="ctr">
-                    <a:lnL w="7620">
-                      <a:noFill/>
-                    </a:lnL>
-                    <a:lnR w="7620">
-                      <a:noFill/>
-                    </a:lnR>
-                    <a:lnT w="7620">
-                      <a:noFill/>
-                    </a:lnT>
-                    <a:lnB w="7620">
-                      <a:noFill/>
-                    </a:lnB>
-                    <a:solidFill>
-                      <a:srgbClr val="FFFEF8"/>
-                    </a:solidFill>
-                  </a:tcPr>
-                </a:tc>
-                <a:tc>
-                  <a:txBody>
-                    <a:bodyPr wrap="square">
-                      <a:noAutofit/>
-                    </a:bodyPr>
-                    <a:lstStyle/>
-                    <a:p>
-                      <a:pPr algn="r">
-                        <a:lnSpc>
-                          <a:spcPts val="2415"/>
-                        </a:lnSpc>
-                        <a:buNone/>
-                        <a:defRPr sz="2100" b="0">
-                          <a:solidFill>
-                            <a:srgbClr val="303437"/>
-                          </a:solidFill>
-                          <a:latin typeface="Noto Sans"/>
-                        </a:defRPr>
-                      </a:pPr>
-                      <a:r>
-                        <a:rPr sz="2100" b="0" lang="ja-JP" altLang="en-US">
-                          <a:solidFill>
-                            <a:srgbClr val="303437"/>
-                          </a:solidFill>
-                          <a:latin typeface="Noto Sans"/>
-                          <a:ea typeface="Noto Sans CJK JP"/>
-                          <a:cs typeface="Noto Sans"/>
-                        </a:rPr>
-                        <a:t>4,229</a:t>
-                      </a:r>
-                    </a:p>
-                  </a:txBody>
-                  <a:tcPr marL="63500" marR="63500" marT="38100" marB="38100" anchor="ctr">
-                    <a:lnL w="7620">
-                      <a:noFill/>
-                    </a:lnL>
-                    <a:lnR w="7620">
-                      <a:noFill/>
-                    </a:lnR>
-                    <a:lnT w="7620">
-                      <a:noFill/>
-                    </a:lnT>
-                    <a:lnB w="7620">
-                      <a:noFill/>
-                    </a:lnB>
-                    <a:solidFill>
-                      <a:srgbClr val="FFFEF8"/>
-                    </a:solidFill>
-                  </a:tcPr>
-                </a:tc>
-                <a:tc>
-                  <a:txBody>
-                    <a:bodyPr wrap="square">
-                      <a:noAutofit/>
-                    </a:bodyPr>
-                    <a:lstStyle/>
-                    <a:p>
-                      <a:pPr algn="r">
-                        <a:lnSpc>
-                          <a:spcPts val="2415"/>
-                        </a:lnSpc>
-                        <a:buNone/>
-                        <a:defRPr sz="2100" b="0">
-                          <a:solidFill>
-                            <a:srgbClr val="303437"/>
-                          </a:solidFill>
-                          <a:latin typeface="Noto Sans"/>
-                        </a:defRPr>
-                      </a:pPr>
-                      <a:r>
-                        <a:rPr sz="2100" b="0" lang="ja-JP" altLang="en-US">
-                          <a:solidFill>
-                            <a:srgbClr val="303437"/>
-                          </a:solidFill>
-                          <a:latin typeface="Noto Sans"/>
-                          <a:ea typeface="Noto Sans CJK JP"/>
-                          <a:cs typeface="Noto Sans"/>
-                        </a:rPr>
-                        <a:t>4,229</a:t>
-                      </a:r>
-                    </a:p>
-                  </a:txBody>
-                  <a:tcPr marL="63500" marR="63500" marT="38100" marB="38100" anchor="ctr">
-                    <a:lnL w="7620">
-                      <a:noFill/>
-                    </a:lnL>
-                    <a:lnR w="7620">
-                      <a:noFill/>
-                    </a:lnR>
-                    <a:lnT w="7620">
-                      <a:noFill/>
-                    </a:lnT>
-                    <a:lnB w="7620">
-                      <a:noFill/>
-                    </a:lnB>
-                    <a:solidFill>
-                      <a:srgbClr val="FFFEF8"/>
-                    </a:solidFill>
-                  </a:tcPr>
-                </a:tc>
-              </a:tr>
-              <a:tr h="457200">
-                <a:tc>
-                  <a:txBody>
-                    <a:bodyPr wrap="square">
-                      <a:noAutofit/>
-                    </a:bodyPr>
-                    <a:lstStyle/>
-                    <a:p>
-                      <a:pPr algn="l">
-                        <a:lnSpc>
-                          <a:spcPts val="2415"/>
-                        </a:lnSpc>
-                        <a:buNone/>
-                        <a:defRPr sz="2100" b="0">
-                          <a:solidFill>
-                            <a:srgbClr val="303437"/>
-                          </a:solidFill>
-                          <a:latin typeface="Noto Sans"/>
-                        </a:defRPr>
-                      </a:pPr>
-                      <a:r>
-                        <a:rPr sz="2100" b="0" lang="ja-JP" altLang="en-US">
-                          <a:solidFill>
-                            <a:srgbClr val="303437"/>
-                          </a:solidFill>
-                          <a:latin typeface="Noto Sans"/>
-                          <a:ea typeface="Noto Sans CJK JP"/>
-                          <a:cs typeface="Noto Sans"/>
-                        </a:rPr>
-                        <a:t>test</a:t>
-                      </a:r>
-                    </a:p>
-                  </a:txBody>
-                  <a:tcPr marL="63500" marR="63500" marT="38100" marB="38100" anchor="ctr">
-                    <a:lnL w="7620">
-                      <a:noFill/>
-                    </a:lnL>
-                    <a:lnR w="7620">
-                      <a:noFill/>
-                    </a:lnR>
-                    <a:lnT w="7620">
-                      <a:noFill/>
-                    </a:lnT>
-                    <a:lnB w="15240">
-                      <a:solidFill>
-                        <a:srgbClr val="626669"/>
-                      </a:solidFill>
-                      <a:prstDash val="solid"/>
-                    </a:lnB>
-                    <a:solidFill>
-                      <a:srgbClr val="FFFEF8"/>
-                    </a:solidFill>
-                  </a:tcPr>
-                </a:tc>
-                <a:tc>
-                  <a:txBody>
-                    <a:bodyPr wrap="square">
-                      <a:noAutofit/>
-                    </a:bodyPr>
-                    <a:lstStyle/>
-                    <a:p>
-                      <a:pPr algn="r">
-                        <a:lnSpc>
-                          <a:spcPts val="2415"/>
-                        </a:lnSpc>
-                        <a:buNone/>
-                        <a:defRPr sz="2100" b="0">
-                          <a:solidFill>
-                            <a:srgbClr val="303437"/>
-                          </a:solidFill>
-                          <a:latin typeface="Noto Sans"/>
-                        </a:defRPr>
-                      </a:pPr>
-                      <a:r>
-                        <a:rPr sz="2100" b="0" lang="ja-JP" altLang="en-US">
-                          <a:solidFill>
-                            <a:srgbClr val="303437"/>
-                          </a:solidFill>
-                          <a:latin typeface="Noto Sans"/>
-                          <a:ea typeface="Noto Sans CJK JP"/>
-                          <a:cs typeface="Noto Sans"/>
-                        </a:rPr>
-                        <a:t>4,238</a:t>
-                      </a:r>
-                    </a:p>
-                  </a:txBody>
-                  <a:tcPr marL="63500" marR="63500" marT="38100" marB="38100" anchor="ctr">
-                    <a:lnL w="7620">
-                      <a:noFill/>
-                    </a:lnL>
-                    <a:lnR w="7620">
-                      <a:noFill/>
-                    </a:lnR>
-                    <a:lnT w="7620">
-                      <a:noFill/>
-                    </a:lnT>
-                    <a:lnB w="15240">
-                      <a:solidFill>
-                        <a:srgbClr val="626669"/>
-                      </a:solidFill>
-                      <a:prstDash val="solid"/>
-                    </a:lnB>
-                    <a:solidFill>
-                      <a:srgbClr val="FFFEF8"/>
-                    </a:solidFill>
-                  </a:tcPr>
-                </a:tc>
-                <a:tc>
-                  <a:txBody>
-                    <a:bodyPr wrap="square">
-                      <a:noAutofit/>
-                    </a:bodyPr>
-                    <a:lstStyle/>
-                    <a:p>
-                      <a:pPr algn="r">
-                        <a:lnSpc>
-                          <a:spcPts val="2415"/>
-                        </a:lnSpc>
-                        <a:buNone/>
-                        <a:defRPr sz="2100" b="0">
-                          <a:solidFill>
-                            <a:srgbClr val="303437"/>
-                          </a:solidFill>
-                          <a:latin typeface="Noto Sans"/>
-                        </a:defRPr>
-                      </a:pPr>
-                      <a:r>
-                        <a:rPr sz="2100" b="0" lang="ja-JP" altLang="en-US">
-                          <a:solidFill>
-                            <a:srgbClr val="303437"/>
-                          </a:solidFill>
-                          <a:latin typeface="Noto Sans"/>
-                          <a:ea typeface="Noto Sans CJK JP"/>
-                          <a:cs typeface="Noto Sans"/>
-                        </a:rPr>
-                        <a:t>4,238</a:t>
-                      </a:r>
-                    </a:p>
-                  </a:txBody>
-                  <a:tcPr marL="63500" marR="63500" marT="38100" marB="38100" anchor="ctr">
-                    <a:lnL w="7620">
-                      <a:noFill/>
-                    </a:lnL>
-                    <a:lnR w="7620">
-                      <a:noFill/>
-                    </a:lnR>
-                    <a:lnT w="7620">
-                      <a:noFill/>
-                    </a:lnT>
-                    <a:lnB w="15240">
-                      <a:solidFill>
-                        <a:srgbClr val="626669"/>
-                      </a:solidFill>
-                      <a:prstDash val="solid"/>
-                    </a:lnB>
-                    <a:solidFill>
-                      <a:srgbClr val="FFFEF8"/>
-                    </a:solidFill>
-                  </a:tcPr>
-                </a:tc>
-              </a:tr>
-            </a:tbl>
-          </a:graphicData>
-        </a:graphic>
-      </p:graphicFrame>
-      <p:sp>
-        <p:nvSpPr>
-          <p:cNvPr id="5" name="TextBox 4"/>
-          <p:cNvSpPr txBox="1"/>
-          <p:nvPr/>
-        </p:nvSpPr>
-        <p:spPr>
-          <a:xfrm>
-            <a:off x="594360" y="3474720"/>
-            <a:ext cx="7955279" cy="603504"/>
-          </a:xfrm>
-          <a:prstGeom prst="rect">
-            <a:avLst/>
-          </a:prstGeom>
-          <a:noFill/>
-        </p:spPr>
-        <p:txBody>
-          <a:bodyPr wrap="square" lIns="0" rIns="0" tIns="0" bIns="0">
-            <a:noAutofit/>
-          </a:bodyPr>
-          <a:lstStyle/>
-          <a:p>
-            <a:pPr algn="l">
-              <a:lnSpc>
-                <a:spcPts val="1930"/>
-              </a:lnSpc>
-              <a:spcBef>
-                <a:spcPts val="0"/>
-              </a:spcBef>
-              <a:spcAft>
-                <a:spcPts val="0"/>
-              </a:spcAft>
-              <a:buNone/>
-              <a:defRPr sz="1650" b="0">
-                <a:solidFill>
-                  <a:srgbClr val="303437"/>
-                </a:solidFill>
-                <a:latin typeface="Noto Sans"/>
-              </a:defRPr>
-            </a:pPr>
-            <a:r>
-              <a:rPr sz="1650" b="0" lang="ja-JP" altLang="en-US">
-                <a:solidFill>
-                  <a:srgbClr val="303437"/>
-                </a:solidFill>
-                <a:latin typeface="Noto Sans"/>
-                <a:ea typeface="Noto Sans CJK JP"/>
-                <a:cs typeface="Noto Sans"/>
-              </a:rPr>
-              <a:t>原版の全sys発話を、前方の全履歴＋次応答へ展開した場合の件数。CLEVA v1の実際の選定件数ではない。</a:t>
-            </a:r>
-          </a:p>
-        </p:txBody>
-      </p:sp>
-      <p:sp>
-        <p:nvSpPr>
-          <p:cNvPr id="6" name="sources"/>
-          <p:cNvSpPr txBox="1"/>
-          <p:nvPr/>
-        </p:nvSpPr>
-        <p:spPr>
-          <a:xfrm>
-            <a:off x="502920" y="4700016"/>
-            <a:ext cx="8183879" cy="621792"/>
-          </a:xfrm>
-          <a:prstGeom prst="rect">
-            <a:avLst/>
-          </a:prstGeom>
-          <a:noFill/>
-        </p:spPr>
-        <p:txBody>
-          <a:bodyPr wrap="square" lIns="0" rIns="0" tIns="0" bIns="0">
-            <a:noAutofit/>
-          </a:bodyPr>
-          <a:lstStyle/>
-          <a:p>
-            <a:pPr algn="l">
-              <a:lnSpc>
-                <a:spcPts val="1200"/>
-              </a:lnSpc>
-              <a:spcBef>
-                <a:spcPts val="0"/>
-              </a:spcBef>
-              <a:spcAft>
-                <a:spcPts val="0"/>
-              </a:spcAft>
-              <a:buNone/>
-              <a:defRPr sz="810" b="0">
-                <a:solidFill>
-                  <a:srgbClr val="303437"/>
-                </a:solidFill>
-                <a:latin typeface="Noto Sans"/>
-              </a:defRPr>
-            </a:pPr>
-            <a:r>
-              <a:rPr sz="810" b="0" lang="ja-JP" altLang="en-US">
-                <a:solidFill>
-                  <a:srgbClr val="626669"/>
-                </a:solidFill>
-                <a:latin typeface="Noto Sans"/>
-                <a:ea typeface="Noto Sans CJK JP"/>
-                <a:cs typeface="Noto Sans"/>
-              </a:rPr>
-              <a:t>[1] Qi Zhu et al. (2020). CrossWOZ公式配布データ。固定commit df82c9fd。</a:t>
-            </a:r>
-          </a:p>
-          <a:p>
-            <a:pPr>
-              <a:lnSpc>
-                <a:spcPts val="1200"/>
-              </a:lnSpc>
-              <a:buNone/>
-              <a:defRPr sz="810" b="0">
-                <a:solidFill>
-                  <a:srgbClr val="303437"/>
-                </a:solidFill>
-                <a:latin typeface="Noto Sans"/>
-              </a:defRPr>
-            </a:pPr>
-            <a:r>
-              <a:rPr sz="810" b="0" lang="ja-JP" altLang="en-US">
-                <a:solidFill>
-                  <a:srgbClr val="626669"/>
-                </a:solidFill>
-                <a:latin typeface="Noto Sans"/>
-                <a:ea typeface="Noto Sans CJK JP"/>
-                <a:cs typeface="Noto Sans"/>
-                <a:hlinkClick r:id="rId2"/>
-              </a:rPr>
-              <a:t>https://github.com/thu-coai/CrossWOZ/tree/df82c9fdff91b9b130f2d6b89110d3870ba6260e/data/crosswoz</a:t>
-            </a:r>
-          </a:p>
-        </p:txBody>
-      </p:sp>
-    </p:spTree>
-  </p:cSld>
-  <p:clrMapOvr>
-    <a:masterClrMapping/>
-  </p:clrMapOvr>
-</p:sld>
-</file>
-
-<file path=ppt/slides/slide55.xml><?xml version="1.0" encoding="utf-8"?>
-<p:sld xmlns:a="http://schemas.openxmlformats.org/drawingml/2006/main" xmlns:p="http://schemas.openxmlformats.org/presentationml/2006/main" xmlns:r="http://schemas.openxmlformats.org/officeDocument/2006/relationships">
-  <p:cSld>
-    <p:spTree>
-      <p:nvGrpSpPr>
-        <p:cNvPr id="1" name=""/>
-        <p:cNvGrpSpPr/>
-        <p:nvPr/>
-      </p:nvGrpSpPr>
-      <p:grpSpPr/>
-      <p:sp>
-        <p:nvSpPr>
-          <p:cNvPr id="2" name="Title 1"/>
-          <p:cNvSpPr>
-            <a:spLocks noGrp="1"/>
-          </p:cNvSpPr>
-          <p:nvPr>
-            <p:ph type="title"/>
-          </p:nvPr>
-        </p:nvSpPr>
-        <p:spPr>
-          <a:xfrm>
-            <a:off x="468172" y="650138"/>
-            <a:ext cx="8206740" cy="616305"/>
-          </a:xfrm>
-        </p:spPr>
-        <p:txBody>
-          <a:bodyPr wrap="square" lIns="0" rIns="0" tIns="0" bIns="0">
-            <a:noAutofit/>
-          </a:bodyPr>
-          <a:lstStyle/>
-          <a:p>
-            <a:pPr algn="l">
-              <a:lnSpc>
-                <a:spcPct val="110000"/>
-              </a:lnSpc>
-              <a:buNone/>
-              <a:defRPr sz="2800" b="0">
-                <a:solidFill>
-                  <a:srgbClr val="303437"/>
-                </a:solidFill>
-                <a:latin typeface="Noto Sans"/>
-              </a:defRPr>
-            </a:pPr>
-            <a:r>
-              <a:rPr sz="2800" b="1" lang="ja-JP" altLang="en-US">
-                <a:solidFill>
-                  <a:srgbClr val="303437"/>
-                </a:solidFill>
-                <a:latin typeface="Noto Sans"/>
-                <a:ea typeface="Noto Sans CJK JP"/>
-                <a:cs typeface="Noto Sans"/>
-              </a:rPr>
-              <a:t>完全一致は、状態全体を比較する</a:t>
-            </a:r>
-          </a:p>
-        </p:txBody>
-      </p:sp>
-      <p:sp>
-        <p:nvSpPr>
-          <p:cNvPr id="3" name="Title 2"/>
-          <p:cNvSpPr>
-            <a:spLocks noGrp="1"/>
-          </p:cNvSpPr>
-          <p:nvPr>
-            <p:ph type="title" idx="2"/>
-          </p:nvPr>
-        </p:nvSpPr>
-        <p:spPr>
-          <a:xfrm>
-            <a:off x="75895" y="0"/>
-            <a:ext cx="8115300" cy="480060"/>
-          </a:xfrm>
-        </p:spPr>
-        <p:txBody>
-          <a:bodyPr wrap="square" lIns="0" rIns="0" tIns="0" bIns="0" anchor="ctr">
-            <a:noAutofit/>
-          </a:bodyPr>
-          <a:lstStyle/>
-          <a:p>
-            <a:pPr algn="l">
-              <a:lnSpc>
-                <a:spcPct val="110000"/>
-              </a:lnSpc>
-              <a:buNone/>
-              <a:defRPr sz="1400" b="0">
-                <a:solidFill>
-                  <a:srgbClr val="303437"/>
-                </a:solidFill>
-                <a:latin typeface="Noto Sans"/>
-              </a:defRPr>
-            </a:pPr>
-            <a:r>
-              <a:rPr sz="1400" b="1" lang="ja-JP" altLang="en-US">
-                <a:solidFill>
-                  <a:srgbClr val="FFFEF8"/>
-                </a:solidFill>
-                <a:latin typeface="Noto Sans"/>
-                <a:ea typeface="Noto Sans CJK JP"/>
-                <a:cs typeface="Noto Sans"/>
-              </a:rPr>
-              <a:t>Appendix: 2. 形式・集計・再計算</a:t>
-            </a:r>
-          </a:p>
-        </p:txBody>
-      </p:sp>
-      <p:graphicFrame>
-        <p:nvGraphicFramePr>
-          <p:cNvPr id="4" name="Table 3"/>
-          <p:cNvGraphicFramePr>
-            <a:graphicFrameLocks noGrp="1"/>
-          </p:cNvGraphicFramePr>
-          <p:nvPr/>
-        </p:nvGraphicFramePr>
-        <p:xfrm>
-          <a:off x="548640" y="1508760"/>
-          <a:ext cx="8046720" cy="2688336"/>
-        </p:xfrm>
-        <a:graphic>
-          <a:graphicData uri="http://schemas.openxmlformats.org/drawingml/2006/table">
-            <a:tbl>
-              <a:tblPr firstRow="0" bandRow="0"/>
-              <a:tblGrid>
-                <a:gridCol w="1371600"/>
-                <a:gridCol w="4389120"/>
-                <a:gridCol w="2286000"/>
-              </a:tblGrid>
-              <a:tr h="384048">
-                <a:tc>
-                  <a:txBody>
-                    <a:bodyPr wrap="square">
-                      <a:noAutofit/>
-                    </a:bodyPr>
-                    <a:lstStyle/>
-                    <a:p>
-                      <a:pPr algn="l">
-                        <a:lnSpc>
-                          <a:spcPts val="2070"/>
-                        </a:lnSpc>
-                        <a:buNone/>
-                        <a:defRPr sz="1800" b="0">
-                          <a:solidFill>
-                            <a:srgbClr val="303437"/>
-                          </a:solidFill>
-                          <a:latin typeface="Noto Sans"/>
-                        </a:defRPr>
-                      </a:pPr>
-                      <a:r>
-                        <a:rPr sz="1800" b="0" lang="ja-JP" altLang="en-US">
-                          <a:solidFill>
-                            <a:srgbClr val="303437"/>
-                          </a:solidFill>
-                          <a:latin typeface="Noto Sans"/>
-                          <a:ea typeface="Noto Sans CJK JP"/>
-                          <a:cs typeface="Noto Sans"/>
-                        </a:rPr>
-                        <a:t>目標種</a:t>
-                      </a:r>
-                    </a:p>
-                  </a:txBody>
-                  <a:tcPr marL="63500" marR="63500" marT="38100" marB="38100" anchor="ctr">
-                    <a:lnL w="7620">
-                      <a:noFill/>
-                    </a:lnL>
-                    <a:lnR w="7620">
-                      <a:noFill/>
-                    </a:lnR>
-                    <a:lnT w="15240">
-                      <a:solidFill>
-                        <a:srgbClr val="626669"/>
-                      </a:solidFill>
-                      <a:prstDash val="solid"/>
-                    </a:lnT>
-                    <a:lnB w="7620">
-                      <a:solidFill>
-                        <a:srgbClr val="626669"/>
-                      </a:solidFill>
-                      <a:prstDash val="solid"/>
-                    </a:lnB>
-                    <a:solidFill>
-                      <a:srgbClr val="FFFEF8"/>
-                    </a:solidFill>
-                  </a:tcPr>
-                </a:tc>
-                <a:tc>
-                  <a:txBody>
-                    <a:bodyPr wrap="square">
-                      <a:noAutofit/>
-                    </a:bodyPr>
-                    <a:lstStyle/>
-                    <a:p>
-                      <a:pPr algn="r">
-                        <a:lnSpc>
-                          <a:spcPts val="2070"/>
-                        </a:lnSpc>
-                        <a:buNone/>
-                        <a:defRPr sz="1800" b="0">
-                          <a:solidFill>
-                            <a:srgbClr val="303437"/>
-                          </a:solidFill>
-                          <a:latin typeface="Noto Sans"/>
-                        </a:defRPr>
-                      </a:pPr>
-                      <a:r>
-                        <a:rPr sz="1800" b="0" lang="ja-JP" altLang="en-US">
-                          <a:solidFill>
-                            <a:srgbClr val="303437"/>
-                          </a:solidFill>
-                          <a:latin typeface="Noto Sans"/>
-                          <a:ea typeface="Noto Sans CJK JP"/>
-                          <a:cs typeface="Noto Sans"/>
-                        </a:rPr>
-                        <a:t>正解応答数／対象数</a:t>
-                      </a:r>
-                    </a:p>
-                  </a:txBody>
-                  <a:tcPr marL="63500" marR="63500" marT="38100" marB="38100" anchor="ctr">
-                    <a:lnL w="7620">
-                      <a:noFill/>
-                    </a:lnL>
-                    <a:lnR w="7620">
-                      <a:noFill/>
-                    </a:lnR>
-                    <a:lnT w="15240">
-                      <a:solidFill>
-                        <a:srgbClr val="626669"/>
-                      </a:solidFill>
-                      <a:prstDash val="solid"/>
-                    </a:lnT>
-                    <a:lnB w="7620">
-                      <a:solidFill>
-                        <a:srgbClr val="626669"/>
-                      </a:solidFill>
-                      <a:prstDash val="solid"/>
-                    </a:lnB>
-                    <a:solidFill>
-                      <a:srgbClr val="FFFEF8"/>
-                    </a:solidFill>
-                  </a:tcPr>
-                </a:tc>
-                <a:tc>
-                  <a:txBody>
-                    <a:bodyPr wrap="square">
-                      <a:noAutofit/>
-                    </a:bodyPr>
-                    <a:lstStyle/>
-                    <a:p>
-                      <a:pPr algn="r">
-                        <a:lnSpc>
-                          <a:spcPts val="2070"/>
-                        </a:lnSpc>
-                        <a:buNone/>
-                        <a:defRPr sz="1800" b="0">
-                          <a:solidFill>
-                            <a:srgbClr val="303437"/>
-                          </a:solidFill>
-                          <a:latin typeface="Noto Sans"/>
-                        </a:defRPr>
-                      </a:pPr>
-                      <a:r>
-                        <a:rPr sz="1800" b="0" lang="ja-JP" altLang="en-US">
-                          <a:solidFill>
-                            <a:srgbClr val="303437"/>
-                          </a:solidFill>
-                          <a:latin typeface="Noto Sans"/>
-                          <a:ea typeface="Noto Sans CJK JP"/>
-                          <a:cs typeface="Noto Sans"/>
-                        </a:rPr>
-                        <a:t>完全一致率</a:t>
-                      </a:r>
-                    </a:p>
-                  </a:txBody>
-                  <a:tcPr marL="63500" marR="63500" marT="38100" marB="38100" anchor="ctr">
-                    <a:lnL w="7620">
-                      <a:noFill/>
-                    </a:lnL>
-                    <a:lnR w="7620">
-                      <a:noFill/>
-                    </a:lnR>
-                    <a:lnT w="15240">
-                      <a:solidFill>
-                        <a:srgbClr val="626669"/>
-                      </a:solidFill>
-                      <a:prstDash val="solid"/>
-                    </a:lnT>
-                    <a:lnB w="7620">
-                      <a:solidFill>
-                        <a:srgbClr val="626669"/>
-                      </a:solidFill>
-                      <a:prstDash val="solid"/>
-                    </a:lnB>
-                    <a:solidFill>
-                      <a:srgbClr val="FFFEF8"/>
-                    </a:solidFill>
-                  </a:tcPr>
-                </a:tc>
-              </a:tr>
-              <a:tr h="384048">
-                <a:tc>
-                  <a:txBody>
-                    <a:bodyPr wrap="square">
-                      <a:noAutofit/>
-                    </a:bodyPr>
-                    <a:lstStyle/>
-                    <a:p>
-                      <a:pPr algn="l">
-                        <a:lnSpc>
-                          <a:spcPts val="2070"/>
-                        </a:lnSpc>
-                        <a:buNone/>
-                        <a:defRPr sz="1800" b="0">
-                          <a:solidFill>
-                            <a:srgbClr val="303437"/>
-                          </a:solidFill>
-                          <a:latin typeface="Noto Sans"/>
-                        </a:defRPr>
-                      </a:pPr>
-                      <a:r>
-                        <a:rPr sz="1800" b="0" lang="ja-JP" altLang="en-US">
-                          <a:solidFill>
-                            <a:srgbClr val="303437"/>
-                          </a:solidFill>
-                          <a:latin typeface="Noto Sans"/>
-                          <a:ea typeface="Noto Sans CJK JP"/>
-                          <a:cs typeface="Noto Sans"/>
-                        </a:rPr>
-                        <a:t>S</a:t>
-                      </a:r>
-                    </a:p>
-                  </a:txBody>
-                  <a:tcPr marL="63500" marR="63500" marT="38100" marB="38100" anchor="ctr">
-                    <a:lnL w="7620">
-                      <a:noFill/>
-                    </a:lnL>
-                    <a:lnR w="7620">
-                      <a:noFill/>
-                    </a:lnR>
-                    <a:lnT w="7620">
-                      <a:solidFill>
-                        <a:srgbClr val="626669"/>
-                      </a:solidFill>
-                      <a:prstDash val="solid"/>
-                    </a:lnT>
-                    <a:lnB w="7620">
-                      <a:noFill/>
-                    </a:lnB>
-                    <a:solidFill>
-                      <a:srgbClr val="FFFEF8"/>
-                    </a:solidFill>
-                  </a:tcPr>
-                </a:tc>
-                <a:tc>
-                  <a:txBody>
-                    <a:bodyPr wrap="square">
-                      <a:noAutofit/>
-                    </a:bodyPr>
-                    <a:lstStyle/>
-                    <a:p>
-                      <a:pPr algn="r">
-                        <a:lnSpc>
-                          <a:spcPts val="2070"/>
-                        </a:lnSpc>
-                        <a:buNone/>
-                        <a:defRPr sz="1800" b="0">
-                          <a:solidFill>
-                            <a:srgbClr val="303437"/>
-                          </a:solidFill>
-                          <a:latin typeface="Noto Sans"/>
-                        </a:defRPr>
-                      </a:pPr>
-                      <a:r>
-                        <a:rPr sz="1800" b="0" lang="ja-JP" altLang="en-US">
-                          <a:solidFill>
-                            <a:srgbClr val="303437"/>
-                          </a:solidFill>
-                          <a:latin typeface="Noto Sans"/>
-                          <a:ea typeface="Noto Sans CJK JP"/>
-                          <a:cs typeface="Noto Sans"/>
-                        </a:rPr>
-                        <a:t>101 / 120</a:t>
-                      </a:r>
-                    </a:p>
-                  </a:txBody>
-                  <a:tcPr marL="63500" marR="63500" marT="38100" marB="38100" anchor="ctr">
-                    <a:lnL w="7620">
-                      <a:noFill/>
-                    </a:lnL>
-                    <a:lnR w="7620">
-                      <a:noFill/>
-                    </a:lnR>
-                    <a:lnT w="7620">
-                      <a:solidFill>
-                        <a:srgbClr val="626669"/>
-                      </a:solidFill>
-                      <a:prstDash val="solid"/>
-                    </a:lnT>
-                    <a:lnB w="7620">
-                      <a:noFill/>
-                    </a:lnB>
-                    <a:solidFill>
-                      <a:srgbClr val="FFFEF8"/>
-                    </a:solidFill>
-                  </a:tcPr>
-                </a:tc>
-                <a:tc>
-                  <a:txBody>
-                    <a:bodyPr wrap="square">
-                      <a:noAutofit/>
-                    </a:bodyPr>
-                    <a:lstStyle/>
-                    <a:p>
-                      <a:pPr algn="r">
-                        <a:lnSpc>
-                          <a:spcPts val="2070"/>
-                        </a:lnSpc>
-                        <a:buNone/>
-                        <a:defRPr sz="1800" b="0">
-                          <a:solidFill>
-                            <a:srgbClr val="303437"/>
-                          </a:solidFill>
-                          <a:latin typeface="Noto Sans"/>
-                        </a:defRPr>
-                      </a:pPr>
-                      <a:r>
-                        <a:rPr sz="1800" b="0" lang="ja-JP" altLang="en-US">
-                          <a:solidFill>
-                            <a:srgbClr val="303437"/>
-                          </a:solidFill>
-                          <a:latin typeface="Noto Sans"/>
-                          <a:ea typeface="Noto Sans CJK JP"/>
-                          <a:cs typeface="Noto Sans"/>
-                        </a:rPr>
-                        <a:t>84.17%</a:t>
-                      </a:r>
-                    </a:p>
-                  </a:txBody>
-                  <a:tcPr marL="63500" marR="63500" marT="38100" marB="38100" anchor="ctr">
-                    <a:lnL w="7620">
-                      <a:noFill/>
-                    </a:lnL>
-                    <a:lnR w="7620">
-                      <a:noFill/>
-                    </a:lnR>
-                    <a:lnT w="7620">
-                      <a:solidFill>
-                        <a:srgbClr val="626669"/>
-                      </a:solidFill>
-                      <a:prstDash val="solid"/>
-                    </a:lnT>
-                    <a:lnB w="7620">
-                      <a:noFill/>
-                    </a:lnB>
-                    <a:solidFill>
-                      <a:srgbClr val="FFFEF8"/>
-                    </a:solidFill>
-                  </a:tcPr>
-                </a:tc>
-              </a:tr>
-              <a:tr h="384048">
-                <a:tc>
-                  <a:txBody>
-                    <a:bodyPr wrap="square">
-                      <a:noAutofit/>
-                    </a:bodyPr>
-                    <a:lstStyle/>
-                    <a:p>
-                      <a:pPr algn="l">
-                        <a:lnSpc>
-                          <a:spcPts val="2070"/>
-                        </a:lnSpc>
-                        <a:buNone/>
-                        <a:defRPr sz="1800" b="0">
-                          <a:solidFill>
-                            <a:srgbClr val="303437"/>
-                          </a:solidFill>
-                          <a:latin typeface="Noto Sans"/>
-                        </a:defRPr>
-                      </a:pPr>
-                      <a:r>
-                        <a:rPr sz="1800" b="0" lang="ja-JP" altLang="en-US">
-                          <a:solidFill>
-                            <a:srgbClr val="303437"/>
-                          </a:solidFill>
-                          <a:latin typeface="Noto Sans"/>
-                          <a:ea typeface="Noto Sans CJK JP"/>
-                          <a:cs typeface="Noto Sans"/>
-                        </a:rPr>
-                        <a:t>M</a:t>
-                      </a:r>
-                    </a:p>
-                  </a:txBody>
-                  <a:tcPr marL="63500" marR="63500" marT="38100" marB="38100" anchor="ctr">
-                    <a:lnL w="7620">
-                      <a:noFill/>
-                    </a:lnL>
-                    <a:lnR w="7620">
-                      <a:noFill/>
-                    </a:lnR>
-                    <a:lnT w="7620">
-                      <a:noFill/>
-                    </a:lnT>
-                    <a:lnB w="7620">
-                      <a:noFill/>
-                    </a:lnB>
-                    <a:solidFill>
-                      <a:srgbClr val="FFFEF8"/>
-                    </a:solidFill>
-                  </a:tcPr>
-                </a:tc>
-                <a:tc>
-                  <a:txBody>
-                    <a:bodyPr wrap="square">
-                      <a:noAutofit/>
-                    </a:bodyPr>
-                    <a:lstStyle/>
-                    <a:p>
-                      <a:pPr algn="r">
-                        <a:lnSpc>
-                          <a:spcPts val="2070"/>
-                        </a:lnSpc>
-                        <a:buNone/>
-                        <a:defRPr sz="1800" b="0">
-                          <a:solidFill>
-                            <a:srgbClr val="303437"/>
-                          </a:solidFill>
-                          <a:latin typeface="Noto Sans"/>
-                        </a:defRPr>
-                      </a:pPr>
-                      <a:r>
-                        <a:rPr sz="1800" b="0" lang="ja-JP" altLang="en-US">
-                          <a:solidFill>
-                            <a:srgbClr val="303437"/>
-                          </a:solidFill>
-                          <a:latin typeface="Noto Sans"/>
-                          <a:ea typeface="Noto Sans CJK JP"/>
-                          <a:cs typeface="Noto Sans"/>
-                        </a:rPr>
-                        <a:t>863 / 1,104</a:t>
-                      </a:r>
-                    </a:p>
-                  </a:txBody>
-                  <a:tcPr marL="63500" marR="63500" marT="38100" marB="38100" anchor="ctr">
-                    <a:lnL w="7620">
-                      <a:noFill/>
-                    </a:lnL>
-                    <a:lnR w="7620">
-                      <a:noFill/>
-                    </a:lnR>
-                    <a:lnT w="7620">
-                      <a:noFill/>
-                    </a:lnT>
-                    <a:lnB w="7620">
-                      <a:noFill/>
-                    </a:lnB>
-                    <a:solidFill>
-                      <a:srgbClr val="FFFEF8"/>
-                    </a:solidFill>
-                  </a:tcPr>
-                </a:tc>
-                <a:tc>
-                  <a:txBody>
-                    <a:bodyPr wrap="square">
-                      <a:noAutofit/>
-                    </a:bodyPr>
-                    <a:lstStyle/>
-                    <a:p>
-                      <a:pPr algn="r">
-                        <a:lnSpc>
-                          <a:spcPts val="2070"/>
-                        </a:lnSpc>
-                        <a:buNone/>
-                        <a:defRPr sz="1800" b="0">
-                          <a:solidFill>
-                            <a:srgbClr val="303437"/>
-                          </a:solidFill>
-                          <a:latin typeface="Noto Sans"/>
-                        </a:defRPr>
-                      </a:pPr>
-                      <a:r>
-                        <a:rPr sz="1800" b="0" lang="ja-JP" altLang="en-US">
-                          <a:solidFill>
-                            <a:srgbClr val="303437"/>
-                          </a:solidFill>
-                          <a:latin typeface="Noto Sans"/>
-                          <a:ea typeface="Noto Sans CJK JP"/>
-                          <a:cs typeface="Noto Sans"/>
-                        </a:rPr>
-                        <a:t>78.17%</a:t>
-                      </a:r>
-                    </a:p>
-                  </a:txBody>
-                  <a:tcPr marL="63500" marR="63500" marT="38100" marB="38100" anchor="ctr">
-                    <a:lnL w="7620">
-                      <a:noFill/>
-                    </a:lnL>
-                    <a:lnR w="7620">
-                      <a:noFill/>
-                    </a:lnR>
-                    <a:lnT w="7620">
-                      <a:noFill/>
-                    </a:lnT>
-                    <a:lnB w="7620">
-                      <a:noFill/>
-                    </a:lnB>
-                    <a:solidFill>
-                      <a:srgbClr val="FFFEF8"/>
-                    </a:solidFill>
-                  </a:tcPr>
-                </a:tc>
-              </a:tr>
-              <a:tr h="384048">
-                <a:tc>
-                  <a:txBody>
-                    <a:bodyPr wrap="square">
-                      <a:noAutofit/>
-                    </a:bodyPr>
-                    <a:lstStyle/>
-                    <a:p>
-                      <a:pPr algn="l">
-                        <a:lnSpc>
-                          <a:spcPts val="2070"/>
-                        </a:lnSpc>
-                        <a:buNone/>
-                        <a:defRPr sz="1800" b="0">
-                          <a:solidFill>
-                            <a:srgbClr val="303437"/>
-                          </a:solidFill>
-                          <a:latin typeface="Noto Sans"/>
-                        </a:defRPr>
-                      </a:pPr>
-                      <a:r>
-                        <a:rPr sz="1800" b="0" lang="ja-JP" altLang="en-US">
-                          <a:solidFill>
-                            <a:srgbClr val="303437"/>
-                          </a:solidFill>
-                          <a:latin typeface="Noto Sans"/>
-                          <a:ea typeface="Noto Sans CJK JP"/>
-                          <a:cs typeface="Noto Sans"/>
-                        </a:rPr>
-                        <a:t>M+T</a:t>
-                      </a:r>
-                    </a:p>
-                  </a:txBody>
-                  <a:tcPr marL="63500" marR="63500" marT="38100" marB="38100" anchor="ctr">
-                    <a:lnL w="7620">
-                      <a:noFill/>
-                    </a:lnL>
-                    <a:lnR w="7620">
-                      <a:noFill/>
-                    </a:lnR>
-                    <a:lnT w="7620">
-                      <a:noFill/>
-                    </a:lnT>
-                    <a:lnB w="7620">
-                      <a:noFill/>
-                    </a:lnB>
-                    <a:solidFill>
-                      <a:srgbClr val="FFFEF8"/>
-                    </a:solidFill>
-                  </a:tcPr>
-                </a:tc>
-                <a:tc>
-                  <a:txBody>
-                    <a:bodyPr wrap="square">
-                      <a:noAutofit/>
-                    </a:bodyPr>
-                    <a:lstStyle/>
-                    <a:p>
-                      <a:pPr algn="r">
-                        <a:lnSpc>
-                          <a:spcPts val="2070"/>
-                        </a:lnSpc>
-                        <a:buNone/>
-                        <a:defRPr sz="1800" b="0">
-                          <a:solidFill>
-                            <a:srgbClr val="303437"/>
-                          </a:solidFill>
-                          <a:latin typeface="Noto Sans"/>
-                        </a:defRPr>
-                      </a:pPr>
-                      <a:r>
-                        <a:rPr sz="1800" b="0" lang="ja-JP" altLang="en-US">
-                          <a:solidFill>
-                            <a:srgbClr val="303437"/>
-                          </a:solidFill>
-                          <a:latin typeface="Noto Sans"/>
-                          <a:ea typeface="Noto Sans CJK JP"/>
-                          <a:cs typeface="Noto Sans"/>
-                        </a:rPr>
-                        <a:t>535 / 653</a:t>
-                      </a:r>
-                    </a:p>
-                  </a:txBody>
-                  <a:tcPr marL="63500" marR="63500" marT="38100" marB="38100" anchor="ctr">
-                    <a:lnL w="7620">
-                      <a:noFill/>
-                    </a:lnL>
-                    <a:lnR w="7620">
-                      <a:noFill/>
-                    </a:lnR>
-                    <a:lnT w="7620">
-                      <a:noFill/>
-                    </a:lnT>
-                    <a:lnB w="7620">
-                      <a:noFill/>
-                    </a:lnB>
-                    <a:solidFill>
-                      <a:srgbClr val="FFFEF8"/>
-                    </a:solidFill>
-                  </a:tcPr>
-                </a:tc>
-                <a:tc>
-                  <a:txBody>
-                    <a:bodyPr wrap="square">
-                      <a:noAutofit/>
-                    </a:bodyPr>
-                    <a:lstStyle/>
-                    <a:p>
-                      <a:pPr algn="r">
-                        <a:lnSpc>
-                          <a:spcPts val="2070"/>
-                        </a:lnSpc>
-                        <a:buNone/>
-                        <a:defRPr sz="1800" b="0">
-                          <a:solidFill>
-                            <a:srgbClr val="303437"/>
-                          </a:solidFill>
-                          <a:latin typeface="Noto Sans"/>
-                        </a:defRPr>
-                      </a:pPr>
-                      <a:r>
-                        <a:rPr sz="1800" b="0" lang="ja-JP" altLang="en-US">
-                          <a:solidFill>
-                            <a:srgbClr val="303437"/>
-                          </a:solidFill>
-                          <a:latin typeface="Noto Sans"/>
-                          <a:ea typeface="Noto Sans CJK JP"/>
-                          <a:cs typeface="Noto Sans"/>
-                        </a:rPr>
-                        <a:t>81.93%</a:t>
-                      </a:r>
-                    </a:p>
-                  </a:txBody>
-                  <a:tcPr marL="63500" marR="63500" marT="38100" marB="38100" anchor="ctr">
-                    <a:lnL w="7620">
-                      <a:noFill/>
-                    </a:lnL>
-                    <a:lnR w="7620">
-                      <a:noFill/>
-                    </a:lnR>
-                    <a:lnT w="7620">
-                      <a:noFill/>
-                    </a:lnT>
-                    <a:lnB w="7620">
-                      <a:noFill/>
-                    </a:lnB>
-                    <a:solidFill>
-                      <a:srgbClr val="FFFEF8"/>
-                    </a:solidFill>
-                  </a:tcPr>
-                </a:tc>
-              </a:tr>
-              <a:tr h="384048">
-                <a:tc>
-                  <a:txBody>
-                    <a:bodyPr wrap="square">
-                      <a:noAutofit/>
-                    </a:bodyPr>
-                    <a:lstStyle/>
-                    <a:p>
-                      <a:pPr algn="l">
-                        <a:lnSpc>
-                          <a:spcPts val="2070"/>
-                        </a:lnSpc>
-                        <a:buNone/>
-                        <a:defRPr sz="1800" b="0">
-                          <a:solidFill>
-                            <a:srgbClr val="303437"/>
-                          </a:solidFill>
-                          <a:latin typeface="Noto Sans"/>
-                        </a:defRPr>
-                      </a:pPr>
-                      <a:r>
-                        <a:rPr sz="1800" b="0" lang="ja-JP" altLang="en-US">
-                          <a:solidFill>
-                            <a:srgbClr val="303437"/>
-                          </a:solidFill>
-                          <a:latin typeface="Noto Sans"/>
-                          <a:ea typeface="Noto Sans CJK JP"/>
-                          <a:cs typeface="Noto Sans"/>
-                        </a:rPr>
-                        <a:t>CM</a:t>
-                      </a:r>
-                    </a:p>
-                  </a:txBody>
-                  <a:tcPr marL="63500" marR="63500" marT="38100" marB="38100" anchor="ctr">
-                    <a:lnL w="7620">
-                      <a:noFill/>
-                    </a:lnL>
-                    <a:lnR w="7620">
-                      <a:noFill/>
-                    </a:lnR>
-                    <a:lnT w="7620">
-                      <a:noFill/>
-                    </a:lnT>
-                    <a:lnB w="7620">
-                      <a:noFill/>
-                    </a:lnB>
-                    <a:solidFill>
-                      <a:srgbClr val="FFFEF8"/>
-                    </a:solidFill>
-                  </a:tcPr>
-                </a:tc>
-                <a:tc>
-                  <a:txBody>
-                    <a:bodyPr wrap="square">
-                      <a:noAutofit/>
-                    </a:bodyPr>
-                    <a:lstStyle/>
-                    <a:p>
-                      <a:pPr algn="r">
-                        <a:lnSpc>
-                          <a:spcPts val="2070"/>
-                        </a:lnSpc>
-                        <a:buNone/>
-                        <a:defRPr sz="1800" b="0">
-                          <a:solidFill>
-                            <a:srgbClr val="303437"/>
-                          </a:solidFill>
-                          <a:latin typeface="Noto Sans"/>
-                        </a:defRPr>
-                      </a:pPr>
-                      <a:r>
-                        <a:rPr sz="1800" b="0" lang="ja-JP" altLang="en-US">
-                          <a:solidFill>
-                            <a:srgbClr val="303437"/>
-                          </a:solidFill>
-                          <a:latin typeface="Noto Sans"/>
-                          <a:ea typeface="Noto Sans CJK JP"/>
-                          <a:cs typeface="Noto Sans"/>
-                        </a:rPr>
-                        <a:t>1,106 / 1,745</a:t>
-                      </a:r>
-                    </a:p>
-                  </a:txBody>
-                  <a:tcPr marL="63500" marR="63500" marT="38100" marB="38100" anchor="ctr">
-                    <a:lnL w="7620">
-                      <a:noFill/>
-                    </a:lnL>
-                    <a:lnR w="7620">
-                      <a:noFill/>
-                    </a:lnR>
-                    <a:lnT w="7620">
-                      <a:noFill/>
-                    </a:lnT>
-                    <a:lnB w="7620">
-                      <a:noFill/>
-                    </a:lnB>
-                    <a:solidFill>
-                      <a:srgbClr val="FFFEF8"/>
-                    </a:solidFill>
-                  </a:tcPr>
-                </a:tc>
-                <a:tc>
-                  <a:txBody>
-                    <a:bodyPr wrap="square">
-                      <a:noAutofit/>
-                    </a:bodyPr>
-                    <a:lstStyle/>
-                    <a:p>
-                      <a:pPr algn="r">
-                        <a:lnSpc>
-                          <a:spcPts val="2070"/>
-                        </a:lnSpc>
-                        <a:buNone/>
-                        <a:defRPr sz="1800" b="0">
-                          <a:solidFill>
-                            <a:srgbClr val="303437"/>
-                          </a:solidFill>
-                          <a:latin typeface="Noto Sans"/>
-                        </a:defRPr>
-                      </a:pPr>
-                      <a:r>
-                        <a:rPr sz="1800" b="0" lang="ja-JP" altLang="en-US">
-                          <a:solidFill>
-                            <a:srgbClr val="303437"/>
-                          </a:solidFill>
-                          <a:latin typeface="Noto Sans"/>
-                          <a:ea typeface="Noto Sans CJK JP"/>
-                          <a:cs typeface="Noto Sans"/>
-                        </a:rPr>
-                        <a:t>63.38%</a:t>
-                      </a:r>
-                    </a:p>
-                  </a:txBody>
-                  <a:tcPr marL="63500" marR="63500" marT="38100" marB="38100" anchor="ctr">
-                    <a:lnL w="7620">
-                      <a:noFill/>
-                    </a:lnL>
-                    <a:lnR w="7620">
-                      <a:noFill/>
-                    </a:lnR>
-                    <a:lnT w="7620">
-                      <a:noFill/>
-                    </a:lnT>
-                    <a:lnB w="7620">
-                      <a:noFill/>
-                    </a:lnB>
-                    <a:solidFill>
-                      <a:srgbClr val="FFFEF8"/>
-                    </a:solidFill>
-                  </a:tcPr>
-                </a:tc>
-              </a:tr>
-              <a:tr h="384048">
-                <a:tc>
-                  <a:txBody>
-                    <a:bodyPr wrap="square">
-                      <a:noAutofit/>
-                    </a:bodyPr>
-                    <a:lstStyle/>
-                    <a:p>
-                      <a:pPr algn="l">
-                        <a:lnSpc>
-                          <a:spcPts val="2070"/>
-                        </a:lnSpc>
-                        <a:buNone/>
-                        <a:defRPr sz="1800" b="0">
-                          <a:solidFill>
-                            <a:srgbClr val="303437"/>
-                          </a:solidFill>
-                          <a:latin typeface="Noto Sans"/>
-                        </a:defRPr>
-                      </a:pPr>
-                      <a:r>
-                        <a:rPr sz="1800" b="0" lang="ja-JP" altLang="en-US">
-                          <a:solidFill>
-                            <a:srgbClr val="303437"/>
-                          </a:solidFill>
-                          <a:latin typeface="Noto Sans"/>
-                          <a:ea typeface="Noto Sans CJK JP"/>
-                          <a:cs typeface="Noto Sans"/>
-                        </a:rPr>
-                        <a:t>CM+T</a:t>
-                      </a:r>
-                    </a:p>
-                  </a:txBody>
-                  <a:tcPr marL="63500" marR="63500" marT="38100" marB="38100" anchor="ctr">
-                    <a:lnL w="7620">
-                      <a:noFill/>
-                    </a:lnL>
-                    <a:lnR w="7620">
-                      <a:noFill/>
-                    </a:lnR>
-                    <a:lnT w="7620">
-                      <a:noFill/>
-                    </a:lnT>
-                    <a:lnB w="7620">
-                      <a:noFill/>
-                    </a:lnB>
-                    <a:solidFill>
-                      <a:srgbClr val="FFFEF8"/>
-                    </a:solidFill>
-                  </a:tcPr>
-                </a:tc>
-                <a:tc>
-                  <a:txBody>
-                    <a:bodyPr wrap="square">
-                      <a:noAutofit/>
-                    </a:bodyPr>
-                    <a:lstStyle/>
-                    <a:p>
-                      <a:pPr algn="r">
-                        <a:lnSpc>
-                          <a:spcPts val="2070"/>
-                        </a:lnSpc>
-                        <a:buNone/>
-                        <a:defRPr sz="1800" b="0">
-                          <a:solidFill>
-                            <a:srgbClr val="303437"/>
-                          </a:solidFill>
-                          <a:latin typeface="Noto Sans"/>
-                        </a:defRPr>
-                      </a:pPr>
-                      <a:r>
-                        <a:rPr sz="1800" b="0" lang="ja-JP" altLang="en-US">
-                          <a:solidFill>
-                            <a:srgbClr val="303437"/>
-                          </a:solidFill>
-                          <a:latin typeface="Noto Sans"/>
-                          <a:ea typeface="Noto Sans CJK JP"/>
-                          <a:cs typeface="Noto Sans"/>
-                        </a:rPr>
-                        <a:t>418 / 616</a:t>
-                      </a:r>
-                    </a:p>
-                  </a:txBody>
-                  <a:tcPr marL="63500" marR="63500" marT="38100" marB="38100" anchor="ctr">
-                    <a:lnL w="7620">
-                      <a:noFill/>
-                    </a:lnL>
-                    <a:lnR w="7620">
-                      <a:noFill/>
-                    </a:lnR>
-                    <a:lnT w="7620">
-                      <a:noFill/>
-                    </a:lnT>
-                    <a:lnB w="7620">
-                      <a:noFill/>
-                    </a:lnB>
-                    <a:solidFill>
-                      <a:srgbClr val="FFFEF8"/>
-                    </a:solidFill>
-                  </a:tcPr>
-                </a:tc>
-                <a:tc>
-                  <a:txBody>
-                    <a:bodyPr wrap="square">
-                      <a:noAutofit/>
-                    </a:bodyPr>
-                    <a:lstStyle/>
-                    <a:p>
-                      <a:pPr algn="r">
-                        <a:lnSpc>
-                          <a:spcPts val="2070"/>
-                        </a:lnSpc>
-                        <a:buNone/>
-                        <a:defRPr sz="1800" b="0">
-                          <a:solidFill>
-                            <a:srgbClr val="303437"/>
-                          </a:solidFill>
-                          <a:latin typeface="Noto Sans"/>
-                        </a:defRPr>
-                      </a:pPr>
-                      <a:r>
-                        <a:rPr sz="1800" b="0" lang="ja-JP" altLang="en-US">
-                          <a:solidFill>
-                            <a:srgbClr val="303437"/>
-                          </a:solidFill>
-                          <a:latin typeface="Noto Sans"/>
-                          <a:ea typeface="Noto Sans CJK JP"/>
-                          <a:cs typeface="Noto Sans"/>
-                        </a:rPr>
-                        <a:t>67.86%</a:t>
-                      </a:r>
-                    </a:p>
-                  </a:txBody>
-                  <a:tcPr marL="63500" marR="63500" marT="38100" marB="38100" anchor="ctr">
-                    <a:lnL w="7620">
-                      <a:noFill/>
-                    </a:lnL>
-                    <a:lnR w="7620">
-                      <a:noFill/>
-                    </a:lnR>
-                    <a:lnT w="7620">
-                      <a:noFill/>
-                    </a:lnT>
-                    <a:lnB w="7620">
-                      <a:noFill/>
-                    </a:lnB>
-                    <a:solidFill>
-                      <a:srgbClr val="FFFEF8"/>
-                    </a:solidFill>
-                  </a:tcPr>
-                </a:tc>
-              </a:tr>
-              <a:tr h="384048">
-                <a:tc>
-                  <a:txBody>
-                    <a:bodyPr wrap="square">
-                      <a:noAutofit/>
-                    </a:bodyPr>
-                    <a:lstStyle/>
-                    <a:p>
-                      <a:pPr algn="l">
-                        <a:lnSpc>
-                          <a:spcPts val="2070"/>
-                        </a:lnSpc>
-                        <a:buNone/>
-                        <a:defRPr sz="1800" b="0">
-                          <a:solidFill>
-                            <a:srgbClr val="303437"/>
-                          </a:solidFill>
-                          <a:latin typeface="Noto Sans"/>
-                        </a:defRPr>
-                      </a:pPr>
-                      <a:r>
-                        <a:rPr sz="1800" b="0" lang="ja-JP" altLang="en-US">
-                          <a:solidFill>
-                            <a:srgbClr val="303437"/>
-                          </a:solidFill>
-                          <a:latin typeface="Noto Sans"/>
-                          <a:ea typeface="Noto Sans CJK JP"/>
-                          <a:cs typeface="Noto Sans"/>
-                        </a:rPr>
-                        <a:t>全体</a:t>
-                      </a:r>
-                    </a:p>
-                  </a:txBody>
-                  <a:tcPr marL="63500" marR="63500" marT="38100" marB="38100" anchor="ctr">
-                    <a:lnL w="7620">
-                      <a:noFill/>
-                    </a:lnL>
-                    <a:lnR w="7620">
-                      <a:noFill/>
-                    </a:lnR>
-                    <a:lnT w="7620">
-                      <a:noFill/>
-                    </a:lnT>
-                    <a:lnB w="15240">
-                      <a:solidFill>
-                        <a:srgbClr val="626669"/>
-                      </a:solidFill>
-                      <a:prstDash val="solid"/>
-                    </a:lnB>
-                    <a:solidFill>
-                      <a:srgbClr val="FFFEF8"/>
-                    </a:solidFill>
-                  </a:tcPr>
-                </a:tc>
-                <a:tc>
-                  <a:txBody>
-                    <a:bodyPr wrap="square">
-                      <a:noAutofit/>
-                    </a:bodyPr>
-                    <a:lstStyle/>
-                    <a:p>
-                      <a:pPr algn="r">
-                        <a:lnSpc>
-                          <a:spcPts val="2070"/>
-                        </a:lnSpc>
-                        <a:buNone/>
-                        <a:defRPr sz="1800" b="0">
-                          <a:solidFill>
-                            <a:srgbClr val="303437"/>
-                          </a:solidFill>
-                          <a:latin typeface="Noto Sans"/>
-                        </a:defRPr>
-                      </a:pPr>
-                      <a:r>
-                        <a:rPr sz="1800" b="0" lang="ja-JP" altLang="en-US">
-                          <a:solidFill>
-                            <a:srgbClr val="303437"/>
-                          </a:solidFill>
-                          <a:latin typeface="Noto Sans"/>
-                          <a:ea typeface="Noto Sans CJK JP"/>
-                          <a:cs typeface="Noto Sans"/>
-                        </a:rPr>
-                        <a:t>3,023 / 4,238</a:t>
-                      </a:r>
-                    </a:p>
-                  </a:txBody>
-                  <a:tcPr marL="63500" marR="63500" marT="38100" marB="38100" anchor="ctr">
-                    <a:lnL w="7620">
-                      <a:noFill/>
-                    </a:lnL>
-                    <a:lnR w="7620">
-                      <a:noFill/>
-                    </a:lnR>
-                    <a:lnT w="7620">
-                      <a:noFill/>
-                    </a:lnT>
-                    <a:lnB w="15240">
-                      <a:solidFill>
-                        <a:srgbClr val="626669"/>
-                      </a:solidFill>
-                      <a:prstDash val="solid"/>
-                    </a:lnB>
-                    <a:solidFill>
-                      <a:srgbClr val="FFFEF8"/>
-                    </a:solidFill>
-                  </a:tcPr>
-                </a:tc>
-                <a:tc>
-                  <a:txBody>
-                    <a:bodyPr wrap="square">
-                      <a:noAutofit/>
-                    </a:bodyPr>
-                    <a:lstStyle/>
-                    <a:p>
-                      <a:pPr algn="r">
-                        <a:lnSpc>
-                          <a:spcPts val="2070"/>
-                        </a:lnSpc>
-                        <a:buNone/>
-                        <a:defRPr sz="1800" b="0">
-                          <a:solidFill>
-                            <a:srgbClr val="303437"/>
-                          </a:solidFill>
-                          <a:latin typeface="Noto Sans"/>
-                        </a:defRPr>
-                      </a:pPr>
-                      <a:r>
-                        <a:rPr sz="1800" b="0" lang="ja-JP" altLang="en-US">
-                          <a:solidFill>
-                            <a:srgbClr val="303437"/>
-                          </a:solidFill>
-                          <a:latin typeface="Noto Sans"/>
-                          <a:ea typeface="Noto Sans CJK JP"/>
-                          <a:cs typeface="Noto Sans"/>
-                        </a:rPr>
-                        <a:t>71.33%</a:t>
-                      </a:r>
-                    </a:p>
-                  </a:txBody>
-                  <a:tcPr marL="63500" marR="63500" marT="38100" marB="38100" anchor="ctr">
-                    <a:lnL w="7620">
-                      <a:noFill/>
-                    </a:lnL>
-                    <a:lnR w="7620">
-                      <a:noFill/>
-                    </a:lnR>
-                    <a:lnT w="7620">
-                      <a:noFill/>
-                    </a:lnT>
-                    <a:lnB w="15240">
-                      <a:solidFill>
-                        <a:srgbClr val="626669"/>
-                      </a:solidFill>
-                      <a:prstDash val="solid"/>
-                    </a:lnB>
-                    <a:solidFill>
-                      <a:srgbClr val="FFFEF8"/>
-                    </a:solidFill>
-                  </a:tcPr>
-                </a:tc>
-              </a:tr>
-            </a:tbl>
-          </a:graphicData>
-        </a:graphic>
-      </p:graphicFrame>
-      <p:sp>
-        <p:nvSpPr>
-          <p:cNvPr id="5" name="sources"/>
-          <p:cNvSpPr txBox="1"/>
-          <p:nvPr/>
-        </p:nvSpPr>
-        <p:spPr>
-          <a:xfrm>
-            <a:off x="502920" y="4700016"/>
-            <a:ext cx="8183879" cy="621792"/>
-          </a:xfrm>
-          <a:prstGeom prst="rect">
-            <a:avLst/>
-          </a:prstGeom>
-          <a:noFill/>
-        </p:spPr>
-        <p:txBody>
-          <a:bodyPr wrap="square" lIns="0" rIns="0" tIns="0" bIns="0">
-            <a:noAutofit/>
-          </a:bodyPr>
-          <a:lstStyle/>
-          <a:p>
-            <a:pPr algn="l">
-              <a:lnSpc>
-                <a:spcPts val="1200"/>
-              </a:lnSpc>
-              <a:spcBef>
-                <a:spcPts val="0"/>
-              </a:spcBef>
-              <a:spcAft>
-                <a:spcPts val="0"/>
-              </a:spcAft>
-              <a:buNone/>
-              <a:defRPr sz="810" b="0">
-                <a:solidFill>
-                  <a:srgbClr val="303437"/>
-                </a:solidFill>
-                <a:latin typeface="Noto Sans"/>
-              </a:defRPr>
-            </a:pPr>
-            <a:r>
-              <a:rPr sz="810" b="0" lang="ja-JP" altLang="en-US">
-                <a:solidFill>
-                  <a:srgbClr val="626669"/>
-                </a:solidFill>
-                <a:latin typeface="Noto Sans"/>
-                <a:ea typeface="Noto Sans CJK JP"/>
-                <a:cs typeface="Noto Sans"/>
-              </a:rPr>
-              <a:t>[1] Qi Zhu et al. CrossWOZ RuleDST / evaluate.py. 固定commit df82c9fd。</a:t>
-            </a:r>
-          </a:p>
-          <a:p>
-            <a:pPr>
-              <a:lnSpc>
-                <a:spcPts val="1200"/>
-              </a:lnSpc>
-              <a:buNone/>
-              <a:defRPr sz="810" b="0">
-                <a:solidFill>
-                  <a:srgbClr val="303437"/>
-                </a:solidFill>
-                <a:latin typeface="Noto Sans"/>
-              </a:defRPr>
-            </a:pPr>
-            <a:r>
-              <a:rPr sz="810" b="0" lang="ja-JP" altLang="en-US">
-                <a:solidFill>
-                  <a:srgbClr val="626669"/>
-                </a:solidFill>
-                <a:latin typeface="Noto Sans"/>
-                <a:ea typeface="Noto Sans CJK JP"/>
-                <a:cs typeface="Noto Sans"/>
-                <a:hlinkClick r:id="rId2"/>
-              </a:rPr>
-              <a:t>https://github.com/thu-coai/CrossWOZ/blob/df82c9fdff91b9b130f2d6b89110d3870ba6260e/convlab2/dst/rule/crosswoz/evaluate.py</a:t>
+              <a:t>Appendix: 2. データの読み方</a:t>
             </a:r>
           </a:p>
         </p:txBody>
@@ -34086,7 +30534,7 @@
                 <a:ea typeface="Noto Sans CJK JP"/>
                 <a:cs typeface="Noto Sans"/>
               </a:rPr>
-              <a:t>検索前後の差は、周辺条件に現れる</a:t>
+              <a:t>ZIP内のJSONから、一つの対話を読む</a:t>
             </a:r>
           </a:p>
         </p:txBody>
@@ -34134,7 +30582,7 @@
                 <a:ea typeface="Noto Sans CJK JP"/>
                 <a:cs typeface="Noto Sans"/>
               </a:rPr>
-              <a:t>Appendix: 2. 形式・集計・再計算</a:t>
+              <a:t>Appendix: 2. データの読み方</a:t>
             </a:r>
           </a:p>
         </p:txBody>
@@ -34206,7 +30654,7 @@
                 <a:ea typeface="Noto Sans CJK JP"/>
                 <a:cs typeface="Liberation Mono"/>
               </a:rPr>
-              <a:t>sys_state_init["酒店"]["周边餐馆"] = (</a:t>
+              <a:t>import json</a:t>
             </a:r>
           </a:p>
           <a:p>
@@ -34237,7 +30685,7 @@
                 <a:ea typeface="Noto Sans CJK JP"/>
                 <a:cs typeface="Liberation Mono"/>
               </a:rPr>
-              <a:t>    "站点比萨(北大餐厅)"</a:t>
+              <a:t>from zipfile import ZipFile</a:t>
             </a:r>
           </a:p>
           <a:p>
@@ -34268,7 +30716,7 @@
                 <a:ea typeface="Noto Sans CJK JP"/>
                 <a:cs typeface="Liberation Mono"/>
               </a:rPr>
-              <a:t>)</a:t>
+              <a:t/>
             </a:r>
           </a:p>
           <a:p>
@@ -34299,7 +30747,7 @@
                 <a:ea typeface="Noto Sans CJK JP"/>
                 <a:cs typeface="Liberation Mono"/>
               </a:rPr>
-              <a:t>sys_state["酒店"]["周边餐馆"] = ""</a:t>
+              <a:t>with ZipFile("test.json.zip") as archive:</a:t>
             </a:r>
           </a:p>
           <a:p>
@@ -34330,7 +30778,7 @@
                 <a:ea typeface="Noto Sans CJK JP"/>
                 <a:cs typeface="Liberation Mono"/>
               </a:rPr>
-              <a:t>sys_state["酒店"]["selectedResults"] = [</a:t>
+              <a:t>    dialogues = json.load(archive.open("test.json"))</a:t>
             </a:r>
           </a:p>
           <a:p>
@@ -34361,7 +30809,7 @@
                 <a:ea typeface="Noto Sans CJK JP"/>
                 <a:cs typeface="Liberation Mono"/>
               </a:rPr>
-              <a:t>    "北京美第奇精选酒店"</a:t>
+              <a:t>for turn in dialogues["11732"]["messages"][:2]:</a:t>
             </a:r>
           </a:p>
           <a:p>
@@ -34392,7 +30840,7 @@
                 <a:ea typeface="Noto Sans CJK JP"/>
                 <a:cs typeface="Liberation Mono"/>
               </a:rPr>
-              <a:t>]</a:t>
+              <a:t>    print(turn["content"])</a:t>
             </a:r>
           </a:p>
         </p:txBody>
@@ -34446,7 +30894,7 @@
                 <a:ea typeface="Noto Sans CJK JP"/>
                 <a:cs typeface="Noto Sans"/>
               </a:rPr>
-              <a:t>実例2の同じsys発話から、3項目の実値を表示。価格200–300元と評価4.5点以上は両検索に残る。</a:t>
+              <a:t>test.json.zipを作業フォルダに置いて実行する。実例1の、利用者の質問と案内役の応答を順に表示する。</a:t>
             </a:r>
           </a:p>
         </p:txBody>
@@ -34459,8 +30907,8 @@
         </p:nvSpPr>
         <p:spPr>
           <a:xfrm>
-            <a:off x="502920" y="4700016"/>
-            <a:ext cx="8183879" cy="621792"/>
+            <a:off x="502920" y="4699000"/>
+            <a:ext cx="8183879" cy="431800"/>
           </a:xfrm>
           <a:prstGeom prst="rect">
             <a:avLst/>
@@ -34492,41 +30940,27 @@
               </a:defRPr>
             </a:pPr>
             <a:r>
-              <a:rPr sz="810" b="0" lang="ja-JP" altLang="en-US">
-                <a:solidFill>
-                  <a:srgbClr val="626669"/>
-                </a:solidFill>
-                <a:latin typeface="Noto Sans"/>
-                <a:ea typeface="Noto Sans CJK JP"/>
-                <a:cs typeface="Noto Sans"/>
-              </a:rPr>
-              <a:t>[1] Qi Zhu et al. (2020). CrossWOZ公式配布データ。固定commit df82c9fd。</a:t>
+              <a:rPr sz="830">
+                <a:latin typeface="Noto Sans CJK JP"/>
+              </a:rPr>
+              <a:t>[1] Zhu et al. (2020). CrossWOZ: dialogue data.</a:t>
             </a:r>
           </a:p>
           <a:p>
             <a:pPr>
-              <a:lnSpc>
-                <a:spcPts val="1200"/>
-              </a:lnSpc>
-              <a:buNone/>
-              <a:defRPr sz="810" b="0">
-                <a:solidFill>
-                  <a:srgbClr val="303437"/>
-                </a:solidFill>
-                <a:latin typeface="Noto Sans"/>
-              </a:defRPr>
-            </a:pPr>
-            <a:r>
-              <a:rPr sz="810" b="0" lang="ja-JP" altLang="en-US">
-                <a:solidFill>
-                  <a:srgbClr val="626669"/>
-                </a:solidFill>
-                <a:latin typeface="Noto Sans"/>
-                <a:ea typeface="Noto Sans CJK JP"/>
-                <a:cs typeface="Noto Sans"/>
-                <a:hlinkClick r:id="rId2"/>
-              </a:rPr>
-              <a:t>https://github.com/thu-coai/CrossWOZ/tree/df82c9fdff91b9b130f2d6b89110d3870ba6260e/data/crosswoz</a:t>
+              <a:spcBef>
+                <a:spcPts val="0"/>
+              </a:spcBef>
+              <a:spcAft>
+                <a:spcPts val="0"/>
+              </a:spcAft>
+            </a:pPr>
+            <a:r>
+              <a:rPr sz="830">
+                <a:latin typeface="Noto Sans CJK JP"/>
+                <a:hlinkClick r:id="rId3"/>
+              </a:rPr>
+              <a:t>https://github.com/thu-coai/CrossWOZ/tree/master/data/crosswoz</a:t>
             </a:r>
           </a:p>
         </p:txBody>
@@ -34592,7 +31026,7 @@
                 <a:ea typeface="Noto Sans CJK JP"/>
                 <a:cs typeface="Noto Sans"/>
               </a:rPr>
-              <a:t>実例13の注釈は、観光地の周辺ホテル</a:t>
+              <a:t>観光地の周辺ホテルを知らせる注釈</a:t>
             </a:r>
           </a:p>
         </p:txBody>
@@ -34640,7 +31074,7 @@
                 <a:ea typeface="Noto Sans CJK JP"/>
                 <a:cs typeface="Noto Sans"/>
               </a:rPr>
-              <a:t>Appendix: 2. 形式・集計・再計算</a:t>
+              <a:t>Appendix: 2. データの読み方</a:t>
             </a:r>
           </a:p>
         </p:txBody>
@@ -35252,7 +31686,7 @@
                 <a:ea typeface="Noto Sans CJK JP"/>
                 <a:cs typeface="Noto Sans"/>
               </a:rPr>
-              <a:t>val12121 / messages[9].dialog_actの1組。ホテルという語を含む応答でも、観光地の周辺属性を答える行為として注釈される。</a:t>
+              <a:t>実例13では、観光地の周辺ホテルを答える発話に、このような情報提示の注釈が付く。</a:t>
             </a:r>
           </a:p>
         </p:txBody>
@@ -35265,8 +31699,8 @@
         </p:nvSpPr>
         <p:spPr>
           <a:xfrm>
-            <a:off x="502920" y="4700016"/>
-            <a:ext cx="8183879" cy="621792"/>
+            <a:off x="502920" y="4699000"/>
+            <a:ext cx="8183879" cy="431800"/>
           </a:xfrm>
           <a:prstGeom prst="rect">
             <a:avLst/>
@@ -35298,41 +31732,27 @@
               </a:defRPr>
             </a:pPr>
             <a:r>
-              <a:rPr sz="810" b="0" lang="ja-JP" altLang="en-US">
-                <a:solidFill>
-                  <a:srgbClr val="626669"/>
-                </a:solidFill>
-                <a:latin typeface="Noto Sans"/>
-                <a:ea typeface="Noto Sans CJK JP"/>
-                <a:cs typeface="Noto Sans"/>
-              </a:rPr>
-              <a:t>[1] Qi Zhu et al. (2020). CrossWOZ公式配布データ。固定commit df82c9fd。</a:t>
+              <a:rPr sz="830">
+                <a:latin typeface="Noto Sans CJK JP"/>
+              </a:rPr>
+              <a:t>[1] Zhu et al. (2020). CrossWOZ: dialogue data.</a:t>
             </a:r>
           </a:p>
           <a:p>
             <a:pPr>
-              <a:lnSpc>
-                <a:spcPts val="1200"/>
-              </a:lnSpc>
-              <a:buNone/>
-              <a:defRPr sz="810" b="0">
-                <a:solidFill>
-                  <a:srgbClr val="303437"/>
-                </a:solidFill>
-                <a:latin typeface="Noto Sans"/>
-              </a:defRPr>
-            </a:pPr>
-            <a:r>
-              <a:rPr sz="810" b="0" lang="ja-JP" altLang="en-US">
-                <a:solidFill>
-                  <a:srgbClr val="626669"/>
-                </a:solidFill>
-                <a:latin typeface="Noto Sans"/>
-                <a:ea typeface="Noto Sans CJK JP"/>
-                <a:cs typeface="Noto Sans"/>
-                <a:hlinkClick r:id="rId2"/>
-              </a:rPr>
-              <a:t>https://github.com/thu-coai/CrossWOZ/tree/df82c9fdff91b9b130f2d6b89110d3870ba6260e/data/crosswoz</a:t>
+              <a:spcBef>
+                <a:spcPts val="0"/>
+              </a:spcBef>
+              <a:spcAft>
+                <a:spcPts val="0"/>
+              </a:spcAft>
+            </a:pPr>
+            <a:r>
+              <a:rPr sz="830">
+                <a:latin typeface="Noto Sans CJK JP"/>
+                <a:hlinkClick r:id="rId3"/>
+              </a:rPr>
+              <a:t>https://github.com/thu-coai/CrossWOZ/tree/master/data/crosswoz</a:t>
             </a:r>
           </a:p>
         </p:txBody>
@@ -35686,8 +32106,8 @@
         </p:nvSpPr>
         <p:spPr>
           <a:xfrm>
-            <a:off x="502920" y="4700016"/>
-            <a:ext cx="8183879" cy="621792"/>
+            <a:off x="502920" y="4699000"/>
+            <a:ext cx="8183879" cy="431800"/>
           </a:xfrm>
           <a:prstGeom prst="rect">
             <a:avLst/>
@@ -35719,35 +32139,24 @@
               </a:defRPr>
             </a:pPr>
             <a:r>
-              <a:rPr sz="810" b="0" lang="ja-JP" altLang="en-US">
-                <a:solidFill>
-                  <a:srgbClr val="626669"/>
-                </a:solidFill>
-                <a:latin typeface="Noto Sans"/>
-                <a:ea typeface="Noto Sans CJK JP"/>
-                <a:cs typeface="Noto Sans"/>
-              </a:rPr>
-              <a:t>[1] Zhu et al. (2020). CrossWOZ: A Large-Scale Chinese Cross-Domain Task-Oriented Dialogue Dataset. TACL 8:281–295.</a:t>
-            </a:r>
-            <a:r>
-              <a:rPr sz="810" b="0" lang="ja-JP" altLang="en-US">
-                <a:solidFill>
-                  <a:srgbClr val="626669"/>
-                </a:solidFill>
-                <a:latin typeface="Noto Sans"/>
-                <a:ea typeface="Noto Sans CJK JP"/>
-                <a:cs typeface="Noto Sans"/>
-              </a:rPr>
-              <a:t>  </a:t>
-            </a:r>
-            <a:r>
-              <a:rPr sz="810" b="0" lang="ja-JP" altLang="en-US">
-                <a:solidFill>
-                  <a:srgbClr val="626669"/>
-                </a:solidFill>
-                <a:latin typeface="Noto Sans"/>
-                <a:ea typeface="Noto Sans CJK JP"/>
-                <a:cs typeface="Noto Sans"/>
+              <a:rPr sz="830">
+                <a:latin typeface="Noto Sans CJK JP"/>
+              </a:rPr>
+              <a:t>[1] Zhu et al. (2020). CrossWOZ: A Large-Scale Chinese Cross-Domain Task-Oriented Dialogue Dataset.</a:t>
+            </a:r>
+          </a:p>
+          <a:p>
+            <a:pPr>
+              <a:spcBef>
+                <a:spcPts val="0"/>
+              </a:spcBef>
+              <a:spcAft>
+                <a:spcPts val="0"/>
+              </a:spcAft>
+            </a:pPr>
+            <a:r>
+              <a:rPr sz="830">
+                <a:latin typeface="Noto Sans CJK JP"/>
                 <a:hlinkClick r:id="rId2"/>
               </a:rPr>
               <a:t>https://aclanthology.org/2020.tacl-1.19/</a:t>
@@ -35816,7 +32225,7 @@
                 <a:ea typeface="Noto Sans CJK JP"/>
                 <a:cs typeface="Noto Sans"/>
               </a:rPr>
-              <a:t>一つの応答を、直前までの全履歴と対応させる</a:t>
+              <a:t>対話の履歴から、次の一言を生成する</a:t>
             </a:r>
           </a:p>
         </p:txBody>
@@ -35869,7 +32278,7 @@
                 <a:ea typeface="Noto Sans CJK JP"/>
                 <a:cs typeface="Noto Sans"/>
               </a:rPr>
-              <a:t>13実例では、収録された一つのシステム応答を選び、それより前の全発話を入力として示す。表示範囲は元messages配列の位置で明記する。</a:t>
+              <a:t>応答生成では、それまでの利用者と案内役の発話を入力し、次に案内役が返す文を作る。正解例には、収録された人間の応答を使う。</a:t>
             </a:r>
           </a:p>
           <a:p>
@@ -35899,37 +32308,7 @@
                 <a:ea typeface="Noto Sans CJK JP"/>
                 <a:cs typeface="Noto Sans"/>
               </a:rPr>
-              <a:t>参照は人間の案内役が書いた応答。新しくモデルへ問い合わせた生成例ではない。選んだ応答より後の会話は、この入力単位に含めない。</a:t>
-            </a:r>
-          </a:p>
-          <a:p>
-            <a:pPr marL="457200" indent="-355600">
-              <a:lnSpc>
-                <a:spcPts val="2379"/>
-              </a:lnSpc>
-              <a:spcAft>
-                <a:spcPts val="0"/>
-              </a:spcAft>
-              <a:buSzPct val="66500"/>
-              <a:buFont typeface="Noto Sans CJK JP"/>
-              <a:buChar char="●"/>
-              <a:defRPr sz="2000" b="0">
-                <a:solidFill>
-                  <a:srgbClr val="303437"/>
-                </a:solidFill>
-                <a:latin typeface="Noto Sans"/>
-              </a:defRPr>
-            </a:pPr>
-            <a:r>
-              <a:rPr sz="2000" b="0" lang="ja-JP" altLang="en-US">
-                <a:solidFill>
-                  <a:srgbClr val="303437"/>
-                </a:solidFill>
-                <a:latin typeface="Noto Sans"/>
-                <a:ea typeface="Noto Sans CJK JP"/>
-                <a:cs typeface="Noto Sans"/>
-              </a:rPr>
-              <a:t>元の対話全体と注釈も保持し、次応答の生成と、目標・状態・対話行為を使う評価を結び付ける。</a:t>
+              <a:t>以下の例は、ある応答の直前までの履歴を全文掲載する。電話番号や検索条件の引き継ぎなど、応答に必要な情報が履歴に含まれる。</a:t>
             </a:r>
           </a:p>
         </p:txBody>
@@ -35977,7 +32356,7 @@
                 <a:ea typeface="Noto Sans CJK JP"/>
                 <a:cs typeface="Noto Sans"/>
               </a:rPr>
-              <a:t>1. 対話の履歴から、次の応答を読む</a:t>
+              <a:t>1. 旅行相談の対話と応答</a:t>
             </a:r>
           </a:p>
         </p:txBody>
@@ -35990,8 +32369,8 @@
         </p:nvSpPr>
         <p:spPr>
           <a:xfrm>
-            <a:off x="502920" y="4700016"/>
-            <a:ext cx="8183879" cy="621792"/>
+            <a:off x="502920" y="4699000"/>
+            <a:ext cx="8183879" cy="431800"/>
           </a:xfrm>
           <a:prstGeom prst="rect">
             <a:avLst/>
@@ -36023,41 +32402,27 @@
               </a:defRPr>
             </a:pPr>
             <a:r>
-              <a:rPr sz="810" b="0" lang="ja-JP" altLang="en-US">
-                <a:solidFill>
-                  <a:srgbClr val="626669"/>
-                </a:solidFill>
-                <a:latin typeface="Noto Sans"/>
-                <a:ea typeface="Noto Sans CJK JP"/>
-                <a:cs typeface="Noto Sans"/>
-              </a:rPr>
-              <a:t>[1] Qi Zhu et al. (2020). CrossWOZ公式配布データ。固定commit df82c9fd。</a:t>
+              <a:rPr sz="830">
+                <a:latin typeface="Noto Sans CJK JP"/>
+              </a:rPr>
+              <a:t>[1] Zhu et al. (2020). CrossWOZ: dialogue data.</a:t>
             </a:r>
           </a:p>
           <a:p>
             <a:pPr>
-              <a:lnSpc>
-                <a:spcPts val="1200"/>
-              </a:lnSpc>
-              <a:buNone/>
-              <a:defRPr sz="810" b="0">
-                <a:solidFill>
-                  <a:srgbClr val="303437"/>
-                </a:solidFill>
-                <a:latin typeface="Noto Sans"/>
-              </a:defRPr>
-            </a:pPr>
-            <a:r>
-              <a:rPr sz="810" b="0" lang="ja-JP" altLang="en-US">
-                <a:solidFill>
-                  <a:srgbClr val="626669"/>
-                </a:solidFill>
-                <a:latin typeface="Noto Sans"/>
-                <a:ea typeface="Noto Sans CJK JP"/>
-                <a:cs typeface="Noto Sans"/>
-                <a:hlinkClick r:id="rId2"/>
-              </a:rPr>
-              <a:t>https://github.com/thu-coai/CrossWOZ/tree/df82c9fdff91b9b130f2d6b89110d3870ba6260e/data/crosswoz</a:t>
+              <a:spcBef>
+                <a:spcPts val="0"/>
+              </a:spcBef>
+              <a:spcAft>
+                <a:spcPts val="0"/>
+              </a:spcAft>
+            </a:pPr>
+            <a:r>
+              <a:rPr sz="830">
+                <a:latin typeface="Noto Sans CJK JP"/>
+                <a:hlinkClick r:id="rId3"/>
+              </a:rPr>
+              <a:t>https://github.com/thu-coai/CrossWOZ/tree/master/data/crosswoz</a:t>
             </a:r>
           </a:p>
         </p:txBody>
@@ -36404,7 +32769,7 @@
                 <a:ea typeface="Noto Sans CJK JP"/>
                 <a:cs typeface="Noto Sans"/>
               </a:rPr>
-              <a:t>Qi Zhu et al. 公式リポジトリ。固定commit df82c9fd。</a:t>
+              <a:t>Qi Zhu et al. 公式リポジトリ。</a:t>
             </a:r>
           </a:p>
           <a:p>
@@ -36783,7 +33148,7 @@
                 <a:ea typeface="Noto Sans CJK JP"/>
                 <a:cs typeface="Noto Sans"/>
               </a:rPr>
-              <a:t>CLEVA Scenario and v1 Run Configuration</a:t>
+              <a:t>HELM: CLEVA dialogue generation scenario</a:t>
             </a:r>
           </a:p>
           <a:p>
@@ -36845,7 +33210,7 @@
                 <a:ea typeface="Noto Sans CJK JP"/>
                 <a:cs typeface="Noto Sans"/>
               </a:rPr>
-              <a:t>履歴からsys応答を作る変換、入力テンプレート、下位課題とプロンプトの固定設定を定める。</a:t>
+              <a:t>会話履歴と次の応答を組み合わせ、中国語モデルの応答生成に使う実装。</a:t>
             </a:r>
           </a:p>
           <a:p>
@@ -36991,7 +33356,7 @@
                 <a:ea typeface="Noto Sans CJK JP"/>
                 <a:cs typeface="Noto Sans"/>
               </a:rPr>
-              <a:t>1. 対話の履歴から、次の応答を読む</a:t>
+              <a:t>1. 旅行相談の対話と応答</a:t>
             </a:r>
           </a:p>
         </p:txBody>
@@ -37045,7 +33410,7 @@
                 <a:ea typeface="Noto Sans CJK JP"/>
                 <a:cs typeface="Noto Sans"/>
               </a:rPr>
-              <a:t>test / 対話11732 / 全履歴 1発話 → 収録応答1発話</a:t>
+              <a:t>会話の履歴（1発話）と、次の応答</a:t>
             </a:r>
           </a:p>
         </p:txBody>
@@ -37422,8 +33787,8 @@
         </p:nvSpPr>
         <p:spPr>
           <a:xfrm>
-            <a:off x="502920" y="4700016"/>
-            <a:ext cx="8183879" cy="621792"/>
+            <a:off x="502920" y="4699000"/>
+            <a:ext cx="8183879" cy="431800"/>
           </a:xfrm>
           <a:prstGeom prst="rect">
             <a:avLst/>
@@ -37455,41 +33820,27 @@
               </a:defRPr>
             </a:pPr>
             <a:r>
-              <a:rPr sz="810" b="0" lang="ja-JP" altLang="en-US">
-                <a:solidFill>
-                  <a:srgbClr val="626669"/>
-                </a:solidFill>
-                <a:latin typeface="Noto Sans"/>
-                <a:ea typeface="Noto Sans CJK JP"/>
-                <a:cs typeface="Noto Sans"/>
-              </a:rPr>
-              <a:t>[1] Qi Zhu et al. (2020). CrossWOZ公式配布データ。固定commit df82c9fd。 test.json / dialogue 11732 / messages[0:1] → [1]。</a:t>
+              <a:rPr sz="830">
+                <a:latin typeface="Noto Sans CJK JP"/>
+              </a:rPr>
+              <a:t>[1] Zhu et al. (2020). CrossWOZ: dialogue data.</a:t>
             </a:r>
           </a:p>
           <a:p>
             <a:pPr>
-              <a:lnSpc>
-                <a:spcPts val="1200"/>
-              </a:lnSpc>
-              <a:buNone/>
-              <a:defRPr sz="810" b="0">
-                <a:solidFill>
-                  <a:srgbClr val="303437"/>
-                </a:solidFill>
-                <a:latin typeface="Noto Sans"/>
-              </a:defRPr>
-            </a:pPr>
-            <a:r>
-              <a:rPr sz="810" b="0" lang="ja-JP" altLang="en-US">
-                <a:solidFill>
-                  <a:srgbClr val="626669"/>
-                </a:solidFill>
-                <a:latin typeface="Noto Sans"/>
-                <a:ea typeface="Noto Sans CJK JP"/>
-                <a:cs typeface="Noto Sans"/>
-                <a:hlinkClick r:id="rId2"/>
-              </a:rPr>
-              <a:t>https://github.com/thu-coai/CrossWOZ/tree/df82c9fdff91b9b130f2d6b89110d3870ba6260e/data/crosswoz</a:t>
+              <a:spcBef>
+                <a:spcPts val="0"/>
+              </a:spcBef>
+              <a:spcAft>
+                <a:spcPts val="0"/>
+              </a:spcAft>
+            </a:pPr>
+            <a:r>
+              <a:rPr sz="830">
+                <a:latin typeface="Noto Sans CJK JP"/>
+                <a:hlinkClick r:id="rId3"/>
+              </a:rPr>
+              <a:t>https://github.com/thu-coai/CrossWOZ/tree/master/data/crosswoz</a:t>
             </a:r>
           </a:p>
         </p:txBody>
@@ -37608,7 +33959,7 @@
                 <a:ea typeface="Noto Sans CJK JP"/>
                 <a:cs typeface="Noto Sans"/>
               </a:rPr>
-              <a:t>実例1は、指定されたホテルの電話番号と評価を尋ねる。参照応答は両方を返し、対話行為にも「名称」「電話」「評価」が記録される。</a:t>
+              <a:t>実例1は、指定されたホテルの電話番号と評価を尋ねる。応答は両方を返し、対話行為にも「名称」「電話」「評価」が記録される。</a:t>
             </a:r>
           </a:p>
           <a:p>
@@ -37638,7 +33989,7 @@
                 <a:ea typeface="Noto Sans CJK JP"/>
                 <a:cs typeface="Noto Sans"/>
               </a:rPr>
-              <a:t>発話を読む課題では、言い回しの一致だけでなく、どの施設のどの項目を答えたかが重要になる。</a:t>
+              <a:t>施設名と、電話番号・評価という項目を正しく結び付ける応答が求められる。</a:t>
             </a:r>
           </a:p>
           <a:p>
@@ -37668,7 +34019,7 @@
                 <a:ea typeface="Noto Sans CJK JP"/>
                 <a:cs typeface="Noto Sans"/>
               </a:rPr>
-              <a:t>状態追跡では、会話で与えられた施設名などを、検索に使うスロットと値へ対応させる。</a:t>
+              <a:t>状態追跡では、会話で与えられた施設名などを、検索に使う項目（スロット）と値へ対応させる。</a:t>
             </a:r>
           </a:p>
         </p:txBody>
@@ -37716,7 +34067,7 @@
                 <a:ea typeface="Noto Sans CJK JP"/>
                 <a:cs typeface="Noto Sans"/>
               </a:rPr>
-              <a:t>1. 対話の履歴から、次の応答を読む</a:t>
+              <a:t>1. 旅行相談の対話と応答</a:t>
             </a:r>
           </a:p>
         </p:txBody>
@@ -37729,8 +34080,8 @@
         </p:nvSpPr>
         <p:spPr>
           <a:xfrm>
-            <a:off x="502920" y="4700016"/>
-            <a:ext cx="8183879" cy="621792"/>
+            <a:off x="502920" y="4699000"/>
+            <a:ext cx="8183879" cy="431800"/>
           </a:xfrm>
           <a:prstGeom prst="rect">
             <a:avLst/>
@@ -37762,35 +34113,24 @@
               </a:defRPr>
             </a:pPr>
             <a:r>
-              <a:rPr sz="810" b="0" lang="ja-JP" altLang="en-US">
-                <a:solidFill>
-                  <a:srgbClr val="626669"/>
-                </a:solidFill>
-                <a:latin typeface="Noto Sans"/>
-                <a:ea typeface="Noto Sans CJK JP"/>
-                <a:cs typeface="Noto Sans"/>
-              </a:rPr>
-              <a:t>[1] Zhu et al. (2020). CrossWOZ: A Large-Scale Chinese Cross-Domain Task-Oriented Dialogue Dataset. TACL 8:281–295.</a:t>
-            </a:r>
-            <a:r>
-              <a:rPr sz="810" b="0" lang="ja-JP" altLang="en-US">
-                <a:solidFill>
-                  <a:srgbClr val="626669"/>
-                </a:solidFill>
-                <a:latin typeface="Noto Sans"/>
-                <a:ea typeface="Noto Sans CJK JP"/>
-                <a:cs typeface="Noto Sans"/>
-              </a:rPr>
-              <a:t>  </a:t>
-            </a:r>
-            <a:r>
-              <a:rPr sz="810" b="0" lang="ja-JP" altLang="en-US">
-                <a:solidFill>
-                  <a:srgbClr val="626669"/>
-                </a:solidFill>
-                <a:latin typeface="Noto Sans"/>
-                <a:ea typeface="Noto Sans CJK JP"/>
-                <a:cs typeface="Noto Sans"/>
+              <a:rPr sz="830">
+                <a:latin typeface="Noto Sans CJK JP"/>
+              </a:rPr>
+              <a:t>[1] Zhu et al. (2020). CrossWOZ: A Large-Scale Chinese Cross-Domain Task-Oriented Dialogue Dataset.</a:t>
+            </a:r>
+          </a:p>
+          <a:p>
+            <a:pPr>
+              <a:spcBef>
+                <a:spcPts val="0"/>
+              </a:spcBef>
+              <a:spcAft>
+                <a:spcPts val="0"/>
+              </a:spcAft>
+            </a:pPr>
+            <a:r>
+              <a:rPr sz="830">
+                <a:latin typeface="Noto Sans CJK JP"/>
                 <a:hlinkClick r:id="rId2"/>
               </a:rPr>
               <a:t>https://aclanthology.org/2020.tacl-1.19/</a:t>
@@ -37907,7 +34247,7 @@
                 <a:ea typeface="Noto Sans CJK JP"/>
                 <a:cs typeface="Noto Sans"/>
               </a:rPr>
-              <a:t>1. 対話の履歴から、次の応答を読む</a:t>
+              <a:t>1. 旅行相談の対話と応答</a:t>
             </a:r>
           </a:p>
         </p:txBody>
@@ -37961,7 +34301,7 @@
                 <a:ea typeface="Noto Sans CJK JP"/>
                 <a:cs typeface="Noto Sans"/>
               </a:rPr>
-              <a:t>train / 対話7568 / 全履歴 5発話 → 収録応答1発話 ／ 原文は左→右</a:t>
+              <a:t>会話の履歴（5発話）と、次の応答</a:t>
             </a:r>
           </a:p>
         </p:txBody>
@@ -38269,8 +34609,8 @@
         </p:nvSpPr>
         <p:spPr>
           <a:xfrm>
-            <a:off x="502920" y="4700016"/>
-            <a:ext cx="8183879" cy="621792"/>
+            <a:off x="502920" y="4699000"/>
+            <a:ext cx="8183879" cy="431800"/>
           </a:xfrm>
           <a:prstGeom prst="rect">
             <a:avLst/>
@@ -38302,41 +34642,27 @@
               </a:defRPr>
             </a:pPr>
             <a:r>
-              <a:rPr sz="810" b="0" lang="ja-JP" altLang="en-US">
-                <a:solidFill>
-                  <a:srgbClr val="626669"/>
-                </a:solidFill>
-                <a:latin typeface="Noto Sans"/>
-                <a:ea typeface="Noto Sans CJK JP"/>
-                <a:cs typeface="Noto Sans"/>
-              </a:rPr>
-              <a:t>[1] Qi Zhu et al. (2020). CrossWOZ公式配布データ。固定commit df82c9fd。 train.json / dialogue 7568 / messages[0:5] → [5]。</a:t>
+              <a:rPr sz="830">
+                <a:latin typeface="Noto Sans CJK JP"/>
+              </a:rPr>
+              <a:t>[1] Zhu et al. (2020). CrossWOZ: dialogue data.</a:t>
             </a:r>
           </a:p>
           <a:p>
             <a:pPr>
-              <a:lnSpc>
-                <a:spcPts val="1200"/>
-              </a:lnSpc>
-              <a:buNone/>
-              <a:defRPr sz="810" b="0">
-                <a:solidFill>
-                  <a:srgbClr val="303437"/>
-                </a:solidFill>
-                <a:latin typeface="Noto Sans"/>
-              </a:defRPr>
-            </a:pPr>
-            <a:r>
-              <a:rPr sz="810" b="0" lang="ja-JP" altLang="en-US">
-                <a:solidFill>
-                  <a:srgbClr val="626669"/>
-                </a:solidFill>
-                <a:latin typeface="Noto Sans"/>
-                <a:ea typeface="Noto Sans CJK JP"/>
-                <a:cs typeface="Noto Sans"/>
-                <a:hlinkClick r:id="rId2"/>
-              </a:rPr>
-              <a:t>https://github.com/thu-coai/CrossWOZ/tree/df82c9fdff91b9b130f2d6b89110d3870ba6260e/data/crosswoz</a:t>
+              <a:spcBef>
+                <a:spcPts val="0"/>
+              </a:spcBef>
+              <a:spcAft>
+                <a:spcPts val="0"/>
+              </a:spcAft>
+            </a:pPr>
+            <a:r>
+              <a:rPr sz="830">
+                <a:latin typeface="Noto Sans CJK JP"/>
+                <a:hlinkClick r:id="rId3"/>
+              </a:rPr>
+              <a:t>https://github.com/thu-coai/CrossWOZ/tree/master/data/crosswoz</a:t>
             </a:r>
           </a:p>
         </p:txBody>

--- a/slides/datasets-in-10-minutes-crosswoz.pptx
+++ b/slides/datasets-in-10-minutes-crosswoz.pptx
@@ -35,7 +35,6 @@
     <p:sldId id="283" r:id="rId33"/>
     <p:sldId id="284" r:id="rId34"/>
     <p:sldId id="285" r:id="rId35"/>
-    <p:sldId id="286" r:id="rId36"/>
     <p:sldId id="288" r:id="rId38"/>
     <p:sldId id="289" r:id="rId39"/>
     <p:sldId id="290" r:id="rId40"/>
@@ -62,7 +61,6 @@
     <p:sldId id="313" r:id="rId63"/>
     <p:sldId id="314" r:id="rId64"/>
     <p:sldId id="315" r:id="rId65"/>
-    <p:sldId id="316" r:id="rId66"/>
   </p:sldIdLst>
   <p:sldSz cx="9144000" cy="5143500" type="screen16x9"/>
   <p:notesSz cx="6858000" cy="9144000"/>
@@ -19175,7 +19173,7 @@
 </p:sld>
 </file>
 
-<file path=ppt/slides/slide31.xml><?xml version="1.0" encoding="utf-8"?>
+<file path=ppt/slides/slide32.xml><?xml version="1.0" encoding="utf-8"?>
 <p:sld xmlns:a="http://schemas.openxmlformats.org/drawingml/2006/main" xmlns:p="http://schemas.openxmlformats.org/presentationml/2006/main" xmlns:r="http://schemas.openxmlformats.org/officeDocument/2006/relationships">
   <p:cSld>
     <p:spTree>
@@ -19228,7 +19226,7 @@
                 <a:ea typeface="Noto Sans CJK JP"/>
                 <a:cs typeface="Noto Sans"/>
               </a:rPr>
-              <a:t>CLEVAでは、履歴から応答を生成する</a:t>
+              <a:t>公式データと対話システムの実装を入手する</a:t>
             </a:r>
           </a:p>
         </p:txBody>
@@ -19281,7 +19279,7 @@
                 <a:ea typeface="Noto Sans CJK JP"/>
                 <a:cs typeface="Noto Sans"/>
               </a:rPr>
-              <a:t>CLEVAは、中国語モデルの評価にCrossWOZを採用した。会話の履歴を入力し、次に案内役が返す応答を生成する課題である。</a:t>
+              <a:t>公式リポジトリのdata/crosswozから、train・val・testのZIPと施設DBを取得できる。各ZIPには、対話IDをキーとしたJSON辞書が入っている。</a:t>
             </a:r>
           </a:p>
           <a:p>
@@ -19311,7 +19309,7 @@
                 <a:ea typeface="Noto Sans CJK JP"/>
                 <a:cs typeface="Noto Sans"/>
               </a:rPr>
-              <a:t>公開実装は、各システム発話の直前までの会話と、収録された応答を組にする。</a:t>
+              <a:t>自然言語理解、状態追跡、対話方策、応答生成を組み合わせる実装も公開されている。</a:t>
             </a:r>
           </a:p>
           <a:p>
@@ -19341,7 +19339,7 @@
                 <a:ea typeface="Noto Sans CJK JP"/>
                 <a:cs typeface="Noto Sans"/>
               </a:rPr>
-              <a:t>CLEVAで使われた対話の全体や、抽出範囲は公開説明から確認できない。元のCrossWOZは、公式リポジトリから取得できる。</a:t>
+              <a:t>リポジトリのライセンスはApache License 2.0。構築論文はCC BY 4.0で公開され、著者はデータやコードを使う場合の論文引用を求めている。</a:t>
             </a:r>
           </a:p>
         </p:txBody>
@@ -19402,8 +19400,8 @@
         </p:nvSpPr>
         <p:spPr>
           <a:xfrm>
-            <a:off x="502920" y="4699000"/>
-            <a:ext cx="8183879" cy="431800"/>
+            <a:off x="502920" y="4508500"/>
+            <a:ext cx="8183879" cy="558800"/>
           </a:xfrm>
           <a:prstGeom prst="rect">
             <a:avLst/>
@@ -19438,7 +19436,7 @@
               <a:rPr sz="830">
                 <a:latin typeface="Noto Sans CJK JP"/>
               </a:rPr>
-              <a:t>[1] Stanford CRFM (2023). HELM: CLEVA dialogue generation scenario.</a:t>
+              <a:t>[1] Zhu et al. (2020). CrossWOZ: official repository.</a:t>
             </a:r>
           </a:p>
           <a:p>
@@ -19455,7 +19453,40 @@
                 <a:latin typeface="Noto Sans CJK JP"/>
                 <a:hlinkClick r:id="rId2"/>
               </a:rPr>
-              <a:t>https://github.com/stanford-crfm/helm/blob/v0.4.0/src/helm/benchmark/scenarios/cleva_scenario.py</a:t>
+              <a:t>https://github.com/thu-coai/CrossWOZ</a:t>
+            </a:r>
+          </a:p>
+          <a:p>
+            <a:pPr>
+              <a:spcBef>
+                <a:spcPts val="0"/>
+              </a:spcBef>
+              <a:spcAft>
+                <a:spcPts val="0"/>
+              </a:spcAft>
+            </a:pPr>
+            <a:r>
+              <a:rPr sz="830">
+                <a:latin typeface="Noto Sans CJK JP"/>
+              </a:rPr>
+              <a:t>[2] 本資料の利用許諾・帰属表示（Apache 2.0）。</a:t>
+            </a:r>
+          </a:p>
+          <a:p>
+            <a:pPr>
+              <a:spcBef>
+                <a:spcPts val="0"/>
+              </a:spcBef>
+              <a:spcAft>
+                <a:spcPts val="0"/>
+              </a:spcAft>
+            </a:pPr>
+            <a:r>
+              <a:rPr sz="830">
+                <a:latin typeface="Noto Sans CJK JP"/>
+                <a:hlinkClick r:id="rId3"/>
+              </a:rPr>
+              <a:t>https://datasets-in-10-minutes.sasakiy84.net/assets/crosswoz-notices.zip</a:t>
             </a:r>
           </a:p>
         </p:txBody>
@@ -19521,7 +19552,7 @@
                 <a:ea typeface="Noto Sans CJK JP"/>
                 <a:cs typeface="Noto Sans"/>
               </a:rPr>
-              <a:t>公式データと対話システムの実装を入手する</a:t>
+              <a:t>文脈と状態を使う、領域横断の対話データ</a:t>
             </a:r>
           </a:p>
         </p:txBody>
@@ -19550,91 +19581,91 @@
           <a:p>
             <a:pPr marL="457200" indent="-355600">
               <a:lnSpc>
-                <a:spcPts val="2379"/>
+                <a:spcPts val="2439"/>
               </a:lnSpc>
               <a:spcAft>
                 <a:spcPts val="700"/>
               </a:spcAft>
-              <a:buSzPct val="66500"/>
+              <a:buSzPct val="64878"/>
               <a:buFont typeface="Noto Sans CJK JP"/>
               <a:buChar char="●"/>
-              <a:defRPr sz="2000" b="0">
-                <a:solidFill>
-                  <a:srgbClr val="303437"/>
-                </a:solidFill>
-                <a:latin typeface="Noto Sans"/>
-              </a:defRPr>
-            </a:pPr>
-            <a:r>
-              <a:rPr sz="2000" b="0" lang="ja-JP" altLang="en-US">
-                <a:solidFill>
-                  <a:srgbClr val="303437"/>
-                </a:solidFill>
-                <a:latin typeface="Noto Sans"/>
-                <a:ea typeface="Noto Sans CJK JP"/>
-                <a:cs typeface="Noto Sans"/>
-              </a:rPr>
-              <a:t>公式リポジトリのdata/crosswozから、train・val・testのZIPと施設DBを取得できる。各ZIPには、対話IDをキーとしたJSON辞書が入っている。</a:t>
+              <a:defRPr sz="2050" b="0">
+                <a:solidFill>
+                  <a:srgbClr val="303437"/>
+                </a:solidFill>
+                <a:latin typeface="Noto Sans"/>
+              </a:defRPr>
+            </a:pPr>
+            <a:r>
+              <a:rPr sz="2050" b="0" lang="ja-JP" altLang="en-US">
+                <a:solidFill>
+                  <a:srgbClr val="303437"/>
+                </a:solidFill>
+                <a:latin typeface="Noto Sans"/>
+                <a:ea typeface="Noto Sans CJK JP"/>
+                <a:cs typeface="Noto Sans"/>
+              </a:rPr>
+              <a:t>CrossWOZは、5領域の旅行案内を6,012対話にまとめ、目標・状態・対話行為・施設DBを対応させた中国語データセットである。</a:t>
             </a:r>
           </a:p>
           <a:p>
             <a:pPr marL="457200" indent="-355600">
               <a:lnSpc>
-                <a:spcPts val="2379"/>
+                <a:spcPts val="2439"/>
               </a:lnSpc>
               <a:spcAft>
                 <a:spcPts val="700"/>
               </a:spcAft>
-              <a:buSzPct val="66500"/>
+              <a:buSzPct val="64878"/>
               <a:buFont typeface="Noto Sans CJK JP"/>
               <a:buChar char="●"/>
-              <a:defRPr sz="2000" b="0">
-                <a:solidFill>
-                  <a:srgbClr val="303437"/>
-                </a:solidFill>
-                <a:latin typeface="Noto Sans"/>
-              </a:defRPr>
-            </a:pPr>
-            <a:r>
-              <a:rPr sz="2000" b="0" lang="ja-JP" altLang="en-US">
-                <a:solidFill>
-                  <a:srgbClr val="303437"/>
-                </a:solidFill>
-                <a:latin typeface="Noto Sans"/>
-                <a:ea typeface="Noto Sans CJK JP"/>
-                <a:cs typeface="Noto Sans"/>
-              </a:rPr>
-              <a:t>自然言語理解、状態追跡、対話方策、応答生成を組み合わせる実装も公開されている。</a:t>
+              <a:defRPr sz="2050" b="0">
+                <a:solidFill>
+                  <a:srgbClr val="303437"/>
+                </a:solidFill>
+                <a:latin typeface="Noto Sans"/>
+              </a:defRPr>
+            </a:pPr>
+            <a:r>
+              <a:rPr sz="2050" b="0" lang="ja-JP" altLang="en-US">
+                <a:solidFill>
+                  <a:srgbClr val="303437"/>
+                </a:solidFill>
+                <a:latin typeface="Noto Sans"/>
+                <a:ea typeface="Noto Sans CJK JP"/>
+                <a:cs typeface="Noto Sans"/>
+              </a:rPr>
+              <a:t>一つの施設の回答から、周辺の施設や施設間の移動へと条件がつながる。施設間に依存関係のある旅行目標では、状態追跡の正解率が低かった。</a:t>
             </a:r>
           </a:p>
           <a:p>
             <a:pPr marL="457200" indent="-355600">
               <a:lnSpc>
-                <a:spcPts val="2379"/>
-              </a:lnSpc>
-              <a:spcAft>
-                <a:spcPts val="0"/>
-              </a:spcAft>
-              <a:buSzPct val="66500"/>
+                <a:spcPts val="2439"/>
+              </a:lnSpc>
+              <a:spcAft>
+                <a:spcPts val="0"/>
+              </a:spcAft>
+              <a:buSzPct val="64878"/>
               <a:buFont typeface="Noto Sans CJK JP"/>
               <a:buChar char="●"/>
-              <a:defRPr sz="2000" b="0">
-                <a:solidFill>
-                  <a:srgbClr val="303437"/>
-                </a:solidFill>
-                <a:latin typeface="Noto Sans"/>
-              </a:defRPr>
-            </a:pPr>
-            <a:r>
-              <a:rPr sz="2000" b="0" lang="ja-JP" altLang="en-US">
-                <a:solidFill>
-                  <a:srgbClr val="303437"/>
-                </a:solidFill>
-                <a:latin typeface="Noto Sans"/>
-                <a:ea typeface="Noto Sans CJK JP"/>
-                <a:cs typeface="Noto Sans"/>
-              </a:rPr>
-              <a:t>リポジトリのライセンスはApache License 2.0。構築論文はCC BY 4.0で公開され、著者はデータやコードを使う場合の論文引用を求めている。</a:t>
+              <a:defRPr sz="2050" b="0">
+                <a:solidFill>
+                  <a:srgbClr val="303437"/>
+                </a:solidFill>
+                <a:latin typeface="Noto Sans"/>
+              </a:defRPr>
+            </a:pPr>
+            <a:r>
+              <a:rPr sz="2050" b="0" lang="ja-JP" altLang="en-US">
+                <a:solidFill>
+                  <a:srgbClr val="303437"/>
+                </a:solidFill>
+                <a:latin typeface="Noto Sans"/>
+                <a:ea typeface="Noto Sans CJK JP"/>
+                <a:cs typeface="Noto Sans"/>
+              </a:rPr>
+              <a:t>目標や状態の注釈は対話システムの各段階の評価に使える。収録された会話と応答は、履歴から次の発話を生成する課題にも使える。</a:t>
             </a:r>
           </a:p>
         </p:txBody>
@@ -19695,8 +19726,8 @@
         </p:nvSpPr>
         <p:spPr>
           <a:xfrm>
-            <a:off x="502920" y="4508500"/>
-            <a:ext cx="8183879" cy="558800"/>
+            <a:off x="502920" y="4699000"/>
+            <a:ext cx="8183879" cy="431800"/>
           </a:xfrm>
           <a:prstGeom prst="rect">
             <a:avLst/>
@@ -19731,7 +19762,7 @@
               <a:rPr sz="830">
                 <a:latin typeface="Noto Sans CJK JP"/>
               </a:rPr>
-              <a:t>[1] Zhu et al. (2020). CrossWOZ: official repository.</a:t>
+              <a:t>[1] Zhu et al. (2020). CrossWOZ: A Large-Scale Chinese Cross-Domain Task-Oriented Dialogue Dataset.</a:t>
             </a:r>
           </a:p>
           <a:p>
@@ -19748,40 +19779,7 @@
                 <a:latin typeface="Noto Sans CJK JP"/>
                 <a:hlinkClick r:id="rId2"/>
               </a:rPr>
-              <a:t>https://github.com/thu-coai/CrossWOZ</a:t>
-            </a:r>
-          </a:p>
-          <a:p>
-            <a:pPr>
-              <a:spcBef>
-                <a:spcPts val="0"/>
-              </a:spcBef>
-              <a:spcAft>
-                <a:spcPts val="0"/>
-              </a:spcAft>
-            </a:pPr>
-            <a:r>
-              <a:rPr sz="830">
-                <a:latin typeface="Noto Sans CJK JP"/>
-              </a:rPr>
-              <a:t>[2] 本資料の利用許諾・帰属表示（Apache 2.0）。</a:t>
-            </a:r>
-          </a:p>
-          <a:p>
-            <a:pPr>
-              <a:spcBef>
-                <a:spcPts val="0"/>
-              </a:spcBef>
-              <a:spcAft>
-                <a:spcPts val="0"/>
-              </a:spcAft>
-            </a:pPr>
-            <a:r>
-              <a:rPr sz="830">
-                <a:latin typeface="Noto Sans CJK JP"/>
-                <a:hlinkClick r:id="rId3"/>
-              </a:rPr>
-              <a:t>https://datasets-in-10-minutes.sasakiy84.net/assets/crosswoz-notices.zip</a:t>
+              <a:t>https://aclanthology.org/2020.tacl-1.19/</a:t>
             </a:r>
           </a:p>
         </p:txBody>
@@ -19816,158 +19814,45 @@
         </p:nvSpPr>
         <p:spPr>
           <a:xfrm>
-            <a:off x="468172" y="650138"/>
-            <a:ext cx="8206740" cy="616305"/>
+            <a:off x="548640" y="2484835"/>
+            <a:ext cx="8046720" cy="585216"/>
           </a:xfrm>
         </p:spPr>
         <p:txBody>
-          <a:bodyPr wrap="square" lIns="0" rIns="0" tIns="0" bIns="0">
+          <a:bodyPr wrap="square" lIns="0" rIns="0" tIns="0" bIns="0" anchor="ctr">
             <a:noAutofit/>
           </a:bodyPr>
           <a:lstStyle/>
           <a:p>
-            <a:pPr algn="l">
+            <a:pPr algn="ctr">
               <a:lnSpc>
                 <a:spcPct val="110000"/>
               </a:lnSpc>
               <a:buNone/>
-              <a:defRPr sz="2800" b="0">
-                <a:solidFill>
-                  <a:srgbClr val="303437"/>
-                </a:solidFill>
-                <a:latin typeface="Noto Sans"/>
-              </a:defRPr>
-            </a:pPr>
-            <a:r>
-              <a:rPr sz="2800" b="1" lang="ja-JP" altLang="en-US">
-                <a:solidFill>
-                  <a:srgbClr val="303437"/>
-                </a:solidFill>
-                <a:latin typeface="Noto Sans"/>
-                <a:ea typeface="Noto Sans CJK JP"/>
-                <a:cs typeface="Noto Sans"/>
-              </a:rPr>
-              <a:t>文脈と状態を使う、領域横断の対話データ</a:t>
+              <a:defRPr sz="3600" b="0">
+                <a:solidFill>
+                  <a:srgbClr val="303437"/>
+                </a:solidFill>
+                <a:latin typeface="Noto Sans"/>
+              </a:defRPr>
+            </a:pPr>
+            <a:r>
+              <a:rPr sz="3600" b="1" lang="ja-JP" altLang="en-US">
+                <a:solidFill>
+                  <a:srgbClr val="303437"/>
+                </a:solidFill>
+                <a:latin typeface="Noto Sans"/>
+                <a:ea typeface="Noto Sans CJK JP"/>
+                <a:cs typeface="Noto Sans"/>
+              </a:rPr>
+              <a:t>Appendix</a:t>
             </a:r>
           </a:p>
         </p:txBody>
       </p:sp>
       <p:sp>
         <p:nvSpPr>
-          <p:cNvPr id="3" name="Text Placeholder 2"/>
-          <p:cNvSpPr>
-            <a:spLocks noGrp="1"/>
-          </p:cNvSpPr>
-          <p:nvPr>
-            <p:ph type="body" idx="1"/>
-          </p:nvPr>
-        </p:nvSpPr>
-        <p:spPr>
-          <a:xfrm>
-            <a:off x="594360" y="1463040"/>
-            <a:ext cx="7955279" cy="3044952"/>
-          </a:xfrm>
-        </p:spPr>
-        <p:txBody>
-          <a:bodyPr wrap="square" tIns="91440" bIns="91440">
-            <a:noAutofit/>
-          </a:bodyPr>
-          <a:lstStyle/>
-          <a:p>
-            <a:pPr marL="457200" indent="-355600">
-              <a:lnSpc>
-                <a:spcPts val="2439"/>
-              </a:lnSpc>
-              <a:spcAft>
-                <a:spcPts val="700"/>
-              </a:spcAft>
-              <a:buSzPct val="64878"/>
-              <a:buFont typeface="Noto Sans CJK JP"/>
-              <a:buChar char="●"/>
-              <a:defRPr sz="2050" b="0">
-                <a:solidFill>
-                  <a:srgbClr val="303437"/>
-                </a:solidFill>
-                <a:latin typeface="Noto Sans"/>
-              </a:defRPr>
-            </a:pPr>
-            <a:r>
-              <a:rPr sz="2050" b="0" lang="ja-JP" altLang="en-US">
-                <a:solidFill>
-                  <a:srgbClr val="303437"/>
-                </a:solidFill>
-                <a:latin typeface="Noto Sans"/>
-                <a:ea typeface="Noto Sans CJK JP"/>
-                <a:cs typeface="Noto Sans"/>
-              </a:rPr>
-              <a:t>CrossWOZは、5領域の旅行案内を6,012対話にまとめ、目標・状態・対話行為・施設DBを対応させた中国語データセットである。</a:t>
-            </a:r>
-          </a:p>
-          <a:p>
-            <a:pPr marL="457200" indent="-355600">
-              <a:lnSpc>
-                <a:spcPts val="2439"/>
-              </a:lnSpc>
-              <a:spcAft>
-                <a:spcPts val="700"/>
-              </a:spcAft>
-              <a:buSzPct val="64878"/>
-              <a:buFont typeface="Noto Sans CJK JP"/>
-              <a:buChar char="●"/>
-              <a:defRPr sz="2050" b="0">
-                <a:solidFill>
-                  <a:srgbClr val="303437"/>
-                </a:solidFill>
-                <a:latin typeface="Noto Sans"/>
-              </a:defRPr>
-            </a:pPr>
-            <a:r>
-              <a:rPr sz="2050" b="0" lang="ja-JP" altLang="en-US">
-                <a:solidFill>
-                  <a:srgbClr val="303437"/>
-                </a:solidFill>
-                <a:latin typeface="Noto Sans"/>
-                <a:ea typeface="Noto Sans CJK JP"/>
-                <a:cs typeface="Noto Sans"/>
-              </a:rPr>
-              <a:t>一つの施設の回答から、周辺の施設や施設間の移動へと条件がつながる。施設間に依存関係のある旅行目標では、状態追跡の正解率が低かった。</a:t>
-            </a:r>
-          </a:p>
-          <a:p>
-            <a:pPr marL="457200" indent="-355600">
-              <a:lnSpc>
-                <a:spcPts val="2439"/>
-              </a:lnSpc>
-              <a:spcAft>
-                <a:spcPts val="0"/>
-              </a:spcAft>
-              <a:buSzPct val="64878"/>
-              <a:buFont typeface="Noto Sans CJK JP"/>
-              <a:buChar char="●"/>
-              <a:defRPr sz="2050" b="0">
-                <a:solidFill>
-                  <a:srgbClr val="303437"/>
-                </a:solidFill>
-                <a:latin typeface="Noto Sans"/>
-              </a:defRPr>
-            </a:pPr>
-            <a:r>
-              <a:rPr sz="2050" b="0" lang="ja-JP" altLang="en-US">
-                <a:solidFill>
-                  <a:srgbClr val="303437"/>
-                </a:solidFill>
-                <a:latin typeface="Noto Sans"/>
-                <a:ea typeface="Noto Sans CJK JP"/>
-                <a:cs typeface="Noto Sans"/>
-              </a:rPr>
-              <a:t>目標や状態の注釈は対話システムの各段階の評価に使える。収録された会話と応答は、履歴から次の発話を生成する課題にも使える。</a:t>
-            </a:r>
-          </a:p>
-        </p:txBody>
-      </p:sp>
-      <p:sp>
-        <p:nvSpPr>
-          <p:cNvPr id="4" name="Title 3"/>
+          <p:cNvPr id="3" name="Title 2"/>
           <p:cNvSpPr>
             <a:spLocks noGrp="1"/>
           </p:cNvSpPr>
@@ -20008,73 +19893,7 @@
                 <a:ea typeface="Noto Sans CJK JP"/>
                 <a:cs typeface="Noto Sans"/>
               </a:rPr>
-              <a:t>4. 入手と応答生成への利用</a:t>
-            </a:r>
-          </a:p>
-        </p:txBody>
-      </p:sp>
-      <p:sp>
-        <p:nvSpPr>
-          <p:cNvPr id="5" name="sources"/>
-          <p:cNvSpPr txBox="1"/>
-          <p:nvPr/>
-        </p:nvSpPr>
-        <p:spPr>
-          <a:xfrm>
-            <a:off x="502920" y="4699000"/>
-            <a:ext cx="8183879" cy="431800"/>
-          </a:xfrm>
-          <a:prstGeom prst="rect">
-            <a:avLst/>
-          </a:prstGeom>
-          <a:noFill/>
-        </p:spPr>
-        <p:txBody>
-          <a:bodyPr wrap="square" lIns="0" rIns="0" tIns="0" bIns="0">
-            <a:noAutofit/>
-          </a:bodyPr>
-          <a:lstStyle/>
-          <a:p>
-            <a:pPr algn="l">
-              <a:lnSpc>
-                <a:spcPts val="1200"/>
-              </a:lnSpc>
-              <a:spcBef>
-                <a:spcPts val="0"/>
-              </a:spcBef>
-              <a:spcAft>
-                <a:spcPts val="0"/>
-              </a:spcAft>
-              <a:buNone/>
-              <a:defRPr sz="810" b="0">
-                <a:solidFill>
-                  <a:srgbClr val="303437"/>
-                </a:solidFill>
-                <a:latin typeface="Noto Sans"/>
-              </a:defRPr>
-            </a:pPr>
-            <a:r>
-              <a:rPr sz="830">
-                <a:latin typeface="Noto Sans CJK JP"/>
-              </a:rPr>
-              <a:t>[1] Zhu et al. (2020). CrossWOZ: A Large-Scale Chinese Cross-Domain Task-Oriented Dialogue Dataset.</a:t>
-            </a:r>
-          </a:p>
-          <a:p>
-            <a:pPr>
-              <a:spcBef>
-                <a:spcPts val="0"/>
-              </a:spcBef>
-              <a:spcAft>
-                <a:spcPts val="0"/>
-              </a:spcAft>
-            </a:pPr>
-            <a:r>
-              <a:rPr sz="830">
-                <a:latin typeface="Noto Sans CJK JP"/>
-                <a:hlinkClick r:id="rId2"/>
-              </a:rPr>
-              <a:t>https://aclanthology.org/2020.tacl-1.19/</a:t>
+              <a:t>Appendix</a:t>
             </a:r>
           </a:p>
         </p:txBody>
@@ -20109,45 +19928,158 @@
         </p:nvSpPr>
         <p:spPr>
           <a:xfrm>
-            <a:off x="548640" y="2484835"/>
-            <a:ext cx="8046720" cy="585216"/>
+            <a:off x="468172" y="650138"/>
+            <a:ext cx="8206740" cy="616305"/>
           </a:xfrm>
         </p:spPr>
         <p:txBody>
-          <a:bodyPr wrap="square" lIns="0" rIns="0" tIns="0" bIns="0" anchor="ctr">
+          <a:bodyPr wrap="square" lIns="0" rIns="0" tIns="0" bIns="0">
             <a:noAutofit/>
           </a:bodyPr>
           <a:lstStyle/>
           <a:p>
-            <a:pPr algn="ctr">
+            <a:pPr algn="l">
               <a:lnSpc>
                 <a:spcPct val="110000"/>
               </a:lnSpc>
               <a:buNone/>
-              <a:defRPr sz="3600" b="0">
-                <a:solidFill>
-                  <a:srgbClr val="303437"/>
-                </a:solidFill>
-                <a:latin typeface="Noto Sans"/>
-              </a:defRPr>
-            </a:pPr>
-            <a:r>
-              <a:rPr sz="3600" b="1" lang="ja-JP" altLang="en-US">
-                <a:solidFill>
-                  <a:srgbClr val="303437"/>
-                </a:solidFill>
-                <a:latin typeface="Noto Sans"/>
-                <a:ea typeface="Noto Sans CJK JP"/>
-                <a:cs typeface="Noto Sans"/>
-              </a:rPr>
-              <a:t>Appendix</a:t>
+              <a:defRPr sz="2800" b="0">
+                <a:solidFill>
+                  <a:srgbClr val="303437"/>
+                </a:solidFill>
+                <a:latin typeface="Noto Sans"/>
+              </a:defRPr>
+            </a:pPr>
+            <a:r>
+              <a:rPr sz="2800" b="1" lang="ja-JP" altLang="en-US">
+                <a:solidFill>
+                  <a:srgbClr val="303437"/>
+                </a:solidFill>
+                <a:latin typeface="Noto Sans"/>
+                <a:ea typeface="Noto Sans CJK JP"/>
+                <a:cs typeface="Noto Sans"/>
+              </a:rPr>
+              <a:t/>
             </a:r>
           </a:p>
         </p:txBody>
       </p:sp>
       <p:sp>
         <p:nvSpPr>
-          <p:cNvPr id="3" name="Title 2"/>
+          <p:cNvPr id="3" name="Text Placeholder 2"/>
+          <p:cNvSpPr>
+            <a:spLocks noGrp="1"/>
+          </p:cNvSpPr>
+          <p:nvPr>
+            <p:ph type="body" idx="1"/>
+          </p:nvPr>
+        </p:nvSpPr>
+        <p:spPr>
+          <a:xfrm>
+            <a:off x="640080" y="1972511"/>
+            <a:ext cx="7863840" cy="1744980"/>
+          </a:xfrm>
+        </p:spPr>
+        <p:txBody>
+          <a:bodyPr lIns="0" rIns="0" tIns="0" bIns="0">
+            <a:noAutofit/>
+          </a:bodyPr>
+          <a:lstStyle/>
+          <a:p>
+            <a:pPr marL="457200" indent="-457200">
+              <a:lnSpc>
+                <a:spcPts val="3660"/>
+              </a:lnSpc>
+              <a:spcAft>
+                <a:spcPts val="1200"/>
+              </a:spcAft>
+              <a:buSzPct val="100000"/>
+              <a:buFont typeface="Noto Sans CJK JP"/>
+              <a:buAutoNum type="arabicPeriod" startAt="1"/>
+              <a:defRPr sz="3000" b="1">
+                <a:solidFill>
+                  <a:srgbClr val="303437"/>
+                </a:solidFill>
+                <a:latin typeface="Noto Sans"/>
+              </a:defRPr>
+            </a:pPr>
+            <a:r>
+              <a:rPr sz="3000" b="1" lang="ja-JP" altLang="en-US">
+                <a:solidFill>
+                  <a:srgbClr val="303437"/>
+                </a:solidFill>
+                <a:latin typeface="Noto Sans"/>
+                <a:ea typeface="Noto Sans CJK JP"/>
+                <a:cs typeface="Noto Sans"/>
+              </a:rPr>
+              <a:t>追加の対話</a:t>
+            </a:r>
+          </a:p>
+          <a:p>
+            <a:pPr marL="457200" indent="-457200">
+              <a:lnSpc>
+                <a:spcPts val="3660"/>
+              </a:lnSpc>
+              <a:spcAft>
+                <a:spcPts val="1200"/>
+              </a:spcAft>
+              <a:buSzPct val="100000"/>
+              <a:buFont typeface="Noto Sans CJK JP"/>
+              <a:buAutoNum type="arabicPeriod" startAt="2"/>
+              <a:defRPr sz="3000" b="1">
+                <a:solidFill>
+                  <a:srgbClr val="303437"/>
+                </a:solidFill>
+                <a:latin typeface="Noto Sans"/>
+              </a:defRPr>
+            </a:pPr>
+            <a:r>
+              <a:rPr sz="3000" b="1" lang="ja-JP" altLang="en-US">
+                <a:solidFill>
+                  <a:srgbClr val="303437"/>
+                </a:solidFill>
+                <a:latin typeface="Noto Sans"/>
+                <a:ea typeface="Noto Sans CJK JP"/>
+                <a:cs typeface="Noto Sans"/>
+              </a:rPr>
+              <a:t>データの読み方</a:t>
+            </a:r>
+          </a:p>
+          <a:p>
+            <a:pPr marL="457200" indent="-457200">
+              <a:lnSpc>
+                <a:spcPts val="3660"/>
+              </a:lnSpc>
+              <a:spcAft>
+                <a:spcPts val="0"/>
+              </a:spcAft>
+              <a:buSzPct val="100000"/>
+              <a:buFont typeface="Noto Sans CJK JP"/>
+              <a:buAutoNum type="arabicPeriod" startAt="3"/>
+              <a:defRPr sz="3000" b="1">
+                <a:solidFill>
+                  <a:srgbClr val="303437"/>
+                </a:solidFill>
+                <a:latin typeface="Noto Sans"/>
+              </a:defRPr>
+            </a:pPr>
+            <a:r>
+              <a:rPr sz="3000" b="1" lang="ja-JP" altLang="en-US">
+                <a:solidFill>
+                  <a:srgbClr val="303437"/>
+                </a:solidFill>
+                <a:latin typeface="Noto Sans"/>
+                <a:ea typeface="Noto Sans CJK JP"/>
+                <a:cs typeface="Noto Sans"/>
+              </a:rPr>
+              <a:t>研究と参考文献</a:t>
+            </a:r>
+          </a:p>
+        </p:txBody>
+      </p:sp>
+      <p:sp>
+        <p:nvSpPr>
+          <p:cNvPr id="4" name="Title 3"/>
           <p:cNvSpPr>
             <a:spLocks noGrp="1"/>
           </p:cNvSpPr>
@@ -20188,7 +20120,7 @@
                 <a:ea typeface="Noto Sans CJK JP"/>
                 <a:cs typeface="Noto Sans"/>
               </a:rPr>
-              <a:t>Appendix</a:t>
+              <a:t>Appendix: 目次</a:t>
             </a:r>
           </a:p>
         </p:txBody>
@@ -20223,233 +20155,6 @@
         </p:nvSpPr>
         <p:spPr>
           <a:xfrm>
-            <a:off x="468172" y="650138"/>
-            <a:ext cx="8206740" cy="616305"/>
-          </a:xfrm>
-        </p:spPr>
-        <p:txBody>
-          <a:bodyPr wrap="square" lIns="0" rIns="0" tIns="0" bIns="0">
-            <a:noAutofit/>
-          </a:bodyPr>
-          <a:lstStyle/>
-          <a:p>
-            <a:pPr algn="l">
-              <a:lnSpc>
-                <a:spcPct val="110000"/>
-              </a:lnSpc>
-              <a:buNone/>
-              <a:defRPr sz="2800" b="0">
-                <a:solidFill>
-                  <a:srgbClr val="303437"/>
-                </a:solidFill>
-                <a:latin typeface="Noto Sans"/>
-              </a:defRPr>
-            </a:pPr>
-            <a:r>
-              <a:rPr sz="2800" b="1" lang="ja-JP" altLang="en-US">
-                <a:solidFill>
-                  <a:srgbClr val="303437"/>
-                </a:solidFill>
-                <a:latin typeface="Noto Sans"/>
-                <a:ea typeface="Noto Sans CJK JP"/>
-                <a:cs typeface="Noto Sans"/>
-              </a:rPr>
-              <a:t/>
-            </a:r>
-          </a:p>
-        </p:txBody>
-      </p:sp>
-      <p:sp>
-        <p:nvSpPr>
-          <p:cNvPr id="3" name="Text Placeholder 2"/>
-          <p:cNvSpPr>
-            <a:spLocks noGrp="1"/>
-          </p:cNvSpPr>
-          <p:nvPr>
-            <p:ph type="body" idx="1"/>
-          </p:nvPr>
-        </p:nvSpPr>
-        <p:spPr>
-          <a:xfrm>
-            <a:off x="640080" y="1972511"/>
-            <a:ext cx="7863840" cy="1744980"/>
-          </a:xfrm>
-        </p:spPr>
-        <p:txBody>
-          <a:bodyPr lIns="0" rIns="0" tIns="0" bIns="0">
-            <a:noAutofit/>
-          </a:bodyPr>
-          <a:lstStyle/>
-          <a:p>
-            <a:pPr marL="457200" indent="-457200">
-              <a:lnSpc>
-                <a:spcPts val="3660"/>
-              </a:lnSpc>
-              <a:spcAft>
-                <a:spcPts val="1200"/>
-              </a:spcAft>
-              <a:buSzPct val="100000"/>
-              <a:buFont typeface="Noto Sans CJK JP"/>
-              <a:buAutoNum type="arabicPeriod" startAt="1"/>
-              <a:defRPr sz="3000" b="1">
-                <a:solidFill>
-                  <a:srgbClr val="303437"/>
-                </a:solidFill>
-                <a:latin typeface="Noto Sans"/>
-              </a:defRPr>
-            </a:pPr>
-            <a:r>
-              <a:rPr sz="3000" b="1" lang="ja-JP" altLang="en-US">
-                <a:solidFill>
-                  <a:srgbClr val="303437"/>
-                </a:solidFill>
-                <a:latin typeface="Noto Sans"/>
-                <a:ea typeface="Noto Sans CJK JP"/>
-                <a:cs typeface="Noto Sans"/>
-              </a:rPr>
-              <a:t>追加の対話</a:t>
-            </a:r>
-          </a:p>
-          <a:p>
-            <a:pPr marL="457200" indent="-457200">
-              <a:lnSpc>
-                <a:spcPts val="3660"/>
-              </a:lnSpc>
-              <a:spcAft>
-                <a:spcPts val="1200"/>
-              </a:spcAft>
-              <a:buSzPct val="100000"/>
-              <a:buFont typeface="Noto Sans CJK JP"/>
-              <a:buAutoNum type="arabicPeriod" startAt="2"/>
-              <a:defRPr sz="3000" b="1">
-                <a:solidFill>
-                  <a:srgbClr val="303437"/>
-                </a:solidFill>
-                <a:latin typeface="Noto Sans"/>
-              </a:defRPr>
-            </a:pPr>
-            <a:r>
-              <a:rPr sz="3000" b="1" lang="ja-JP" altLang="en-US">
-                <a:solidFill>
-                  <a:srgbClr val="303437"/>
-                </a:solidFill>
-                <a:latin typeface="Noto Sans"/>
-                <a:ea typeface="Noto Sans CJK JP"/>
-                <a:cs typeface="Noto Sans"/>
-              </a:rPr>
-              <a:t>データの読み方</a:t>
-            </a:r>
-          </a:p>
-          <a:p>
-            <a:pPr marL="457200" indent="-457200">
-              <a:lnSpc>
-                <a:spcPts val="3660"/>
-              </a:lnSpc>
-              <a:spcAft>
-                <a:spcPts val="0"/>
-              </a:spcAft>
-              <a:buSzPct val="100000"/>
-              <a:buFont typeface="Noto Sans CJK JP"/>
-              <a:buAutoNum type="arabicPeriod" startAt="3"/>
-              <a:defRPr sz="3000" b="1">
-                <a:solidFill>
-                  <a:srgbClr val="303437"/>
-                </a:solidFill>
-                <a:latin typeface="Noto Sans"/>
-              </a:defRPr>
-            </a:pPr>
-            <a:r>
-              <a:rPr sz="3000" b="1" lang="ja-JP" altLang="en-US">
-                <a:solidFill>
-                  <a:srgbClr val="303437"/>
-                </a:solidFill>
-                <a:latin typeface="Noto Sans"/>
-                <a:ea typeface="Noto Sans CJK JP"/>
-                <a:cs typeface="Noto Sans"/>
-              </a:rPr>
-              <a:t>研究と参考文献</a:t>
-            </a:r>
-          </a:p>
-        </p:txBody>
-      </p:sp>
-      <p:sp>
-        <p:nvSpPr>
-          <p:cNvPr id="4" name="Title 3"/>
-          <p:cNvSpPr>
-            <a:spLocks noGrp="1"/>
-          </p:cNvSpPr>
-          <p:nvPr>
-            <p:ph type="title" idx="2"/>
-          </p:nvPr>
-        </p:nvSpPr>
-        <p:spPr>
-          <a:xfrm>
-            <a:off x="75895" y="0"/>
-            <a:ext cx="8115300" cy="480060"/>
-          </a:xfrm>
-        </p:spPr>
-        <p:txBody>
-          <a:bodyPr wrap="square" lIns="0" rIns="0" tIns="0" bIns="0" anchor="ctr">
-            <a:noAutofit/>
-          </a:bodyPr>
-          <a:lstStyle/>
-          <a:p>
-            <a:pPr algn="l">
-              <a:lnSpc>
-                <a:spcPct val="110000"/>
-              </a:lnSpc>
-              <a:buNone/>
-              <a:defRPr sz="1400" b="0">
-                <a:solidFill>
-                  <a:srgbClr val="303437"/>
-                </a:solidFill>
-                <a:latin typeface="Noto Sans"/>
-              </a:defRPr>
-            </a:pPr>
-            <a:r>
-              <a:rPr sz="1400" b="1" lang="ja-JP" altLang="en-US">
-                <a:solidFill>
-                  <a:srgbClr val="FFFEF8"/>
-                </a:solidFill>
-                <a:latin typeface="Noto Sans"/>
-                <a:ea typeface="Noto Sans CJK JP"/>
-                <a:cs typeface="Noto Sans"/>
-              </a:rPr>
-              <a:t>Appendix: 目次</a:t>
-            </a:r>
-          </a:p>
-        </p:txBody>
-      </p:sp>
-    </p:spTree>
-  </p:cSld>
-  <p:clrMapOvr>
-    <a:masterClrMapping/>
-  </p:clrMapOvr>
-</p:sld>
-</file>
-
-<file path=ppt/slides/slide37.xml><?xml version="1.0" encoding="utf-8"?>
-<p:sld xmlns:a="http://schemas.openxmlformats.org/drawingml/2006/main" xmlns:p="http://schemas.openxmlformats.org/presentationml/2006/main" xmlns:r="http://schemas.openxmlformats.org/officeDocument/2006/relationships">
-  <p:cSld>
-    <p:spTree>
-      <p:nvGrpSpPr>
-        <p:cNvPr id="1" name=""/>
-        <p:cNvGrpSpPr/>
-        <p:nvPr/>
-      </p:nvGrpSpPr>
-      <p:grpSpPr/>
-      <p:sp>
-        <p:nvSpPr>
-          <p:cNvPr id="2" name="Title 1"/>
-          <p:cNvSpPr>
-            <a:spLocks noGrp="1"/>
-          </p:cNvSpPr>
-          <p:nvPr>
-            <p:ph type="title"/>
-          </p:nvPr>
-        </p:nvSpPr>
-        <p:spPr>
-          <a:xfrm>
             <a:off x="548640" y="2506875"/>
             <a:ext cx="8046720" cy="585216"/>
           </a:xfrm>
@@ -20542,7 +20247,7 @@
 </p:sld>
 </file>
 
-<file path=ppt/slides/slide38.xml><?xml version="1.0" encoding="utf-8"?>
+<file path=ppt/slides/slide37.xml><?xml version="1.0" encoding="utf-8"?>
 <p:sld xmlns:a="http://schemas.openxmlformats.org/drawingml/2006/main" xmlns:p="http://schemas.openxmlformats.org/presentationml/2006/main" xmlns:r="http://schemas.openxmlformats.org/officeDocument/2006/relationships">
   <p:cSld>
     <p:spTree>
@@ -21264,7 +20969,7 @@
 </p:sld>
 </file>
 
-<file path=ppt/slides/slide39.xml><?xml version="1.0" encoding="utf-8"?>
+<file path=ppt/slides/slide38.xml><?xml version="1.0" encoding="utf-8"?>
 <p:sld xmlns:a="http://schemas.openxmlformats.org/drawingml/2006/main" xmlns:p="http://schemas.openxmlformats.org/presentationml/2006/main" xmlns:r="http://schemas.openxmlformats.org/officeDocument/2006/relationships">
   <p:cSld>
     <p:spTree>
@@ -21986,121 +21691,7 @@
 </p:sld>
 </file>
 
-<file path=ppt/slides/slide4.xml><?xml version="1.0" encoding="utf-8"?>
-<p:sld xmlns:a="http://schemas.openxmlformats.org/drawingml/2006/main" xmlns:p="http://schemas.openxmlformats.org/presentationml/2006/main" xmlns:r="http://schemas.openxmlformats.org/officeDocument/2006/relationships">
-  <p:cSld>
-    <p:spTree>
-      <p:nvGrpSpPr>
-        <p:cNvPr id="1" name=""/>
-        <p:cNvGrpSpPr/>
-        <p:nvPr/>
-      </p:nvGrpSpPr>
-      <p:grpSpPr/>
-      <p:sp>
-        <p:nvSpPr>
-          <p:cNvPr id="2" name="Title 1"/>
-          <p:cNvSpPr>
-            <a:spLocks noGrp="1"/>
-          </p:cNvSpPr>
-          <p:nvPr>
-            <p:ph type="title"/>
-          </p:nvPr>
-        </p:nvSpPr>
-        <p:spPr>
-          <a:xfrm>
-            <a:off x="548640" y="2506875"/>
-            <a:ext cx="8046720" cy="585216"/>
-          </a:xfrm>
-        </p:spPr>
-        <p:txBody>
-          <a:bodyPr wrap="square" lIns="0" rIns="0" tIns="0" bIns="0" anchor="ctr">
-            <a:noAutofit/>
-          </a:bodyPr>
-          <a:lstStyle/>
-          <a:p>
-            <a:pPr algn="ctr">
-              <a:lnSpc>
-                <a:spcPct val="110000"/>
-              </a:lnSpc>
-              <a:buNone/>
-              <a:defRPr sz="3600" b="0">
-                <a:solidFill>
-                  <a:srgbClr val="303437"/>
-                </a:solidFill>
-                <a:latin typeface="Noto Sans"/>
-              </a:defRPr>
-            </a:pPr>
-            <a:r>
-              <a:rPr sz="3600" b="1" lang="ja-JP" altLang="en-US">
-                <a:solidFill>
-                  <a:srgbClr val="303437"/>
-                </a:solidFill>
-                <a:latin typeface="Noto Sans"/>
-                <a:ea typeface="Noto Sans CJK JP"/>
-                <a:cs typeface="Noto Sans"/>
-              </a:rPr>
-              <a:t>1. 旅行相談の対話と応答</a:t>
-            </a:r>
-          </a:p>
-        </p:txBody>
-      </p:sp>
-      <p:sp>
-        <p:nvSpPr>
-          <p:cNvPr id="3" name="Title 2"/>
-          <p:cNvSpPr>
-            <a:spLocks noGrp="1"/>
-          </p:cNvSpPr>
-          <p:nvPr>
-            <p:ph type="title" idx="2"/>
-          </p:nvPr>
-        </p:nvSpPr>
-        <p:spPr>
-          <a:xfrm>
-            <a:off x="75895" y="0"/>
-            <a:ext cx="8115300" cy="480060"/>
-          </a:xfrm>
-        </p:spPr>
-        <p:txBody>
-          <a:bodyPr wrap="square" lIns="0" rIns="0" tIns="0" bIns="0" anchor="ctr">
-            <a:noAutofit/>
-          </a:bodyPr>
-          <a:lstStyle/>
-          <a:p>
-            <a:pPr algn="l">
-              <a:lnSpc>
-                <a:spcPct val="110000"/>
-              </a:lnSpc>
-              <a:buNone/>
-              <a:defRPr sz="1400" b="0">
-                <a:solidFill>
-                  <a:srgbClr val="303437"/>
-                </a:solidFill>
-                <a:latin typeface="Noto Sans"/>
-              </a:defRPr>
-            </a:pPr>
-            <a:r>
-              <a:rPr sz="1400" b="1" lang="ja-JP" altLang="en-US">
-                <a:solidFill>
-                  <a:srgbClr val="FFFEF8"/>
-                </a:solidFill>
-                <a:latin typeface="Noto Sans"/>
-                <a:ea typeface="Noto Sans CJK JP"/>
-                <a:cs typeface="Noto Sans"/>
-              </a:rPr>
-              <a:t>1. 旅行相談の対話と応答</a:t>
-            </a:r>
-          </a:p>
-        </p:txBody>
-      </p:sp>
-    </p:spTree>
-  </p:cSld>
-  <p:clrMapOvr>
-    <a:masterClrMapping/>
-  </p:clrMapOvr>
-</p:sld>
-</file>
-
-<file path=ppt/slides/slide40.xml><?xml version="1.0" encoding="utf-8"?>
+<file path=ppt/slides/slide39.xml><?xml version="1.0" encoding="utf-8"?>
 <p:sld xmlns:a="http://schemas.openxmlformats.org/drawingml/2006/main" xmlns:p="http://schemas.openxmlformats.org/presentationml/2006/main" xmlns:r="http://schemas.openxmlformats.org/officeDocument/2006/relationships">
   <p:cSld>
     <p:spTree>
@@ -22822,7 +22413,121 @@
 </p:sld>
 </file>
 
-<file path=ppt/slides/slide41.xml><?xml version="1.0" encoding="utf-8"?>
+<file path=ppt/slides/slide4.xml><?xml version="1.0" encoding="utf-8"?>
+<p:sld xmlns:a="http://schemas.openxmlformats.org/drawingml/2006/main" xmlns:p="http://schemas.openxmlformats.org/presentationml/2006/main" xmlns:r="http://schemas.openxmlformats.org/officeDocument/2006/relationships">
+  <p:cSld>
+    <p:spTree>
+      <p:nvGrpSpPr>
+        <p:cNvPr id="1" name=""/>
+        <p:cNvGrpSpPr/>
+        <p:nvPr/>
+      </p:nvGrpSpPr>
+      <p:grpSpPr/>
+      <p:sp>
+        <p:nvSpPr>
+          <p:cNvPr id="2" name="Title 1"/>
+          <p:cNvSpPr>
+            <a:spLocks noGrp="1"/>
+          </p:cNvSpPr>
+          <p:nvPr>
+            <p:ph type="title"/>
+          </p:nvPr>
+        </p:nvSpPr>
+        <p:spPr>
+          <a:xfrm>
+            <a:off x="548640" y="2506875"/>
+            <a:ext cx="8046720" cy="585216"/>
+          </a:xfrm>
+        </p:spPr>
+        <p:txBody>
+          <a:bodyPr wrap="square" lIns="0" rIns="0" tIns="0" bIns="0" anchor="ctr">
+            <a:noAutofit/>
+          </a:bodyPr>
+          <a:lstStyle/>
+          <a:p>
+            <a:pPr algn="ctr">
+              <a:lnSpc>
+                <a:spcPct val="110000"/>
+              </a:lnSpc>
+              <a:buNone/>
+              <a:defRPr sz="3600" b="0">
+                <a:solidFill>
+                  <a:srgbClr val="303437"/>
+                </a:solidFill>
+                <a:latin typeface="Noto Sans"/>
+              </a:defRPr>
+            </a:pPr>
+            <a:r>
+              <a:rPr sz="3600" b="1" lang="ja-JP" altLang="en-US">
+                <a:solidFill>
+                  <a:srgbClr val="303437"/>
+                </a:solidFill>
+                <a:latin typeface="Noto Sans"/>
+                <a:ea typeface="Noto Sans CJK JP"/>
+                <a:cs typeface="Noto Sans"/>
+              </a:rPr>
+              <a:t>1. 旅行相談の対話と応答</a:t>
+            </a:r>
+          </a:p>
+        </p:txBody>
+      </p:sp>
+      <p:sp>
+        <p:nvSpPr>
+          <p:cNvPr id="3" name="Title 2"/>
+          <p:cNvSpPr>
+            <a:spLocks noGrp="1"/>
+          </p:cNvSpPr>
+          <p:nvPr>
+            <p:ph type="title" idx="2"/>
+          </p:nvPr>
+        </p:nvSpPr>
+        <p:spPr>
+          <a:xfrm>
+            <a:off x="75895" y="0"/>
+            <a:ext cx="8115300" cy="480060"/>
+          </a:xfrm>
+        </p:spPr>
+        <p:txBody>
+          <a:bodyPr wrap="square" lIns="0" rIns="0" tIns="0" bIns="0" anchor="ctr">
+            <a:noAutofit/>
+          </a:bodyPr>
+          <a:lstStyle/>
+          <a:p>
+            <a:pPr algn="l">
+              <a:lnSpc>
+                <a:spcPct val="110000"/>
+              </a:lnSpc>
+              <a:buNone/>
+              <a:defRPr sz="1400" b="0">
+                <a:solidFill>
+                  <a:srgbClr val="303437"/>
+                </a:solidFill>
+                <a:latin typeface="Noto Sans"/>
+              </a:defRPr>
+            </a:pPr>
+            <a:r>
+              <a:rPr sz="1400" b="1" lang="ja-JP" altLang="en-US">
+                <a:solidFill>
+                  <a:srgbClr val="FFFEF8"/>
+                </a:solidFill>
+                <a:latin typeface="Noto Sans"/>
+                <a:ea typeface="Noto Sans CJK JP"/>
+                <a:cs typeface="Noto Sans"/>
+              </a:rPr>
+              <a:t>1. 旅行相談の対話と応答</a:t>
+            </a:r>
+          </a:p>
+        </p:txBody>
+      </p:sp>
+    </p:spTree>
+  </p:cSld>
+  <p:clrMapOvr>
+    <a:masterClrMapping/>
+  </p:clrMapOvr>
+</p:sld>
+</file>
+
+<file path=ppt/slides/slide40.xml><?xml version="1.0" encoding="utf-8"?>
 <p:sld xmlns:a="http://schemas.openxmlformats.org/drawingml/2006/main" xmlns:p="http://schemas.openxmlformats.org/presentationml/2006/main" xmlns:r="http://schemas.openxmlformats.org/officeDocument/2006/relationships">
   <p:cSld>
     <p:spTree>
@@ -23300,7 +23005,7 @@
 </p:sld>
 </file>
 
-<file path=ppt/slides/slide42.xml><?xml version="1.0" encoding="utf-8"?>
+<file path=ppt/slides/slide41.xml><?xml version="1.0" encoding="utf-8"?>
 <p:sld xmlns:a="http://schemas.openxmlformats.org/drawingml/2006/main" xmlns:p="http://schemas.openxmlformats.org/presentationml/2006/main" xmlns:r="http://schemas.openxmlformats.org/officeDocument/2006/relationships">
   <p:cSld>
     <p:spTree>
@@ -23778,7 +23483,7 @@
 </p:sld>
 </file>
 
-<file path=ppt/slides/slide43.xml><?xml version="1.0" encoding="utf-8"?>
+<file path=ppt/slides/slide42.xml><?xml version="1.0" encoding="utf-8"?>
 <p:sld xmlns:a="http://schemas.openxmlformats.org/drawingml/2006/main" xmlns:p="http://schemas.openxmlformats.org/presentationml/2006/main" xmlns:r="http://schemas.openxmlformats.org/officeDocument/2006/relationships">
   <p:cSld>
     <p:spTree>
@@ -24376,7 +24081,7 @@
 </p:sld>
 </file>
 
-<file path=ppt/slides/slide44.xml><?xml version="1.0" encoding="utf-8"?>
+<file path=ppt/slides/slide43.xml><?xml version="1.0" encoding="utf-8"?>
 <p:sld xmlns:a="http://schemas.openxmlformats.org/drawingml/2006/main" xmlns:p="http://schemas.openxmlformats.org/presentationml/2006/main" xmlns:r="http://schemas.openxmlformats.org/officeDocument/2006/relationships">
   <p:cSld>
     <p:spTree>
@@ -24974,7 +24679,7 @@
 </p:sld>
 </file>
 
-<file path=ppt/slides/slide45.xml><?xml version="1.0" encoding="utf-8"?>
+<file path=ppt/slides/slide44.xml><?xml version="1.0" encoding="utf-8"?>
 <p:sld xmlns:a="http://schemas.openxmlformats.org/drawingml/2006/main" xmlns:p="http://schemas.openxmlformats.org/presentationml/2006/main" xmlns:r="http://schemas.openxmlformats.org/officeDocument/2006/relationships">
   <p:cSld>
     <p:spTree>
@@ -25534,7 +25239,7 @@
 </p:sld>
 </file>
 
-<file path=ppt/slides/slide46.xml><?xml version="1.0" encoding="utf-8"?>
+<file path=ppt/slides/slide45.xml><?xml version="1.0" encoding="utf-8"?>
 <p:sld xmlns:a="http://schemas.openxmlformats.org/drawingml/2006/main" xmlns:p="http://schemas.openxmlformats.org/presentationml/2006/main" xmlns:r="http://schemas.openxmlformats.org/officeDocument/2006/relationships">
   <p:cSld>
     <p:spTree>
@@ -26094,7 +25799,7 @@
 </p:sld>
 </file>
 
-<file path=ppt/slides/slide47.xml><?xml version="1.0" encoding="utf-8"?>
+<file path=ppt/slides/slide46.xml><?xml version="1.0" encoding="utf-8"?>
 <p:sld xmlns:a="http://schemas.openxmlformats.org/drawingml/2006/main" xmlns:p="http://schemas.openxmlformats.org/presentationml/2006/main" xmlns:r="http://schemas.openxmlformats.org/officeDocument/2006/relationships">
   <p:cSld>
     <p:spTree>
@@ -26747,7 +26452,7 @@
 </p:sld>
 </file>
 
-<file path=ppt/slides/slide48.xml><?xml version="1.0" encoding="utf-8"?>
+<file path=ppt/slides/slide47.xml><?xml version="1.0" encoding="utf-8"?>
 <p:sld xmlns:a="http://schemas.openxmlformats.org/drawingml/2006/main" xmlns:p="http://schemas.openxmlformats.org/presentationml/2006/main" xmlns:r="http://schemas.openxmlformats.org/officeDocument/2006/relationships">
   <p:cSld>
     <p:spTree>
@@ -27431,7 +27136,7 @@
 </p:sld>
 </file>
 
-<file path=ppt/slides/slide49.xml><?xml version="1.0" encoding="utf-8"?>
+<file path=ppt/slides/slide48.xml><?xml version="1.0" encoding="utf-8"?>
 <p:sld xmlns:a="http://schemas.openxmlformats.org/drawingml/2006/main" xmlns:p="http://schemas.openxmlformats.org/presentationml/2006/main" xmlns:r="http://schemas.openxmlformats.org/officeDocument/2006/relationships">
   <p:cSld>
     <p:spTree>
@@ -28115,300 +27820,7 @@
 </p:sld>
 </file>
 
-<file path=ppt/slides/slide5.xml><?xml version="1.0" encoding="utf-8"?>
-<p:sld xmlns:a="http://schemas.openxmlformats.org/drawingml/2006/main" xmlns:p="http://schemas.openxmlformats.org/presentationml/2006/main" xmlns:r="http://schemas.openxmlformats.org/officeDocument/2006/relationships">
-  <p:cSld>
-    <p:spTree>
-      <p:nvGrpSpPr>
-        <p:cNvPr id="1" name=""/>
-        <p:cNvGrpSpPr/>
-        <p:nvPr/>
-      </p:nvGrpSpPr>
-      <p:grpSpPr/>
-      <p:sp>
-        <p:nvSpPr>
-          <p:cNvPr id="2" name="Title 1"/>
-          <p:cNvSpPr>
-            <a:spLocks noGrp="1"/>
-          </p:cNvSpPr>
-          <p:nvPr>
-            <p:ph type="title"/>
-          </p:nvPr>
-        </p:nvSpPr>
-        <p:spPr>
-          <a:xfrm>
-            <a:off x="468172" y="650138"/>
-            <a:ext cx="8206740" cy="616305"/>
-          </a:xfrm>
-        </p:spPr>
-        <p:txBody>
-          <a:bodyPr wrap="square" lIns="0" rIns="0" tIns="0" bIns="0">
-            <a:noAutofit/>
-          </a:bodyPr>
-          <a:lstStyle/>
-          <a:p>
-            <a:pPr algn="l">
-              <a:lnSpc>
-                <a:spcPct val="110000"/>
-              </a:lnSpc>
-              <a:buNone/>
-              <a:defRPr sz="2800" b="0">
-                <a:solidFill>
-                  <a:srgbClr val="303437"/>
-                </a:solidFill>
-                <a:latin typeface="Noto Sans"/>
-              </a:defRPr>
-            </a:pPr>
-            <a:r>
-              <a:rPr sz="2800" b="1" lang="ja-JP" altLang="en-US">
-                <a:solidFill>
-                  <a:srgbClr val="303437"/>
-                </a:solidFill>
-                <a:latin typeface="Noto Sans"/>
-                <a:ea typeface="Noto Sans CJK JP"/>
-                <a:cs typeface="Noto Sans"/>
-              </a:rPr>
-              <a:t>旅行の相談を、複数の領域へつなぐ</a:t>
-            </a:r>
-          </a:p>
-        </p:txBody>
-      </p:sp>
-      <p:sp>
-        <p:nvSpPr>
-          <p:cNvPr id="3" name="Text Placeholder 2"/>
-          <p:cNvSpPr>
-            <a:spLocks noGrp="1"/>
-          </p:cNvSpPr>
-          <p:nvPr>
-            <p:ph type="body" idx="1"/>
-          </p:nvPr>
-        </p:nvSpPr>
-        <p:spPr>
-          <a:xfrm>
-            <a:off x="594360" y="1463040"/>
-            <a:ext cx="7955279" cy="3044952"/>
-          </a:xfrm>
-        </p:spPr>
-        <p:txBody>
-          <a:bodyPr wrap="square" tIns="91440" bIns="91440">
-            <a:noAutofit/>
-          </a:bodyPr>
-          <a:lstStyle/>
-          <a:p>
-            <a:pPr marL="457200" indent="-355600">
-              <a:lnSpc>
-                <a:spcPts val="2499"/>
-              </a:lnSpc>
-              <a:spcAft>
-                <a:spcPts val="700"/>
-              </a:spcAft>
-              <a:buSzPct val="63333"/>
-              <a:buFont typeface="Noto Sans CJK JP"/>
-              <a:buChar char="●"/>
-              <a:defRPr sz="2100" b="0">
-                <a:solidFill>
-                  <a:srgbClr val="303437"/>
-                </a:solidFill>
-                <a:latin typeface="Noto Sans"/>
-              </a:defRPr>
-            </a:pPr>
-            <a:r>
-              <a:rPr sz="2100" b="0" lang="ja-JP" altLang="en-US">
-                <a:solidFill>
-                  <a:srgbClr val="303437"/>
-                </a:solidFill>
-                <a:latin typeface="Noto Sans"/>
-                <a:ea typeface="Noto Sans CJK JP"/>
-                <a:cs typeface="Noto Sans"/>
-              </a:rPr>
-              <a:t>CrossWOZは、北京の旅行情報を尋ねる中国語のタスク指向対話を集めたデータセット。ホテル、レストラン、観光地、地下鉄、タクシーの5領域を扱う。</a:t>
-            </a:r>
-          </a:p>
-          <a:p>
-            <a:pPr marL="457200" indent="-355600">
-              <a:lnSpc>
-                <a:spcPts val="2499"/>
-              </a:lnSpc>
-              <a:spcAft>
-                <a:spcPts val="700"/>
-              </a:spcAft>
-              <a:buSzPct val="63333"/>
-              <a:buFont typeface="Noto Sans CJK JP"/>
-              <a:buChar char="●"/>
-              <a:defRPr sz="2100" b="0">
-                <a:solidFill>
-                  <a:srgbClr val="303437"/>
-                </a:solidFill>
-                <a:latin typeface="Noto Sans"/>
-              </a:defRPr>
-            </a:pPr>
-            <a:r>
-              <a:rPr sz="2100" b="0" lang="ja-JP" altLang="en-US">
-                <a:solidFill>
-                  <a:srgbClr val="303437"/>
-                </a:solidFill>
-                <a:latin typeface="Noto Sans"/>
-                <a:ea typeface="Noto Sans CJK JP"/>
-                <a:cs typeface="Noto Sans"/>
-              </a:rPr>
-              <a:t>旅行者役と案内役の人間が会話し、施設の条件や、選んだ施設の周辺、施設間の移動を順に決める。</a:t>
-            </a:r>
-          </a:p>
-          <a:p>
-            <a:pPr marL="457200" indent="-355600">
-              <a:lnSpc>
-                <a:spcPts val="2499"/>
-              </a:lnSpc>
-              <a:spcAft>
-                <a:spcPts val="0"/>
-              </a:spcAft>
-              <a:buSzPct val="63333"/>
-              <a:buFont typeface="Noto Sans CJK JP"/>
-              <a:buChar char="●"/>
-              <a:defRPr sz="2100" b="0">
-                <a:solidFill>
-                  <a:srgbClr val="303437"/>
-                </a:solidFill>
-                <a:latin typeface="Noto Sans"/>
-              </a:defRPr>
-            </a:pPr>
-            <a:r>
-              <a:rPr sz="2100" b="0" lang="ja-JP" altLang="en-US">
-                <a:solidFill>
-                  <a:srgbClr val="303437"/>
-                </a:solidFill>
-                <a:latin typeface="Noto Sans"/>
-                <a:ea typeface="Noto Sans CJK JP"/>
-                <a:cs typeface="Noto Sans"/>
-              </a:rPr>
-              <a:t>発話だけでなく、達成したい目標、会話中の状態、伝えた内容の注釈、検索用DBを持つ。</a:t>
-            </a:r>
-          </a:p>
-        </p:txBody>
-      </p:sp>
-      <p:sp>
-        <p:nvSpPr>
-          <p:cNvPr id="4" name="Title 3"/>
-          <p:cNvSpPr>
-            <a:spLocks noGrp="1"/>
-          </p:cNvSpPr>
-          <p:nvPr>
-            <p:ph type="title" idx="2"/>
-          </p:nvPr>
-        </p:nvSpPr>
-        <p:spPr>
-          <a:xfrm>
-            <a:off x="75895" y="0"/>
-            <a:ext cx="8115300" cy="480060"/>
-          </a:xfrm>
-        </p:spPr>
-        <p:txBody>
-          <a:bodyPr wrap="square" lIns="0" rIns="0" tIns="0" bIns="0" anchor="ctr">
-            <a:noAutofit/>
-          </a:bodyPr>
-          <a:lstStyle/>
-          <a:p>
-            <a:pPr algn="l">
-              <a:lnSpc>
-                <a:spcPct val="110000"/>
-              </a:lnSpc>
-              <a:buNone/>
-              <a:defRPr sz="1400" b="0">
-                <a:solidFill>
-                  <a:srgbClr val="303437"/>
-                </a:solidFill>
-                <a:latin typeface="Noto Sans"/>
-              </a:defRPr>
-            </a:pPr>
-            <a:r>
-              <a:rPr sz="1400" b="1" lang="ja-JP" altLang="en-US">
-                <a:solidFill>
-                  <a:srgbClr val="FFFEF8"/>
-                </a:solidFill>
-                <a:latin typeface="Noto Sans"/>
-                <a:ea typeface="Noto Sans CJK JP"/>
-                <a:cs typeface="Noto Sans"/>
-              </a:rPr>
-              <a:t>1. 旅行相談の対話と応答</a:t>
-            </a:r>
-          </a:p>
-        </p:txBody>
-      </p:sp>
-      <p:sp>
-        <p:nvSpPr>
-          <p:cNvPr id="5" name="sources"/>
-          <p:cNvSpPr txBox="1"/>
-          <p:nvPr/>
-        </p:nvSpPr>
-        <p:spPr>
-          <a:xfrm>
-            <a:off x="502920" y="4699000"/>
-            <a:ext cx="8183879" cy="431800"/>
-          </a:xfrm>
-          <a:prstGeom prst="rect">
-            <a:avLst/>
-          </a:prstGeom>
-          <a:noFill/>
-        </p:spPr>
-        <p:txBody>
-          <a:bodyPr wrap="square" lIns="0" rIns="0" tIns="0" bIns="0">
-            <a:noAutofit/>
-          </a:bodyPr>
-          <a:lstStyle/>
-          <a:p>
-            <a:pPr algn="l">
-              <a:lnSpc>
-                <a:spcPts val="1200"/>
-              </a:lnSpc>
-              <a:spcBef>
-                <a:spcPts val="0"/>
-              </a:spcBef>
-              <a:spcAft>
-                <a:spcPts val="0"/>
-              </a:spcAft>
-              <a:buNone/>
-              <a:defRPr sz="810" b="0">
-                <a:solidFill>
-                  <a:srgbClr val="303437"/>
-                </a:solidFill>
-                <a:latin typeface="Noto Sans"/>
-              </a:defRPr>
-            </a:pPr>
-            <a:r>
-              <a:rPr sz="830">
-                <a:latin typeface="Noto Sans CJK JP"/>
-              </a:rPr>
-              <a:t>[1] Zhu et al. (2020). CrossWOZ: A Large-Scale Chinese Cross-Domain Task-Oriented Dialogue Dataset.</a:t>
-            </a:r>
-          </a:p>
-          <a:p>
-            <a:pPr>
-              <a:spcBef>
-                <a:spcPts val="0"/>
-              </a:spcBef>
-              <a:spcAft>
-                <a:spcPts val="0"/>
-              </a:spcAft>
-            </a:pPr>
-            <a:r>
-              <a:rPr sz="830">
-                <a:latin typeface="Noto Sans CJK JP"/>
-                <a:hlinkClick r:id="rId2"/>
-              </a:rPr>
-              <a:t>https://aclanthology.org/2020.tacl-1.19/</a:t>
-            </a:r>
-          </a:p>
-        </p:txBody>
-      </p:sp>
-    </p:spTree>
-  </p:cSld>
-  <p:clrMapOvr>
-    <a:masterClrMapping/>
-  </p:clrMapOvr>
-</p:sld>
-</file>
-
-<file path=ppt/slides/slide50.xml><?xml version="1.0" encoding="utf-8"?>
+<file path=ppt/slides/slide49.xml><?xml version="1.0" encoding="utf-8"?>
 <p:sld xmlns:a="http://schemas.openxmlformats.org/drawingml/2006/main" xmlns:p="http://schemas.openxmlformats.org/presentationml/2006/main" xmlns:r="http://schemas.openxmlformats.org/officeDocument/2006/relationships">
   <p:cSld>
     <p:spTree>
@@ -29061,7 +28473,300 @@
 </p:sld>
 </file>
 
-<file path=ppt/slides/slide51.xml><?xml version="1.0" encoding="utf-8"?>
+<file path=ppt/slides/slide5.xml><?xml version="1.0" encoding="utf-8"?>
+<p:sld xmlns:a="http://schemas.openxmlformats.org/drawingml/2006/main" xmlns:p="http://schemas.openxmlformats.org/presentationml/2006/main" xmlns:r="http://schemas.openxmlformats.org/officeDocument/2006/relationships">
+  <p:cSld>
+    <p:spTree>
+      <p:nvGrpSpPr>
+        <p:cNvPr id="1" name=""/>
+        <p:cNvGrpSpPr/>
+        <p:nvPr/>
+      </p:nvGrpSpPr>
+      <p:grpSpPr/>
+      <p:sp>
+        <p:nvSpPr>
+          <p:cNvPr id="2" name="Title 1"/>
+          <p:cNvSpPr>
+            <a:spLocks noGrp="1"/>
+          </p:cNvSpPr>
+          <p:nvPr>
+            <p:ph type="title"/>
+          </p:nvPr>
+        </p:nvSpPr>
+        <p:spPr>
+          <a:xfrm>
+            <a:off x="468172" y="650138"/>
+            <a:ext cx="8206740" cy="616305"/>
+          </a:xfrm>
+        </p:spPr>
+        <p:txBody>
+          <a:bodyPr wrap="square" lIns="0" rIns="0" tIns="0" bIns="0">
+            <a:noAutofit/>
+          </a:bodyPr>
+          <a:lstStyle/>
+          <a:p>
+            <a:pPr algn="l">
+              <a:lnSpc>
+                <a:spcPct val="110000"/>
+              </a:lnSpc>
+              <a:buNone/>
+              <a:defRPr sz="2800" b="0">
+                <a:solidFill>
+                  <a:srgbClr val="303437"/>
+                </a:solidFill>
+                <a:latin typeface="Noto Sans"/>
+              </a:defRPr>
+            </a:pPr>
+            <a:r>
+              <a:rPr sz="2800" b="1" lang="ja-JP" altLang="en-US">
+                <a:solidFill>
+                  <a:srgbClr val="303437"/>
+                </a:solidFill>
+                <a:latin typeface="Noto Sans"/>
+                <a:ea typeface="Noto Sans CJK JP"/>
+                <a:cs typeface="Noto Sans"/>
+              </a:rPr>
+              <a:t>旅行の相談を、複数の領域へつなぐ</a:t>
+            </a:r>
+          </a:p>
+        </p:txBody>
+      </p:sp>
+      <p:sp>
+        <p:nvSpPr>
+          <p:cNvPr id="3" name="Text Placeholder 2"/>
+          <p:cNvSpPr>
+            <a:spLocks noGrp="1"/>
+          </p:cNvSpPr>
+          <p:nvPr>
+            <p:ph type="body" idx="1"/>
+          </p:nvPr>
+        </p:nvSpPr>
+        <p:spPr>
+          <a:xfrm>
+            <a:off x="594360" y="1463040"/>
+            <a:ext cx="7955279" cy="3044952"/>
+          </a:xfrm>
+        </p:spPr>
+        <p:txBody>
+          <a:bodyPr wrap="square" tIns="91440" bIns="91440">
+            <a:noAutofit/>
+          </a:bodyPr>
+          <a:lstStyle/>
+          <a:p>
+            <a:pPr marL="457200" indent="-355600">
+              <a:lnSpc>
+                <a:spcPts val="2499"/>
+              </a:lnSpc>
+              <a:spcAft>
+                <a:spcPts val="700"/>
+              </a:spcAft>
+              <a:buSzPct val="63333"/>
+              <a:buFont typeface="Noto Sans CJK JP"/>
+              <a:buChar char="●"/>
+              <a:defRPr sz="2100" b="0">
+                <a:solidFill>
+                  <a:srgbClr val="303437"/>
+                </a:solidFill>
+                <a:latin typeface="Noto Sans"/>
+              </a:defRPr>
+            </a:pPr>
+            <a:r>
+              <a:rPr sz="2100" b="0" lang="ja-JP" altLang="en-US">
+                <a:solidFill>
+                  <a:srgbClr val="303437"/>
+                </a:solidFill>
+                <a:latin typeface="Noto Sans"/>
+                <a:ea typeface="Noto Sans CJK JP"/>
+                <a:cs typeface="Noto Sans"/>
+              </a:rPr>
+              <a:t>CrossWOZは、北京の旅行情報を尋ねる中国語のタスク指向対話を集めたデータセット。ホテル、レストラン、観光地、地下鉄、タクシーの5領域を扱う。</a:t>
+            </a:r>
+          </a:p>
+          <a:p>
+            <a:pPr marL="457200" indent="-355600">
+              <a:lnSpc>
+                <a:spcPts val="2499"/>
+              </a:lnSpc>
+              <a:spcAft>
+                <a:spcPts val="700"/>
+              </a:spcAft>
+              <a:buSzPct val="63333"/>
+              <a:buFont typeface="Noto Sans CJK JP"/>
+              <a:buChar char="●"/>
+              <a:defRPr sz="2100" b="0">
+                <a:solidFill>
+                  <a:srgbClr val="303437"/>
+                </a:solidFill>
+                <a:latin typeface="Noto Sans"/>
+              </a:defRPr>
+            </a:pPr>
+            <a:r>
+              <a:rPr sz="2100" b="0" lang="ja-JP" altLang="en-US">
+                <a:solidFill>
+                  <a:srgbClr val="303437"/>
+                </a:solidFill>
+                <a:latin typeface="Noto Sans"/>
+                <a:ea typeface="Noto Sans CJK JP"/>
+                <a:cs typeface="Noto Sans"/>
+              </a:rPr>
+              <a:t>旅行者役と案内役の人間が会話し、施設の条件や、選んだ施設の周辺、施設間の移動を順に決める。</a:t>
+            </a:r>
+          </a:p>
+          <a:p>
+            <a:pPr marL="457200" indent="-355600">
+              <a:lnSpc>
+                <a:spcPts val="2499"/>
+              </a:lnSpc>
+              <a:spcAft>
+                <a:spcPts val="0"/>
+              </a:spcAft>
+              <a:buSzPct val="63333"/>
+              <a:buFont typeface="Noto Sans CJK JP"/>
+              <a:buChar char="●"/>
+              <a:defRPr sz="2100" b="0">
+                <a:solidFill>
+                  <a:srgbClr val="303437"/>
+                </a:solidFill>
+                <a:latin typeface="Noto Sans"/>
+              </a:defRPr>
+            </a:pPr>
+            <a:r>
+              <a:rPr sz="2100" b="0" lang="ja-JP" altLang="en-US">
+                <a:solidFill>
+                  <a:srgbClr val="303437"/>
+                </a:solidFill>
+                <a:latin typeface="Noto Sans"/>
+                <a:ea typeface="Noto Sans CJK JP"/>
+                <a:cs typeface="Noto Sans"/>
+              </a:rPr>
+              <a:t>発話だけでなく、達成したい目標、会話中の状態、伝えた内容の注釈、検索用DBを持つ。</a:t>
+            </a:r>
+          </a:p>
+        </p:txBody>
+      </p:sp>
+      <p:sp>
+        <p:nvSpPr>
+          <p:cNvPr id="4" name="Title 3"/>
+          <p:cNvSpPr>
+            <a:spLocks noGrp="1"/>
+          </p:cNvSpPr>
+          <p:nvPr>
+            <p:ph type="title" idx="2"/>
+          </p:nvPr>
+        </p:nvSpPr>
+        <p:spPr>
+          <a:xfrm>
+            <a:off x="75895" y="0"/>
+            <a:ext cx="8115300" cy="480060"/>
+          </a:xfrm>
+        </p:spPr>
+        <p:txBody>
+          <a:bodyPr wrap="square" lIns="0" rIns="0" tIns="0" bIns="0" anchor="ctr">
+            <a:noAutofit/>
+          </a:bodyPr>
+          <a:lstStyle/>
+          <a:p>
+            <a:pPr algn="l">
+              <a:lnSpc>
+                <a:spcPct val="110000"/>
+              </a:lnSpc>
+              <a:buNone/>
+              <a:defRPr sz="1400" b="0">
+                <a:solidFill>
+                  <a:srgbClr val="303437"/>
+                </a:solidFill>
+                <a:latin typeface="Noto Sans"/>
+              </a:defRPr>
+            </a:pPr>
+            <a:r>
+              <a:rPr sz="1400" b="1" lang="ja-JP" altLang="en-US">
+                <a:solidFill>
+                  <a:srgbClr val="FFFEF8"/>
+                </a:solidFill>
+                <a:latin typeface="Noto Sans"/>
+                <a:ea typeface="Noto Sans CJK JP"/>
+                <a:cs typeface="Noto Sans"/>
+              </a:rPr>
+              <a:t>1. 旅行相談の対話と応答</a:t>
+            </a:r>
+          </a:p>
+        </p:txBody>
+      </p:sp>
+      <p:sp>
+        <p:nvSpPr>
+          <p:cNvPr id="5" name="sources"/>
+          <p:cNvSpPr txBox="1"/>
+          <p:nvPr/>
+        </p:nvSpPr>
+        <p:spPr>
+          <a:xfrm>
+            <a:off x="502920" y="4699000"/>
+            <a:ext cx="8183879" cy="431800"/>
+          </a:xfrm>
+          <a:prstGeom prst="rect">
+            <a:avLst/>
+          </a:prstGeom>
+          <a:noFill/>
+        </p:spPr>
+        <p:txBody>
+          <a:bodyPr wrap="square" lIns="0" rIns="0" tIns="0" bIns="0">
+            <a:noAutofit/>
+          </a:bodyPr>
+          <a:lstStyle/>
+          <a:p>
+            <a:pPr algn="l">
+              <a:lnSpc>
+                <a:spcPts val="1200"/>
+              </a:lnSpc>
+              <a:spcBef>
+                <a:spcPts val="0"/>
+              </a:spcBef>
+              <a:spcAft>
+                <a:spcPts val="0"/>
+              </a:spcAft>
+              <a:buNone/>
+              <a:defRPr sz="810" b="0">
+                <a:solidFill>
+                  <a:srgbClr val="303437"/>
+                </a:solidFill>
+                <a:latin typeface="Noto Sans"/>
+              </a:defRPr>
+            </a:pPr>
+            <a:r>
+              <a:rPr sz="830">
+                <a:latin typeface="Noto Sans CJK JP"/>
+              </a:rPr>
+              <a:t>[1] Zhu et al. (2020). CrossWOZ: A Large-Scale Chinese Cross-Domain Task-Oriented Dialogue Dataset.</a:t>
+            </a:r>
+          </a:p>
+          <a:p>
+            <a:pPr>
+              <a:spcBef>
+                <a:spcPts val="0"/>
+              </a:spcBef>
+              <a:spcAft>
+                <a:spcPts val="0"/>
+              </a:spcAft>
+            </a:pPr>
+            <a:r>
+              <a:rPr sz="830">
+                <a:latin typeface="Noto Sans CJK JP"/>
+                <a:hlinkClick r:id="rId2"/>
+              </a:rPr>
+              <a:t>https://aclanthology.org/2020.tacl-1.19/</a:t>
+            </a:r>
+          </a:p>
+        </p:txBody>
+      </p:sp>
+    </p:spTree>
+  </p:cSld>
+  <p:clrMapOvr>
+    <a:masterClrMapping/>
+  </p:clrMapOvr>
+</p:sld>
+</file>
+
+<file path=ppt/slides/slide50.xml><?xml version="1.0" encoding="utf-8"?>
 <p:sld xmlns:a="http://schemas.openxmlformats.org/drawingml/2006/main" xmlns:p="http://schemas.openxmlformats.org/presentationml/2006/main" xmlns:r="http://schemas.openxmlformats.org/officeDocument/2006/relationships">
   <p:cSld>
     <p:spTree>
@@ -29714,7 +29419,7 @@
 </p:sld>
 </file>
 
-<file path=ppt/slides/slide52.xml><?xml version="1.0" encoding="utf-8"?>
+<file path=ppt/slides/slide51.xml><?xml version="1.0" encoding="utf-8"?>
 <p:sld xmlns:a="http://schemas.openxmlformats.org/drawingml/2006/main" xmlns:p="http://schemas.openxmlformats.org/presentationml/2006/main" xmlns:r="http://schemas.openxmlformats.org/officeDocument/2006/relationships">
   <p:cSld>
     <p:spTree>
@@ -30367,7 +30072,7 @@
 </p:sld>
 </file>
 
-<file path=ppt/slides/slide53.xml><?xml version="1.0" encoding="utf-8"?>
+<file path=ppt/slides/slide52.xml><?xml version="1.0" encoding="utf-8"?>
 <p:sld xmlns:a="http://schemas.openxmlformats.org/drawingml/2006/main" xmlns:p="http://schemas.openxmlformats.org/presentationml/2006/main" xmlns:r="http://schemas.openxmlformats.org/officeDocument/2006/relationships">
   <p:cSld>
     <p:spTree>
@@ -30481,7 +30186,7 @@
 </p:sld>
 </file>
 
-<file path=ppt/slides/slide56.xml><?xml version="1.0" encoding="utf-8"?>
+<file path=ppt/slides/slide53.xml><?xml version="1.0" encoding="utf-8"?>
 <p:sld xmlns:a="http://schemas.openxmlformats.org/drawingml/2006/main" xmlns:p="http://schemas.openxmlformats.org/presentationml/2006/main" xmlns:r="http://schemas.openxmlformats.org/officeDocument/2006/relationships">
   <p:cSld>
     <p:spTree>
@@ -30973,7 +30678,7 @@
 </p:sld>
 </file>
 
-<file path=ppt/slides/slide57.xml><?xml version="1.0" encoding="utf-8"?>
+<file path=ppt/slides/slide54.xml><?xml version="1.0" encoding="utf-8"?>
 <p:sld xmlns:a="http://schemas.openxmlformats.org/drawingml/2006/main" xmlns:p="http://schemas.openxmlformats.org/presentationml/2006/main" xmlns:r="http://schemas.openxmlformats.org/officeDocument/2006/relationships">
   <p:cSld>
     <p:spTree>
@@ -31765,7 +31470,7 @@
 </p:sld>
 </file>
 
-<file path=ppt/slides/slide58.xml><?xml version="1.0" encoding="utf-8"?>
+<file path=ppt/slides/slide55.xml><?xml version="1.0" encoding="utf-8"?>
 <p:sld xmlns:a="http://schemas.openxmlformats.org/drawingml/2006/main" xmlns:p="http://schemas.openxmlformats.org/presentationml/2006/main" xmlns:r="http://schemas.openxmlformats.org/officeDocument/2006/relationships">
   <p:cSld>
     <p:spTree>
@@ -31879,7 +31584,7 @@
 </p:sld>
 </file>
 
-<file path=ppt/slides/slide59.xml><?xml version="1.0" encoding="utf-8"?>
+<file path=ppt/slides/slide56.xml><?xml version="1.0" encoding="utf-8"?>
 <p:sld xmlns:a="http://schemas.openxmlformats.org/drawingml/2006/main" xmlns:p="http://schemas.openxmlformats.org/presentationml/2006/main" xmlns:r="http://schemas.openxmlformats.org/officeDocument/2006/relationships">
   <p:cSld>
     <p:spTree>
@@ -31985,7 +31690,7 @@
                 <a:ea typeface="Noto Sans CJK JP"/>
                 <a:cs typeface="Noto Sans"/>
               </a:rPr>
-              <a:t>第一著者はQi Zhu、最終著者はMinlie Huang。Kaili Huang、Zheng Zhang、Xiaoyan Zhuとともに、清華大学でデータとベースラインを構築した。</a:t>
+              <a:t>清華大学のQi Zhu、Kaili Huang、Zheng Zhang、Xiaoyan Zhu、Minlie Huangが、データセットとベースラインを構築した。</a:t>
             </a:r>
           </a:p>
           <a:p>
@@ -32160,6 +31865,416 @@
                 <a:hlinkClick r:id="rId2"/>
               </a:rPr>
               <a:t>https://aclanthology.org/2020.tacl-1.19/</a:t>
+            </a:r>
+          </a:p>
+        </p:txBody>
+      </p:sp>
+    </p:spTree>
+  </p:cSld>
+  <p:clrMapOvr>
+    <a:masterClrMapping/>
+  </p:clrMapOvr>
+</p:sld>
+</file>
+
+<file path=ppt/slides/slide57.xml><?xml version="1.0" encoding="utf-8"?>
+<p:sld xmlns:a="http://schemas.openxmlformats.org/drawingml/2006/main" xmlns:p="http://schemas.openxmlformats.org/presentationml/2006/main" xmlns:r="http://schemas.openxmlformats.org/officeDocument/2006/relationships">
+  <p:cSld>
+    <p:spTree>
+      <p:nvGrpSpPr>
+        <p:cNvPr id="1" name=""/>
+        <p:cNvGrpSpPr/>
+        <p:nvPr/>
+      </p:nvGrpSpPr>
+      <p:grpSpPr/>
+      <p:sp>
+        <p:nvSpPr>
+          <p:cNvPr id="2" name="Title 1"/>
+          <p:cNvSpPr>
+            <a:spLocks noGrp="1"/>
+          </p:cNvSpPr>
+          <p:nvPr>
+            <p:ph type="title"/>
+          </p:nvPr>
+        </p:nvSpPr>
+        <p:spPr>
+          <a:xfrm>
+            <a:off x="468172" y="650138"/>
+            <a:ext cx="8206740" cy="616305"/>
+          </a:xfrm>
+        </p:spPr>
+        <p:txBody>
+          <a:bodyPr wrap="square" lIns="0" rIns="0" tIns="0" bIns="0">
+            <a:noAutofit/>
+          </a:bodyPr>
+          <a:lstStyle/>
+          <a:p>
+            <a:pPr algn="l">
+              <a:lnSpc>
+                <a:spcPct val="110000"/>
+              </a:lnSpc>
+              <a:buNone/>
+              <a:defRPr sz="2800" b="0">
+                <a:solidFill>
+                  <a:srgbClr val="303437"/>
+                </a:solidFill>
+                <a:latin typeface="Noto Sans"/>
+              </a:defRPr>
+            </a:pPr>
+            <a:r>
+              <a:rPr sz="2800" b="1" lang="ja-JP" altLang="en-US">
+                <a:solidFill>
+                  <a:srgbClr val="303437"/>
+                </a:solidFill>
+                <a:latin typeface="Noto Sans"/>
+                <a:ea typeface="Noto Sans CJK JP"/>
+                <a:cs typeface="Noto Sans"/>
+              </a:rPr>
+              <a:t>参考文献</a:t>
+            </a:r>
+          </a:p>
+        </p:txBody>
+      </p:sp>
+      <p:sp>
+        <p:nvSpPr>
+          <p:cNvPr id="3" name="Title 2"/>
+          <p:cNvSpPr>
+            <a:spLocks noGrp="1"/>
+          </p:cNvSpPr>
+          <p:nvPr>
+            <p:ph type="title" idx="2"/>
+          </p:nvPr>
+        </p:nvSpPr>
+        <p:spPr>
+          <a:xfrm>
+            <a:off x="75895" y="0"/>
+            <a:ext cx="8115300" cy="480060"/>
+          </a:xfrm>
+        </p:spPr>
+        <p:txBody>
+          <a:bodyPr wrap="square" lIns="0" rIns="0" tIns="0" bIns="0" anchor="ctr">
+            <a:noAutofit/>
+          </a:bodyPr>
+          <a:lstStyle/>
+          <a:p>
+            <a:pPr algn="l">
+              <a:lnSpc>
+                <a:spcPct val="110000"/>
+              </a:lnSpc>
+              <a:buNone/>
+              <a:defRPr sz="1400" b="0">
+                <a:solidFill>
+                  <a:srgbClr val="303437"/>
+                </a:solidFill>
+                <a:latin typeface="Noto Sans"/>
+              </a:defRPr>
+            </a:pPr>
+            <a:r>
+              <a:rPr sz="1400" b="1" lang="ja-JP" altLang="en-US">
+                <a:solidFill>
+                  <a:srgbClr val="FFFEF8"/>
+                </a:solidFill>
+                <a:latin typeface="Noto Sans"/>
+                <a:ea typeface="Noto Sans CJK JP"/>
+                <a:cs typeface="Noto Sans"/>
+              </a:rPr>
+              <a:t>Appendix: 3. 研究と参考文献</a:t>
+            </a:r>
+          </a:p>
+        </p:txBody>
+      </p:sp>
+      <p:sp>
+        <p:nvSpPr>
+          <p:cNvPr id="4" name="文献 1: CrossWOZ: A Large-Scale Chinese Cross-Domain Task-Oriented Dialogue Dataset"/>
+          <p:cNvSpPr txBox="1"/>
+          <p:nvPr/>
+        </p:nvSpPr>
+        <p:spPr>
+          <a:xfrm>
+            <a:off x="548640" y="1417320"/>
+            <a:ext cx="8046720" cy="1849045"/>
+          </a:xfrm>
+          <a:prstGeom prst="rect">
+            <a:avLst/>
+          </a:prstGeom>
+          <a:noFill/>
+        </p:spPr>
+        <p:txBody>
+          <a:bodyPr wrap="square" lIns="0" rIns="0" tIns="0" bIns="0">
+            <a:noAutofit/>
+          </a:bodyPr>
+          <a:lstStyle/>
+          <a:p>
+            <a:pPr algn="l">
+              <a:lnSpc>
+                <a:spcPct val="114000"/>
+              </a:lnSpc>
+              <a:spcBef>
+                <a:spcPts val="0"/>
+              </a:spcBef>
+              <a:spcAft>
+                <a:spcPts val="400"/>
+              </a:spcAft>
+              <a:buNone/>
+              <a:defRPr sz="1800" b="0">
+                <a:solidFill>
+                  <a:srgbClr val="303437"/>
+                </a:solidFill>
+                <a:latin typeface="Noto Sans"/>
+              </a:defRPr>
+            </a:pPr>
+            <a:r>
+              <a:rPr sz="1800" b="1" lang="ja-JP" altLang="en-US">
+                <a:solidFill>
+                  <a:srgbClr val="303437"/>
+                </a:solidFill>
+                <a:latin typeface="Noto Sans"/>
+                <a:ea typeface="Noto Sans CJK JP"/>
+                <a:cs typeface="Noto Sans"/>
+              </a:rPr>
+              <a:t>CrossWOZ: A Large-Scale Chinese Cross-Domain Task-Oriented Dialogue Dataset</a:t>
+            </a:r>
+          </a:p>
+          <a:p>
+            <a:pPr algn="l">
+              <a:lnSpc>
+                <a:spcPct val="114000"/>
+              </a:lnSpc>
+              <a:spcBef>
+                <a:spcPts val="0"/>
+              </a:spcBef>
+              <a:spcAft>
+                <a:spcPts val="500"/>
+              </a:spcAft>
+              <a:buNone/>
+              <a:defRPr sz="1250" b="0">
+                <a:solidFill>
+                  <a:srgbClr val="303437"/>
+                </a:solidFill>
+                <a:latin typeface="Noto Sans"/>
+              </a:defRPr>
+            </a:pPr>
+            <a:r>
+              <a:rPr sz="1250" b="0" lang="ja-JP" altLang="en-US">
+                <a:solidFill>
+                  <a:srgbClr val="626669"/>
+                </a:solidFill>
+                <a:latin typeface="Noto Sans"/>
+                <a:ea typeface="Noto Sans CJK JP"/>
+                <a:cs typeface="Noto Sans"/>
+              </a:rPr>
+              <a:t>Qi Zhu, Kaili Huang, Zheng Zhang, Xiaoyan Zhu, Minlie Huang (2020). TACL8:281–295.</a:t>
+            </a:r>
+          </a:p>
+          <a:p>
+            <a:pPr algn="l">
+              <a:lnSpc>
+                <a:spcPct val="114000"/>
+              </a:lnSpc>
+              <a:spcBef>
+                <a:spcPts val="0"/>
+              </a:spcBef>
+              <a:spcAft>
+                <a:spcPts val="400"/>
+              </a:spcAft>
+              <a:buNone/>
+              <a:defRPr sz="1750" b="0">
+                <a:solidFill>
+                  <a:srgbClr val="303437"/>
+                </a:solidFill>
+                <a:latin typeface="Noto Sans"/>
+              </a:defRPr>
+            </a:pPr>
+            <a:r>
+              <a:rPr sz="1750" b="0" lang="ja-JP" altLang="en-US">
+                <a:solidFill>
+                  <a:srgbClr val="303437"/>
+                </a:solidFill>
+                <a:latin typeface="Noto Sans"/>
+                <a:ea typeface="Noto Sans CJK JP"/>
+                <a:cs typeface="Noto Sans"/>
+              </a:rPr>
+              <a:t>北京の旅行案内を人間同士で収集し、領域間の依存を持つ目標、状態・行為の注釈と部品別評価を提示する。</a:t>
+            </a:r>
+          </a:p>
+          <a:p>
+            <a:pPr algn="l">
+              <a:lnSpc>
+                <a:spcPct val="114000"/>
+              </a:lnSpc>
+              <a:spcBef>
+                <a:spcPts val="0"/>
+              </a:spcBef>
+              <a:spcAft>
+                <a:spcPts val="0"/>
+              </a:spcAft>
+              <a:buNone/>
+              <a:defRPr sz="1050" b="0">
+                <a:solidFill>
+                  <a:srgbClr val="303437"/>
+                </a:solidFill>
+                <a:latin typeface="Noto Sans"/>
+              </a:defRPr>
+            </a:pPr>
+            <a:r>
+              <a:rPr sz="1050" b="0" lang="ja-JP" altLang="en-US">
+                <a:solidFill>
+                  <a:srgbClr val="626669"/>
+                </a:solidFill>
+                <a:latin typeface="Noto Sans"/>
+                <a:ea typeface="Noto Sans CJK JP"/>
+                <a:cs typeface="Noto Sans"/>
+                <a:hlinkClick r:id="rId2"/>
+              </a:rPr>
+              <a:t>https://aclanthology.org/2020.tacl-1.19/</a:t>
+            </a:r>
+          </a:p>
+        </p:txBody>
+      </p:sp>
+      <p:sp>
+        <p:nvSpPr>
+          <p:cNvPr id="5" name="文献 2: CrossWOZ"/>
+          <p:cNvSpPr txBox="1"/>
+          <p:nvPr/>
+        </p:nvSpPr>
+        <p:spPr>
+          <a:xfrm>
+            <a:off x="548640" y="3248152"/>
+            <a:ext cx="8046720" cy="1537057"/>
+          </a:xfrm>
+          <a:prstGeom prst="rect">
+            <a:avLst/>
+          </a:prstGeom>
+          <a:noFill/>
+        </p:spPr>
+        <p:txBody>
+          <a:bodyPr wrap="square" lIns="0" rIns="0" tIns="0" bIns="0">
+            <a:noAutofit/>
+          </a:bodyPr>
+          <a:lstStyle/>
+          <a:p>
+            <a:pPr algn="l">
+              <a:lnSpc>
+                <a:spcPct val="114000"/>
+              </a:lnSpc>
+              <a:spcBef>
+                <a:spcPts val="0"/>
+              </a:spcBef>
+              <a:spcAft>
+                <a:spcPts val="400"/>
+              </a:spcAft>
+              <a:buNone/>
+              <a:defRPr sz="1800" b="0">
+                <a:solidFill>
+                  <a:srgbClr val="303437"/>
+                </a:solidFill>
+                <a:latin typeface="Noto Sans"/>
+              </a:defRPr>
+            </a:pPr>
+            <a:r>
+              <a:rPr sz="1800" b="1" lang="ja-JP" altLang="en-US">
+                <a:solidFill>
+                  <a:srgbClr val="303437"/>
+                </a:solidFill>
+                <a:latin typeface="Noto Sans"/>
+                <a:ea typeface="Noto Sans CJK JP"/>
+                <a:cs typeface="Noto Sans"/>
+              </a:rPr>
+              <a:t>CrossWOZ</a:t>
+            </a:r>
+          </a:p>
+          <a:p>
+            <a:pPr algn="l">
+              <a:lnSpc>
+                <a:spcPct val="114000"/>
+              </a:lnSpc>
+              <a:spcBef>
+                <a:spcPts val="0"/>
+              </a:spcBef>
+              <a:spcAft>
+                <a:spcPts val="500"/>
+              </a:spcAft>
+              <a:buNone/>
+              <a:defRPr sz="1250" b="0">
+                <a:solidFill>
+                  <a:srgbClr val="303437"/>
+                </a:solidFill>
+                <a:latin typeface="Noto Sans"/>
+              </a:defRPr>
+            </a:pPr>
+            <a:r>
+              <a:rPr sz="1250" b="0" lang="ja-JP" altLang="en-US">
+                <a:solidFill>
+                  <a:srgbClr val="626669"/>
+                </a:solidFill>
+                <a:latin typeface="Noto Sans"/>
+                <a:ea typeface="Noto Sans CJK JP"/>
+                <a:cs typeface="Noto Sans"/>
+              </a:rPr>
+              <a:t>Qi Zhu et al. (n.d.). 公式リポジトリ。参照2026-10-18。</a:t>
+            </a:r>
+          </a:p>
+          <a:p>
+            <a:pPr algn="l">
+              <a:lnSpc>
+                <a:spcPct val="114000"/>
+              </a:lnSpc>
+              <a:spcBef>
+                <a:spcPts val="0"/>
+              </a:spcBef>
+              <a:spcAft>
+                <a:spcPts val="400"/>
+              </a:spcAft>
+              <a:buNone/>
+              <a:defRPr sz="1750" b="0">
+                <a:solidFill>
+                  <a:srgbClr val="303437"/>
+                </a:solidFill>
+                <a:latin typeface="Noto Sans"/>
+              </a:defRPr>
+            </a:pPr>
+            <a:r>
+              <a:rPr sz="1750" b="0" lang="ja-JP" altLang="en-US">
+                <a:solidFill>
+                  <a:srgbClr val="303437"/>
+                </a:solidFill>
+                <a:latin typeface="Noto Sans"/>
+                <a:ea typeface="Noto Sans CJK JP"/>
+                <a:cs typeface="Noto Sans"/>
+              </a:rPr>
+              <a:t>対話3分割、施設DB、状態追跡や方策・生成のコード、収集プラットフォームを配布する。</a:t>
+            </a:r>
+          </a:p>
+          <a:p>
+            <a:pPr algn="l">
+              <a:lnSpc>
+                <a:spcPct val="114000"/>
+              </a:lnSpc>
+              <a:spcBef>
+                <a:spcPts val="0"/>
+              </a:spcBef>
+              <a:spcAft>
+                <a:spcPts val="0"/>
+              </a:spcAft>
+              <a:buNone/>
+              <a:defRPr sz="1050" b="0">
+                <a:solidFill>
+                  <a:srgbClr val="303437"/>
+                </a:solidFill>
+                <a:latin typeface="Noto Sans"/>
+              </a:defRPr>
+            </a:pPr>
+            <a:r>
+              <a:rPr sz="1050" b="0" lang="ja-JP" altLang="en-US">
+                <a:solidFill>
+                  <a:srgbClr val="626669"/>
+                </a:solidFill>
+                <a:latin typeface="Noto Sans"/>
+                <a:ea typeface="Noto Sans CJK JP"/>
+                <a:cs typeface="Noto Sans"/>
+                <a:hlinkClick r:id="rId3"/>
+              </a:rPr>
+              <a:t>https://github.com/thu-coai/CrossWOZ</a:t>
             </a:r>
           </a:p>
         </p:txBody>
@@ -32423,826 +32538,6 @@
                 <a:hlinkClick r:id="rId3"/>
               </a:rPr>
               <a:t>https://github.com/thu-coai/CrossWOZ/tree/master/data/crosswoz</a:t>
-            </a:r>
-          </a:p>
-        </p:txBody>
-      </p:sp>
-    </p:spTree>
-  </p:cSld>
-  <p:clrMapOvr>
-    <a:masterClrMapping/>
-  </p:clrMapOvr>
-</p:sld>
-</file>
-
-<file path=ppt/slides/slide60.xml><?xml version="1.0" encoding="utf-8"?>
-<p:sld xmlns:a="http://schemas.openxmlformats.org/drawingml/2006/main" xmlns:p="http://schemas.openxmlformats.org/presentationml/2006/main" xmlns:r="http://schemas.openxmlformats.org/officeDocument/2006/relationships">
-  <p:cSld>
-    <p:spTree>
-      <p:nvGrpSpPr>
-        <p:cNvPr id="1" name=""/>
-        <p:cNvGrpSpPr/>
-        <p:nvPr/>
-      </p:nvGrpSpPr>
-      <p:grpSpPr/>
-      <p:sp>
-        <p:nvSpPr>
-          <p:cNvPr id="2" name="Title 1"/>
-          <p:cNvSpPr>
-            <a:spLocks noGrp="1"/>
-          </p:cNvSpPr>
-          <p:nvPr>
-            <p:ph type="title"/>
-          </p:nvPr>
-        </p:nvSpPr>
-        <p:spPr>
-          <a:xfrm>
-            <a:off x="468172" y="650138"/>
-            <a:ext cx="8206740" cy="616305"/>
-          </a:xfrm>
-        </p:spPr>
-        <p:txBody>
-          <a:bodyPr wrap="square" lIns="0" rIns="0" tIns="0" bIns="0">
-            <a:noAutofit/>
-          </a:bodyPr>
-          <a:lstStyle/>
-          <a:p>
-            <a:pPr algn="l">
-              <a:lnSpc>
-                <a:spcPct val="110000"/>
-              </a:lnSpc>
-              <a:buNone/>
-              <a:defRPr sz="2800" b="0">
-                <a:solidFill>
-                  <a:srgbClr val="303437"/>
-                </a:solidFill>
-                <a:latin typeface="Noto Sans"/>
-              </a:defRPr>
-            </a:pPr>
-            <a:r>
-              <a:rPr sz="2800" b="1" lang="ja-JP" altLang="en-US">
-                <a:solidFill>
-                  <a:srgbClr val="303437"/>
-                </a:solidFill>
-                <a:latin typeface="Noto Sans"/>
-                <a:ea typeface="Noto Sans CJK JP"/>
-                <a:cs typeface="Noto Sans"/>
-              </a:rPr>
-              <a:t>参考文献</a:t>
-            </a:r>
-          </a:p>
-        </p:txBody>
-      </p:sp>
-      <p:sp>
-        <p:nvSpPr>
-          <p:cNvPr id="3" name="Title 2"/>
-          <p:cNvSpPr>
-            <a:spLocks noGrp="1"/>
-          </p:cNvSpPr>
-          <p:nvPr>
-            <p:ph type="title" idx="2"/>
-          </p:nvPr>
-        </p:nvSpPr>
-        <p:spPr>
-          <a:xfrm>
-            <a:off x="75895" y="0"/>
-            <a:ext cx="8115300" cy="480060"/>
-          </a:xfrm>
-        </p:spPr>
-        <p:txBody>
-          <a:bodyPr wrap="square" lIns="0" rIns="0" tIns="0" bIns="0" anchor="ctr">
-            <a:noAutofit/>
-          </a:bodyPr>
-          <a:lstStyle/>
-          <a:p>
-            <a:pPr algn="l">
-              <a:lnSpc>
-                <a:spcPct val="110000"/>
-              </a:lnSpc>
-              <a:buNone/>
-              <a:defRPr sz="1400" b="0">
-                <a:solidFill>
-                  <a:srgbClr val="303437"/>
-                </a:solidFill>
-                <a:latin typeface="Noto Sans"/>
-              </a:defRPr>
-            </a:pPr>
-            <a:r>
-              <a:rPr sz="1400" b="1" lang="ja-JP" altLang="en-US">
-                <a:solidFill>
-                  <a:srgbClr val="FFFEF8"/>
-                </a:solidFill>
-                <a:latin typeface="Noto Sans"/>
-                <a:ea typeface="Noto Sans CJK JP"/>
-                <a:cs typeface="Noto Sans"/>
-              </a:rPr>
-              <a:t>Appendix: 3. 研究と参考文献</a:t>
-            </a:r>
-          </a:p>
-        </p:txBody>
-      </p:sp>
-      <p:sp>
-        <p:nvSpPr>
-          <p:cNvPr id="4" name="文献 1: CrossWOZ: A Large-Scale Chinese Cross-Domain Task-Oriented Dialogue Dataset"/>
-          <p:cNvSpPr txBox="1"/>
-          <p:nvPr/>
-        </p:nvSpPr>
-        <p:spPr>
-          <a:xfrm>
-            <a:off x="548640" y="1417320"/>
-            <a:ext cx="8046720" cy="1849045"/>
-          </a:xfrm>
-          <a:prstGeom prst="rect">
-            <a:avLst/>
-          </a:prstGeom>
-          <a:noFill/>
-        </p:spPr>
-        <p:txBody>
-          <a:bodyPr wrap="square" lIns="0" rIns="0" tIns="0" bIns="0">
-            <a:noAutofit/>
-          </a:bodyPr>
-          <a:lstStyle/>
-          <a:p>
-            <a:pPr algn="l">
-              <a:lnSpc>
-                <a:spcPct val="114000"/>
-              </a:lnSpc>
-              <a:spcBef>
-                <a:spcPts val="0"/>
-              </a:spcBef>
-              <a:spcAft>
-                <a:spcPts val="400"/>
-              </a:spcAft>
-              <a:buNone/>
-              <a:defRPr sz="1800" b="0">
-                <a:solidFill>
-                  <a:srgbClr val="303437"/>
-                </a:solidFill>
-                <a:latin typeface="Noto Sans"/>
-              </a:defRPr>
-            </a:pPr>
-            <a:r>
-              <a:rPr sz="1800" b="1" lang="ja-JP" altLang="en-US">
-                <a:solidFill>
-                  <a:srgbClr val="303437"/>
-                </a:solidFill>
-                <a:latin typeface="Noto Sans"/>
-                <a:ea typeface="Noto Sans CJK JP"/>
-                <a:cs typeface="Noto Sans"/>
-              </a:rPr>
-              <a:t>CrossWOZ: A Large-Scale Chinese Cross-Domain Task-Oriented Dialogue Dataset</a:t>
-            </a:r>
-          </a:p>
-          <a:p>
-            <a:pPr algn="l">
-              <a:lnSpc>
-                <a:spcPct val="114000"/>
-              </a:lnSpc>
-              <a:spcBef>
-                <a:spcPts val="0"/>
-              </a:spcBef>
-              <a:spcAft>
-                <a:spcPts val="500"/>
-              </a:spcAft>
-              <a:buNone/>
-              <a:defRPr sz="1250" b="0">
-                <a:solidFill>
-                  <a:srgbClr val="303437"/>
-                </a:solidFill>
-                <a:latin typeface="Noto Sans"/>
-              </a:defRPr>
-            </a:pPr>
-            <a:r>
-              <a:rPr sz="1250" b="0" lang="ja-JP" altLang="en-US">
-                <a:solidFill>
-                  <a:srgbClr val="626669"/>
-                </a:solidFill>
-                <a:latin typeface="Noto Sans"/>
-                <a:ea typeface="Noto Sans CJK JP"/>
-                <a:cs typeface="Noto Sans"/>
-              </a:rPr>
-              <a:t>Qi Zhu, Kaili Huang, Zheng Zhang, Xiaoyan Zhu, Minlie Huang (2020). TACL8:281–295.</a:t>
-            </a:r>
-          </a:p>
-          <a:p>
-            <a:pPr algn="l">
-              <a:lnSpc>
-                <a:spcPct val="114000"/>
-              </a:lnSpc>
-              <a:spcBef>
-                <a:spcPts val="0"/>
-              </a:spcBef>
-              <a:spcAft>
-                <a:spcPts val="400"/>
-              </a:spcAft>
-              <a:buNone/>
-              <a:defRPr sz="1750" b="0">
-                <a:solidFill>
-                  <a:srgbClr val="303437"/>
-                </a:solidFill>
-                <a:latin typeface="Noto Sans"/>
-              </a:defRPr>
-            </a:pPr>
-            <a:r>
-              <a:rPr sz="1750" b="0" lang="ja-JP" altLang="en-US">
-                <a:solidFill>
-                  <a:srgbClr val="303437"/>
-                </a:solidFill>
-                <a:latin typeface="Noto Sans"/>
-                <a:ea typeface="Noto Sans CJK JP"/>
-                <a:cs typeface="Noto Sans"/>
-              </a:rPr>
-              <a:t>北京の旅行案内を人間同士で収集し、領域間の依存を持つ目標、状態・行為の注釈と部品別評価を提示する。</a:t>
-            </a:r>
-          </a:p>
-          <a:p>
-            <a:pPr algn="l">
-              <a:lnSpc>
-                <a:spcPct val="114000"/>
-              </a:lnSpc>
-              <a:spcBef>
-                <a:spcPts val="0"/>
-              </a:spcBef>
-              <a:spcAft>
-                <a:spcPts val="0"/>
-              </a:spcAft>
-              <a:buNone/>
-              <a:defRPr sz="1050" b="0">
-                <a:solidFill>
-                  <a:srgbClr val="303437"/>
-                </a:solidFill>
-                <a:latin typeface="Noto Sans"/>
-              </a:defRPr>
-            </a:pPr>
-            <a:r>
-              <a:rPr sz="1050" b="0" lang="ja-JP" altLang="en-US">
-                <a:solidFill>
-                  <a:srgbClr val="626669"/>
-                </a:solidFill>
-                <a:latin typeface="Noto Sans"/>
-                <a:ea typeface="Noto Sans CJK JP"/>
-                <a:cs typeface="Noto Sans"/>
-                <a:hlinkClick r:id="rId2"/>
-              </a:rPr>
-              <a:t>https://aclanthology.org/2020.tacl-1.19/</a:t>
-            </a:r>
-          </a:p>
-        </p:txBody>
-      </p:sp>
-      <p:sp>
-        <p:nvSpPr>
-          <p:cNvPr id="5" name="文献 2: CrossWOZ"/>
-          <p:cNvSpPr txBox="1"/>
-          <p:nvPr/>
-        </p:nvSpPr>
-        <p:spPr>
-          <a:xfrm>
-            <a:off x="548640" y="3248152"/>
-            <a:ext cx="8046720" cy="1537057"/>
-          </a:xfrm>
-          <a:prstGeom prst="rect">
-            <a:avLst/>
-          </a:prstGeom>
-          <a:noFill/>
-        </p:spPr>
-        <p:txBody>
-          <a:bodyPr wrap="square" lIns="0" rIns="0" tIns="0" bIns="0">
-            <a:noAutofit/>
-          </a:bodyPr>
-          <a:lstStyle/>
-          <a:p>
-            <a:pPr algn="l">
-              <a:lnSpc>
-                <a:spcPct val="114000"/>
-              </a:lnSpc>
-              <a:spcBef>
-                <a:spcPts val="0"/>
-              </a:spcBef>
-              <a:spcAft>
-                <a:spcPts val="400"/>
-              </a:spcAft>
-              <a:buNone/>
-              <a:defRPr sz="1800" b="0">
-                <a:solidFill>
-                  <a:srgbClr val="303437"/>
-                </a:solidFill>
-                <a:latin typeface="Noto Sans"/>
-              </a:defRPr>
-            </a:pPr>
-            <a:r>
-              <a:rPr sz="1800" b="1" lang="ja-JP" altLang="en-US">
-                <a:solidFill>
-                  <a:srgbClr val="303437"/>
-                </a:solidFill>
-                <a:latin typeface="Noto Sans"/>
-                <a:ea typeface="Noto Sans CJK JP"/>
-                <a:cs typeface="Noto Sans"/>
-              </a:rPr>
-              <a:t>CrossWOZ</a:t>
-            </a:r>
-          </a:p>
-          <a:p>
-            <a:pPr algn="l">
-              <a:lnSpc>
-                <a:spcPct val="114000"/>
-              </a:lnSpc>
-              <a:spcBef>
-                <a:spcPts val="0"/>
-              </a:spcBef>
-              <a:spcAft>
-                <a:spcPts val="500"/>
-              </a:spcAft>
-              <a:buNone/>
-              <a:defRPr sz="1250" b="0">
-                <a:solidFill>
-                  <a:srgbClr val="303437"/>
-                </a:solidFill>
-                <a:latin typeface="Noto Sans"/>
-              </a:defRPr>
-            </a:pPr>
-            <a:r>
-              <a:rPr sz="1250" b="0" lang="ja-JP" altLang="en-US">
-                <a:solidFill>
-                  <a:srgbClr val="626669"/>
-                </a:solidFill>
-                <a:latin typeface="Noto Sans"/>
-                <a:ea typeface="Noto Sans CJK JP"/>
-                <a:cs typeface="Noto Sans"/>
-              </a:rPr>
-              <a:t>Qi Zhu et al. 公式リポジトリ。</a:t>
-            </a:r>
-          </a:p>
-          <a:p>
-            <a:pPr algn="l">
-              <a:lnSpc>
-                <a:spcPct val="114000"/>
-              </a:lnSpc>
-              <a:spcBef>
-                <a:spcPts val="0"/>
-              </a:spcBef>
-              <a:spcAft>
-                <a:spcPts val="400"/>
-              </a:spcAft>
-              <a:buNone/>
-              <a:defRPr sz="1750" b="0">
-                <a:solidFill>
-                  <a:srgbClr val="303437"/>
-                </a:solidFill>
-                <a:latin typeface="Noto Sans"/>
-              </a:defRPr>
-            </a:pPr>
-            <a:r>
-              <a:rPr sz="1750" b="0" lang="ja-JP" altLang="en-US">
-                <a:solidFill>
-                  <a:srgbClr val="303437"/>
-                </a:solidFill>
-                <a:latin typeface="Noto Sans"/>
-                <a:ea typeface="Noto Sans CJK JP"/>
-                <a:cs typeface="Noto Sans"/>
-              </a:rPr>
-              <a:t>対話3分割、施設DB、状態追跡や方策・生成のコード、収集プラットフォームを配布する。</a:t>
-            </a:r>
-          </a:p>
-          <a:p>
-            <a:pPr algn="l">
-              <a:lnSpc>
-                <a:spcPct val="114000"/>
-              </a:lnSpc>
-              <a:spcBef>
-                <a:spcPts val="0"/>
-              </a:spcBef>
-              <a:spcAft>
-                <a:spcPts val="0"/>
-              </a:spcAft>
-              <a:buNone/>
-              <a:defRPr sz="1050" b="0">
-                <a:solidFill>
-                  <a:srgbClr val="303437"/>
-                </a:solidFill>
-                <a:latin typeface="Noto Sans"/>
-              </a:defRPr>
-            </a:pPr>
-            <a:r>
-              <a:rPr sz="1050" b="0" lang="ja-JP" altLang="en-US">
-                <a:solidFill>
-                  <a:srgbClr val="626669"/>
-                </a:solidFill>
-                <a:latin typeface="Noto Sans"/>
-                <a:ea typeface="Noto Sans CJK JP"/>
-                <a:cs typeface="Noto Sans"/>
-                <a:hlinkClick r:id="rId3"/>
-              </a:rPr>
-              <a:t>https://github.com/thu-coai/CrossWOZ</a:t>
-            </a:r>
-          </a:p>
-        </p:txBody>
-      </p:sp>
-    </p:spTree>
-  </p:cSld>
-  <p:clrMapOvr>
-    <a:masterClrMapping/>
-  </p:clrMapOvr>
-</p:sld>
-</file>
-
-<file path=ppt/slides/slide61.xml><?xml version="1.0" encoding="utf-8"?>
-<p:sld xmlns:a="http://schemas.openxmlformats.org/drawingml/2006/main" xmlns:p="http://schemas.openxmlformats.org/presentationml/2006/main" xmlns:r="http://schemas.openxmlformats.org/officeDocument/2006/relationships">
-  <p:cSld>
-    <p:spTree>
-      <p:nvGrpSpPr>
-        <p:cNvPr id="1" name=""/>
-        <p:cNvGrpSpPr/>
-        <p:nvPr/>
-      </p:nvGrpSpPr>
-      <p:grpSpPr/>
-      <p:sp>
-        <p:nvSpPr>
-          <p:cNvPr id="2" name="Title 1"/>
-          <p:cNvSpPr>
-            <a:spLocks noGrp="1"/>
-          </p:cNvSpPr>
-          <p:nvPr>
-            <p:ph type="title"/>
-          </p:nvPr>
-        </p:nvSpPr>
-        <p:spPr>
-          <a:xfrm>
-            <a:off x="468172" y="650138"/>
-            <a:ext cx="8206740" cy="616305"/>
-          </a:xfrm>
-        </p:spPr>
-        <p:txBody>
-          <a:bodyPr wrap="square" lIns="0" rIns="0" tIns="0" bIns="0">
-            <a:noAutofit/>
-          </a:bodyPr>
-          <a:lstStyle/>
-          <a:p>
-            <a:pPr algn="l">
-              <a:lnSpc>
-                <a:spcPct val="110000"/>
-              </a:lnSpc>
-              <a:buNone/>
-              <a:defRPr sz="2800" b="0">
-                <a:solidFill>
-                  <a:srgbClr val="303437"/>
-                </a:solidFill>
-                <a:latin typeface="Noto Sans"/>
-              </a:defRPr>
-            </a:pPr>
-            <a:r>
-              <a:rPr sz="2800" b="1" lang="ja-JP" altLang="en-US">
-                <a:solidFill>
-                  <a:srgbClr val="303437"/>
-                </a:solidFill>
-                <a:latin typeface="Noto Sans"/>
-                <a:ea typeface="Noto Sans CJK JP"/>
-                <a:cs typeface="Noto Sans"/>
-              </a:rPr>
-              <a:t>参考文献</a:t>
-            </a:r>
-          </a:p>
-        </p:txBody>
-      </p:sp>
-      <p:sp>
-        <p:nvSpPr>
-          <p:cNvPr id="3" name="Title 2"/>
-          <p:cNvSpPr>
-            <a:spLocks noGrp="1"/>
-          </p:cNvSpPr>
-          <p:nvPr>
-            <p:ph type="title" idx="2"/>
-          </p:nvPr>
-        </p:nvSpPr>
-        <p:spPr>
-          <a:xfrm>
-            <a:off x="75895" y="0"/>
-            <a:ext cx="8115300" cy="480060"/>
-          </a:xfrm>
-        </p:spPr>
-        <p:txBody>
-          <a:bodyPr wrap="square" lIns="0" rIns="0" tIns="0" bIns="0" anchor="ctr">
-            <a:noAutofit/>
-          </a:bodyPr>
-          <a:lstStyle/>
-          <a:p>
-            <a:pPr algn="l">
-              <a:lnSpc>
-                <a:spcPct val="110000"/>
-              </a:lnSpc>
-              <a:buNone/>
-              <a:defRPr sz="1400" b="0">
-                <a:solidFill>
-                  <a:srgbClr val="303437"/>
-                </a:solidFill>
-                <a:latin typeface="Noto Sans"/>
-              </a:defRPr>
-            </a:pPr>
-            <a:r>
-              <a:rPr sz="1400" b="1" lang="ja-JP" altLang="en-US">
-                <a:solidFill>
-                  <a:srgbClr val="FFFEF8"/>
-                </a:solidFill>
-                <a:latin typeface="Noto Sans"/>
-                <a:ea typeface="Noto Sans CJK JP"/>
-                <a:cs typeface="Noto Sans"/>
-              </a:rPr>
-              <a:t>Appendix: 3. 研究と参考文献</a:t>
-            </a:r>
-          </a:p>
-        </p:txBody>
-      </p:sp>
-      <p:sp>
-        <p:nvSpPr>
-          <p:cNvPr id="4" name="文献 1: CLEVA: Chinese Language Models EVAluation Platform"/>
-          <p:cNvSpPr txBox="1"/>
-          <p:nvPr/>
-        </p:nvSpPr>
-        <p:spPr>
-          <a:xfrm>
-            <a:off x="548640" y="1417320"/>
-            <a:ext cx="8046720" cy="1233451"/>
-          </a:xfrm>
-          <a:prstGeom prst="rect">
-            <a:avLst/>
-          </a:prstGeom>
-          <a:noFill/>
-        </p:spPr>
-        <p:txBody>
-          <a:bodyPr wrap="square" lIns="0" rIns="0" tIns="0" bIns="0">
-            <a:noAutofit/>
-          </a:bodyPr>
-          <a:lstStyle/>
-          <a:p>
-            <a:pPr algn="l">
-              <a:lnSpc>
-                <a:spcPct val="114000"/>
-              </a:lnSpc>
-              <a:spcBef>
-                <a:spcPts val="0"/>
-              </a:spcBef>
-              <a:spcAft>
-                <a:spcPts val="400"/>
-              </a:spcAft>
-              <a:buNone/>
-              <a:defRPr sz="1800" b="0">
-                <a:solidFill>
-                  <a:srgbClr val="303437"/>
-                </a:solidFill>
-                <a:latin typeface="Noto Sans"/>
-              </a:defRPr>
-            </a:pPr>
-            <a:r>
-              <a:rPr sz="1800" b="1" lang="ja-JP" altLang="en-US">
-                <a:solidFill>
-                  <a:srgbClr val="303437"/>
-                </a:solidFill>
-                <a:latin typeface="Noto Sans"/>
-                <a:ea typeface="Noto Sans CJK JP"/>
-                <a:cs typeface="Noto Sans"/>
-              </a:rPr>
-              <a:t>CLEVA: Chinese Language Models EVAluation Platform</a:t>
-            </a:r>
-          </a:p>
-          <a:p>
-            <a:pPr algn="l">
-              <a:lnSpc>
-                <a:spcPct val="114000"/>
-              </a:lnSpc>
-              <a:spcBef>
-                <a:spcPts val="0"/>
-              </a:spcBef>
-              <a:spcAft>
-                <a:spcPts val="500"/>
-              </a:spcAft>
-              <a:buNone/>
-              <a:defRPr sz="1250" b="0">
-                <a:solidFill>
-                  <a:srgbClr val="303437"/>
-                </a:solidFill>
-                <a:latin typeface="Noto Sans"/>
-              </a:defRPr>
-            </a:pPr>
-            <a:r>
-              <a:rPr sz="1250" b="0" lang="ja-JP" altLang="en-US">
-                <a:solidFill>
-                  <a:srgbClr val="626669"/>
-                </a:solidFill>
-                <a:latin typeface="Noto Sans"/>
-                <a:ea typeface="Noto Sans CJK JP"/>
-                <a:cs typeface="Noto Sans"/>
-              </a:rPr>
-              <a:t>Yanyang Li, Jianqiao Zhao et al. (2023). EMNLP System Demonstrations, pp.186–217.</a:t>
-            </a:r>
-          </a:p>
-          <a:p>
-            <a:pPr algn="l">
-              <a:lnSpc>
-                <a:spcPct val="114000"/>
-              </a:lnSpc>
-              <a:spcBef>
-                <a:spcPts val="0"/>
-              </a:spcBef>
-              <a:spcAft>
-                <a:spcPts val="400"/>
-              </a:spcAft>
-              <a:buNone/>
-              <a:defRPr sz="1750" b="0">
-                <a:solidFill>
-                  <a:srgbClr val="303437"/>
-                </a:solidFill>
-                <a:latin typeface="Noto Sans"/>
-              </a:defRPr>
-            </a:pPr>
-            <a:r>
-              <a:rPr sz="1750" b="0" lang="ja-JP" altLang="en-US">
-                <a:solidFill>
-                  <a:srgbClr val="303437"/>
-                </a:solidFill>
-                <a:latin typeface="Noto Sans"/>
-                <a:ea typeface="Noto Sans CJK JP"/>
-                <a:cs typeface="Noto Sans"/>
-              </a:rPr>
-              <a:t>中国語評価の基盤を提案し、CrossWOZを対話生成の採用元として説明する。</a:t>
-            </a:r>
-          </a:p>
-          <a:p>
-            <a:pPr algn="l">
-              <a:lnSpc>
-                <a:spcPct val="114000"/>
-              </a:lnSpc>
-              <a:spcBef>
-                <a:spcPts val="0"/>
-              </a:spcBef>
-              <a:spcAft>
-                <a:spcPts val="0"/>
-              </a:spcAft>
-              <a:buNone/>
-              <a:defRPr sz="1050" b="0">
-                <a:solidFill>
-                  <a:srgbClr val="303437"/>
-                </a:solidFill>
-                <a:latin typeface="Noto Sans"/>
-              </a:defRPr>
-            </a:pPr>
-            <a:r>
-              <a:rPr sz="1050" b="0" lang="ja-JP" altLang="en-US">
-                <a:solidFill>
-                  <a:srgbClr val="626669"/>
-                </a:solidFill>
-                <a:latin typeface="Noto Sans"/>
-                <a:ea typeface="Noto Sans CJK JP"/>
-                <a:cs typeface="Noto Sans"/>
-                <a:hlinkClick r:id="rId2"/>
-              </a:rPr>
-              <a:t>https://aclanthology.org/2023.emnlp-demo.17/</a:t>
-            </a:r>
-          </a:p>
-        </p:txBody>
-      </p:sp>
-      <p:sp>
-        <p:nvSpPr>
-          <p:cNvPr id="5" name="文献 2: CLEVA Scenario and v1 Run Configuration"/>
-          <p:cNvSpPr txBox="1"/>
-          <p:nvPr/>
-        </p:nvSpPr>
-        <p:spPr>
-          <a:xfrm>
-            <a:off x="548640" y="2734183"/>
-            <a:ext cx="8046720" cy="1536587"/>
-          </a:xfrm>
-          <a:prstGeom prst="rect">
-            <a:avLst/>
-          </a:prstGeom>
-          <a:noFill/>
-        </p:spPr>
-        <p:txBody>
-          <a:bodyPr wrap="square" lIns="0" rIns="0" tIns="0" bIns="0">
-            <a:noAutofit/>
-          </a:bodyPr>
-          <a:lstStyle/>
-          <a:p>
-            <a:pPr algn="l">
-              <a:lnSpc>
-                <a:spcPct val="114000"/>
-              </a:lnSpc>
-              <a:spcBef>
-                <a:spcPts val="0"/>
-              </a:spcBef>
-              <a:spcAft>
-                <a:spcPts val="400"/>
-              </a:spcAft>
-              <a:buNone/>
-              <a:defRPr sz="1800" b="0">
-                <a:solidFill>
-                  <a:srgbClr val="303437"/>
-                </a:solidFill>
-                <a:latin typeface="Noto Sans"/>
-              </a:defRPr>
-            </a:pPr>
-            <a:r>
-              <a:rPr sz="1800" b="1" lang="ja-JP" altLang="en-US">
-                <a:solidFill>
-                  <a:srgbClr val="303437"/>
-                </a:solidFill>
-                <a:latin typeface="Noto Sans"/>
-                <a:ea typeface="Noto Sans CJK JP"/>
-                <a:cs typeface="Noto Sans"/>
-              </a:rPr>
-              <a:t>HELM: CLEVA dialogue generation scenario</a:t>
-            </a:r>
-          </a:p>
-          <a:p>
-            <a:pPr algn="l">
-              <a:lnSpc>
-                <a:spcPct val="114000"/>
-              </a:lnSpc>
-              <a:spcBef>
-                <a:spcPts val="0"/>
-              </a:spcBef>
-              <a:spcAft>
-                <a:spcPts val="500"/>
-              </a:spcAft>
-              <a:buNone/>
-              <a:defRPr sz="1250" b="0">
-                <a:solidFill>
-                  <a:srgbClr val="303437"/>
-                </a:solidFill>
-                <a:latin typeface="Noto Sans"/>
-              </a:defRPr>
-            </a:pPr>
-            <a:r>
-              <a:rPr sz="1250" b="0" lang="ja-JP" altLang="en-US">
-                <a:solidFill>
-                  <a:srgbClr val="626669"/>
-                </a:solidFill>
-                <a:latin typeface="Noto Sans"/>
-                <a:ea typeface="Noto Sans CJK JP"/>
-                <a:cs typeface="Noto Sans"/>
-              </a:rPr>
-              <a:t>Stanford CRFM (2023). HELM v0.4.0.</a:t>
-            </a:r>
-          </a:p>
-          <a:p>
-            <a:pPr algn="l">
-              <a:lnSpc>
-                <a:spcPct val="114000"/>
-              </a:lnSpc>
-              <a:spcBef>
-                <a:spcPts val="0"/>
-              </a:spcBef>
-              <a:spcAft>
-                <a:spcPts val="400"/>
-              </a:spcAft>
-              <a:buNone/>
-              <a:defRPr sz="1750" b="0">
-                <a:solidFill>
-                  <a:srgbClr val="303437"/>
-                </a:solidFill>
-                <a:latin typeface="Noto Sans"/>
-              </a:defRPr>
-            </a:pPr>
-            <a:r>
-              <a:rPr sz="1750" b="0" lang="ja-JP" altLang="en-US">
-                <a:solidFill>
-                  <a:srgbClr val="303437"/>
-                </a:solidFill>
-                <a:latin typeface="Noto Sans"/>
-                <a:ea typeface="Noto Sans CJK JP"/>
-                <a:cs typeface="Noto Sans"/>
-              </a:rPr>
-              <a:t>会話履歴と次の応答を組み合わせ、中国語モデルの応答生成に使う実装。</a:t>
-            </a:r>
-          </a:p>
-          <a:p>
-            <a:pPr algn="l">
-              <a:lnSpc>
-                <a:spcPct val="114000"/>
-              </a:lnSpc>
-              <a:spcBef>
-                <a:spcPts val="0"/>
-              </a:spcBef>
-              <a:spcAft>
-                <a:spcPts val="0"/>
-              </a:spcAft>
-              <a:buNone/>
-              <a:defRPr sz="1050" b="0">
-                <a:solidFill>
-                  <a:srgbClr val="303437"/>
-                </a:solidFill>
-                <a:latin typeface="Noto Sans"/>
-              </a:defRPr>
-            </a:pPr>
-            <a:r>
-              <a:rPr sz="1050" b="0" lang="ja-JP" altLang="en-US">
-                <a:solidFill>
-                  <a:srgbClr val="626669"/>
-                </a:solidFill>
-                <a:latin typeface="Noto Sans"/>
-                <a:ea typeface="Noto Sans CJK JP"/>
-                <a:cs typeface="Noto Sans"/>
-                <a:hlinkClick r:id="rId3"/>
-              </a:rPr>
-              <a:t>https://github.com/stanford-crfm/helm/blob/v0.4.0/src/helm/benchmark/scenarios/cleva_scenario.py</a:t>
             </a:r>
           </a:p>
         </p:txBody>
